--- a/docs/발표자료_침실노드.pptx
+++ b/docs/발표자료_침실노드.pptx
@@ -111,19 +111,19 @@
   <p:extLst>
     <p:ext uri="{521415D9-36F7-43E2-AB2F-B90AF26B5E84}">
       <p14:sectionLst xmlns:p14="http://schemas.microsoft.com/office/powerpoint/2010/main">
-        <p14:section name="핵심 주제" id="{45afe2cf-732b-2a3f-ac8c-15c6aaa7f632}">
+        <p14:section name="핵심 주제" id="{a5b37329-ddbc-c281-bde4-ae3a76af07c3}">
           <p14:sldIdLst>
             <p14:sldId id="256"/>
           </p14:sldIdLst>
         </p14:section>
-        <p14:section name="주요 개발 내용" id="{b19d49fd-ffe7-a2a3-559a-03502d13e0b4}">
+        <p14:section name="주요 개발 내용" id="{fa487d0a-50ca-e40e-f562-939851156b30}">
           <p14:sldIdLst>
             <p14:sldId id="257"/>
             <p14:sldId id="258"/>
             <p14:sldId id="259"/>
           </p14:sldIdLst>
         </p14:section>
-        <p14:section name="시연 내용" id="{0d569fea-0129-3504-08d4-2d30195d8164}">
+        <p14:section name="시연 내용" id="{0711be4d-f726-8838-86c8-2b9cf18399ff}">
           <p14:sldIdLst>
             <p14:sldId id="260"/>
           </p14:sldIdLst>
@@ -1165,7 +1165,7 @@
           <a:p>
             <a:r>
               <a:rPr lang="en-US" dirty="0"/>
-              <a:t>SDK 예제 위에 엔드포인트를 직접 추가했습니다. 습도·온도는 표준 측정 클러스터로, 가습기와 선풍기는 On/Off로 노출합니다. 판단부가 속성을 설정하면 SDK가 허브로 ReportData를 보내고, 시연 1회 동안 19번 보고해 19번 모두 수신 확인을 받았습니다. 앱에서 직접 조작한 값은 콜백으로 받아 판단부에 반영합니다.</a:t>
+              <a:t>SDK 예제 위에 엔드포인트를 직접 추가했습니다. 습도·온도는 표준 측정 클러스터로, 가습기와 선풍기는 On/Off로 노출합니다. 판단부가 속성을 설정하면 SDK가 허브로 ReportData를 보내고, 시연 1회 동안 13번 보고해 13번 모두 수신 확인을 받았고, 응답은 평균 92ms였습니다. 앱에서 직접 조작한 값은 콜백으로 받아 판단부에 반영합니다.</a:t>
             </a:r>
             <a:endParaRPr lang="en-US" dirty="0"/>
           </a:p>
@@ -8192,7 +8192,7 @@
                   <a:schemeClr val="accent1"/>
                 </a:solidFill>
               </a:rPr>
-              <a:t>19 / 19</a:t>
+              <a:t>13 / 13</a:t>
             </a:r>
             <a:endParaRPr lang="en-US" sz="2200" dirty="0"/>
           </a:p>
@@ -8288,7 +8288,7 @@
                   <a:schemeClr val="accent1"/>
                 </a:solidFill>
               </a:rPr>
-              <a:t>91 ms</a:t>
+              <a:t>92 ms</a:t>
             </a:r>
             <a:endParaRPr lang="en-US" sz="2200" dirty="0"/>
           </a:p>
@@ -8324,7 +8324,7 @@
                   <a:schemeClr val="tx2"/>
                 </a:solidFill>
               </a:rPr>
-              <a:t>보고 → 허브 응답</a:t>
+              <a:t>보고 → 허브 응답 (평균)</a:t>
             </a:r>
             <a:endParaRPr lang="en-US" sz="1100" dirty="0"/>
           </a:p>
@@ -10156,7 +10156,7 @@
                   <a:schemeClr val="tx2"/>
                 </a:solidFill>
               </a:rPr>
-              <a:t>시연 화면 하나에 실내·벽 표면 습도, 노드의 판단, 가습기·선풍기, SmartThings 허브 보고가 함께 보입니다</a:t>
+              <a:t>실제 보드를 연결한 03:00 화면 · 실내·벽 표면 습도, 노드의 판단, 가습기·선풍기, 허브 보고가 한 화면에</a:t>
             </a:r>
             <a:endParaRPr lang="en-US" sz="1100" dirty="0"/>
           </a:p>
@@ -10799,7 +10799,7 @@
                   <a:schemeClr val="tx1"/>
                 </a:solidFill>
               </a:rPr>
-              <a:t>01:00</a:t>
+              <a:t>01:05</a:t>
             </a:r>
             <a:endParaRPr lang="en-US" sz="1200" dirty="0"/>
           </a:p>
@@ -10874,7 +10874,7 @@
                   <a:schemeClr val="tx1"/>
                 </a:solidFill>
               </a:rPr>
-              <a:t>01:05</a:t>
+              <a:t>01:10</a:t>
             </a:r>
             <a:endParaRPr lang="en-US" sz="1200" dirty="0"/>
           </a:p>
@@ -10949,7 +10949,7 @@
                   <a:schemeClr val="tx1"/>
                 </a:solidFill>
               </a:rPr>
-              <a:t>03:00~</a:t>
+              <a:t>02:45~</a:t>
             </a:r>
             <a:endParaRPr lang="en-US" sz="1200" dirty="0"/>
           </a:p>

--- a/docs/발표자료_침실노드.pptx
+++ b/docs/발표자료_침실노드.pptx
@@ -1,9 +1,12 @@
 
 <file path=ppt/presentation.xml><?xml version="1.0" encoding="utf-8"?>
-<p:presentation xmlns:a="http://schemas.openxmlformats.org/drawingml/2006/main" xmlns:r="http://schemas.openxmlformats.org/officeDocument/2006/relationships" xmlns:p="http://schemas.openxmlformats.org/presentationml/2006/main" saveSubsetFonts="1" autoCompressPictures="0">
+<p:presentation xmlns:a="http://schemas.openxmlformats.org/drawingml/2006/main" xmlns:r="http://schemas.openxmlformats.org/officeDocument/2006/relationships" xmlns:p="http://schemas.openxmlformats.org/presentationml/2006/main" embedTrueTypeFonts="1" saveSubsetFonts="1" autoCompressPictures="0">
   <p:sldMasterIdLst>
     <p:sldMasterId id="2147483648" r:id="rId1"/>
   </p:sldMasterIdLst>
+  <p:notesMasterIdLst>
+    <p:notesMasterId r:id="rId7"/>
+  </p:notesMasterIdLst>
   <p:sldIdLst>
     <p:sldId id="256" r:id="rId2"/>
     <p:sldId id="257" r:id="rId3"/>
@@ -11,11 +14,19 @@
     <p:sldId id="259" r:id="rId5"/>
     <p:sldId id="260" r:id="rId6"/>
   </p:sldIdLst>
-  <p:notesMasterIdLst>
-    <p:notesMasterId r:id="rId7"/>
-  </p:notesMasterIdLst>
   <p:sldSz cx="12192000" cy="6858000"/>
   <p:notesSz cx="6858000" cy="12192000"/>
+  <p:embeddedFontLst>
+    <p:embeddedFont>
+      <p:font typeface="Pretendard" panose="02000503000000020004" pitchFamily="2" charset="-127"/>
+      <p:regular r:id="rId8"/>
+      <p:bold r:id="rId9"/>
+    </p:embeddedFont>
+    <p:embeddedFont>
+      <p:font typeface="Cambria Math" panose="02040503050406030204" pitchFamily="18" charset="0"/>
+      <p:regular r:id="rId10"/>
+    </p:embeddedFont>
+  </p:embeddedFontLst>
   <p:defaultTextStyle>
     <a:lvl1pPr marL="0" algn="l" defTabSz="914400" rtl="0" eaLnBrk="1" latinLnBrk="0" hangingPunct="1">
       <a:defRPr sz="1800" kern="1200">
@@ -111,19 +122,19 @@
   <p:extLst>
     <p:ext uri="{521415D9-36F7-43E2-AB2F-B90AF26B5E84}">
       <p14:sectionLst xmlns:p14="http://schemas.microsoft.com/office/powerpoint/2010/main">
-        <p14:section name="핵심 주제" id="{a5b37329-ddbc-c281-bde4-ae3a76af07c3}">
+        <p14:section name="핵심 주제" id="{6EE65434-1D3B-C3BC-EE32-BE5F1F28179D}">
           <p14:sldIdLst>
             <p14:sldId id="256"/>
           </p14:sldIdLst>
         </p14:section>
-        <p14:section name="주요 개발 내용" id="{fa487d0a-50ca-e40e-f562-939851156b30}">
+        <p14:section name="주요 개발 내용" id="{E8F5A8FA-7909-62C2-211D-476F9436B8FC}">
           <p14:sldIdLst>
             <p14:sldId id="257"/>
             <p14:sldId id="258"/>
             <p14:sldId id="259"/>
           </p14:sldIdLst>
         </p14:section>
-        <p14:section name="시연 내용" id="{0711be4d-f726-8838-86c8-2b9cf18399ff}">
+        <p14:section name="시연 내용" id="{5A7C79EF-4315-EA4A-22E4-7C795879DE2D}">
           <p14:sldIdLst>
             <p14:sldId id="260"/>
           </p14:sldIdLst>
@@ -138,9 +149,11 @@
 </file>
 
 <file path=ppt/charts/chart1.xml><?xml version="1.0" encoding="utf-8"?>
-<c:chartSpace xmlns:c="http://schemas.openxmlformats.org/drawingml/2006/chart" xmlns:a="http://schemas.openxmlformats.org/drawingml/2006/main" xmlns:r="http://schemas.openxmlformats.org/officeDocument/2006/relationships">
+<c:chartSpace xmlns:c="http://schemas.openxmlformats.org/drawingml/2006/chart" xmlns:a="http://schemas.openxmlformats.org/drawingml/2006/main" xmlns:r="http://schemas.openxmlformats.org/officeDocument/2006/relationships" xmlns:c16r2="http://schemas.microsoft.com/office/drawing/2015/06/chart">
   <c:date1904 val="0"/>
+  <c:lang val="ko-KR"/>
   <c:roundedCorners val="1"/>
+  <c:style val="2"/>
   <c:chart>
     <c:title>
       <c:tx>
@@ -151,24 +164,50 @@
             <a:pPr>
               <a:defRPr sz="1400" b="0" i="0" u="none" strike="noStrike">
                 <a:solidFill>
-                  <a:srgbClr val="1D1D1F"/>
+                  <a:srgbClr val="000000"/>
                 </a:solidFill>
                 <a:latin typeface="+mn-lt"/>
               </a:defRPr>
             </a:pPr>
             <a:r>
-              <a:rPr sz="1400" b="0" i="0" u="none" strike="noStrike">
-                <a:solidFill>
-                  <a:srgbClr val="1D1D1F"/>
+              <a:rPr lang="ko-KR" altLang="en-US" sz="1400" b="0" i="0" u="none" strike="noStrike">
+                <a:solidFill>
+                  <a:srgbClr val="000000"/>
                 </a:solidFill>
                 <a:latin typeface="+mn-lt"/>
               </a:rPr>
-              <a:t>벽 표면 온도별 허용 실내 습도 (실내 21℃)</a:t>
+              <a:t>벽 표면 온도별 허용 실내 습도 </a:t>
+            </a:r>
+            <a:r>
+              <a:rPr lang="en-US" altLang="ko-KR" sz="1400" b="0" i="0" u="none" strike="noStrike">
+                <a:solidFill>
+                  <a:srgbClr val="000000"/>
+                </a:solidFill>
+                <a:latin typeface="+mn-lt"/>
+              </a:rPr>
+              <a:t>(</a:t>
+            </a:r>
+            <a:r>
+              <a:rPr lang="ko-KR" altLang="en-US" sz="1400" b="0" i="0" u="none" strike="noStrike">
+                <a:solidFill>
+                  <a:srgbClr val="000000"/>
+                </a:solidFill>
+                <a:latin typeface="+mn-lt"/>
+              </a:rPr>
+              <a:t>실내 </a:t>
+            </a:r>
+            <a:r>
+              <a:rPr lang="en-US" altLang="ko-KR" sz="1400" b="0" i="0" u="none" strike="noStrike">
+                <a:solidFill>
+                  <a:srgbClr val="000000"/>
+                </a:solidFill>
+                <a:latin typeface="+mn-lt"/>
+              </a:rPr>
+              <a:t>21℃)</a:t>
             </a:r>
           </a:p>
         </c:rich>
       </c:tx>
-      <c:layout/>
       <c:overlay val="0"/>
     </c:title>
     <c:autoTitleDeleted val="0"/>
@@ -194,25 +233,33 @@
           </c:tx>
           <c:spPr>
             <a:solidFill>
-              <a:srgbClr val="0066CC"/>
+              <a:srgbClr val="8CB8E8"/>
             </a:solidFill>
             <a:effectLst/>
           </c:spPr>
           <c:invertIfNegative val="0"/>
           <c:dLbls>
             <c:numFmt formatCode="0&quot;%&quot;" sourceLinked="0"/>
+            <c:spPr>
+              <a:noFill/>
+              <a:ln>
+                <a:noFill/>
+              </a:ln>
+              <a:effectLst/>
+            </c:spPr>
             <c:txPr>
               <a:bodyPr/>
               <a:lstStyle/>
               <a:p>
                 <a:pPr>
-                  <a:defRPr b="0" i="0" strike="noStrike" sz="1200" u="none">
+                  <a:defRPr sz="1200" b="0" i="0" u="none" strike="noStrike">
                     <a:solidFill>
-                      <a:srgbClr val="FFFFFF"/>
+                      <a:srgbClr val="000000"/>
                     </a:solidFill>
                     <a:latin typeface="+mn-lt"/>
                   </a:defRPr>
                 </a:pPr>
+                <a:endParaRPr lang="ko-KR"/>
               </a:p>
             </c:txPr>
             <c:dLblPos val="inBase"/>
@@ -223,31 +270,34 @@
             <c:showPercent val="0"/>
             <c:showBubbleSize val="0"/>
             <c:showLeaderLines val="0"/>
+            <c:extLst>
+              <c:ext xmlns:c15="http://schemas.microsoft.com/office/drawing/2012/chart" uri="{CE6537A1-D6FC-4f65-9D91-7224C49458BB}">
+                <c15:showLeaderLines val="0"/>
+              </c:ext>
+            </c:extLst>
           </c:dLbls>
           <c:cat>
-            <c:multiLvlStrRef>
+            <c:strRef>
               <c:f>Sheet1!$A$2:$A$6</c:f>
-              <c:multiLvlStrCache>
+              <c:strCache>
                 <c:ptCount val="5"/>
-                <c:lvl>
-                  <c:pt idx="0">
-                    <c:v>15℃</c:v>
-                  </c:pt>
-                  <c:pt idx="1">
-                    <c:v>12℃</c:v>
-                  </c:pt>
-                  <c:pt idx="2">
-                    <c:v>9℃</c:v>
-                  </c:pt>
-                  <c:pt idx="3">
-                    <c:v>약 7.2℃</c:v>
-                  </c:pt>
-                  <c:pt idx="4">
-                    <c:v>6℃</c:v>
-                  </c:pt>
-                </c:lvl>
-              </c:multiLvlStrCache>
-            </c:multiLvlStrRef>
+                <c:pt idx="0">
+                  <c:v>15℃</c:v>
+                </c:pt>
+                <c:pt idx="1">
+                  <c:v>12℃</c:v>
+                </c:pt>
+                <c:pt idx="2">
+                  <c:v>9℃</c:v>
+                </c:pt>
+                <c:pt idx="3">
+                  <c:v>약 7.2℃</c:v>
+                </c:pt>
+                <c:pt idx="4">
+                  <c:v>6℃</c:v>
+                </c:pt>
+              </c:strCache>
+            </c:strRef>
           </c:cat>
           <c:val>
             <c:numRef>
@@ -273,23 +323,13 @@
               </c:numCache>
             </c:numRef>
           </c:val>
+          <c:extLst>
+            <c:ext xmlns:c16="http://schemas.microsoft.com/office/drawing/2014/chart" uri="{C3380CC4-5D6E-409C-BE32-E72D297353CC}">
+              <c16:uniqueId val="{00000000-98B5-43D6-ADB5-C79E5AC1D6BE}"/>
+            </c:ext>
+          </c:extLst>
         </c:ser>
         <c:dLbls>
-          <c:numFmt formatCode="0&quot;%&quot;" sourceLinked="0"/>
-          <c:txPr>
-            <a:bodyPr/>
-            <a:lstStyle/>
-            <a:p>
-              <a:pPr>
-                <a:defRPr b="0" i="0" strike="noStrike" sz="1200" u="none">
-                  <a:solidFill>
-                    <a:srgbClr val="FFFFFF"/>
-                  </a:solidFill>
-                  <a:latin typeface="+mn-lt"/>
-                </a:defRPr>
-              </a:pPr>
-            </a:p>
-          </c:txPr>
           <c:dLblPos val="inBase"/>
           <c:showLegendKey val="0"/>
           <c:showVal val="1"/>
@@ -297,15 +337,13 @@
           <c:showSerName val="0"/>
           <c:showPercent val="0"/>
           <c:showBubbleSize val="0"/>
-          <c:showLeaderLines val="0"/>
         </c:dLbls>
         <c:gapWidth val="60"/>
-        <c:overlap val="0"/>
         <c:axId val="2094734554"/>
         <c:axId val="2094734552"/>
-        <c:axId val="2094734556"/>
       </c:barChart>
       <c:lineChart>
+        <c:grouping val="standard"/>
         <c:varyColors val="0"/>
         <c:ser>
           <c:idx val="1"/>
@@ -322,9 +360,6 @@
             </c:strRef>
           </c:tx>
           <c:spPr>
-            <a:solidFill>
-              <a:srgbClr val="E30000"/>
-            </a:solidFill>
             <a:ln w="25400" cap="flat">
               <a:solidFill>
                 <a:srgbClr val="E30000"/>
@@ -334,72 +369,31 @@
             </a:ln>
             <a:effectLst/>
           </c:spPr>
-          <c:invertIfNegative val="0"/>
-          <c:dLbls>
-            <c:numFmt formatCode="#,##0" sourceLinked="0"/>
-            <c:txPr>
-              <a:bodyPr/>
-              <a:lstStyle/>
-              <a:p>
-                <a:pPr>
-                  <a:defRPr b="0" i="0" strike="noStrike" sz="1200" u="none">
-                    <a:solidFill>
-                      <a:srgbClr val="000000"/>
-                    </a:solidFill>
-                    <a:latin typeface="Arial"/>
-                  </a:defRPr>
-                </a:pPr>
-              </a:p>
-            </c:txPr>
-            <c:showLegendKey val="0"/>
-            <c:showVal val="0"/>
-            <c:showCatName val="0"/>
-            <c:showSerName val="0"/>
-            <c:showPercent val="0"/>
-            <c:showBubbleSize val="0"/>
-            <c:showLeaderLines val="0"/>
-          </c:dLbls>
           <c:marker>
             <c:symbol val="none"/>
-            <c:size val="6"/>
-            <c:spPr>
-              <a:solidFill>
-                <a:srgbClr val="E30000"/>
-              </a:solidFill>
-              <a:ln w="9525" cap="flat">
-                <a:solidFill>
-                  <a:srgbClr val="E30000"/>
-                </a:solidFill>
-                <a:prstDash val="solid"/>
-                <a:round/>
-              </a:ln>
-              <a:effectLst/>
-            </c:spPr>
           </c:marker>
           <c:cat>
-            <c:multiLvlStrRef>
+            <c:strRef>
               <c:f>Sheet1!$A$2:$A$6</c:f>
-              <c:multiLvlStrCache>
+              <c:strCache>
                 <c:ptCount val="5"/>
-                <c:lvl>
-                  <c:pt idx="0">
-                    <c:v>15℃</c:v>
-                  </c:pt>
-                  <c:pt idx="1">
-                    <c:v>12℃</c:v>
-                  </c:pt>
-                  <c:pt idx="2">
-                    <c:v>9℃</c:v>
-                  </c:pt>
-                  <c:pt idx="3">
-                    <c:v>약 7.2℃</c:v>
-                  </c:pt>
-                  <c:pt idx="4">
-                    <c:v>6℃</c:v>
-                  </c:pt>
-                </c:lvl>
-              </c:multiLvlStrCache>
-            </c:multiLvlStrRef>
+                <c:pt idx="0">
+                  <c:v>15℃</c:v>
+                </c:pt>
+                <c:pt idx="1">
+                  <c:v>12℃</c:v>
+                </c:pt>
+                <c:pt idx="2">
+                  <c:v>9℃</c:v>
+                </c:pt>
+                <c:pt idx="3">
+                  <c:v>약 7.2℃</c:v>
+                </c:pt>
+                <c:pt idx="4">
+                  <c:v>6℃</c:v>
+                </c:pt>
+              </c:strCache>
+            </c:strRef>
           </c:cat>
           <c:val>
             <c:numRef>
@@ -426,35 +420,24 @@
             </c:numRef>
           </c:val>
           <c:smooth val="0"/>
+          <c:extLst>
+            <c:ext xmlns:c16="http://schemas.microsoft.com/office/drawing/2014/chart" uri="{C3380CC4-5D6E-409C-BE32-E72D297353CC}">
+              <c16:uniqueId val="{00000001-98B5-43D6-ADB5-C79E5AC1D6BE}"/>
+            </c:ext>
+          </c:extLst>
         </c:ser>
         <c:dLbls>
-          <c:numFmt formatCode="#,##0" sourceLinked="0"/>
-          <c:txPr>
-            <a:bodyPr/>
-            <a:lstStyle/>
-            <a:p>
-              <a:pPr>
-                <a:defRPr b="0" i="0" strike="noStrike" sz="1200" u="none">
-                  <a:solidFill>
-                    <a:srgbClr val="000000"/>
-                  </a:solidFill>
-                  <a:latin typeface="Arial"/>
-                </a:defRPr>
-              </a:pPr>
-            </a:p>
-          </c:txPr>
           <c:showLegendKey val="0"/>
           <c:showVal val="0"/>
           <c:showCatName val="0"/>
           <c:showSerName val="0"/>
           <c:showPercent val="0"/>
           <c:showBubbleSize val="0"/>
-          <c:showLeaderLines val="0"/>
         </c:dLbls>
         <c:marker val="1"/>
+        <c:smooth val="0"/>
         <c:axId val="2094734554"/>
         <c:axId val="2094734552"/>
-        <c:axId val="2094734556"/>
       </c:lineChart>
       <c:catAx>
         <c:axId val="2094734554"/>
@@ -483,7 +466,7 @@
             <a:pPr>
               <a:defRPr sz="1200" b="0" i="0" u="none" strike="noStrike">
                 <a:solidFill>
-                  <a:srgbClr val="6E6E73"/>
+                  <a:srgbClr val="000000"/>
                 </a:solidFill>
                 <a:latin typeface="+mn-lt"/>
               </a:defRPr>
@@ -495,6 +478,7 @@
         <c:crosses val="autoZero"/>
         <c:auto val="1"/>
         <c:lblAlgn val="ctr"/>
+        <c:lblOffset val="100"/>
         <c:noMultiLvlLbl val="1"/>
       </c:catAx>
       <c:valAx>
@@ -537,7 +521,7 @@
             <a:pPr>
               <a:defRPr sz="1100" b="0" i="0" u="none" strike="noStrike">
                 <a:solidFill>
-                  <a:srgbClr val="6E6E73"/>
+                  <a:srgbClr val="000000"/>
                 </a:solidFill>
                 <a:latin typeface="+mn-lt"/>
               </a:defRPr>
@@ -568,7 +552,7 @@
           <a:pPr>
             <a:defRPr sz="1200">
               <a:solidFill>
-                <a:srgbClr val="6E6E73"/>
+                <a:srgbClr val="000000"/>
               </a:solidFill>
               <a:latin typeface="+mn-lt"/>
               <a:cs typeface="+mn-lt"/>
@@ -580,6 +564,7 @@
     </c:legend>
     <c:plotVisOnly val="1"/>
     <c:dispBlanksAs val="span"/>
+    <c:showDLblsOverMax val="1"/>
   </c:chart>
   <c:spPr>
     <a:noFill/>
@@ -616,240 +601,16 @@
           <a:chExt cx="0" cy="0"/>
         </a:xfrm>
       </p:grpSpPr>
-      <p:sp>
-        <p:nvSpPr>
-          <p:cNvPr id="2" name="Header Placeholder 1"/>
-          <p:cNvSpPr>
-            <a:spLocks noGrp="1"/>
-          </p:cNvSpPr>
-          <p:nvPr>
-            <p:ph type="hdr" sz="quarter"/>
-          </p:nvPr>
-        </p:nvSpPr>
-        <p:spPr>
-          <a:xfrm>
-            <a:off x="0" y="0"/>
-            <a:ext cx="2971800" cy="458788"/>
-          </a:xfrm>
-          <a:prstGeom prst="rect">
-            <a:avLst/>
-          </a:prstGeom>
-        </p:spPr>
-        <p:txBody>
-          <a:bodyPr vert="horz" lIns="91440" tIns="45720" rIns="91440" bIns="45720" rtlCol="0"/>
-          <a:lstStyle>
-            <a:lvl1pPr algn="l">
-              <a:defRPr sz="1200"/>
-            </a:lvl1pPr>
-          </a:lstStyle>
-          <a:p>
-            <a:endParaRPr lang="en-US"/>
-          </a:p>
-        </p:txBody>
-      </p:sp>
-      <p:sp>
-        <p:nvSpPr>
-          <p:cNvPr id="3" name="Date Placeholder 2"/>
-          <p:cNvSpPr>
-            <a:spLocks noGrp="1"/>
-          </p:cNvSpPr>
-          <p:nvPr>
-            <p:ph type="dt" idx="1"/>
-          </p:nvPr>
-        </p:nvSpPr>
-        <p:spPr>
-          <a:xfrm>
-            <a:off x="3884613" y="0"/>
-            <a:ext cx="2971800" cy="458788"/>
-          </a:xfrm>
-          <a:prstGeom prst="rect">
-            <a:avLst/>
-          </a:prstGeom>
-        </p:spPr>
-        <p:txBody>
-          <a:bodyPr vert="horz" lIns="91440" tIns="45720" rIns="91440" bIns="45720" rtlCol="0"/>
-          <a:lstStyle>
-            <a:lvl1pPr algn="r">
-              <a:defRPr sz="1200"/>
-            </a:lvl1pPr>
-          </a:lstStyle>
-          <a:p>
-            <a:fld id="{5282F153-3F37-0F45-9E97-73ACFA13230C}" type="datetimeFigureOut">
-              <a:rPr lang="en-US"/>
-              <a:t>7/23/19</a:t>
-            </a:fld>
-            <a:endParaRPr lang="en-US"/>
-          </a:p>
-        </p:txBody>
-      </p:sp>
-      <p:sp>
-        <p:nvSpPr>
-          <p:cNvPr id="4" name="Slide Image Placeholder 3"/>
-          <p:cNvSpPr>
-            <a:spLocks noGrp="1" noRot="1" noChangeAspect="1"/>
-          </p:cNvSpPr>
-          <p:nvPr>
-            <p:ph type="sldImg" idx="2"/>
-          </p:nvPr>
-        </p:nvSpPr>
-        <p:spPr>
-          <a:xfrm>
-            <a:off x="685800" y="1143000"/>
-            <a:ext cx="5486400" cy="3086100"/>
-          </a:xfrm>
-          <a:prstGeom prst="rect">
-            <a:avLst/>
-          </a:prstGeom>
-          <a:noFill/>
-          <a:ln w="12700">
-            <a:solidFill>
-              <a:prstClr val="black"/>
-            </a:solidFill>
-          </a:ln>
-        </p:spPr>
-        <p:txBody>
-          <a:bodyPr vert="horz" lIns="91440" tIns="45720" rIns="91440" bIns="45720" rtlCol="0" anchor="ctr"/>
-          <a:lstStyle/>
-          <a:p>
-            <a:endParaRPr lang="en-US"/>
-          </a:p>
-        </p:txBody>
-      </p:sp>
-      <p:sp>
-        <p:nvSpPr>
-          <p:cNvPr id="5" name="Notes Placeholder 4"/>
-          <p:cNvSpPr>
-            <a:spLocks noGrp="1"/>
-          </p:cNvSpPr>
-          <p:nvPr>
-            <p:ph type="body" sz="quarter" idx="3"/>
-          </p:nvPr>
-        </p:nvSpPr>
-        <p:spPr>
-          <a:xfrm>
-            <a:off x="685800" y="4400550"/>
-            <a:ext cx="5486400" cy="3600450"/>
-          </a:xfrm>
-          <a:prstGeom prst="rect">
-            <a:avLst/>
-          </a:prstGeom>
-        </p:spPr>
-        <p:txBody>
-          <a:bodyPr vert="horz" lIns="91440" tIns="45720" rIns="91440" bIns="45720" rtlCol="0"/>
-          <a:lstStyle/>
-          <a:p>
-            <a:pPr lvl="0"/>
-            <a:r>
-              <a:rPr lang="en-US"/>
-              <a:t>Click to edit Master text styles</a:t>
-            </a:r>
-          </a:p>
-          <a:p>
-            <a:pPr lvl="1"/>
-            <a:r>
-              <a:rPr lang="en-US"/>
-              <a:t>Second level</a:t>
-            </a:r>
-          </a:p>
-          <a:p>
-            <a:pPr lvl="2"/>
-            <a:r>
-              <a:rPr lang="en-US"/>
-              <a:t>Third level</a:t>
-            </a:r>
-          </a:p>
-          <a:p>
-            <a:pPr lvl="3"/>
-            <a:r>
-              <a:rPr lang="en-US"/>
-              <a:t>Fourth level</a:t>
-            </a:r>
-          </a:p>
-          <a:p>
-            <a:pPr lvl="4"/>
-            <a:r>
-              <a:rPr lang="en-US"/>
-              <a:t>Fifth level</a:t>
-            </a:r>
-          </a:p>
-        </p:txBody>
-      </p:sp>
-      <p:sp>
-        <p:nvSpPr>
-          <p:cNvPr id="6" name="Footer Placeholder 5"/>
-          <p:cNvSpPr>
-            <a:spLocks noGrp="1"/>
-          </p:cNvSpPr>
-          <p:nvPr>
-            <p:ph type="ftr" sz="quarter" idx="4"/>
-          </p:nvPr>
-        </p:nvSpPr>
-        <p:spPr>
-          <a:xfrm>
-            <a:off x="0" y="8685213"/>
-            <a:ext cx="2971800" cy="458787"/>
-          </a:xfrm>
-          <a:prstGeom prst="rect">
-            <a:avLst/>
-          </a:prstGeom>
-        </p:spPr>
-        <p:txBody>
-          <a:bodyPr vert="horz" lIns="91440" tIns="45720" rIns="91440" bIns="45720" rtlCol="0" anchor="b"/>
-          <a:lstStyle>
-            <a:lvl1pPr algn="l">
-              <a:defRPr sz="1200"/>
-            </a:lvl1pPr>
-          </a:lstStyle>
-          <a:p>
-            <a:endParaRPr lang="en-US"/>
-          </a:p>
-        </p:txBody>
-      </p:sp>
-      <p:sp>
-        <p:nvSpPr>
-          <p:cNvPr id="7" name="Slide Number Placeholder 6"/>
-          <p:cNvSpPr>
-            <a:spLocks noGrp="1"/>
-          </p:cNvSpPr>
-          <p:nvPr>
-            <p:ph type="sldNum" sz="quarter" idx="5"/>
-          </p:nvPr>
-        </p:nvSpPr>
-        <p:spPr>
-          <a:xfrm>
-            <a:off x="3884613" y="8685213"/>
-            <a:ext cx="2971800" cy="458787"/>
-          </a:xfrm>
-          <a:prstGeom prst="rect">
-            <a:avLst/>
-          </a:prstGeom>
-        </p:spPr>
-        <p:txBody>
-          <a:bodyPr vert="horz" lIns="91440" tIns="45720" rIns="91440" bIns="45720" rtlCol="0" anchor="b"/>
-          <a:lstStyle>
-            <a:lvl1pPr algn="r">
-              <a:defRPr sz="1200"/>
-            </a:lvl1pPr>
-          </a:lstStyle>
-          <a:p>
-            <a:fld id="{CE5E9CC1-C706-0F49-92D6-E571CC5EEA8F}" type="slidenum">
-              <a:rPr lang="en-US"/>
-              <a:t>‹#›</a:t>
-            </a:fld>
-            <a:endParaRPr lang="en-US"/>
-          </a:p>
-        </p:txBody>
-      </p:sp>
     </p:spTree>
     <p:extLst>
       <p:ext uri="{BB962C8B-B14F-4D97-AF65-F5344CB8AC3E}">
-        <p14:creationId xmlns:p14="http://schemas.microsoft.com/office/powerpoint/2010/main" val="1024086991"/>
+        <p14:creationId xmlns:p14="http://schemas.microsoft.com/office/powerpoint/2010/main" val="2587067134"/>
       </p:ext>
     </p:extLst>
   </p:cSld>
   <p:clrMap bg1="lt1" tx1="dk1" bg2="lt2" tx2="dk2" accent1="accent1" accent2="accent2" accent3="accent3" accent4="accent4" accent5="accent5" accent6="accent6" hlink="hlink" folHlink="folHlink"/>
   <p:notesStyle>
-    <a:lvl1pPr marL="0" algn="l" defTabSz="914400" rtl="0" eaLnBrk="1" latinLnBrk="0" hangingPunct="1">
+    <a:lvl1pPr marL="0" algn="l" defTabSz="914400" rtl="0" eaLnBrk="1" latinLnBrk="1" hangingPunct="1">
       <a:defRPr sz="1200" kern="1200">
         <a:solidFill>
           <a:schemeClr val="tx1"/>
@@ -859,7 +620,7 @@
         <a:cs typeface="+mn-cs"/>
       </a:defRPr>
     </a:lvl1pPr>
-    <a:lvl2pPr marL="457200" algn="l" defTabSz="914400" rtl="0" eaLnBrk="1" latinLnBrk="0" hangingPunct="1">
+    <a:lvl2pPr marL="457200" algn="l" defTabSz="914400" rtl="0" eaLnBrk="1" latinLnBrk="1" hangingPunct="1">
       <a:defRPr sz="1200" kern="1200">
         <a:solidFill>
           <a:schemeClr val="tx1"/>
@@ -869,7 +630,7 @@
         <a:cs typeface="+mn-cs"/>
       </a:defRPr>
     </a:lvl2pPr>
-    <a:lvl3pPr marL="914400" algn="l" defTabSz="914400" rtl="0" eaLnBrk="1" latinLnBrk="0" hangingPunct="1">
+    <a:lvl3pPr marL="914400" algn="l" defTabSz="914400" rtl="0" eaLnBrk="1" latinLnBrk="1" hangingPunct="1">
       <a:defRPr sz="1200" kern="1200">
         <a:solidFill>
           <a:schemeClr val="tx1"/>
@@ -879,7 +640,7 @@
         <a:cs typeface="+mn-cs"/>
       </a:defRPr>
     </a:lvl3pPr>
-    <a:lvl4pPr marL="1371600" algn="l" defTabSz="914400" rtl="0" eaLnBrk="1" latinLnBrk="0" hangingPunct="1">
+    <a:lvl4pPr marL="1371600" algn="l" defTabSz="914400" rtl="0" eaLnBrk="1" latinLnBrk="1" hangingPunct="1">
       <a:defRPr sz="1200" kern="1200">
         <a:solidFill>
           <a:schemeClr val="tx1"/>
@@ -889,7 +650,7 @@
         <a:cs typeface="+mn-cs"/>
       </a:defRPr>
     </a:lvl4pPr>
-    <a:lvl5pPr marL="1828800" algn="l" defTabSz="914400" rtl="0" eaLnBrk="1" latinLnBrk="0" hangingPunct="1">
+    <a:lvl5pPr marL="1828800" algn="l" defTabSz="914400" rtl="0" eaLnBrk="1" latinLnBrk="1" hangingPunct="1">
       <a:defRPr sz="1200" kern="1200">
         <a:solidFill>
           <a:schemeClr val="tx1"/>
@@ -899,7 +660,7 @@
         <a:cs typeface="+mn-cs"/>
       </a:defRPr>
     </a:lvl5pPr>
-    <a:lvl6pPr marL="2286000" algn="l" defTabSz="914400" rtl="0" eaLnBrk="1" latinLnBrk="0" hangingPunct="1">
+    <a:lvl6pPr marL="2286000" algn="l" defTabSz="914400" rtl="0" eaLnBrk="1" latinLnBrk="1" hangingPunct="1">
       <a:defRPr sz="1200" kern="1200">
         <a:solidFill>
           <a:schemeClr val="tx1"/>
@@ -909,7 +670,7 @@
         <a:cs typeface="+mn-cs"/>
       </a:defRPr>
     </a:lvl6pPr>
-    <a:lvl7pPr marL="2743200" algn="l" defTabSz="914400" rtl="0" eaLnBrk="1" latinLnBrk="0" hangingPunct="1">
+    <a:lvl7pPr marL="2743200" algn="l" defTabSz="914400" rtl="0" eaLnBrk="1" latinLnBrk="1" hangingPunct="1">
       <a:defRPr sz="1200" kern="1200">
         <a:solidFill>
           <a:schemeClr val="tx1"/>
@@ -919,7 +680,7 @@
         <a:cs typeface="+mn-cs"/>
       </a:defRPr>
     </a:lvl7pPr>
-    <a:lvl8pPr marL="3200400" algn="l" defTabSz="914400" rtl="0" eaLnBrk="1" latinLnBrk="0" hangingPunct="1">
+    <a:lvl8pPr marL="3200400" algn="l" defTabSz="914400" rtl="0" eaLnBrk="1" latinLnBrk="1" hangingPunct="1">
       <a:defRPr sz="1200" kern="1200">
         <a:solidFill>
           <a:schemeClr val="tx1"/>
@@ -929,7 +690,7 @@
         <a:cs typeface="+mn-cs"/>
       </a:defRPr>
     </a:lvl8pPr>
-    <a:lvl9pPr marL="3657600" algn="l" defTabSz="914400" rtl="0" eaLnBrk="1" latinLnBrk="0" hangingPunct="1">
+    <a:lvl9pPr marL="3657600" algn="l" defTabSz="914400" rtl="0" eaLnBrk="1" latinLnBrk="1" hangingPunct="1">
       <a:defRPr sz="1200" kern="1200">
         <a:solidFill>
           <a:schemeClr val="tx1"/>
@@ -989,9 +750,8 @@
           <a:p>
             <a:r>
               <a:rPr lang="en-US" dirty="0"/>
-              <a:t>방 습도계가 45%로 안전해 보여도 12도까지 식은 북측 벽 표면에 닿은 공기는 80%입니다. 곰팡이 임계는 벽 표면 값으로 정해집니다. 수면, 점막 방어, 곰팡이 세 목표가 서로 충돌하고, 벽 온도에 따라 허용 습도 구간이 30%에서 55%까지 달라집니다. 이 구간을 계산해 지키는 것이 이 노드입니다.</a:t>
-            </a:r>
-            <a:endParaRPr lang="en-US" dirty="0"/>
+              <a:t>방 습도계가 45%로 안전해 보여도 12℃까지 식은 북측 벽 표면에 닿은 공기는 80%임. 곰팡이 임계는 벽 표면 값으로 정해짐. 수면, 점막 방어, 곰팡이 세 목표가 서로 충돌하고, 벽 온도에 따라 허용 습도 구간이 30%에서 55%까지 달라짐. 이 구간을 계산해 지키는 것이 이 노드임.</a:t>
+            </a:r>
           </a:p>
         </p:txBody>
       </p:sp>
@@ -1077,9 +837,8 @@
           <a:p>
             <a:r>
               <a:rPr lang="en-US" dirty="0"/>
-              <a:t>구성은 측정, 판단, 개입, 노출 4계층입니다. 판단은 nRF54LM20 DK 안에서 끝나고, 결과는 릴레이로 가전 전원을 켜고 끄며, 같은 결과를 Matter 엔드포인트로 SmartThings에 보고합니다. 릴레이는 LOW에서 켜지는 모듈이라 핀을 active-low로 정의했습니다.</a:t>
-            </a:r>
-            <a:endParaRPr lang="en-US" dirty="0"/>
+              <a:t>구성은 측정, 판단, 개입, 노출 4계층임. 판단은 nRF54LM20 DK 안에서 끝나고, 결과는 릴레이로 가전 전원을 켜고 끄며, 같은 결과를 Matter 엔드포인트로 SmartThings에 보고함. 릴레이는 LOW에서 켜지는 모듈이라 핀을 active-low로 정의함.</a:t>
+            </a:r>
           </a:p>
         </p:txBody>
       </p:sp>
@@ -1165,9 +924,8 @@
           <a:p>
             <a:r>
               <a:rPr lang="en-US" dirty="0"/>
-              <a:t>SDK 예제 위에 엔드포인트를 직접 추가했습니다. 습도·온도는 표준 측정 클러스터로, 가습기와 선풍기는 On/Off로 노출합니다. 판단부가 속성을 설정하면 SDK가 허브로 ReportData를 보내고, 시연 1회 동안 13번 보고해 13번 모두 수신 확인을 받았고, 응답은 평균 92ms였습니다. 앱에서 직접 조작한 값은 콜백으로 받아 판단부에 반영합니다.</a:t>
-            </a:r>
-            <a:endParaRPr lang="en-US" dirty="0"/>
+              <a:t>SDK 예제 위에 엔드포인트를 직접 추가함. 습도와 온도는 표준 측정 클러스터로, 가습기와 선풍기는 On/Off로 노출함. 판단부가 속성을 설정하면 SDK가 허브로 ReportData를 보내고, 시연 1회 동안 11번 보고해 11번 모두 수신 확인을 받았으며 응답은 평균 92ms였음. 앱에서 직접 조작한 값은 콜백으로 받아 판단부에 반영함.</a:t>
+            </a:r>
           </a:p>
         </p:txBody>
       </p:sp>
@@ -1253,9 +1011,8 @@
           <a:p>
             <a:r>
               <a:rPr lang="en-US" dirty="0"/>
-              <a:t>노드는 0.5초마다 표면 습도와 절대습도를 계산합니다. 75%에서 가습을 멈추고, 그래도 오르면 선풍기를 켭니다. 선풍기를 켤 때 벽이 몇 도 오르는지 스스로 재서, 선풍기를 꺼도 안전한지를 판단합니다. 선풍기로 허용 구간을 넓힌 뒤에는 선풍기를 켠 채로 가습을 이어가 점막 방어와 곰팡이 방어를 동시에 지킵니다.</a:t>
-            </a:r>
-            <a:endParaRPr lang="en-US" dirty="0"/>
+              <a:t>노드는 0.5초마다 표면 습도와 절대습도를 계산함. 75%에서 가습을 멈추고, 그래도 오르면 선풍기를 켬. 선풍기를 켤 때 벽이 몇 도 오르는지 스스로 재서, 선풍기를 꺼도 안전한지를 판단함. 선풍기로 허용 구간을 넓힌 뒤에는 선풍기를 켠 채로 가습을 이어가 점막 방어와 곰팡이 방어를 동시에 지킴.</a:t>
+            </a:r>
           </a:p>
         </p:txBody>
       </p:sp>
@@ -1341,9 +1098,8 @@
           <a:p>
             <a:r>
               <a:rPr lang="en-US" dirty="0"/>
-              <a:t>노트북 화면 하나로 시연합니다. 22시부터 08시까지를 60초로 압축했습니다. 실내 습도는 40%대에 머무는데 벽 표면 습도만 올라가고, 75%에서 노드가 가습을 멈춘 뒤 선풍기로 벽을 데웁니다. 그 순간 릴레이가 딸깍하고, 노드가 허브로 보고하는 것이 화면에 표시됩니다. 같은 밤 일반 가습기였다면 8시간 넘게 곰팡이 임계를 넘었을 것을 우리 노드는 0분으로 막았습니다.</a:t>
-            </a:r>
-            <a:endParaRPr lang="en-US" dirty="0"/>
+              <a:t>노트북 화면 하나로 시연함. 22시부터 08시까지를 60초로 압축함. 실내 습도는 40%대에 머무는데 벽 표면 습도만 올라가고, 75%에서 노드가 가습을 멈춘 뒤 선풍기로 벽을 데움. 그 순간 릴레이가 딸깍하고, 노드가 허브로 보고하는 것이 화면에 표시됨. 같은 밤 일반 가습기였다면 8시간 넘게 곰팡이 임계를 넘었을 것을 우리 노드는 0분으로 막음.</a:t>
+            </a:r>
           </a:p>
         </p:txBody>
       </p:sp>
@@ -1421,6 +1177,7 @@
         <a:solidFill>
           <a:srgbClr val="FFFFFF"/>
         </a:solidFill>
+        <a:effectLst/>
       </p:bgPr>
     </p:bg>
     <p:spTree>
@@ -1440,9 +1197,11 @@
       <p:sp>
         <p:nvSpPr>
           <p:cNvPr id="2" name="Text 0"/>
-          <p:cNvSpPr/>
+          <p:cNvSpPr>
+            <a:spLocks noGrp="1"/>
+          </p:cNvSpPr>
           <p:nvPr>
-            <p:ph idx="100" type="body" hasCustomPrompt="1"/>
+            <p:ph type="body" idx="100" hasCustomPrompt="1"/>
           </p:nvPr>
         </p:nvSpPr>
         <p:spPr>
@@ -1459,17 +1218,17 @@
         <p:txBody>
           <a:bodyPr wrap="square" rtlCol="0"/>
           <a:lstStyle>
-            <a:lvl1pPr indent="0" marL="0">
+            <a:lvl1pPr marL="0" indent="0">
               <a:buNone/>
               <a:defRPr lang="en-US" sz="1300" b="1" dirty="0">
                 <a:solidFill>
-                  <a:schemeClr val="accent1"/>
+                  <a:schemeClr val="tx1"/>
                 </a:solidFill>
               </a:defRPr>
             </a:lvl1pPr>
           </a:lstStyle>
           <a:p>
-            <a:pPr indent="0" marL="0">
+            <a:pPr marL="0" indent="0">
               <a:buNone/>
             </a:pPr>
             <a:endParaRPr lang="en-US" sz="1300" dirty="0"/>
@@ -1479,9 +1238,11 @@
       <p:sp>
         <p:nvSpPr>
           <p:cNvPr id="3" name="Text 0"/>
-          <p:cNvSpPr/>
+          <p:cNvSpPr>
+            <a:spLocks noGrp="1"/>
+          </p:cNvSpPr>
           <p:nvPr>
-            <p:ph idx="101" type="title" hasCustomPrompt="1"/>
+            <p:ph type="title" idx="101" hasCustomPrompt="1"/>
           </p:nvPr>
         </p:nvSpPr>
         <p:spPr>
@@ -1498,7 +1259,7 @@
         <p:txBody>
           <a:bodyPr wrap="square" rtlCol="0"/>
           <a:lstStyle>
-            <a:lvl1pPr algn="l" indent="0" marL="0">
+            <a:lvl1pPr marL="0" indent="0" algn="l">
               <a:buNone/>
               <a:defRPr lang="en-US" sz="3000" b="1" dirty="0">
                 <a:solidFill>
@@ -1508,7 +1269,7 @@
             </a:lvl1pPr>
           </a:lstStyle>
           <a:p>
-            <a:pPr algn="l" indent="0" marL="0">
+            <a:pPr marL="0" indent="0" algn="l">
               <a:buNone/>
             </a:pPr>
             <a:endParaRPr lang="en-US" sz="3000" dirty="0"/>
@@ -1536,16 +1297,16 @@
           <a:bodyPr wrap="square" lIns="0" tIns="0" rIns="0" bIns="0" rtlCol="0" anchor="ctr"/>
           <a:lstStyle/>
           <a:p>
-            <a:pPr indent="0" marL="0">
+            <a:pPr marL="0" indent="0">
               <a:buNone/>
             </a:pPr>
             <a:r>
               <a:rPr lang="en-US" sz="1000" dirty="0">
                 <a:solidFill>
-                  <a:schemeClr val="tx2"/>
-                </a:solidFill>
-              </a:rPr>
-              <a:t>침실 환경 면역 방어 노드 · 팀 밤새고 네집내집가기 · 지능형 홈(AI@Home) Matter AX Sprint 2026</a:t>
+                  <a:schemeClr val="tx1"/>
+                </a:solidFill>
+              </a:rPr>
+              <a:t>침실 환경 면역 방어 노드  |  팀 밤새고 네집내집가기  |  지능형 홈(AI@Home) Matter AX Sprint 2026</a:t>
             </a:r>
             <a:endParaRPr lang="en-US" sz="1000" dirty="0"/>
           </a:p>
@@ -1571,7 +1332,7 @@
           </a:prstGeom>
           <a:extLst>
             <a:ext uri="{C572A759-6A51-4108-AA02-DFA0A04FC94B}">
-              <ma14:wrappingTextBoxFlag xmlns:ma14="http://schemas.microsoft.com/office/mac/drawingml/2011/main" val="0"/>
+              <ma14:wrappingTextBoxFlag xmlns:ma14="http://schemas.microsoft.com/office/mac/drawingml/2011/main" xmlns="" val="0"/>
             </a:ext>
           </a:extLst>
         </p:spPr>
@@ -1581,7 +1342,7 @@
             <a:lvl1pPr>
               <a:defRPr sz="1000">
                 <a:solidFill>
-                  <a:schemeClr val="tx2"/>
+                  <a:schemeClr val="tx1"/>
                 </a:solidFill>
               </a:defRPr>
             </a:lvl1pPr>
@@ -1589,8 +1350,8 @@
           <a:p>
             <a:pPr algn="r"/>
             <a:fld id="{F7021451-1387-4CA6-816F-3879F97B5CBC}" type="slidenum">
-              <a:rPr b="0" lang="en-US"/>
-              <a:t>1002</a:t>
+              <a:rPr lang="en-US" b="0"/>
+              <a:t>‹#›</a:t>
             </a:fld>
             <a:endParaRPr lang="en-US"/>
           </a:p>
@@ -1607,6 +1368,11 @@
 <file path=ppt/slideMasters/slideMaster1.xml><?xml version="1.0" encoding="utf-8"?>
 <p:sldMaster xmlns:a="http://schemas.openxmlformats.org/drawingml/2006/main" xmlns:r="http://schemas.openxmlformats.org/officeDocument/2006/relationships" xmlns:p="http://schemas.openxmlformats.org/presentationml/2006/main">
   <p:cSld>
+    <p:bg>
+      <p:bgRef idx="1001">
+        <a:schemeClr val="bg1"/>
+      </p:bgRef>
+    </p:bg>
     <p:spTree>
       <p:nvGrpSpPr>
         <p:cNvPr id="1" name=""/>
@@ -1641,7 +1407,7 @@
           </a:prstGeom>
           <a:extLst>
             <a:ext uri="{C572A759-6A51-4108-AA02-DFA0A04FC94B}">
-              <ma14:wrappingTextBoxFlag xmlns:ma14="http://schemas.microsoft.com/office/mac/drawingml/2011/main" val="0"/>
+              <ma14:wrappingTextBoxFlag xmlns:ma14="http://schemas.microsoft.com/office/mac/drawingml/2011/main" xmlns="" val="0"/>
             </a:ext>
           </a:extLst>
         </p:spPr>
@@ -1651,7 +1417,7 @@
             <a:lvl1pPr>
               <a:defRPr sz="1000">
                 <a:solidFill>
-                  <a:schemeClr val="tx2"/>
+                  <a:schemeClr val="tx1"/>
                 </a:solidFill>
               </a:defRPr>
             </a:lvl1pPr>
@@ -1659,8 +1425,8 @@
           <a:p>
             <a:pPr algn="r"/>
             <a:fld id="{F7021451-1387-4CA6-816F-3879F97B5CBC}" type="slidenum">
-              <a:rPr b="0" lang="en-US"/>
-              <a:t>null</a:t>
+              <a:rPr lang="en-US" b="0"/>
+              <a:t>‹#›</a:t>
             </a:fld>
             <a:endParaRPr lang="en-US"/>
           </a:p>
@@ -1947,9 +1713,11 @@
       <p:sp>
         <p:nvSpPr>
           <p:cNvPr id="2" name="Text 0"/>
-          <p:cNvSpPr/>
+          <p:cNvSpPr>
+            <a:spLocks noGrp="1"/>
+          </p:cNvSpPr>
           <p:nvPr>
-            <p:ph idx="100" type="body" hasCustomPrompt="1"/>
+            <p:ph type="body" idx="100" hasCustomPrompt="1"/>
           </p:nvPr>
         </p:nvSpPr>
         <p:spPr>
@@ -1967,16 +1735,16 @@
           <a:bodyPr wrap="square" lIns="0" tIns="0" rIns="0" bIns="0" rtlCol="0"/>
           <a:lstStyle/>
           <a:p>
-            <a:pPr indent="0" marL="0">
+            <a:pPr marL="0" indent="0">
               <a:buNone/>
             </a:pPr>
             <a:r>
               <a:rPr lang="en-US" sz="1300" b="1" dirty="0">
                 <a:solidFill>
-                  <a:schemeClr val="accent1"/>
-                </a:solidFill>
-              </a:rPr>
-              <a:t>핵심 주제</a:t>
+                  <a:schemeClr val="tx1"/>
+                </a:solidFill>
+              </a:rPr>
+              <a:t>핵심 주제  (응모 분야 Living Assist)</a:t>
             </a:r>
             <a:endParaRPr lang="en-US" sz="1300" dirty="0"/>
           </a:p>
@@ -1985,9 +1753,11 @@
       <p:sp>
         <p:nvSpPr>
           <p:cNvPr id="3" name="Text 0"/>
-          <p:cNvSpPr/>
+          <p:cNvSpPr>
+            <a:spLocks noGrp="1"/>
+          </p:cNvSpPr>
           <p:nvPr>
-            <p:ph idx="101" type="title" hasCustomPrompt="1"/>
+            <p:ph type="title" idx="101" hasCustomPrompt="1"/>
           </p:nvPr>
         </p:nvSpPr>
         <p:spPr>
@@ -2005,7 +1775,7 @@
           <a:bodyPr wrap="square" lIns="0" tIns="0" rIns="0" bIns="0" rtlCol="0" anchor="t"/>
           <a:lstStyle/>
           <a:p>
-            <a:pPr algn="l" indent="0" marL="0">
+            <a:pPr marL="0" indent="0" algn="l">
               <a:buNone/>
             </a:pPr>
             <a:r>
@@ -2014,7 +1784,7 @@
                   <a:schemeClr val="tx1"/>
                 </a:solidFill>
               </a:rPr>
-              <a:t>방 습도계가 45%일 때, 차가운 벽 표면은 80%입니다</a:t>
+              <a:t>방 습도계가 45%여도 차가운 벽 표면은 80%임</a:t>
             </a:r>
             <a:endParaRPr lang="en-US" sz="3000" dirty="0"/>
           </a:p>
@@ -2041,16 +1811,16 @@
           <a:bodyPr wrap="square" lIns="0" tIns="0" rIns="0" bIns="0" rtlCol="0" anchor="t"/>
           <a:lstStyle/>
           <a:p>
-            <a:pPr indent="0" marL="0">
+            <a:pPr marL="0" indent="0">
               <a:buNone/>
             </a:pPr>
             <a:r>
               <a:rPr lang="en-US" sz="1500" dirty="0">
                 <a:solidFill>
-                  <a:schemeClr val="tx2"/>
-                </a:solidFill>
-              </a:rPr>
-              <a:t>벽 표면의 습도를 계산해 곰팡이 임계 전에 가습기와 선풍기를 스스로 조절하는 Matter 디바이스 · 응모 분야 Living Assist</a:t>
+                  <a:schemeClr val="tx1"/>
+                </a:solidFill>
+              </a:rPr>
+              <a:t>벽 표면 습도를 계산해 곰팡이 임계 전에 가습기와 선풍기를 스스로 조절하는 Matter 디바이스를 제안함</a:t>
             </a:r>
             <a:endParaRPr lang="en-US" sz="1500" dirty="0"/>
           </a:p>
@@ -2085,14 +1855,14 @@
       </p:sp>
       <p:pic>
         <p:nvPicPr>
-          <p:cNvPr id="6" name="Image 0" descr="습도계">    </p:cNvPr>
+          <p:cNvPr id="6" name="Image 0" descr="습도계"/>
           <p:cNvPicPr>
             <a:picLocks noChangeAspect="1"/>
           </p:cNvPicPr>
           <p:nvPr/>
         </p:nvPicPr>
         <p:blipFill>
-          <a:blip r:embed="rId1"/>
+          <a:blip r:embed="rId3"/>
           <a:stretch>
             <a:fillRect/>
           </a:stretch>
@@ -2128,13 +1898,13 @@
           <a:bodyPr wrap="square" lIns="0" tIns="0" rIns="0" bIns="0" rtlCol="0" anchor="t"/>
           <a:lstStyle/>
           <a:p>
-            <a:pPr indent="0" marL="0">
+            <a:pPr marL="0" indent="0">
               <a:buNone/>
             </a:pPr>
             <a:r>
               <a:rPr lang="en-US" sz="1300" dirty="0">
                 <a:solidFill>
-                  <a:schemeClr val="tx2"/>
+                  <a:schemeClr val="tx1"/>
                 </a:solidFill>
               </a:rPr>
               <a:t>실내 습도 (방 습도계)</a:t>
@@ -2164,7 +1934,7 @@
           <a:bodyPr wrap="square" lIns="0" tIns="0" rIns="0" bIns="0" rtlCol="0" anchor="t"/>
           <a:lstStyle/>
           <a:p>
-            <a:pPr indent="0" marL="0">
+            <a:pPr marL="0" indent="0">
               <a:buNone/>
             </a:pPr>
             <a:r>
@@ -2200,16 +1970,16 @@
           <a:bodyPr wrap="square" lIns="0" tIns="0" rIns="0" bIns="0" rtlCol="0" anchor="t"/>
           <a:lstStyle/>
           <a:p>
-            <a:pPr indent="0" marL="0">
+            <a:pPr marL="0" indent="0">
               <a:buNone/>
             </a:pPr>
             <a:r>
               <a:rPr lang="en-US" sz="1300" dirty="0">
                 <a:solidFill>
-                  <a:schemeClr val="tx2"/>
-                </a:solidFill>
-              </a:rPr>
-              <a:t>방 공기의 값</a:t>
+                  <a:schemeClr val="tx1"/>
+                </a:solidFill>
+              </a:rPr>
+              <a:t>방 공기 기준 값</a:t>
             </a:r>
             <a:endParaRPr lang="en-US" sz="1300" dirty="0"/>
           </a:p>
@@ -2232,11 +2002,11 @@
             </a:avLst>
           </a:prstGeom>
           <a:solidFill>
-            <a:schemeClr val="bg2"/>
+            <a:srgbClr val="FFFFFF"/>
           </a:solidFill>
-          <a:ln w="9525">
+          <a:ln w="19050">
             <a:solidFill>
-              <a:srgbClr val="E0E0E0"/>
+              <a:srgbClr val="E30000"/>
             </a:solidFill>
             <a:prstDash val="solid"/>
           </a:ln>
@@ -2244,14 +2014,14 @@
       </p:sp>
       <p:pic>
         <p:nvPicPr>
-          <p:cNvPr id="11" name="Image 1" descr="차가운 벽">    </p:cNvPr>
+          <p:cNvPr id="11" name="Image 1" descr="차가운 벽"/>
           <p:cNvPicPr>
             <a:picLocks noChangeAspect="1"/>
           </p:cNvPicPr>
           <p:nvPr/>
         </p:nvPicPr>
         <p:blipFill>
-          <a:blip r:embed="rId2"/>
+          <a:blip r:embed="rId4"/>
           <a:stretch>
             <a:fillRect/>
           </a:stretch>
@@ -2287,13 +2057,13 @@
           <a:bodyPr wrap="square" lIns="0" tIns="0" rIns="0" bIns="0" rtlCol="0" anchor="t"/>
           <a:lstStyle/>
           <a:p>
-            <a:pPr indent="0" marL="0">
+            <a:pPr marL="0" indent="0">
               <a:buNone/>
             </a:pPr>
             <a:r>
               <a:rPr lang="en-US" sz="1300" dirty="0">
                 <a:solidFill>
-                  <a:schemeClr val="tx2"/>
+                  <a:schemeClr val="tx1"/>
                 </a:solidFill>
               </a:rPr>
               <a:t>12℃ 북측 벽 표면</a:t>
@@ -2323,13 +2093,13 @@
           <a:bodyPr wrap="square" lIns="0" tIns="0" rIns="0" bIns="0" rtlCol="0" anchor="t"/>
           <a:lstStyle/>
           <a:p>
-            <a:pPr indent="0" marL="0">
+            <a:pPr marL="0" indent="0">
               <a:buNone/>
             </a:pPr>
             <a:r>
               <a:rPr lang="en-US" sz="5400" b="1" dirty="0">
                 <a:solidFill>
-                  <a:schemeClr val="accent3"/>
+                  <a:schemeClr val="tx1"/>
                 </a:solidFill>
               </a:rPr>
               <a:t>80%</a:t>
@@ -2359,13 +2129,13 @@
           <a:bodyPr wrap="square" lIns="0" tIns="0" rIns="0" bIns="0" rtlCol="0" anchor="t"/>
           <a:lstStyle/>
           <a:p>
-            <a:pPr indent="0" marL="0">
+            <a:pPr marL="0" indent="0">
               <a:buNone/>
             </a:pPr>
             <a:r>
               <a:rPr lang="en-US" sz="1300" dirty="0">
                 <a:solidFill>
-                  <a:schemeClr val="tx2"/>
+                  <a:schemeClr val="tx1"/>
                 </a:solidFill>
               </a:rPr>
               <a:t>ISO 13788 곰팡이 임계</a:t>
@@ -2395,7 +2165,7 @@
           <a:bodyPr wrap="square" lIns="0" tIns="0" rIns="0" bIns="0" rtlCol="0" anchor="t"/>
           <a:lstStyle/>
           <a:p>
-            <a:pPr indent="0" marL="0">
+            <a:pPr marL="0" indent="0">
               <a:buNone/>
             </a:pPr>
             <a:r>
@@ -2437,14 +2207,14 @@
       </p:sp>
       <p:pic>
         <p:nvPicPr>
-          <p:cNvPr id="17" name="Image 2" descr="bed">    </p:cNvPr>
+          <p:cNvPr id="17" name="Image 2" descr="bed"/>
           <p:cNvPicPr>
             <a:picLocks noChangeAspect="1"/>
           </p:cNvPicPr>
           <p:nvPr/>
         </p:nvPicPr>
         <p:blipFill>
-          <a:blip r:embed="rId3"/>
+          <a:blip r:embed="rId5"/>
           <a:stretch>
             <a:fillRect/>
           </a:stretch>
@@ -2480,7 +2250,7 @@
           <a:bodyPr wrap="square" lIns="0" tIns="0" rIns="0" bIns="0" rtlCol="0" anchor="t"/>
           <a:lstStyle/>
           <a:p>
-            <a:pPr indent="0" marL="0">
+            <a:pPr marL="0" indent="0">
               <a:buNone/>
             </a:pPr>
             <a:r>
@@ -2489,21 +2259,21 @@
                   <a:schemeClr val="tx1"/>
                 </a:solidFill>
               </a:rPr>
-              <a:t>① 수면 · 침실 18~20℃</a:t>
+              <a:t>① 수면: 침실 18~20℃</a:t>
             </a:r>
             <a:endParaRPr lang="en-US" sz="1400" dirty="0"/>
           </a:p>
           <a:p>
-            <a:pPr indent="0" marL="0">
+            <a:pPr marL="0" indent="0">
               <a:buNone/>
             </a:pPr>
             <a:r>
               <a:rPr lang="en-US" sz="1300" dirty="0">
                 <a:solidFill>
-                  <a:srgbClr val="6E6E73"/>
-                </a:solidFill>
-              </a:rPr>
-              <a:t>Prather, SLEEP 2015 · 사용자가 정하는 제약 조건</a:t>
+                  <a:schemeClr val="tx1"/>
+                </a:solidFill>
+              </a:rPr>
+              <a:t>사용자가 정하는 제약 조건임 (Prather, SLEEP 2015)</a:t>
             </a:r>
             <a:endParaRPr lang="en-US" sz="1400" dirty="0"/>
           </a:p>
@@ -2536,14 +2306,14 @@
       </p:sp>
       <p:pic>
         <p:nvPicPr>
-          <p:cNvPr id="20" name="Image 3" descr="shield">    </p:cNvPr>
+          <p:cNvPr id="20" name="Image 3" descr="shield"/>
           <p:cNvPicPr>
             <a:picLocks noChangeAspect="1"/>
           </p:cNvPicPr>
           <p:nvPr/>
         </p:nvPicPr>
         <p:blipFill>
-          <a:blip r:embed="rId4"/>
+          <a:blip r:embed="rId6"/>
           <a:stretch>
             <a:fillRect/>
           </a:stretch>
@@ -2579,7 +2349,7 @@
           <a:bodyPr wrap="square" lIns="0" tIns="0" rIns="0" bIns="0" rtlCol="0" anchor="t"/>
           <a:lstStyle/>
           <a:p>
-            <a:pPr indent="0" marL="0">
+            <a:pPr marL="0" indent="0">
               <a:buNone/>
             </a:pPr>
             <a:r>
@@ -2588,21 +2358,21 @@
                   <a:schemeClr val="tx1"/>
                 </a:solidFill>
               </a:rPr>
-              <a:t>② 점막 방어 · 절대습도 6 g/㎥ 이상</a:t>
+              <a:t>② 점막 방어: 절대습도 6 g/㎥ 이상</a:t>
             </a:r>
             <a:endParaRPr lang="en-US" sz="1400" dirty="0"/>
           </a:p>
           <a:p>
-            <a:pPr indent="0" marL="0">
+            <a:pPr marL="0" indent="0">
               <a:buNone/>
             </a:pPr>
             <a:r>
               <a:rPr lang="en-US" sz="1300" dirty="0">
                 <a:solidFill>
-                  <a:srgbClr val="6E6E73"/>
-                </a:solidFill>
-              </a:rPr>
-              <a:t>Shaman &amp; Kohn, PNAS 2009 · 노드가 제어</a:t>
+                  <a:schemeClr val="tx1"/>
+                </a:solidFill>
+              </a:rPr>
+              <a:t>노드가 제어함 (Shaman &amp; Kohn, PNAS 2009)</a:t>
             </a:r>
             <a:endParaRPr lang="en-US" sz="1400" dirty="0"/>
           </a:p>
@@ -2635,14 +2405,14 @@
       </p:sp>
       <p:pic>
         <p:nvPicPr>
-          <p:cNvPr id="23" name="Image 4" descr="virus">    </p:cNvPr>
+          <p:cNvPr id="23" name="Image 4" descr="virus"/>
           <p:cNvPicPr>
             <a:picLocks noChangeAspect="1"/>
           </p:cNvPicPr>
           <p:nvPr/>
         </p:nvPicPr>
         <p:blipFill>
-          <a:blip r:embed="rId5"/>
+          <a:blip r:embed="rId7"/>
           <a:stretch>
             <a:fillRect/>
           </a:stretch>
@@ -2678,7 +2448,7 @@
           <a:bodyPr wrap="square" lIns="0" tIns="0" rIns="0" bIns="0" rtlCol="0" anchor="t"/>
           <a:lstStyle/>
           <a:p>
-            <a:pPr indent="0" marL="0">
+            <a:pPr marL="0" indent="0">
               <a:buNone/>
             </a:pPr>
             <a:r>
@@ -2687,21 +2457,21 @@
                   <a:schemeClr val="tx1"/>
                 </a:solidFill>
               </a:rPr>
-              <a:t>③ 곰팡이·진드기 · 벽 표면 80% 이하</a:t>
+              <a:t>③ 곰팡이와 진드기: 벽 표면 80% 이하</a:t>
             </a:r>
             <a:endParaRPr lang="en-US" sz="1400" dirty="0"/>
           </a:p>
           <a:p>
-            <a:pPr indent="0" marL="0">
+            <a:pPr marL="0" indent="0">
               <a:buNone/>
             </a:pPr>
             <a:r>
               <a:rPr lang="en-US" sz="1300" dirty="0">
                 <a:solidFill>
-                  <a:srgbClr val="6E6E73"/>
-                </a:solidFill>
-              </a:rPr>
-              <a:t>ISO 13788:2012 · 노드가 제어</a:t>
+                  <a:schemeClr val="tx1"/>
+                </a:solidFill>
+              </a:rPr>
+              <a:t>노드가 제어함 (ISO 13788:2012)</a:t>
             </a:r>
             <a:endParaRPr lang="en-US" sz="1400" dirty="0"/>
           </a:p>
@@ -2709,7 +2479,7 @@
       </p:sp>
       <p:graphicFrame>
         <p:nvGraphicFramePr>
-          <p:cNvPr id="25" name="Chart 0" descr=""/>
+          <p:cNvPr id="25" name="Chart 0"/>
           <p:cNvGraphicFramePr/>
           <p:nvPr/>
         </p:nvGraphicFramePr>
@@ -2717,9 +2487,9 @@
           <a:off x="6400800" y="1783080"/>
           <a:ext cx="5257800" cy="3657600"/>
         </p:xfrm>
-        <a:graphic xmlns:a="http://schemas.openxmlformats.org/drawingml/2006/main">
+        <a:graphic>
           <a:graphicData uri="http://schemas.openxmlformats.org/drawingml/2006/chart">
-            <c:chart xmlns:c="http://schemas.openxmlformats.org/drawingml/2006/chart" r:id="rId6"/>
+            <c:chart xmlns:c="http://schemas.openxmlformats.org/drawingml/2006/chart" xmlns:r="http://schemas.openxmlformats.org/officeDocument/2006/relationships" r:id="rId8"/>
           </a:graphicData>
         </a:graphic>
       </p:graphicFrame>
@@ -2744,24 +2514,38 @@
           <a:bodyPr wrap="square" lIns="0" tIns="0" rIns="0" bIns="0" rtlCol="0" anchor="t"/>
           <a:lstStyle/>
           <a:p>
-            <a:pPr indent="0" marL="0">
+            <a:pPr marL="0" indent="0">
               <a:buNone/>
             </a:pPr>
             <a:r>
               <a:rPr lang="en-US" sz="1400" dirty="0">
                 <a:solidFill>
-                  <a:schemeClr val="tx2"/>
-                </a:solidFill>
-              </a:rPr>
-              <a:t>벽이 약 7.2℃ 아래로 내려가면 두 목표를 함께 만족하는 구간이 사라집니다. 노드는 선풍기로 벽 표면을 데워 이 구간을 되찾습니다.</a:t>
+                  <a:schemeClr val="tx1"/>
+                </a:solidFill>
+              </a:rPr>
+              <a:t>벽이 약 7.2℃ 아래로 내려가면 두 목표를 함께 만족하는 구간이 사라짐.</a:t>
             </a:r>
             <a:endParaRPr lang="en-US" sz="1400" dirty="0"/>
           </a:p>
+          <a:p>
+            <a:pPr marL="0" indent="0">
+              <a:buNone/>
+            </a:pPr>
+            <a:r>
+              <a:rPr lang="en-US" sz="1400" dirty="0">
+                <a:solidFill>
+                  <a:schemeClr val="tx1"/>
+                </a:solidFill>
+              </a:rPr>
+              <a:t>노드는 선풍기로 벽 표면을 데워 이 구간을 되찾음.</a:t>
+            </a:r>
+            <a:endParaRPr lang="en-US" sz="1400" dirty="0"/>
+          </a:p>
         </p:txBody>
       </p:sp>
       <p:sp>
         <p:nvSpPr>
-          <p:cNvPr id="25" name="Slide Number Placeholder 0"/>
+          <p:cNvPr id="27" name="Slide Number Placeholder 0"/>
           <p:cNvSpPr>
             <a:spLocks noGrp="1"/>
           </p:cNvSpPr>
@@ -2779,7 +2563,7 @@
           </a:prstGeom>
           <a:extLst>
             <a:ext uri="{C572A759-6A51-4108-AA02-DFA0A04FC94B}">
-              <ma14:wrappingTextBoxFlag xmlns:ma14="http://schemas.microsoft.com/office/mac/drawingml/2011/main" val="0"/>
+              <ma14:wrappingTextBoxFlag xmlns:ma14="http://schemas.microsoft.com/office/mac/drawingml/2011/main" xmlns="" val="0"/>
             </a:ext>
           </a:extLst>
         </p:spPr>
@@ -2789,7 +2573,7 @@
             <a:lvl1pPr>
               <a:defRPr sz="1000">
                 <a:solidFill>
-                  <a:schemeClr val="tx2"/>
+                  <a:schemeClr val="tx1"/>
                 </a:solidFill>
               </a:defRPr>
             </a:lvl1pPr>
@@ -2797,7 +2581,7 @@
           <a:p>
             <a:pPr algn="r"/>
             <a:fld id="{F7021451-1387-4CA6-816F-3879F97B5CBC}" type="slidenum">
-              <a:rPr b="0" lang="en-US"/>
+              <a:rPr lang="en-US" b="0"/>
               <a:t>1</a:t>
             </a:fld>
             <a:endParaRPr lang="en-US"/>
@@ -2832,9 +2616,11 @@
       <p:sp>
         <p:nvSpPr>
           <p:cNvPr id="2" name="Text 0"/>
-          <p:cNvSpPr/>
+          <p:cNvSpPr>
+            <a:spLocks noGrp="1"/>
+          </p:cNvSpPr>
           <p:nvPr>
-            <p:ph idx="100" type="body" hasCustomPrompt="1"/>
+            <p:ph type="body" idx="100" hasCustomPrompt="1"/>
           </p:nvPr>
         </p:nvSpPr>
         <p:spPr>
@@ -2852,13 +2638,13 @@
           <a:bodyPr wrap="square" lIns="0" tIns="0" rIns="0" bIns="0" rtlCol="0"/>
           <a:lstStyle/>
           <a:p>
-            <a:pPr indent="0" marL="0">
+            <a:pPr marL="0" indent="0">
               <a:buNone/>
             </a:pPr>
             <a:r>
               <a:rPr lang="en-US" sz="1300" b="1" dirty="0">
                 <a:solidFill>
-                  <a:schemeClr val="accent1"/>
+                  <a:schemeClr val="tx1"/>
                 </a:solidFill>
               </a:rPr>
               <a:t>주요 개발 내용 ① 시스템 구성과 회로</a:t>
@@ -2870,9 +2656,11 @@
       <p:sp>
         <p:nvSpPr>
           <p:cNvPr id="3" name="Text 0"/>
-          <p:cNvSpPr/>
+          <p:cNvSpPr>
+            <a:spLocks noGrp="1"/>
+          </p:cNvSpPr>
           <p:nvPr>
-            <p:ph idx="101" type="title" hasCustomPrompt="1"/>
+            <p:ph type="title" idx="101" hasCustomPrompt="1"/>
           </p:nvPr>
         </p:nvSpPr>
         <p:spPr>
@@ -2890,7 +2678,7 @@
           <a:bodyPr wrap="square" lIns="0" tIns="0" rIns="0" bIns="0" rtlCol="0" anchor="t"/>
           <a:lstStyle/>
           <a:p>
-            <a:pPr algn="l" indent="0" marL="0">
+            <a:pPr marL="0" indent="0" algn="l">
               <a:buNone/>
             </a:pPr>
             <a:r>
@@ -2899,7 +2687,7 @@
                   <a:schemeClr val="tx1"/>
                 </a:solidFill>
               </a:rPr>
-              <a:t>판단은 보드 안에서, 개입은 릴레이로, 결과는 Matter로</a:t>
+              <a:t>보드 안에서 판단하고, 릴레이로 개입하고, Matter로 보고함</a:t>
             </a:r>
             <a:endParaRPr lang="en-US" sz="3000" dirty="0"/>
           </a:p>
@@ -2959,14 +2747,14 @@
       </p:sp>
       <p:pic>
         <p:nvPicPr>
-          <p:cNvPr id="6" name="Image 0" descr="gauge">    </p:cNvPr>
+          <p:cNvPr id="6" name="Image 0" descr="gauge"/>
           <p:cNvPicPr>
             <a:picLocks noChangeAspect="1"/>
           </p:cNvPicPr>
           <p:nvPr/>
         </p:nvPicPr>
         <p:blipFill>
-          <a:blip r:embed="rId1"/>
+          <a:blip r:embed="rId3"/>
           <a:stretch>
             <a:fillRect/>
           </a:stretch>
@@ -3002,7 +2790,7 @@
           <a:bodyPr wrap="square" lIns="0" tIns="0" rIns="0" bIns="0" rtlCol="0" anchor="ctr"/>
           <a:lstStyle/>
           <a:p>
-            <a:pPr indent="0" marL="0">
+            <a:pPr marL="0" indent="0">
               <a:buNone/>
             </a:pPr>
             <a:r>
@@ -3038,44 +2826,44 @@
           <a:bodyPr wrap="square" lIns="0" tIns="0" rIns="0" bIns="0" rtlCol="0" anchor="t"/>
           <a:lstStyle/>
           <a:p>
-            <a:pPr indent="0" marL="0">
+            <a:pPr marL="0" indent="0">
               <a:buNone/>
             </a:pPr>
             <a:r>
               <a:rPr lang="en-US" sz="1200" dirty="0">
                 <a:solidFill>
-                  <a:srgbClr val="6E6E73"/>
-                </a:solidFill>
-              </a:rPr>
-              <a:t>실내 온·습도</a:t>
+                  <a:schemeClr val="tx1"/>
+                </a:solidFill>
+              </a:rPr>
+              <a:t>실내 온도와 습도</a:t>
             </a:r>
             <a:endParaRPr lang="en-US" sz="1200" dirty="0"/>
           </a:p>
           <a:p>
-            <a:pPr indent="0" marL="0">
+            <a:pPr marL="0" indent="0">
               <a:buNone/>
             </a:pPr>
             <a:r>
               <a:rPr lang="en-US" sz="1200" dirty="0">
                 <a:solidFill>
-                  <a:srgbClr val="6E6E73"/>
-                </a:solidFill>
-              </a:rPr>
-              <a:t>벽 표면 온도 · 침구 습도</a:t>
+                  <a:schemeClr val="tx1"/>
+                </a:solidFill>
+              </a:rPr>
+              <a:t>벽 표면 온도, 침구 습도</a:t>
             </a:r>
             <a:endParaRPr lang="en-US" sz="1200" dirty="0"/>
           </a:p>
           <a:p>
-            <a:pPr indent="0" marL="0">
+            <a:pPr marL="0" indent="0">
               <a:buNone/>
             </a:pPr>
             <a:r>
               <a:rPr lang="en-US" sz="1200" dirty="0">
                 <a:solidFill>
-                  <a:srgbClr val="6E6E73"/>
-                </a:solidFill>
-              </a:rPr>
-              <a:t>시연: 가상 침실이 값 생성</a:t>
+                  <a:schemeClr val="tx1"/>
+                </a:solidFill>
+              </a:rPr>
+              <a:t>시연에서는 가상 침실이 값을 생성함</a:t>
             </a:r>
             <a:endParaRPr lang="en-US" sz="1200" dirty="0"/>
           </a:p>
@@ -3122,9 +2910,9 @@
             </a:avLst>
           </a:prstGeom>
           <a:solidFill>
-            <a:schemeClr val="accent2"/>
+            <a:srgbClr val="FFFFFF"/>
           </a:solidFill>
-          <a:ln w="12700">
+          <a:ln w="19050">
             <a:solidFill>
               <a:srgbClr val="1D5C45"/>
             </a:solidFill>
@@ -3147,7 +2935,7 @@
             <a:avLst/>
           </a:prstGeom>
           <a:solidFill>
-            <a:srgbClr val="2E7D60"/>
+            <a:schemeClr val="accent2"/>
           </a:solidFill>
           <a:ln w="12700">
             <a:solidFill>
@@ -3159,14 +2947,14 @@
       </p:sp>
       <p:pic>
         <p:nvPicPr>
-          <p:cNvPr id="12" name="Image 1" descr="cpu">    </p:cNvPr>
+          <p:cNvPr id="12" name="Image 1" descr="cpu"/>
           <p:cNvPicPr>
             <a:picLocks noChangeAspect="1"/>
           </p:cNvPicPr>
           <p:nvPr/>
         </p:nvPicPr>
         <p:blipFill>
-          <a:blip r:embed="rId2"/>
+          <a:blip r:embed="rId4"/>
           <a:stretch>
             <a:fillRect/>
           </a:stretch>
@@ -3202,13 +2990,13 @@
           <a:bodyPr wrap="square" lIns="0" tIns="0" rIns="0" bIns="0" rtlCol="0" anchor="ctr"/>
           <a:lstStyle/>
           <a:p>
-            <a:pPr indent="0" marL="0">
+            <a:pPr marL="0" indent="0">
               <a:buNone/>
             </a:pPr>
             <a:r>
               <a:rPr lang="en-US" sz="1500" b="1" dirty="0">
                 <a:solidFill>
-                  <a:schemeClr val="bg1"/>
+                  <a:schemeClr val="tx1"/>
                 </a:solidFill>
               </a:rPr>
               <a:t>판단</a:t>
@@ -3238,44 +3026,44 @@
           <a:bodyPr wrap="square" lIns="0" tIns="0" rIns="0" bIns="0" rtlCol="0" anchor="t"/>
           <a:lstStyle/>
           <a:p>
-            <a:pPr indent="0" marL="0">
+            <a:pPr marL="0" indent="0">
               <a:buNone/>
             </a:pPr>
             <a:r>
               <a:rPr lang="en-US" sz="1200" dirty="0">
                 <a:solidFill>
-                  <a:srgbClr val="CFE9DD"/>
-                </a:solidFill>
-              </a:rPr>
-              <a:t>nRF54LM20 DK 안에서</a:t>
+                  <a:schemeClr val="tx1"/>
+                </a:solidFill>
+              </a:rPr>
+              <a:t>nRF54LM20 DK 안에서 처리함</a:t>
             </a:r>
             <a:endParaRPr lang="en-US" sz="1200" dirty="0"/>
           </a:p>
           <a:p>
-            <a:pPr indent="0" marL="0">
+            <a:pPr marL="0" indent="0">
               <a:buNone/>
             </a:pPr>
             <a:r>
               <a:rPr lang="en-US" sz="1200" dirty="0">
                 <a:solidFill>
-                  <a:srgbClr val="CFE9DD"/>
-                </a:solidFill>
-              </a:rPr>
-              <a:t>표면 습도 · 75/70% 판정</a:t>
+                  <a:schemeClr val="tx1"/>
+                </a:solidFill>
+              </a:rPr>
+              <a:t>표면 습도 계산, 75/70% 판정</a:t>
             </a:r>
             <a:endParaRPr lang="en-US" sz="1200" dirty="0"/>
           </a:p>
           <a:p>
-            <a:pPr indent="0" marL="0">
+            <a:pPr marL="0" indent="0">
               <a:buNone/>
             </a:pPr>
             <a:r>
               <a:rPr lang="en-US" sz="1200" dirty="0">
                 <a:solidFill>
-                  <a:srgbClr val="CFE9DD"/>
-                </a:solidFill>
-              </a:rPr>
-              <a:t>학습 · 예측 · 클라우드 불필요</a:t>
+                  <a:schemeClr val="tx1"/>
+                </a:solidFill>
+              </a:rPr>
+              <a:t>학습과 예측, 클라우드 불필요</a:t>
             </a:r>
             <a:endParaRPr lang="en-US" sz="1200" dirty="0"/>
           </a:p>
@@ -3359,14 +3147,14 @@
       </p:sp>
       <p:pic>
         <p:nvPicPr>
-          <p:cNvPr id="18" name="Image 2" descr="plug">    </p:cNvPr>
+          <p:cNvPr id="18" name="Image 2" descr="plug"/>
           <p:cNvPicPr>
             <a:picLocks noChangeAspect="1"/>
           </p:cNvPicPr>
           <p:nvPr/>
         </p:nvPicPr>
         <p:blipFill>
-          <a:blip r:embed="rId3"/>
+          <a:blip r:embed="rId5"/>
           <a:stretch>
             <a:fillRect/>
           </a:stretch>
@@ -3402,7 +3190,7 @@
           <a:bodyPr wrap="square" lIns="0" tIns="0" rIns="0" bIns="0" rtlCol="0" anchor="ctr"/>
           <a:lstStyle/>
           <a:p>
-            <a:pPr indent="0" marL="0">
+            <a:pPr marL="0" indent="0">
               <a:buNone/>
             </a:pPr>
             <a:r>
@@ -3438,13 +3226,13 @@
           <a:bodyPr wrap="square" lIns="0" tIns="0" rIns="0" bIns="0" rtlCol="0" anchor="t"/>
           <a:lstStyle/>
           <a:p>
-            <a:pPr indent="0" marL="0">
+            <a:pPr marL="0" indent="0">
               <a:buNone/>
             </a:pPr>
             <a:r>
               <a:rPr lang="en-US" sz="1200" dirty="0">
                 <a:solidFill>
-                  <a:srgbClr val="6E6E73"/>
+                  <a:schemeClr val="tx1"/>
                 </a:solidFill>
               </a:rPr>
               <a:t>2채널 릴레이</a:t>
@@ -3452,30 +3240,30 @@
             <a:endParaRPr lang="en-US" sz="1200" dirty="0"/>
           </a:p>
           <a:p>
-            <a:pPr indent="0" marL="0">
+            <a:pPr marL="0" indent="0">
               <a:buNone/>
             </a:pPr>
             <a:r>
               <a:rPr lang="en-US" sz="1200" dirty="0">
                 <a:solidFill>
-                  <a:srgbClr val="6E6E73"/>
-                </a:solidFill>
-              </a:rPr>
-              <a:t>CH1 선풍기 · CH2 가습기</a:t>
+                  <a:schemeClr val="tx1"/>
+                </a:solidFill>
+              </a:rPr>
+              <a:t>CH1 선풍기, CH2 가습기</a:t>
             </a:r>
             <a:endParaRPr lang="en-US" sz="1200" dirty="0"/>
           </a:p>
           <a:p>
-            <a:pPr indent="0" marL="0">
+            <a:pPr marL="0" indent="0">
               <a:buNone/>
             </a:pPr>
             <a:r>
               <a:rPr lang="en-US" sz="1200" dirty="0">
                 <a:solidFill>
-                  <a:srgbClr val="6E6E73"/>
-                </a:solidFill>
-              </a:rPr>
-              <a:t>GPIO P1.20 · P1.21</a:t>
+                  <a:schemeClr val="tx1"/>
+                </a:solidFill>
+              </a:rPr>
+              <a:t>GPIO P1.20, P1.21</a:t>
             </a:r>
             <a:endParaRPr lang="en-US" sz="1200" dirty="0"/>
           </a:p>
@@ -3559,14 +3347,14 @@
       </p:sp>
       <p:pic>
         <p:nvPicPr>
-          <p:cNvPr id="24" name="Image 3" descr="wave">    </p:cNvPr>
+          <p:cNvPr id="24" name="Image 3" descr="wave"/>
           <p:cNvPicPr>
             <a:picLocks noChangeAspect="1"/>
           </p:cNvPicPr>
           <p:nvPr/>
         </p:nvPicPr>
         <p:blipFill>
-          <a:blip r:embed="rId4"/>
+          <a:blip r:embed="rId6"/>
           <a:stretch>
             <a:fillRect/>
           </a:stretch>
@@ -3602,7 +3390,7 @@
           <a:bodyPr wrap="square" lIns="0" tIns="0" rIns="0" bIns="0" rtlCol="0" anchor="ctr"/>
           <a:lstStyle/>
           <a:p>
-            <a:pPr indent="0" marL="0">
+            <a:pPr marL="0" indent="0">
               <a:buNone/>
             </a:pPr>
             <a:r>
@@ -3611,7 +3399,7 @@
                   <a:schemeClr val="tx1"/>
                 </a:solidFill>
               </a:rPr>
-              <a:t>노출 · Matter</a:t>
+              <a:t>노출 (Matter)</a:t>
             </a:r>
             <a:endParaRPr lang="en-US" sz="1500" dirty="0"/>
           </a:p>
@@ -3638,44 +3426,44 @@
           <a:bodyPr wrap="square" lIns="0" tIns="0" rIns="0" bIns="0" rtlCol="0" anchor="t"/>
           <a:lstStyle/>
           <a:p>
-            <a:pPr indent="0" marL="0">
+            <a:pPr marL="0" indent="0">
               <a:buNone/>
             </a:pPr>
             <a:r>
               <a:rPr lang="en-US" sz="1200" dirty="0">
                 <a:solidFill>
-                  <a:srgbClr val="6E6E73"/>
-                </a:solidFill>
-              </a:rPr>
-              <a:t>EP1 선풍기 · EP5 가습기</a:t>
+                  <a:schemeClr val="tx1"/>
+                </a:solidFill>
+              </a:rPr>
+              <a:t>EP1 선풍기, EP5 가습기</a:t>
             </a:r>
             <a:endParaRPr lang="en-US" sz="1200" dirty="0"/>
           </a:p>
           <a:p>
-            <a:pPr indent="0" marL="0">
+            <a:pPr marL="0" indent="0">
               <a:buNone/>
             </a:pPr>
             <a:r>
               <a:rPr lang="en-US" sz="1200" dirty="0">
                 <a:solidFill>
-                  <a:srgbClr val="6E6E73"/>
-                </a:solidFill>
-              </a:rPr>
-              <a:t>EP2·3 습도 · EP4 온도</a:t>
+                  <a:schemeClr val="tx1"/>
+                </a:solidFill>
+              </a:rPr>
+              <a:t>EP2, EP3 습도, EP4 온도</a:t>
             </a:r>
             <a:endParaRPr lang="en-US" sz="1200" dirty="0"/>
           </a:p>
           <a:p>
-            <a:pPr indent="0" marL="0">
+            <a:pPr marL="0" indent="0">
               <a:buNone/>
             </a:pPr>
             <a:r>
               <a:rPr lang="en-US" sz="1200" dirty="0">
                 <a:solidFill>
-                  <a:srgbClr val="6E6E73"/>
-                </a:solidFill>
-              </a:rPr>
-              <a:t>표준 클러스터</a:t>
+                  <a:schemeClr val="tx1"/>
+                </a:solidFill>
+              </a:rPr>
+              <a:t>표준 클러스터 사용</a:t>
             </a:r>
             <a:endParaRPr lang="en-US" sz="1200" dirty="0"/>
           </a:p>
@@ -3760,7 +3548,7 @@
         <p:spPr>
           <a:xfrm>
             <a:off x="2194560" y="3255264"/>
-            <a:ext cx="4389120" cy="274320"/>
+            <a:ext cx="4480560" cy="274320"/>
           </a:xfrm>
           <a:prstGeom prst="rect">
             <a:avLst/>
@@ -3772,16 +3560,16 @@
           <a:bodyPr wrap="square" lIns="0" tIns="0" rIns="0" bIns="0" rtlCol="0" anchor="t"/>
           <a:lstStyle/>
           <a:p>
-            <a:pPr indent="0" marL="0">
+            <a:pPr marL="0" indent="0">
               <a:buNone/>
             </a:pPr>
             <a:r>
               <a:rPr lang="en-US" sz="1200" dirty="0">
                 <a:solidFill>
-                  <a:schemeClr val="tx2"/>
-                </a:solidFill>
-              </a:rPr>
-              <a:t>닫힌 고리: 선풍기·가습기가 바꾼 환경이 다시 측정값으로</a:t>
+                  <a:schemeClr val="tx1"/>
+                </a:solidFill>
+              </a:rPr>
+              <a:t>닫힌 고리: 선풍기와 가습기가 바꾼 환경이 다시 측정값으로 돌아옴</a:t>
             </a:r>
             <a:endParaRPr lang="en-US" sz="1200" dirty="0"/>
           </a:p>
@@ -3816,14 +3604,14 @@
       </p:sp>
       <p:pic>
         <p:nvPicPr>
-          <p:cNvPr id="32" name="Image 4" descr="SmartThings Station">    </p:cNvPr>
+          <p:cNvPr id="32" name="Image 4" descr="SmartThings Station"/>
           <p:cNvPicPr>
             <a:picLocks noChangeAspect="1"/>
           </p:cNvPicPr>
           <p:nvPr/>
         </p:nvPicPr>
         <p:blipFill>
-          <a:blip r:embed="rId5"/>
+          <a:blip r:embed="rId7"/>
           <a:stretch>
             <a:fillRect/>
           </a:stretch>
@@ -3859,7 +3647,7 @@
           <a:bodyPr wrap="square" lIns="0" tIns="0" rIns="0" bIns="0" rtlCol="0" anchor="ctr"/>
           <a:lstStyle/>
           <a:p>
-            <a:pPr indent="0" marL="0">
+            <a:pPr marL="0" indent="0">
               <a:buNone/>
             </a:pPr>
             <a:r>
@@ -3868,21 +3656,21 @@
                   <a:schemeClr val="tx1"/>
                 </a:solidFill>
               </a:rPr>
-              <a:t>SmartThings Station · 앱</a:t>
+              <a:t>SmartThings Station과 앱</a:t>
             </a:r>
             <a:endParaRPr lang="en-US" sz="1100" dirty="0"/>
           </a:p>
           <a:p>
-            <a:pPr indent="0" marL="0">
+            <a:pPr marL="0" indent="0">
               <a:buNone/>
             </a:pPr>
             <a:r>
               <a:rPr lang="en-US" sz="1100" dirty="0">
                 <a:solidFill>
-                  <a:srgbClr val="6E6E73"/>
-                </a:solidFill>
-              </a:rPr>
-              <a:t>Thread로 보고 · 수신 확인</a:t>
+                  <a:schemeClr val="tx1"/>
+                </a:solidFill>
+              </a:rPr>
+              <a:t>Thread로 보고, 수신 확인</a:t>
             </a:r>
             <a:endParaRPr lang="en-US" sz="1100" dirty="0"/>
           </a:p>
@@ -3933,7 +3721,7 @@
           <a:bodyPr wrap="square" lIns="0" tIns="0" rIns="0" bIns="0" rtlCol="0" anchor="t"/>
           <a:lstStyle/>
           <a:p>
-            <a:pPr indent="0" marL="0">
+            <a:pPr marL="0" indent="0">
               <a:buNone/>
             </a:pPr>
             <a:r>
@@ -3942,7 +3730,7 @@
                   <a:schemeClr val="tx1"/>
                 </a:solidFill>
               </a:rPr>
-              <a:t>회로 · DK ↔ 2채널 릴레이</a:t>
+              <a:t>회로: DK ↔ 2채널 릴레이</a:t>
             </a:r>
             <a:endParaRPr lang="en-US" sz="1400" dirty="0"/>
           </a:p>
@@ -3965,9 +3753,9 @@
             </a:avLst>
           </a:prstGeom>
           <a:solidFill>
-            <a:schemeClr val="accent2"/>
+            <a:srgbClr val="FFFFFF"/>
           </a:solidFill>
-          <a:ln w="12700">
+          <a:ln w="19050">
             <a:solidFill>
               <a:srgbClr val="1D5C45"/>
             </a:solidFill>
@@ -3996,13 +3784,13 @@
           <a:bodyPr wrap="square" lIns="0" tIns="0" rIns="0" bIns="0" rtlCol="0" anchor="t"/>
           <a:lstStyle/>
           <a:p>
-            <a:pPr indent="0" marL="0">
+            <a:pPr marL="0" indent="0">
               <a:buNone/>
             </a:pPr>
             <a:r>
               <a:rPr lang="en-US" sz="1400" b="1" dirty="0">
                 <a:solidFill>
-                  <a:schemeClr val="bg1"/>
+                  <a:schemeClr val="tx1"/>
                 </a:solidFill>
               </a:rPr>
               <a:t>nRF54LM20 DK</a:t>
@@ -4032,16 +3820,16 @@
           <a:bodyPr wrap="square" lIns="0" tIns="0" rIns="0" bIns="0" rtlCol="0" anchor="t"/>
           <a:lstStyle/>
           <a:p>
-            <a:pPr indent="0" marL="0">
+            <a:pPr marL="0" indent="0">
               <a:buNone/>
             </a:pPr>
             <a:r>
               <a:rPr lang="en-US" sz="1100" dirty="0">
                 <a:solidFill>
-                  <a:srgbClr val="CFE9DD"/>
-                </a:solidFill>
-              </a:rPr>
-              <a:t>PCA10184 · nRF54LM20B</a:t>
+                  <a:schemeClr val="tx1"/>
+                </a:solidFill>
+              </a:rPr>
+              <a:t>PCA10184, nRF54LM20B</a:t>
             </a:r>
             <a:endParaRPr lang="en-US" sz="1100" dirty="0"/>
           </a:p>
@@ -4049,14 +3837,14 @@
       </p:sp>
       <p:pic>
         <p:nvPicPr>
-          <p:cNvPr id="39" name="Image 5" descr="DK">    </p:cNvPr>
+          <p:cNvPr id="39" name="Image 5" descr="DK"/>
           <p:cNvPicPr>
             <a:picLocks noChangeAspect="1"/>
           </p:cNvPicPr>
           <p:nvPr/>
         </p:nvPicPr>
         <p:blipFill>
-          <a:blip r:embed="rId6"/>
+          <a:blip r:embed="rId8"/>
           <a:stretch>
             <a:fillRect/>
           </a:stretch>
@@ -4119,7 +3907,7 @@
           <a:bodyPr wrap="square" lIns="0" tIns="0" rIns="0" bIns="0" rtlCol="0" anchor="t"/>
           <a:lstStyle/>
           <a:p>
-            <a:pPr indent="0" marL="0">
+            <a:pPr marL="0" indent="0">
               <a:buNone/>
             </a:pPr>
             <a:r>
@@ -4155,13 +3943,13 @@
           <a:bodyPr wrap="square" lIns="0" tIns="0" rIns="0" bIns="0" rtlCol="0" anchor="t"/>
           <a:lstStyle/>
           <a:p>
-            <a:pPr indent="0" marL="0">
+            <a:pPr marL="0" indent="0">
               <a:buNone/>
             </a:pPr>
             <a:r>
               <a:rPr lang="en-US" sz="1100" dirty="0">
                 <a:solidFill>
-                  <a:schemeClr val="tx2"/>
+                  <a:schemeClr val="tx1"/>
                 </a:solidFill>
               </a:rPr>
               <a:t>LOW에서 켜짐 (점퍼 L)</a:t>
@@ -4172,14 +3960,14 @@
       </p:sp>
       <p:pic>
         <p:nvPicPr>
-          <p:cNvPr id="43" name="Image 6" descr="릴레이">    </p:cNvPr>
+          <p:cNvPr id="43" name="Image 6" descr="릴레이"/>
           <p:cNvPicPr>
             <a:picLocks noChangeAspect="1"/>
           </p:cNvPicPr>
           <p:nvPr/>
         </p:nvPicPr>
         <p:blipFill>
-          <a:blip r:embed="rId7"/>
+          <a:blip r:embed="rId9"/>
           <a:stretch>
             <a:fillRect/>
           </a:stretch>
@@ -4240,13 +4028,13 @@
           <a:bodyPr wrap="square" lIns="0" tIns="0" rIns="0" bIns="0" rtlCol="0" anchor="ctr"/>
           <a:lstStyle/>
           <a:p>
-            <a:pPr indent="0" marL="0">
+            <a:pPr marL="0" indent="0">
               <a:buNone/>
             </a:pPr>
             <a:r>
               <a:rPr lang="en-US" sz="1100" dirty="0">
                 <a:solidFill>
-                  <a:srgbClr val="CFE9DD"/>
+                  <a:schemeClr val="tx1"/>
                 </a:solidFill>
               </a:rPr>
               <a:t>LED0 Matter 상태</a:t>
@@ -4303,7 +4091,7 @@
           <a:bodyPr wrap="square" lIns="0" tIns="0" rIns="0" bIns="0" rtlCol="0" anchor="ctr"/>
           <a:lstStyle/>
           <a:p>
-            <a:pPr algn="ctr" indent="0" marL="0">
+            <a:pPr marL="0" indent="0" algn="ctr">
               <a:buNone/>
             </a:pPr>
             <a:r>
@@ -4362,13 +4150,13 @@
           <a:bodyPr wrap="square" lIns="0" tIns="0" rIns="0" bIns="0" rtlCol="0" anchor="t"/>
           <a:lstStyle/>
           <a:p>
-            <a:pPr algn="ctr" indent="0" marL="0">
+            <a:pPr marL="0" indent="0" algn="ctr">
               <a:buNone/>
             </a:pPr>
             <a:r>
               <a:rPr lang="en-US" sz="1000" dirty="0">
                 <a:solidFill>
-                  <a:schemeClr val="tx2"/>
+                  <a:schemeClr val="tx1"/>
                 </a:solidFill>
               </a:rPr>
               <a:t>5V 전원</a:t>
@@ -4425,7 +4213,7 @@
           <a:bodyPr wrap="square" lIns="0" tIns="0" rIns="0" bIns="0" rtlCol="0" anchor="ctr"/>
           <a:lstStyle/>
           <a:p>
-            <a:pPr algn="ctr" indent="0" marL="0">
+            <a:pPr marL="0" indent="0" algn="ctr">
               <a:buNone/>
             </a:pPr>
             <a:r>
@@ -4486,13 +4274,13 @@
           <a:bodyPr wrap="square" lIns="0" tIns="0" rIns="0" bIns="0" rtlCol="0" anchor="ctr"/>
           <a:lstStyle/>
           <a:p>
-            <a:pPr indent="0" marL="0">
+            <a:pPr marL="0" indent="0">
               <a:buNone/>
             </a:pPr>
             <a:r>
               <a:rPr lang="en-US" sz="1100" dirty="0">
                 <a:solidFill>
-                  <a:srgbClr val="CFE9DD"/>
+                  <a:schemeClr val="tx1"/>
                 </a:solidFill>
               </a:rPr>
               <a:t>LED1 선풍기</a:t>
@@ -4549,7 +4337,7 @@
           <a:bodyPr wrap="square" lIns="0" tIns="0" rIns="0" bIns="0" rtlCol="0" anchor="ctr"/>
           <a:lstStyle/>
           <a:p>
-            <a:pPr algn="ctr" indent="0" marL="0">
+            <a:pPr marL="0" indent="0" algn="ctr">
               <a:buNone/>
             </a:pPr>
             <a:r>
@@ -4608,13 +4396,13 @@
           <a:bodyPr wrap="square" lIns="0" tIns="0" rIns="0" bIns="0" rtlCol="0" anchor="t"/>
           <a:lstStyle/>
           <a:p>
-            <a:pPr algn="ctr" indent="0" marL="0">
+            <a:pPr marL="0" indent="0" algn="ctr">
               <a:buNone/>
             </a:pPr>
             <a:r>
               <a:rPr lang="en-US" sz="1000" dirty="0">
                 <a:solidFill>
-                  <a:schemeClr val="tx2"/>
+                  <a:schemeClr val="tx1"/>
                 </a:solidFill>
               </a:rPr>
               <a:t>접지</a:t>
@@ -4671,7 +4459,7 @@
           <a:bodyPr wrap="square" lIns="0" tIns="0" rIns="0" bIns="0" rtlCol="0" anchor="ctr"/>
           <a:lstStyle/>
           <a:p>
-            <a:pPr algn="ctr" indent="0" marL="0">
+            <a:pPr marL="0" indent="0" algn="ctr">
               <a:buNone/>
             </a:pPr>
             <a:r>
@@ -4732,13 +4520,13 @@
           <a:bodyPr wrap="square" lIns="0" tIns="0" rIns="0" bIns="0" rtlCol="0" anchor="ctr"/>
           <a:lstStyle/>
           <a:p>
-            <a:pPr indent="0" marL="0">
+            <a:pPr marL="0" indent="0">
               <a:buNone/>
             </a:pPr>
             <a:r>
               <a:rPr lang="en-US" sz="1100" dirty="0">
                 <a:solidFill>
-                  <a:srgbClr val="CFE9DD"/>
+                  <a:schemeClr val="tx1"/>
                 </a:solidFill>
               </a:rPr>
               <a:t>LED2 가습기</a:t>
@@ -4795,7 +4583,7 @@
           <a:bodyPr wrap="square" lIns="0" tIns="0" rIns="0" bIns="0" rtlCol="0" anchor="ctr"/>
           <a:lstStyle/>
           <a:p>
-            <a:pPr algn="ctr" indent="0" marL="0">
+            <a:pPr marL="0" indent="0" algn="ctr">
               <a:buNone/>
             </a:pPr>
             <a:r>
@@ -4854,13 +4642,13 @@
           <a:bodyPr wrap="square" lIns="0" tIns="0" rIns="0" bIns="0" rtlCol="0" anchor="t"/>
           <a:lstStyle/>
           <a:p>
-            <a:pPr algn="ctr" indent="0" marL="0">
+            <a:pPr marL="0" indent="0" algn="ctr">
               <a:buNone/>
             </a:pPr>
             <a:r>
               <a:rPr lang="en-US" sz="1000" dirty="0">
                 <a:solidFill>
-                  <a:schemeClr val="tx2"/>
+                  <a:schemeClr val="tx1"/>
                 </a:solidFill>
               </a:rPr>
               <a:t>선풍기 신호</a:t>
@@ -4917,7 +4705,7 @@
           <a:bodyPr wrap="square" lIns="0" tIns="0" rIns="0" bIns="0" rtlCol="0" anchor="ctr"/>
           <a:lstStyle/>
           <a:p>
-            <a:pPr algn="ctr" indent="0" marL="0">
+            <a:pPr marL="0" indent="0" algn="ctr">
               <a:buNone/>
             </a:pPr>
             <a:r>
@@ -4934,14 +4722,14 @@
       </p:sp>
       <p:pic>
         <p:nvPicPr>
-          <p:cNvPr id="68" name="Image 7" descr="CH1 선풍기">    </p:cNvPr>
+          <p:cNvPr id="68" name="Image 7" descr="CH1 선풍기"/>
           <p:cNvPicPr>
             <a:picLocks noChangeAspect="1"/>
           </p:cNvPicPr>
           <p:nvPr/>
         </p:nvPicPr>
         <p:blipFill>
-          <a:blip r:embed="rId8"/>
+          <a:blip r:embed="rId10"/>
           <a:stretch>
             <a:fillRect/>
           </a:stretch>
@@ -4977,13 +4765,13 @@
           <a:bodyPr wrap="square" lIns="0" tIns="0" rIns="0" bIns="0" rtlCol="0" anchor="ctr"/>
           <a:lstStyle/>
           <a:p>
-            <a:pPr indent="0" marL="0">
+            <a:pPr marL="0" indent="0">
               <a:buNone/>
             </a:pPr>
             <a:r>
               <a:rPr lang="en-US" sz="1100" b="1" dirty="0">
                 <a:solidFill>
-                  <a:schemeClr val="accent1"/>
+                  <a:schemeClr val="tx1"/>
                 </a:solidFill>
               </a:rPr>
               <a:t>CH1 선풍기</a:t>
@@ -5038,13 +4826,13 @@
           <a:bodyPr wrap="square" lIns="0" tIns="0" rIns="0" bIns="0" rtlCol="0" anchor="ctr"/>
           <a:lstStyle/>
           <a:p>
-            <a:pPr indent="0" marL="0">
+            <a:pPr marL="0" indent="0">
               <a:buNone/>
             </a:pPr>
             <a:r>
               <a:rPr lang="en-US" sz="1100" dirty="0">
                 <a:solidFill>
-                  <a:srgbClr val="CFE9DD"/>
+                  <a:schemeClr val="tx1"/>
                 </a:solidFill>
               </a:rPr>
               <a:t>LED3 표면 80%↑</a:t>
@@ -5101,7 +4889,7 @@
           <a:bodyPr wrap="square" lIns="0" tIns="0" rIns="0" bIns="0" rtlCol="0" anchor="ctr"/>
           <a:lstStyle/>
           <a:p>
-            <a:pPr algn="ctr" indent="0" marL="0">
+            <a:pPr marL="0" indent="0" algn="ctr">
               <a:buNone/>
             </a:pPr>
             <a:r>
@@ -5160,13 +4948,13 @@
           <a:bodyPr wrap="square" lIns="0" tIns="0" rIns="0" bIns="0" rtlCol="0" anchor="t"/>
           <a:lstStyle/>
           <a:p>
-            <a:pPr algn="ctr" indent="0" marL="0">
+            <a:pPr marL="0" indent="0" algn="ctr">
               <a:buNone/>
             </a:pPr>
             <a:r>
               <a:rPr lang="en-US" sz="1000" dirty="0">
                 <a:solidFill>
-                  <a:schemeClr val="tx2"/>
+                  <a:schemeClr val="tx1"/>
                 </a:solidFill>
               </a:rPr>
               <a:t>가습기 신호</a:t>
@@ -5223,7 +5011,7 @@
           <a:bodyPr wrap="square" lIns="0" tIns="0" rIns="0" bIns="0" rtlCol="0" anchor="ctr"/>
           <a:lstStyle/>
           <a:p>
-            <a:pPr algn="ctr" indent="0" marL="0">
+            <a:pPr marL="0" indent="0" algn="ctr">
               <a:buNone/>
             </a:pPr>
             <a:r>
@@ -5240,14 +5028,14 @@
       </p:sp>
       <p:pic>
         <p:nvPicPr>
-          <p:cNvPr id="78" name="Image 8" descr="CH2 가습기">    </p:cNvPr>
+          <p:cNvPr id="78" name="Image 8" descr="CH2 가습기"/>
           <p:cNvPicPr>
             <a:picLocks noChangeAspect="1"/>
           </p:cNvPicPr>
           <p:nvPr/>
         </p:nvPicPr>
         <p:blipFill>
-          <a:blip r:embed="rId9"/>
+          <a:blip r:embed="rId11"/>
           <a:stretch>
             <a:fillRect/>
           </a:stretch>
@@ -5283,13 +5071,13 @@
           <a:bodyPr wrap="square" lIns="0" tIns="0" rIns="0" bIns="0" rtlCol="0" anchor="ctr"/>
           <a:lstStyle/>
           <a:p>
-            <a:pPr indent="0" marL="0">
+            <a:pPr marL="0" indent="0">
               <a:buNone/>
             </a:pPr>
             <a:r>
               <a:rPr lang="en-US" sz="1100" b="1" dirty="0">
                 <a:solidFill>
-                  <a:schemeClr val="accent4"/>
+                  <a:schemeClr val="tx1"/>
                 </a:solidFill>
               </a:rPr>
               <a:t>CH2 가습기</a:t>
@@ -5319,7 +5107,7 @@
           <a:bodyPr wrap="square" lIns="0" tIns="0" rIns="0" bIns="0" rtlCol="0" anchor="t"/>
           <a:lstStyle/>
           <a:p>
-            <a:pPr indent="0" marL="0">
+            <a:pPr marL="0" indent="0">
               <a:buNone/>
             </a:pPr>
             <a:r>
@@ -5361,14 +5149,14 @@
       </p:sp>
       <p:pic>
         <p:nvPicPr>
-          <p:cNvPr id="82" name="Image 9" descr="cpu">    </p:cNvPr>
+          <p:cNvPr id="82" name="Image 9" descr="cpu"/>
           <p:cNvPicPr>
             <a:picLocks noChangeAspect="1"/>
           </p:cNvPicPr>
           <p:nvPr/>
         </p:nvPicPr>
         <p:blipFill>
-          <a:blip r:embed="rId10"/>
+          <a:blip r:embed="rId4"/>
           <a:stretch>
             <a:fillRect/>
           </a:stretch>
@@ -5404,7 +5192,7 @@
           <a:bodyPr wrap="square" lIns="0" tIns="0" rIns="0" bIns="0" rtlCol="0" anchor="t"/>
           <a:lstStyle/>
           <a:p>
-            <a:pPr indent="0" marL="0">
+            <a:pPr marL="0" indent="0">
               <a:buNone/>
             </a:pPr>
             <a:r>
@@ -5418,16 +5206,16 @@
             <a:endParaRPr lang="en-US" sz="1300" dirty="0"/>
           </a:p>
           <a:p>
-            <a:pPr indent="0" marL="0">
+            <a:pPr marL="0" indent="0">
               <a:buNone/>
             </a:pPr>
             <a:r>
               <a:rPr lang="en-US" sz="1200" dirty="0">
                 <a:solidFill>
-                  <a:srgbClr val="6E6E73"/>
-                </a:solidFill>
-              </a:rPr>
-              <a:t>칩이 nRF54LM20B라 설명서의 a 타깃 대신 b로 빌드</a:t>
+                  <a:schemeClr val="tx1"/>
+                </a:solidFill>
+              </a:rPr>
+              <a:t>칩이 nRF54LM20B라 설명서의 a 타깃 대신 b로 빌드함</a:t>
             </a:r>
             <a:endParaRPr lang="en-US" sz="1300" dirty="0"/>
           </a:p>
@@ -5460,14 +5248,14 @@
       </p:sp>
       <p:pic>
         <p:nvPicPr>
-          <p:cNvPr id="85" name="Image 10" descr="plug">    </p:cNvPr>
+          <p:cNvPr id="85" name="Image 10" descr="plug"/>
           <p:cNvPicPr>
             <a:picLocks noChangeAspect="1"/>
           </p:cNvPicPr>
           <p:nvPr/>
         </p:nvPicPr>
         <p:blipFill>
-          <a:blip r:embed="rId11"/>
+          <a:blip r:embed="rId5"/>
           <a:stretch>
             <a:fillRect/>
           </a:stretch>
@@ -5503,7 +5291,7 @@
           <a:bodyPr wrap="square" lIns="0" tIns="0" rIns="0" bIns="0" rtlCol="0" anchor="t"/>
           <a:lstStyle/>
           <a:p>
-            <a:pPr indent="0" marL="0">
+            <a:pPr marL="0" indent="0">
               <a:buNone/>
             </a:pPr>
             <a:r>
@@ -5517,16 +5305,16 @@
             <a:endParaRPr lang="en-US" sz="1300" dirty="0"/>
           </a:p>
           <a:p>
-            <a:pPr indent="0" marL="0">
+            <a:pPr marL="0" indent="0">
               <a:buNone/>
             </a:pPr>
             <a:r>
               <a:rPr lang="en-US" sz="1200" dirty="0">
                 <a:solidFill>
-                  <a:srgbClr val="6E6E73"/>
-                </a:solidFill>
-              </a:rPr>
-              <a:t>P1.20 · P1.21 = GPIO_ACTIVE_LOW</a:t>
+                  <a:schemeClr val="tx1"/>
+                </a:solidFill>
+              </a:rPr>
+              <a:t>P1.20, P1.21을 GPIO_ACTIVE_LOW로 정의함</a:t>
             </a:r>
             <a:endParaRPr lang="en-US" sz="1300" dirty="0"/>
           </a:p>
@@ -5559,7 +5347,7 @@
       </p:sp>
       <p:pic>
         <p:nvPicPr>
-          <p:cNvPr id="88" name="Image 11" descr="alert">    </p:cNvPr>
+          <p:cNvPr id="88" name="Image 11" descr="alert"/>
           <p:cNvPicPr>
             <a:picLocks noChangeAspect="1"/>
           </p:cNvPicPr>
@@ -5602,7 +5390,7 @@
           <a:bodyPr wrap="square" lIns="0" tIns="0" rIns="0" bIns="0" rtlCol="0" anchor="t"/>
           <a:lstStyle/>
           <a:p>
-            <a:pPr indent="0" marL="0">
+            <a:pPr marL="0" indent="0">
               <a:buNone/>
             </a:pPr>
             <a:r>
@@ -5616,16 +5404,16 @@
             <a:endParaRPr lang="en-US" sz="1300" dirty="0"/>
           </a:p>
           <a:p>
-            <a:pPr indent="0" marL="0">
+            <a:pPr marL="0" indent="0">
               <a:buNone/>
             </a:pPr>
             <a:r>
               <a:rPr lang="en-US" sz="1200" dirty="0">
                 <a:solidFill>
-                  <a:srgbClr val="6E6E73"/>
-                </a:solidFill>
-              </a:rPr>
-              <a:t>DK의 LED0 핀과 겹쳐 오동작 → 옆 핀 P1.21로 이동</a:t>
+                  <a:schemeClr val="tx1"/>
+                </a:solidFill>
+              </a:rPr>
+              <a:t>DK의 LED0 핀과 겹쳐 오동작해 옆 핀 P1.21로 이동함</a:t>
             </a:r>
             <a:endParaRPr lang="en-US" sz="1300" dirty="0"/>
           </a:p>
@@ -5633,7 +5421,7 @@
       </p:sp>
       <p:sp>
         <p:nvSpPr>
-          <p:cNvPr id="25" name="Slide Number Placeholder 0"/>
+          <p:cNvPr id="90" name="Slide Number Placeholder 0"/>
           <p:cNvSpPr>
             <a:spLocks noGrp="1"/>
           </p:cNvSpPr>
@@ -5651,7 +5439,7 @@
           </a:prstGeom>
           <a:extLst>
             <a:ext uri="{C572A759-6A51-4108-AA02-DFA0A04FC94B}">
-              <ma14:wrappingTextBoxFlag xmlns:ma14="http://schemas.microsoft.com/office/mac/drawingml/2011/main" val="0"/>
+              <ma14:wrappingTextBoxFlag xmlns:ma14="http://schemas.microsoft.com/office/mac/drawingml/2011/main" xmlns="" val="0"/>
             </a:ext>
           </a:extLst>
         </p:spPr>
@@ -5661,7 +5449,7 @@
             <a:lvl1pPr>
               <a:defRPr sz="1000">
                 <a:solidFill>
-                  <a:schemeClr val="tx2"/>
+                  <a:schemeClr val="tx1"/>
                 </a:solidFill>
               </a:defRPr>
             </a:lvl1pPr>
@@ -5669,7 +5457,7 @@
           <a:p>
             <a:pPr algn="r"/>
             <a:fld id="{F7021451-1387-4CA6-816F-3879F97B5CBC}" type="slidenum">
-              <a:rPr b="0" lang="en-US"/>
+              <a:rPr lang="en-US" b="0"/>
               <a:t>2</a:t>
             </a:fld>
             <a:endParaRPr lang="en-US"/>
@@ -5704,9 +5492,11 @@
       <p:sp>
         <p:nvSpPr>
           <p:cNvPr id="2" name="Text 0"/>
-          <p:cNvSpPr/>
+          <p:cNvSpPr>
+            <a:spLocks noGrp="1"/>
+          </p:cNvSpPr>
           <p:nvPr>
-            <p:ph idx="100" type="body" hasCustomPrompt="1"/>
+            <p:ph type="body" idx="100" hasCustomPrompt="1"/>
           </p:nvPr>
         </p:nvSpPr>
         <p:spPr>
@@ -5724,13 +5514,13 @@
           <a:bodyPr wrap="square" lIns="0" tIns="0" rIns="0" bIns="0" rtlCol="0"/>
           <a:lstStyle/>
           <a:p>
-            <a:pPr indent="0" marL="0">
+            <a:pPr marL="0" indent="0">
               <a:buNone/>
             </a:pPr>
             <a:r>
               <a:rPr lang="en-US" sz="1300" b="1" dirty="0">
                 <a:solidFill>
-                  <a:schemeClr val="accent1"/>
+                  <a:schemeClr val="tx1"/>
                 </a:solidFill>
               </a:rPr>
               <a:t>주요 개발 내용 ② Matter SDK 활용</a:t>
@@ -5742,9 +5532,11 @@
       <p:sp>
         <p:nvSpPr>
           <p:cNvPr id="3" name="Text 0"/>
-          <p:cNvSpPr/>
+          <p:cNvSpPr>
+            <a:spLocks noGrp="1"/>
+          </p:cNvSpPr>
           <p:nvPr>
-            <p:ph idx="101" type="title" hasCustomPrompt="1"/>
+            <p:ph type="title" idx="101" hasCustomPrompt="1"/>
           </p:nvPr>
         </p:nvSpPr>
         <p:spPr>
@@ -5762,7 +5554,7 @@
           <a:bodyPr wrap="square" lIns="0" tIns="0" rIns="0" bIns="0" rtlCol="0" anchor="t"/>
           <a:lstStyle/>
           <a:p>
-            <a:pPr algn="l" indent="0" marL="0">
+            <a:pPr marL="0" indent="0" algn="l">
               <a:buNone/>
             </a:pPr>
             <a:r>
@@ -5771,7 +5563,7 @@
                   <a:schemeClr val="tx1"/>
                 </a:solidFill>
               </a:rPr>
-              <a:t>nRF Connect SDK로 노드 하나를 엔드포인트 6개로 직접 구성</a:t>
+              <a:t>nRF Connect SDK로 노드 하나를 엔드포인트 6개로 직접 구성함</a:t>
             </a:r>
             <a:endParaRPr lang="en-US" sz="3000" dirty="0"/>
           </a:p>
@@ -5793,17 +5585,41 @@
         </p:nvGraphicFramePr>
         <p:xfrm>
           <a:off x="548640" y="1371600"/>
-          <a:ext cx="6903720" cy="914400"/>
+          <a:ext cx="6903720" cy="2432304"/>
         </p:xfrm>
         <a:graphic>
           <a:graphicData uri="http://schemas.openxmlformats.org/drawingml/2006/table">
             <a:tbl>
               <a:tblPr/>
               <a:tblGrid>
-                <a:gridCol w="411480"/>
-                <a:gridCol w="2148840"/>
-                <a:gridCol w="2148840"/>
-                <a:gridCol w="2194560"/>
+                <a:gridCol w="411480">
+                  <a:extLst>
+                    <a:ext uri="{9D8B030D-6E8A-4147-A177-3AD203B41FA5}">
+                      <a16:colId xmlns:a16="http://schemas.microsoft.com/office/drawing/2014/main" val="20000"/>
+                    </a:ext>
+                  </a:extLst>
+                </a:gridCol>
+                <a:gridCol w="2148840">
+                  <a:extLst>
+                    <a:ext uri="{9D8B030D-6E8A-4147-A177-3AD203B41FA5}">
+                      <a16:colId xmlns:a16="http://schemas.microsoft.com/office/drawing/2014/main" val="20001"/>
+                    </a:ext>
+                  </a:extLst>
+                </a:gridCol>
+                <a:gridCol w="2148840">
+                  <a:extLst>
+                    <a:ext uri="{9D8B030D-6E8A-4147-A177-3AD203B41FA5}">
+                      <a16:colId xmlns:a16="http://schemas.microsoft.com/office/drawing/2014/main" val="20002"/>
+                    </a:ext>
+                  </a:extLst>
+                </a:gridCol>
+                <a:gridCol w="2194560">
+                  <a:extLst>
+                    <a:ext uri="{9D8B030D-6E8A-4147-A177-3AD203B41FA5}">
+                      <a16:colId xmlns:a16="http://schemas.microsoft.com/office/drawing/2014/main" val="20003"/>
+                    </a:ext>
+                  </a:extLst>
+                </a:gridCol>
               </a:tblGrid>
               <a:tr h="347472">
                 <a:tc>
@@ -5811,13 +5627,13 @@
                     <a:bodyPr/>
                     <a:lstStyle/>
                     <a:p>
-                      <a:pPr indent="0" marL="0">
+                      <a:pPr marL="0" indent="0" algn="ctr">
                         <a:buNone/>
                       </a:pPr>
                       <a:r>
                         <a:rPr lang="en-US" sz="1200" b="1" dirty="0">
                           <a:solidFill>
-                            <a:srgbClr val="1D1D1F"/>
+                            <a:srgbClr val="000000"/>
                           </a:solidFill>
                           <a:latin typeface="Pretendard" pitchFamily="34" charset="0"/>
                           <a:ea typeface="Pretendard" pitchFamily="34" charset="-122"/>
@@ -5832,7 +5648,7 @@
                       </a:endParaRPr>
                     </a:p>
                   </a:txBody>
-                  <a:tcPr marL="73152" marR="73152" marT="45720" marB="45720" anchor="ctr">
+                  <a:tcPr marL="73152" marR="73152" anchor="ctr">
                     <a:lnL w="9525" cap="flat" cmpd="sng" algn="ctr">
                       <a:solidFill>
                         <a:srgbClr val="E0E0E0"/>
@@ -5879,13 +5695,13 @@
                     <a:bodyPr/>
                     <a:lstStyle/>
                     <a:p>
-                      <a:pPr indent="0" marL="0">
+                      <a:pPr marL="0" indent="0" algn="ctr">
                         <a:buNone/>
                       </a:pPr>
                       <a:r>
                         <a:rPr lang="en-US" sz="1200" b="1" dirty="0">
                           <a:solidFill>
-                            <a:srgbClr val="1D1D1F"/>
+                            <a:srgbClr val="000000"/>
                           </a:solidFill>
                           <a:latin typeface="Pretendard" pitchFamily="34" charset="0"/>
                           <a:ea typeface="Pretendard" pitchFamily="34" charset="-122"/>
@@ -5900,7 +5716,7 @@
                       </a:endParaRPr>
                     </a:p>
                   </a:txBody>
-                  <a:tcPr marL="73152" marR="73152" marT="45720" marB="45720" anchor="ctr">
+                  <a:tcPr marL="73152" marR="73152" anchor="ctr">
                     <a:lnL w="9525" cap="flat" cmpd="sng" algn="ctr">
                       <a:solidFill>
                         <a:srgbClr val="E0E0E0"/>
@@ -5947,13 +5763,13 @@
                     <a:bodyPr/>
                     <a:lstStyle/>
                     <a:p>
-                      <a:pPr indent="0" marL="0">
+                      <a:pPr marL="0" indent="0" algn="ctr">
                         <a:buNone/>
                       </a:pPr>
                       <a:r>
                         <a:rPr lang="en-US" sz="1200" b="1" dirty="0">
                           <a:solidFill>
-                            <a:srgbClr val="1D1D1F"/>
+                            <a:srgbClr val="000000"/>
                           </a:solidFill>
                           <a:latin typeface="Pretendard" pitchFamily="34" charset="0"/>
                           <a:ea typeface="Pretendard" pitchFamily="34" charset="-122"/>
@@ -5968,7 +5784,7 @@
                       </a:endParaRPr>
                     </a:p>
                   </a:txBody>
-                  <a:tcPr marL="73152" marR="73152" marT="45720" marB="45720" anchor="ctr">
+                  <a:tcPr marL="73152" marR="73152" anchor="ctr">
                     <a:lnL w="9525" cap="flat" cmpd="sng" algn="ctr">
                       <a:solidFill>
                         <a:srgbClr val="E0E0E0"/>
@@ -6015,13 +5831,13 @@
                     <a:bodyPr/>
                     <a:lstStyle/>
                     <a:p>
-                      <a:pPr indent="0" marL="0">
+                      <a:pPr marL="0" indent="0" algn="ctr">
                         <a:buNone/>
                       </a:pPr>
                       <a:r>
                         <a:rPr lang="en-US" sz="1200" b="1" dirty="0">
                           <a:solidFill>
-                            <a:srgbClr val="1D1D1F"/>
+                            <a:srgbClr val="000000"/>
                           </a:solidFill>
                           <a:latin typeface="Pretendard" pitchFamily="34" charset="0"/>
                           <a:ea typeface="Pretendard" pitchFamily="34" charset="-122"/>
@@ -6036,7 +5852,7 @@
                       </a:endParaRPr>
                     </a:p>
                   </a:txBody>
-                  <a:tcPr marL="73152" marR="73152" marT="45720" marB="45720" anchor="ctr">
+                  <a:tcPr marL="73152" marR="73152" anchor="ctr">
                     <a:lnL w="9525" cap="flat" cmpd="sng" algn="ctr">
                       <a:solidFill>
                         <a:srgbClr val="E0E0E0"/>
@@ -6078,6 +5894,11 @@
                     </a:solidFill>
                   </a:tcPr>
                 </a:tc>
+                <a:extLst>
+                  <a:ext uri="{0D108BD9-81ED-4DB2-BD59-A6C34878D82A}">
+                    <a16:rowId xmlns:a16="http://schemas.microsoft.com/office/drawing/2014/main" val="10000"/>
+                  </a:ext>
+                </a:extLst>
               </a:tr>
               <a:tr h="347472">
                 <a:tc>
@@ -6085,13 +5906,13 @@
                     <a:bodyPr/>
                     <a:lstStyle/>
                     <a:p>
-                      <a:pPr indent="0" marL="0">
+                      <a:pPr marL="0" indent="0" algn="ctr">
                         <a:buNone/>
                       </a:pPr>
                       <a:r>
                         <a:rPr lang="en-US" sz="1200" dirty="0">
                           <a:solidFill>
-                            <a:srgbClr val="1D1D1F"/>
+                            <a:srgbClr val="000000"/>
                           </a:solidFill>
                           <a:latin typeface="Pretendard" pitchFamily="34" charset="0"/>
                           <a:ea typeface="Pretendard" pitchFamily="34" charset="-122"/>
@@ -6106,7 +5927,7 @@
                       </a:endParaRPr>
                     </a:p>
                   </a:txBody>
-                  <a:tcPr marL="73152" marR="73152" marT="45720" marB="45720" anchor="ctr">
+                  <a:tcPr marL="73152" marR="73152" anchor="ctr">
                     <a:lnL w="9525" cap="flat" cmpd="sng" algn="ctr">
                       <a:solidFill>
                         <a:srgbClr val="E0E0E0"/>
@@ -6150,13 +5971,13 @@
                     <a:bodyPr/>
                     <a:lstStyle/>
                     <a:p>
-                      <a:pPr indent="0" marL="0">
+                      <a:pPr marL="0" indent="0" algn="ctr">
                         <a:buNone/>
                       </a:pPr>
                       <a:r>
                         <a:rPr lang="en-US" sz="1200" dirty="0">
                           <a:solidFill>
-                            <a:srgbClr val="1D1D1F"/>
+                            <a:srgbClr val="000000"/>
                           </a:solidFill>
                           <a:latin typeface="Pretendard" pitchFamily="34" charset="0"/>
                           <a:ea typeface="Pretendard" pitchFamily="34" charset="-122"/>
@@ -6171,7 +5992,7 @@
                       </a:endParaRPr>
                     </a:p>
                   </a:txBody>
-                  <a:tcPr marL="73152" marR="73152" marT="45720" marB="45720" anchor="ctr">
+                  <a:tcPr marL="73152" marR="73152" anchor="ctr">
                     <a:lnL w="9525" cap="flat" cmpd="sng" algn="ctr">
                       <a:solidFill>
                         <a:srgbClr val="E0E0E0"/>
@@ -6215,19 +6036,19 @@
                     <a:bodyPr/>
                     <a:lstStyle/>
                     <a:p>
-                      <a:pPr indent="0" marL="0">
+                      <a:pPr marL="0" indent="0" algn="ctr">
                         <a:buNone/>
                       </a:pPr>
                       <a:r>
                         <a:rPr lang="en-US" sz="1200" dirty="0">
                           <a:solidFill>
-                            <a:srgbClr val="1D1D1F"/>
+                            <a:srgbClr val="000000"/>
                           </a:solidFill>
                           <a:latin typeface="Pretendard" pitchFamily="34" charset="0"/>
                           <a:ea typeface="Pretendard" pitchFamily="34" charset="-122"/>
                           <a:cs typeface="Pretendard" pitchFamily="34" charset="-120"/>
                         </a:rPr>
-                        <a:t>Basic Info · 커미셔닝 · Thread</a:t>
+                        <a:t>Basic Info, 커미셔닝, Thread</a:t>
                       </a:r>
                       <a:endParaRPr lang="en-US" sz="1200" dirty="0">
                         <a:latin typeface="Pretendard" charset="0"/>
@@ -6236,7 +6057,7 @@
                       </a:endParaRPr>
                     </a:p>
                   </a:txBody>
-                  <a:tcPr marL="73152" marR="73152" marT="45720" marB="45720" anchor="ctr">
+                  <a:tcPr marL="73152" marR="73152" anchor="ctr">
                     <a:lnL w="9525" cap="flat" cmpd="sng" algn="ctr">
                       <a:solidFill>
                         <a:srgbClr val="E0E0E0"/>
@@ -6280,19 +6101,19 @@
                     <a:bodyPr/>
                     <a:lstStyle/>
                     <a:p>
-                      <a:pPr indent="0" marL="0">
+                      <a:pPr marL="0" indent="0" algn="ctr">
                         <a:buNone/>
                       </a:pPr>
                       <a:r>
                         <a:rPr lang="en-US" sz="1200" dirty="0">
                           <a:solidFill>
-                            <a:srgbClr val="1D1D1F"/>
+                            <a:srgbClr val="000000"/>
                           </a:solidFill>
                           <a:latin typeface="Pretendard" pitchFamily="34" charset="0"/>
                           <a:ea typeface="Pretendard" pitchFamily="34" charset="-122"/>
                           <a:cs typeface="Pretendard" pitchFamily="34" charset="-120"/>
                         </a:rPr>
-                        <a:t>커미셔닝 · Thread 합류</a:t>
+                        <a:t>커미셔닝, Thread 합류</a:t>
                       </a:r>
                       <a:endParaRPr lang="en-US" sz="1200" dirty="0">
                         <a:latin typeface="Pretendard" charset="0"/>
@@ -6301,7 +6122,7 @@
                       </a:endParaRPr>
                     </a:p>
                   </a:txBody>
-                  <a:tcPr marL="73152" marR="73152" marT="45720" marB="45720" anchor="ctr">
+                  <a:tcPr marL="73152" marR="73152" anchor="ctr">
                     <a:lnL w="9525" cap="flat" cmpd="sng" algn="ctr">
                       <a:solidFill>
                         <a:srgbClr val="E0E0E0"/>
@@ -6340,6 +6161,11 @@
                     </a:lnB>
                   </a:tcPr>
                 </a:tc>
+                <a:extLst>
+                  <a:ext uri="{0D108BD9-81ED-4DB2-BD59-A6C34878D82A}">
+                    <a16:rowId xmlns:a16="http://schemas.microsoft.com/office/drawing/2014/main" val="10001"/>
+                  </a:ext>
+                </a:extLst>
               </a:tr>
               <a:tr h="347472">
                 <a:tc>
@@ -6347,13 +6173,13 @@
                     <a:bodyPr/>
                     <a:lstStyle/>
                     <a:p>
-                      <a:pPr indent="0" marL="0">
+                      <a:pPr marL="0" indent="0" algn="ctr">
                         <a:buNone/>
                       </a:pPr>
                       <a:r>
                         <a:rPr lang="en-US" sz="1200" dirty="0">
                           <a:solidFill>
-                            <a:srgbClr val="1D1D1F"/>
+                            <a:srgbClr val="000000"/>
                           </a:solidFill>
                           <a:latin typeface="Pretendard" pitchFamily="34" charset="0"/>
                           <a:ea typeface="Pretendard" pitchFamily="34" charset="-122"/>
@@ -6368,7 +6194,7 @@
                       </a:endParaRPr>
                     </a:p>
                   </a:txBody>
-                  <a:tcPr marL="73152" marR="73152" marT="45720" marB="45720" anchor="ctr">
+                  <a:tcPr marL="73152" marR="73152" anchor="ctr">
                     <a:lnL w="9525" cap="flat" cmpd="sng" algn="ctr">
                       <a:solidFill>
                         <a:srgbClr val="E0E0E0"/>
@@ -6412,13 +6238,13 @@
                     <a:bodyPr/>
                     <a:lstStyle/>
                     <a:p>
-                      <a:pPr indent="0" marL="0">
+                      <a:pPr marL="0" indent="0" algn="ctr">
                         <a:buNone/>
                       </a:pPr>
                       <a:r>
                         <a:rPr lang="en-US" sz="1200" dirty="0">
                           <a:solidFill>
-                            <a:srgbClr val="1D1D1F"/>
+                            <a:srgbClr val="000000"/>
                           </a:solidFill>
                           <a:latin typeface="Pretendard" pitchFamily="34" charset="0"/>
                           <a:ea typeface="Pretendard" pitchFamily="34" charset="-122"/>
@@ -6433,7 +6259,7 @@
                       </a:endParaRPr>
                     </a:p>
                   </a:txBody>
-                  <a:tcPr marL="73152" marR="73152" marT="45720" marB="45720" anchor="ctr">
+                  <a:tcPr marL="73152" marR="73152" anchor="ctr">
                     <a:lnL w="9525" cap="flat" cmpd="sng" algn="ctr">
                       <a:solidFill>
                         <a:srgbClr val="E0E0E0"/>
@@ -6477,19 +6303,19 @@
                     <a:bodyPr/>
                     <a:lstStyle/>
                     <a:p>
-                      <a:pPr indent="0" marL="0">
+                      <a:pPr marL="0" indent="0" algn="ctr">
                         <a:buNone/>
                       </a:pPr>
                       <a:r>
                         <a:rPr lang="en-US" sz="1200" dirty="0">
                           <a:solidFill>
-                            <a:srgbClr val="1D1D1F"/>
+                            <a:srgbClr val="000000"/>
                           </a:solidFill>
                           <a:latin typeface="Pretendard" pitchFamily="34" charset="0"/>
                           <a:ea typeface="Pretendard" pitchFamily="34" charset="-122"/>
                           <a:cs typeface="Pretendard" pitchFamily="34" charset="-120"/>
                         </a:rPr>
-                        <a:t>On/Off · Level · Identify</a:t>
+                        <a:t>On/Off, Level, Identify</a:t>
                       </a:r>
                       <a:endParaRPr lang="en-US" sz="1200" dirty="0">
                         <a:latin typeface="Pretendard" charset="0"/>
@@ -6498,7 +6324,7 @@
                       </a:endParaRPr>
                     </a:p>
                   </a:txBody>
-                  <a:tcPr marL="73152" marR="73152" marT="45720" marB="45720" anchor="ctr">
+                  <a:tcPr marL="73152" marR="73152" anchor="ctr">
                     <a:lnL w="9525" cap="flat" cmpd="sng" algn="ctr">
                       <a:solidFill>
                         <a:srgbClr val="E0E0E0"/>
@@ -6542,13 +6368,13 @@
                     <a:bodyPr/>
                     <a:lstStyle/>
                     <a:p>
-                      <a:pPr indent="0" marL="0">
+                      <a:pPr marL="0" indent="0" algn="ctr">
                         <a:buNone/>
                       </a:pPr>
                       <a:r>
                         <a:rPr lang="en-US" sz="1200" dirty="0">
                           <a:solidFill>
-                            <a:srgbClr val="1D1D1F"/>
+                            <a:srgbClr val="000000"/>
                           </a:solidFill>
                           <a:latin typeface="Pretendard" pitchFamily="34" charset="0"/>
                           <a:ea typeface="Pretendard" pitchFamily="34" charset="-122"/>
@@ -6563,7 +6389,7 @@
                       </a:endParaRPr>
                     </a:p>
                   </a:txBody>
-                  <a:tcPr marL="73152" marR="73152" marT="45720" marB="45720" anchor="ctr">
+                  <a:tcPr marL="73152" marR="73152" anchor="ctr">
                     <a:lnL w="9525" cap="flat" cmpd="sng" algn="ctr">
                       <a:solidFill>
                         <a:srgbClr val="E0E0E0"/>
@@ -6602,6 +6428,11 @@
                     </a:lnB>
                   </a:tcPr>
                 </a:tc>
+                <a:extLst>
+                  <a:ext uri="{0D108BD9-81ED-4DB2-BD59-A6C34878D82A}">
+                    <a16:rowId xmlns:a16="http://schemas.microsoft.com/office/drawing/2014/main" val="10002"/>
+                  </a:ext>
+                </a:extLst>
               </a:tr>
               <a:tr h="347472">
                 <a:tc>
@@ -6609,13 +6440,13 @@
                     <a:bodyPr/>
                     <a:lstStyle/>
                     <a:p>
-                      <a:pPr indent="0" marL="0">
+                      <a:pPr marL="0" indent="0" algn="ctr">
                         <a:buNone/>
                       </a:pPr>
                       <a:r>
                         <a:rPr lang="en-US" sz="1200" dirty="0">
                           <a:solidFill>
-                            <a:srgbClr val="1D1D1F"/>
+                            <a:srgbClr val="000000"/>
                           </a:solidFill>
                           <a:latin typeface="Pretendard" pitchFamily="34" charset="0"/>
                           <a:ea typeface="Pretendard" pitchFamily="34" charset="-122"/>
@@ -6630,7 +6461,7 @@
                       </a:endParaRPr>
                     </a:p>
                   </a:txBody>
-                  <a:tcPr marL="73152" marR="73152" marT="45720" marB="45720" anchor="ctr">
+                  <a:tcPr marL="73152" marR="73152" anchor="ctr">
                     <a:lnL w="9525" cap="flat" cmpd="sng" algn="ctr">
                       <a:solidFill>
                         <a:srgbClr val="E0E0E0"/>
@@ -6674,13 +6505,13 @@
                     <a:bodyPr/>
                     <a:lstStyle/>
                     <a:p>
-                      <a:pPr indent="0" marL="0">
+                      <a:pPr marL="0" indent="0" algn="ctr">
                         <a:buNone/>
                       </a:pPr>
                       <a:r>
                         <a:rPr lang="en-US" sz="1200" dirty="0">
                           <a:solidFill>
-                            <a:srgbClr val="1D1D1F"/>
+                            <a:srgbClr val="000000"/>
                           </a:solidFill>
                           <a:latin typeface="Pretendard" pitchFamily="34" charset="0"/>
                           <a:ea typeface="Pretendard" pitchFamily="34" charset="-122"/>
@@ -6695,7 +6526,7 @@
                       </a:endParaRPr>
                     </a:p>
                   </a:txBody>
-                  <a:tcPr marL="73152" marR="73152" marT="45720" marB="45720" anchor="ctr">
+                  <a:tcPr marL="73152" marR="73152" anchor="ctr">
                     <a:lnL w="9525" cap="flat" cmpd="sng" algn="ctr">
                       <a:solidFill>
                         <a:srgbClr val="E0E0E0"/>
@@ -6739,13 +6570,13 @@
                     <a:bodyPr/>
                     <a:lstStyle/>
                     <a:p>
-                      <a:pPr indent="0" marL="0">
+                      <a:pPr marL="0" indent="0" algn="ctr">
                         <a:buNone/>
                       </a:pPr>
                       <a:r>
                         <a:rPr lang="en-US" sz="1200" dirty="0">
                           <a:solidFill>
-                            <a:srgbClr val="1D1D1F"/>
+                            <a:srgbClr val="000000"/>
                           </a:solidFill>
                           <a:latin typeface="Pretendard" pitchFamily="34" charset="0"/>
                           <a:ea typeface="Pretendard" pitchFamily="34" charset="-122"/>
@@ -6760,7 +6591,7 @@
                       </a:endParaRPr>
                     </a:p>
                   </a:txBody>
-                  <a:tcPr marL="73152" marR="73152" marT="45720" marB="45720" anchor="ctr">
+                  <a:tcPr marL="73152" marR="73152" anchor="ctr">
                     <a:lnL w="9525" cap="flat" cmpd="sng" algn="ctr">
                       <a:solidFill>
                         <a:srgbClr val="E0E0E0"/>
@@ -6804,13 +6635,13 @@
                     <a:bodyPr/>
                     <a:lstStyle/>
                     <a:p>
-                      <a:pPr indent="0" marL="0">
+                      <a:pPr marL="0" indent="0" algn="ctr">
                         <a:buNone/>
                       </a:pPr>
                       <a:r>
                         <a:rPr lang="en-US" sz="1200" dirty="0">
                           <a:solidFill>
-                            <a:srgbClr val="1D1D1F"/>
+                            <a:srgbClr val="000000"/>
                           </a:solidFill>
                           <a:latin typeface="Pretendard" pitchFamily="34" charset="0"/>
                           <a:ea typeface="Pretendard" pitchFamily="34" charset="-122"/>
@@ -6825,7 +6656,7 @@
                       </a:endParaRPr>
                     </a:p>
                   </a:txBody>
-                  <a:tcPr marL="73152" marR="73152" marT="45720" marB="45720" anchor="ctr">
+                  <a:tcPr marL="73152" marR="73152" anchor="ctr">
                     <a:lnL w="9525" cap="flat" cmpd="sng" algn="ctr">
                       <a:solidFill>
                         <a:srgbClr val="E0E0E0"/>
@@ -6864,6 +6695,11 @@
                     </a:lnB>
                   </a:tcPr>
                 </a:tc>
+                <a:extLst>
+                  <a:ext uri="{0D108BD9-81ED-4DB2-BD59-A6C34878D82A}">
+                    <a16:rowId xmlns:a16="http://schemas.microsoft.com/office/drawing/2014/main" val="10003"/>
+                  </a:ext>
+                </a:extLst>
               </a:tr>
               <a:tr h="347472">
                 <a:tc>
@@ -6871,13 +6707,13 @@
                     <a:bodyPr/>
                     <a:lstStyle/>
                     <a:p>
-                      <a:pPr indent="0" marL="0">
+                      <a:pPr marL="0" indent="0" algn="ctr">
                         <a:buNone/>
                       </a:pPr>
                       <a:r>
                         <a:rPr lang="en-US" sz="1200" dirty="0">
                           <a:solidFill>
-                            <a:srgbClr val="1D1D1F"/>
+                            <a:srgbClr val="000000"/>
                           </a:solidFill>
                           <a:latin typeface="Pretendard" pitchFamily="34" charset="0"/>
                           <a:ea typeface="Pretendard" pitchFamily="34" charset="-122"/>
@@ -6892,7 +6728,7 @@
                       </a:endParaRPr>
                     </a:p>
                   </a:txBody>
-                  <a:tcPr marL="73152" marR="73152" marT="45720" marB="45720" anchor="ctr">
+                  <a:tcPr marL="73152" marR="73152" anchor="ctr">
                     <a:lnL w="9525" cap="flat" cmpd="sng" algn="ctr">
                       <a:solidFill>
                         <a:srgbClr val="E0E0E0"/>
@@ -6936,13 +6772,13 @@
                     <a:bodyPr/>
                     <a:lstStyle/>
                     <a:p>
-                      <a:pPr indent="0" marL="0">
+                      <a:pPr marL="0" indent="0" algn="ctr">
                         <a:buNone/>
                       </a:pPr>
                       <a:r>
                         <a:rPr lang="en-US" sz="1200" dirty="0">
                           <a:solidFill>
-                            <a:srgbClr val="1D1D1F"/>
+                            <a:srgbClr val="000000"/>
                           </a:solidFill>
                           <a:latin typeface="Pretendard" pitchFamily="34" charset="0"/>
                           <a:ea typeface="Pretendard" pitchFamily="34" charset="-122"/>
@@ -6957,7 +6793,7 @@
                       </a:endParaRPr>
                     </a:p>
                   </a:txBody>
-                  <a:tcPr marL="73152" marR="73152" marT="45720" marB="45720" anchor="ctr">
+                  <a:tcPr marL="73152" marR="73152" anchor="ctr">
                     <a:lnL w="9525" cap="flat" cmpd="sng" algn="ctr">
                       <a:solidFill>
                         <a:srgbClr val="E0E0E0"/>
@@ -7001,13 +6837,13 @@
                     <a:bodyPr/>
                     <a:lstStyle/>
                     <a:p>
-                      <a:pPr indent="0" marL="0">
+                      <a:pPr marL="0" indent="0" algn="ctr">
                         <a:buNone/>
                       </a:pPr>
                       <a:r>
                         <a:rPr lang="en-US" sz="1200" dirty="0">
                           <a:solidFill>
-                            <a:srgbClr val="1D1D1F"/>
+                            <a:srgbClr val="000000"/>
                           </a:solidFill>
                           <a:latin typeface="Pretendard" pitchFamily="34" charset="0"/>
                           <a:ea typeface="Pretendard" pitchFamily="34" charset="-122"/>
@@ -7022,7 +6858,7 @@
                       </a:endParaRPr>
                     </a:p>
                   </a:txBody>
-                  <a:tcPr marL="73152" marR="73152" marT="45720" marB="45720" anchor="ctr">
+                  <a:tcPr marL="73152" marR="73152" anchor="ctr">
                     <a:lnL w="9525" cap="flat" cmpd="sng" algn="ctr">
                       <a:solidFill>
                         <a:srgbClr val="E0E0E0"/>
@@ -7066,13 +6902,13 @@
                     <a:bodyPr/>
                     <a:lstStyle/>
                     <a:p>
-                      <a:pPr indent="0" marL="0">
+                      <a:pPr marL="0" indent="0" algn="ctr">
                         <a:buNone/>
                       </a:pPr>
                       <a:r>
                         <a:rPr lang="en-US" sz="1200" dirty="0">
                           <a:solidFill>
-                            <a:srgbClr val="1D1D1F"/>
+                            <a:srgbClr val="000000"/>
                           </a:solidFill>
                           <a:latin typeface="Pretendard" pitchFamily="34" charset="0"/>
                           <a:ea typeface="Pretendard" pitchFamily="34" charset="-122"/>
@@ -7087,7 +6923,7 @@
                       </a:endParaRPr>
                     </a:p>
                   </a:txBody>
-                  <a:tcPr marL="73152" marR="73152" marT="45720" marB="45720" anchor="ctr">
+                  <a:tcPr marL="73152" marR="73152" anchor="ctr">
                     <a:lnL w="9525" cap="flat" cmpd="sng" algn="ctr">
                       <a:solidFill>
                         <a:srgbClr val="E0E0E0"/>
@@ -7126,6 +6962,11 @@
                     </a:lnB>
                   </a:tcPr>
                 </a:tc>
+                <a:extLst>
+                  <a:ext uri="{0D108BD9-81ED-4DB2-BD59-A6C34878D82A}">
+                    <a16:rowId xmlns:a16="http://schemas.microsoft.com/office/drawing/2014/main" val="10004"/>
+                  </a:ext>
+                </a:extLst>
               </a:tr>
               <a:tr h="347472">
                 <a:tc>
@@ -7133,13 +6974,13 @@
                     <a:bodyPr/>
                     <a:lstStyle/>
                     <a:p>
-                      <a:pPr indent="0" marL="0">
+                      <a:pPr marL="0" indent="0" algn="ctr">
                         <a:buNone/>
                       </a:pPr>
                       <a:r>
                         <a:rPr lang="en-US" sz="1200" dirty="0">
                           <a:solidFill>
-                            <a:srgbClr val="1D1D1F"/>
+                            <a:srgbClr val="000000"/>
                           </a:solidFill>
                           <a:latin typeface="Pretendard" pitchFamily="34" charset="0"/>
                           <a:ea typeface="Pretendard" pitchFamily="34" charset="-122"/>
@@ -7154,7 +6995,7 @@
                       </a:endParaRPr>
                     </a:p>
                   </a:txBody>
-                  <a:tcPr marL="73152" marR="73152" marT="45720" marB="45720" anchor="ctr">
+                  <a:tcPr marL="73152" marR="73152" anchor="ctr">
                     <a:lnL w="9525" cap="flat" cmpd="sng" algn="ctr">
                       <a:solidFill>
                         <a:srgbClr val="E0E0E0"/>
@@ -7198,13 +7039,13 @@
                     <a:bodyPr/>
                     <a:lstStyle/>
                     <a:p>
-                      <a:pPr indent="0" marL="0">
+                      <a:pPr marL="0" indent="0" algn="ctr">
                         <a:buNone/>
                       </a:pPr>
                       <a:r>
                         <a:rPr lang="en-US" sz="1200" dirty="0">
                           <a:solidFill>
-                            <a:srgbClr val="1D1D1F"/>
+                            <a:srgbClr val="000000"/>
                           </a:solidFill>
                           <a:latin typeface="Pretendard" pitchFamily="34" charset="0"/>
                           <a:ea typeface="Pretendard" pitchFamily="34" charset="-122"/>
@@ -7219,7 +7060,7 @@
                       </a:endParaRPr>
                     </a:p>
                   </a:txBody>
-                  <a:tcPr marL="73152" marR="73152" marT="45720" marB="45720" anchor="ctr">
+                  <a:tcPr marL="73152" marR="73152" anchor="ctr">
                     <a:lnL w="9525" cap="flat" cmpd="sng" algn="ctr">
                       <a:solidFill>
                         <a:srgbClr val="E0E0E0"/>
@@ -7263,13 +7104,13 @@
                     <a:bodyPr/>
                     <a:lstStyle/>
                     <a:p>
-                      <a:pPr indent="0" marL="0">
+                      <a:pPr marL="0" indent="0" algn="ctr">
                         <a:buNone/>
                       </a:pPr>
                       <a:r>
                         <a:rPr lang="en-US" sz="1200" dirty="0">
                           <a:solidFill>
-                            <a:srgbClr val="1D1D1F"/>
+                            <a:srgbClr val="000000"/>
                           </a:solidFill>
                           <a:latin typeface="Pretendard" pitchFamily="34" charset="0"/>
                           <a:ea typeface="Pretendard" pitchFamily="34" charset="-122"/>
@@ -7284,7 +7125,7 @@
                       </a:endParaRPr>
                     </a:p>
                   </a:txBody>
-                  <a:tcPr marL="73152" marR="73152" marT="45720" marB="45720" anchor="ctr">
+                  <a:tcPr marL="73152" marR="73152" anchor="ctr">
                     <a:lnL w="9525" cap="flat" cmpd="sng" algn="ctr">
                       <a:solidFill>
                         <a:srgbClr val="E0E0E0"/>
@@ -7328,13 +7169,13 @@
                     <a:bodyPr/>
                     <a:lstStyle/>
                     <a:p>
-                      <a:pPr indent="0" marL="0">
+                      <a:pPr marL="0" indent="0" algn="ctr">
                         <a:buNone/>
                       </a:pPr>
                       <a:r>
                         <a:rPr lang="en-US" sz="1200" dirty="0">
                           <a:solidFill>
-                            <a:srgbClr val="1D1D1F"/>
+                            <a:srgbClr val="000000"/>
                           </a:solidFill>
                           <a:latin typeface="Pretendard" pitchFamily="34" charset="0"/>
                           <a:ea typeface="Pretendard" pitchFamily="34" charset="-122"/>
@@ -7349,7 +7190,7 @@
                       </a:endParaRPr>
                     </a:p>
                   </a:txBody>
-                  <a:tcPr marL="73152" marR="73152" marT="45720" marB="45720" anchor="ctr">
+                  <a:tcPr marL="73152" marR="73152" anchor="ctr">
                     <a:lnL w="9525" cap="flat" cmpd="sng" algn="ctr">
                       <a:solidFill>
                         <a:srgbClr val="E0E0E0"/>
@@ -7388,6 +7229,11 @@
                     </a:lnB>
                   </a:tcPr>
                 </a:tc>
+                <a:extLst>
+                  <a:ext uri="{0D108BD9-81ED-4DB2-BD59-A6C34878D82A}">
+                    <a16:rowId xmlns:a16="http://schemas.microsoft.com/office/drawing/2014/main" val="10005"/>
+                  </a:ext>
+                </a:extLst>
               </a:tr>
               <a:tr h="347472">
                 <a:tc>
@@ -7395,13 +7241,13 @@
                     <a:bodyPr/>
                     <a:lstStyle/>
                     <a:p>
-                      <a:pPr indent="0" marL="0">
+                      <a:pPr marL="0" indent="0" algn="ctr">
                         <a:buNone/>
                       </a:pPr>
                       <a:r>
                         <a:rPr lang="en-US" sz="1200" dirty="0">
                           <a:solidFill>
-                            <a:srgbClr val="1D1D1F"/>
+                            <a:srgbClr val="000000"/>
                           </a:solidFill>
                           <a:latin typeface="Pretendard" pitchFamily="34" charset="0"/>
                           <a:ea typeface="Pretendard" pitchFamily="34" charset="-122"/>
@@ -7416,7 +7262,7 @@
                       </a:endParaRPr>
                     </a:p>
                   </a:txBody>
-                  <a:tcPr marL="73152" marR="73152" marT="45720" marB="45720" anchor="ctr">
+                  <a:tcPr marL="73152" marR="73152" anchor="ctr">
                     <a:lnL w="9525" cap="flat" cmpd="sng" algn="ctr">
                       <a:solidFill>
                         <a:srgbClr val="E0E0E0"/>
@@ -7460,13 +7306,13 @@
                     <a:bodyPr/>
                     <a:lstStyle/>
                     <a:p>
-                      <a:pPr indent="0" marL="0">
+                      <a:pPr marL="0" indent="0" algn="ctr">
                         <a:buNone/>
                       </a:pPr>
                       <a:r>
                         <a:rPr lang="en-US" sz="1200" dirty="0">
                           <a:solidFill>
-                            <a:srgbClr val="1D1D1F"/>
+                            <a:srgbClr val="000000"/>
                           </a:solidFill>
                           <a:latin typeface="Pretendard" pitchFamily="34" charset="0"/>
                           <a:ea typeface="Pretendard" pitchFamily="34" charset="-122"/>
@@ -7481,7 +7327,7 @@
                       </a:endParaRPr>
                     </a:p>
                   </a:txBody>
-                  <a:tcPr marL="73152" marR="73152" marT="45720" marB="45720" anchor="ctr">
+                  <a:tcPr marL="73152" marR="73152" anchor="ctr">
                     <a:lnL w="9525" cap="flat" cmpd="sng" algn="ctr">
                       <a:solidFill>
                         <a:srgbClr val="E0E0E0"/>
@@ -7525,19 +7371,19 @@
                     <a:bodyPr/>
                     <a:lstStyle/>
                     <a:p>
-                      <a:pPr indent="0" marL="0">
+                      <a:pPr marL="0" indent="0" algn="ctr">
                         <a:buNone/>
                       </a:pPr>
                       <a:r>
                         <a:rPr lang="en-US" sz="1200" dirty="0">
                           <a:solidFill>
-                            <a:srgbClr val="1D1D1F"/>
+                            <a:srgbClr val="000000"/>
                           </a:solidFill>
                           <a:latin typeface="Pretendard" pitchFamily="34" charset="0"/>
                           <a:ea typeface="Pretendard" pitchFamily="34" charset="-122"/>
                           <a:cs typeface="Pretendard" pitchFamily="34" charset="-120"/>
                         </a:rPr>
-                        <a:t>On/Off · Groups</a:t>
+                        <a:t>On/Off, Groups</a:t>
                       </a:r>
                       <a:endParaRPr lang="en-US" sz="1200" dirty="0">
                         <a:latin typeface="Pretendard" charset="0"/>
@@ -7546,7 +7392,7 @@
                       </a:endParaRPr>
                     </a:p>
                   </a:txBody>
-                  <a:tcPr marL="73152" marR="73152" marT="45720" marB="45720" anchor="ctr">
+                  <a:tcPr marL="73152" marR="73152" anchor="ctr">
                     <a:lnL w="9525" cap="flat" cmpd="sng" algn="ctr">
                       <a:solidFill>
                         <a:srgbClr val="E0E0E0"/>
@@ -7590,13 +7436,13 @@
                     <a:bodyPr/>
                     <a:lstStyle/>
                     <a:p>
-                      <a:pPr indent="0" marL="0">
+                      <a:pPr marL="0" indent="0" algn="ctr">
                         <a:buNone/>
                       </a:pPr>
                       <a:r>
                         <a:rPr lang="en-US" sz="1200" dirty="0">
                           <a:solidFill>
-                            <a:srgbClr val="1D1D1F"/>
+                            <a:srgbClr val="000000"/>
                           </a:solidFill>
                           <a:latin typeface="Pretendard" pitchFamily="34" charset="0"/>
                           <a:ea typeface="Pretendard" pitchFamily="34" charset="-122"/>
@@ -7611,7 +7457,7 @@
                       </a:endParaRPr>
                     </a:p>
                   </a:txBody>
-                  <a:tcPr marL="73152" marR="73152" marT="45720" marB="45720" anchor="ctr">
+                  <a:tcPr marL="73152" marR="73152" anchor="ctr">
                     <a:lnL w="9525" cap="flat" cmpd="sng" algn="ctr">
                       <a:solidFill>
                         <a:srgbClr val="E0E0E0"/>
@@ -7650,6 +7496,11 @@
                     </a:lnB>
                   </a:tcPr>
                 </a:tc>
+                <a:extLst>
+                  <a:ext uri="{0D108BD9-81ED-4DB2-BD59-A6C34878D82A}">
+                    <a16:rowId xmlns:a16="http://schemas.microsoft.com/office/drawing/2014/main" val="10006"/>
+                  </a:ext>
+                </a:extLst>
               </a:tr>
             </a:tbl>
           </a:graphicData>
@@ -7682,14 +7533,14 @@
       </p:sp>
       <p:pic>
         <p:nvPicPr>
-          <p:cNvPr id="6" name="Image 0" descr="db">    </p:cNvPr>
+          <p:cNvPr id="6" name="Image 0" descr="db"/>
           <p:cNvPicPr>
             <a:picLocks noChangeAspect="1"/>
           </p:cNvPicPr>
           <p:nvPr/>
         </p:nvPicPr>
         <p:blipFill>
-          <a:blip r:embed="rId1"/>
+          <a:blip r:embed="rId3"/>
           <a:stretch>
             <a:fillRect/>
           </a:stretch>
@@ -7725,7 +7576,7 @@
           <a:bodyPr wrap="square" lIns="0" tIns="0" rIns="0" bIns="0" rtlCol="0" anchor="t"/>
           <a:lstStyle/>
           <a:p>
-            <a:pPr indent="0" marL="0">
+            <a:pPr marL="0" indent="0">
               <a:buNone/>
             </a:pPr>
             <a:r>
@@ -7739,16 +7590,16 @@
             <a:endParaRPr lang="en-US" sz="1300" dirty="0"/>
           </a:p>
           <a:p>
-            <a:pPr indent="0" marL="0">
+            <a:pPr marL="0" indent="0">
               <a:buNone/>
             </a:pPr>
             <a:r>
               <a:rPr lang="en-US" sz="1200" dirty="0">
                 <a:solidFill>
-                  <a:srgbClr val="6E6E73"/>
-                </a:solidFill>
-              </a:rPr>
-              <a:t>light_bulb.zap에 EP2~EP5 추가 → west zap-generate</a:t>
+                  <a:schemeClr val="tx1"/>
+                </a:solidFill>
+              </a:rPr>
+              <a:t>light_bulb.zap에 EP2~EP5를 추가하고 west zap-generate로 생성함</a:t>
             </a:r>
             <a:endParaRPr lang="en-US" sz="1300" dirty="0"/>
           </a:p>
@@ -7781,14 +7632,14 @@
       </p:sp>
       <p:pic>
         <p:nvPicPr>
-          <p:cNvPr id="9" name="Image 1" descr="upload">    </p:cNvPr>
+          <p:cNvPr id="9" name="Image 1" descr="upload"/>
           <p:cNvPicPr>
             <a:picLocks noChangeAspect="1"/>
           </p:cNvPicPr>
           <p:nvPr/>
         </p:nvPicPr>
         <p:blipFill>
-          <a:blip r:embed="rId2"/>
+          <a:blip r:embed="rId4"/>
           <a:stretch>
             <a:fillRect/>
           </a:stretch>
@@ -7824,7 +7675,7 @@
           <a:bodyPr wrap="square" lIns="0" tIns="0" rIns="0" bIns="0" rtlCol="0" anchor="t"/>
           <a:lstStyle/>
           <a:p>
-            <a:pPr indent="0" marL="0">
+            <a:pPr marL="0" indent="0">
               <a:buNone/>
             </a:pPr>
             <a:r>
@@ -7838,16 +7689,16 @@
             <a:endParaRPr lang="en-US" sz="1300" dirty="0"/>
           </a:p>
           <a:p>
-            <a:pPr indent="0" marL="0">
+            <a:pPr marL="0" indent="0">
               <a:buNone/>
             </a:pPr>
             <a:r>
               <a:rPr lang="en-US" sz="1200" dirty="0">
                 <a:solidFill>
-                  <a:srgbClr val="6E6E73"/>
-                </a:solidFill>
-              </a:rPr>
-              <a:t>Accessors로 값 설정, ScheduleWork로 Matter 스레드에서 실행 → 허브에 ReportData</a:t>
+                  <a:schemeClr val="tx1"/>
+                </a:solidFill>
+              </a:rPr>
+              <a:t>Accessors로 값 설정, ScheduleWork로 Matter 스레드에서 실행, 허브에 ReportData 전송함</a:t>
             </a:r>
             <a:endParaRPr lang="en-US" sz="1300" dirty="0"/>
           </a:p>
@@ -7880,14 +7731,14 @@
       </p:sp>
       <p:pic>
         <p:nvPicPr>
-          <p:cNvPr id="12" name="Image 2" descr="hand">    </p:cNvPr>
+          <p:cNvPr id="12" name="Image 2" descr="hand"/>
           <p:cNvPicPr>
             <a:picLocks noChangeAspect="1"/>
           </p:cNvPicPr>
           <p:nvPr/>
         </p:nvPicPr>
         <p:blipFill>
-          <a:blip r:embed="rId3"/>
+          <a:blip r:embed="rId5"/>
           <a:stretch>
             <a:fillRect/>
           </a:stretch>
@@ -7923,7 +7774,7 @@
           <a:bodyPr wrap="square" lIns="0" tIns="0" rIns="0" bIns="0" rtlCol="0" anchor="t"/>
           <a:lstStyle/>
           <a:p>
-            <a:pPr indent="0" marL="0">
+            <a:pPr marL="0" indent="0">
               <a:buNone/>
             </a:pPr>
             <a:r>
@@ -7937,16 +7788,16 @@
             <a:endParaRPr lang="en-US" sz="1300" dirty="0"/>
           </a:p>
           <a:p>
-            <a:pPr indent="0" marL="0">
+            <a:pPr marL="0" indent="0">
               <a:buNone/>
             </a:pPr>
             <a:r>
               <a:rPr lang="en-US" sz="1200" dirty="0">
                 <a:solidFill>
-                  <a:srgbClr val="6E6E73"/>
-                </a:solidFill>
-              </a:rPr>
-              <a:t>MatterPostAttributeChangeCallback → 릴레이 구동 + 판단부 반영</a:t>
+                  <a:schemeClr val="tx1"/>
+                </a:solidFill>
+              </a:rPr>
+              <a:t>MatterPostAttributeChangeCallback으로 받아 릴레이 구동과 판단부에 반영함</a:t>
             </a:r>
             <a:endParaRPr lang="en-US" sz="1300" dirty="0"/>
           </a:p>
@@ -7979,14 +7830,14 @@
       </p:sp>
       <p:pic>
         <p:nvPicPr>
-          <p:cNvPr id="15" name="Image 3" descr="qr">    </p:cNvPr>
+          <p:cNvPr id="15" name="Image 3" descr="qr"/>
           <p:cNvPicPr>
             <a:picLocks noChangeAspect="1"/>
           </p:cNvPicPr>
           <p:nvPr/>
         </p:nvPicPr>
         <p:blipFill>
-          <a:blip r:embed="rId4"/>
+          <a:blip r:embed="rId6"/>
           <a:stretch>
             <a:fillRect/>
           </a:stretch>
@@ -8022,7 +7873,7 @@
           <a:bodyPr wrap="square" lIns="0" tIns="0" rIns="0" bIns="0" rtlCol="0" anchor="t"/>
           <a:lstStyle/>
           <a:p>
-            <a:pPr indent="0" marL="0">
+            <a:pPr marL="0" indent="0">
               <a:buNone/>
             </a:pPr>
             <a:r>
@@ -8036,16 +7887,16 @@
             <a:endParaRPr lang="en-US" sz="1300" dirty="0"/>
           </a:p>
           <a:p>
-            <a:pPr indent="0" marL="0">
+            <a:pPr marL="0" indent="0">
               <a:buNone/>
             </a:pPr>
             <a:r>
               <a:rPr lang="en-US" sz="1200" dirty="0">
                 <a:solidFill>
-                  <a:srgbClr val="6E6E73"/>
-                </a:solidFill>
-              </a:rPr>
-              <a:t>공장 데이터 + BLE로 SmartThings 등록 → Thread 네트워크 합류</a:t>
+                  <a:schemeClr val="tx1"/>
+                </a:solidFill>
+              </a:rPr>
+              <a:t>공장 데이터와 BLE로 SmartThings에 등록하고 Thread 네트워크에 합류함</a:t>
             </a:r>
             <a:endParaRPr lang="en-US" sz="1300" dirty="0"/>
           </a:p>
@@ -8080,163 +7931,7 @@
       </p:sp>
       <p:pic>
         <p:nvPicPr>
-          <p:cNvPr id="18" name="Image 4" descr="SmartThings 앱에 등록된 노드">    </p:cNvPr>
-          <p:cNvPicPr>
-            <a:picLocks noChangeAspect="1"/>
-          </p:cNvPicPr>
-          <p:nvPr/>
-        </p:nvPicPr>
-        <p:blipFill>
-          <a:blip r:embed="rId5"/>
-          <a:stretch>
-            <a:fillRect/>
-          </a:stretch>
-        </p:blipFill>
-        <p:spPr>
-          <a:xfrm>
-            <a:off x="8001000" y="1554480"/>
-            <a:ext cx="1600200" cy="3467100"/>
-          </a:xfrm>
-          <a:prstGeom prst="rect">
-            <a:avLst/>
-          </a:prstGeom>
-        </p:spPr>
-      </p:pic>
-      <p:sp>
-        <p:nvSpPr>
-          <p:cNvPr id="19" name="Text 11"/>
-          <p:cNvSpPr txBox="1"/>
-          <p:nvPr/>
-        </p:nvSpPr>
-        <p:spPr>
-          <a:xfrm>
-            <a:off x="8001000" y="5074920"/>
-            <a:ext cx="1737360" cy="274320"/>
-          </a:xfrm>
-          <a:prstGeom prst="rect">
-            <a:avLst/>
-          </a:prstGeom>
-          <a:noFill/>
-          <a:ln/>
-        </p:spPr>
-        <p:txBody>
-          <a:bodyPr wrap="square" lIns="0" tIns="0" rIns="0" bIns="0" rtlCol="0" anchor="t"/>
-          <a:lstStyle/>
-          <a:p>
-            <a:pPr indent="0" marL="0">
-              <a:buNone/>
-            </a:pPr>
-            <a:r>
-              <a:rPr lang="en-US" sz="1100" dirty="0">
-                <a:solidFill>
-                  <a:schemeClr val="tx2"/>
-                </a:solidFill>
-              </a:rPr>
-              <a:t>SmartThings 등록 화면</a:t>
-            </a:r>
-            <a:endParaRPr lang="en-US" sz="1100" dirty="0"/>
-          </a:p>
-        </p:txBody>
-      </p:sp>
-      <p:pic>
-        <p:nvPicPr>
-          <p:cNvPr id="20" name="Image 5" descr="wave">    </p:cNvPr>
-          <p:cNvPicPr>
-            <a:picLocks noChangeAspect="1"/>
-          </p:cNvPicPr>
-          <p:nvPr/>
-        </p:nvPicPr>
-        <p:blipFill>
-          <a:blip r:embed="rId6"/>
-          <a:stretch>
-            <a:fillRect/>
-          </a:stretch>
-        </p:blipFill>
-        <p:spPr>
-          <a:xfrm>
-            <a:off x="9802368" y="1655064"/>
-            <a:ext cx="310896" cy="310896"/>
-          </a:xfrm>
-          <a:prstGeom prst="rect">
-            <a:avLst/>
-          </a:prstGeom>
-        </p:spPr>
-      </p:pic>
-      <p:sp>
-        <p:nvSpPr>
-          <p:cNvPr id="21" name="Text 12"/>
-          <p:cNvSpPr txBox="1"/>
-          <p:nvPr/>
-        </p:nvSpPr>
-        <p:spPr>
-          <a:xfrm>
-            <a:off x="10168128" y="1600200"/>
-            <a:ext cx="1417320" cy="438912"/>
-          </a:xfrm>
-          <a:prstGeom prst="rect">
-            <a:avLst/>
-          </a:prstGeom>
-          <a:noFill/>
-          <a:ln/>
-        </p:spPr>
-        <p:txBody>
-          <a:bodyPr wrap="square" lIns="0" tIns="0" rIns="0" bIns="0" rtlCol="0" anchor="t"/>
-          <a:lstStyle/>
-          <a:p>
-            <a:pPr indent="0" marL="0">
-              <a:buNone/>
-            </a:pPr>
-            <a:r>
-              <a:rPr lang="en-US" sz="2200" b="1" dirty="0">
-                <a:solidFill>
-                  <a:schemeClr val="accent1"/>
-                </a:solidFill>
-              </a:rPr>
-              <a:t>13 / 13</a:t>
-            </a:r>
-            <a:endParaRPr lang="en-US" sz="2200" dirty="0"/>
-          </a:p>
-        </p:txBody>
-      </p:sp>
-      <p:sp>
-        <p:nvSpPr>
-          <p:cNvPr id="22" name="Text 13"/>
-          <p:cNvSpPr txBox="1"/>
-          <p:nvPr/>
-        </p:nvSpPr>
-        <p:spPr>
-          <a:xfrm>
-            <a:off x="9802368" y="2057400"/>
-            <a:ext cx="1783080" cy="457200"/>
-          </a:xfrm>
-          <a:prstGeom prst="rect">
-            <a:avLst/>
-          </a:prstGeom>
-          <a:noFill/>
-          <a:ln/>
-        </p:spPr>
-        <p:txBody>
-          <a:bodyPr wrap="square" lIns="0" tIns="0" rIns="0" bIns="0" rtlCol="0" anchor="t"/>
-          <a:lstStyle/>
-          <a:p>
-            <a:pPr indent="0" marL="0">
-              <a:buNone/>
-            </a:pPr>
-            <a:r>
-              <a:rPr lang="en-US" sz="1100" dirty="0">
-                <a:solidFill>
-                  <a:schemeClr val="tx2"/>
-                </a:solidFill>
-              </a:rPr>
-              <a:t>허브 보고 / 수신 확인 (시연 1회)</a:t>
-            </a:r>
-            <a:endParaRPr lang="en-US" sz="1100" dirty="0"/>
-          </a:p>
-        </p:txBody>
-      </p:sp>
-      <p:pic>
-        <p:nvPicPr>
-          <p:cNvPr id="23" name="Image 6" descr="chart">    </p:cNvPr>
+          <p:cNvPr id="18" name="Image 4" descr="SmartThings 앱에 등록된 노드"/>
           <p:cNvPicPr>
             <a:picLocks noChangeAspect="1"/>
           </p:cNvPicPr>
@@ -8250,8 +7945,8 @@
         </p:blipFill>
         <p:spPr>
           <a:xfrm>
-            <a:off x="9802368" y="2660904"/>
-            <a:ext cx="310896" cy="310896"/>
+            <a:off x="8001000" y="1554480"/>
+            <a:ext cx="1600200" cy="3467100"/>
           </a:xfrm>
           <a:prstGeom prst="rect">
             <a:avLst/>
@@ -8260,14 +7955,14 @@
       </p:pic>
       <p:sp>
         <p:nvSpPr>
-          <p:cNvPr id="24" name="Text 14"/>
+          <p:cNvPr id="19" name="Text 11"/>
           <p:cNvSpPr txBox="1"/>
           <p:nvPr/>
         </p:nvSpPr>
         <p:spPr>
           <a:xfrm>
-            <a:off x="10168128" y="2606040"/>
-            <a:ext cx="1417320" cy="438912"/>
+            <a:off x="8001000" y="5074920"/>
+            <a:ext cx="1737360" cy="274320"/>
           </a:xfrm>
           <a:prstGeom prst="rect">
             <a:avLst/>
@@ -8279,52 +7974,16 @@
           <a:bodyPr wrap="square" lIns="0" tIns="0" rIns="0" bIns="0" rtlCol="0" anchor="t"/>
           <a:lstStyle/>
           <a:p>
-            <a:pPr indent="0" marL="0">
-              <a:buNone/>
-            </a:pPr>
-            <a:r>
-              <a:rPr lang="en-US" sz="2200" b="1" dirty="0">
-                <a:solidFill>
-                  <a:schemeClr val="accent1"/>
-                </a:solidFill>
-              </a:rPr>
-              <a:t>92 ms</a:t>
-            </a:r>
-            <a:endParaRPr lang="en-US" sz="2200" dirty="0"/>
-          </a:p>
-        </p:txBody>
-      </p:sp>
-      <p:sp>
-        <p:nvSpPr>
-          <p:cNvPr id="25" name="Text 15"/>
-          <p:cNvSpPr txBox="1"/>
-          <p:nvPr/>
-        </p:nvSpPr>
-        <p:spPr>
-          <a:xfrm>
-            <a:off x="9802368" y="3063240"/>
-            <a:ext cx="1783080" cy="457200"/>
-          </a:xfrm>
-          <a:prstGeom prst="rect">
-            <a:avLst/>
-          </a:prstGeom>
-          <a:noFill/>
-          <a:ln/>
-        </p:spPr>
-        <p:txBody>
-          <a:bodyPr wrap="square" lIns="0" tIns="0" rIns="0" bIns="0" rtlCol="0" anchor="t"/>
-          <a:lstStyle/>
-          <a:p>
-            <a:pPr indent="0" marL="0">
+            <a:pPr marL="0" indent="0">
               <a:buNone/>
             </a:pPr>
             <a:r>
               <a:rPr lang="en-US" sz="1100" dirty="0">
                 <a:solidFill>
-                  <a:schemeClr val="tx2"/>
-                </a:solidFill>
-              </a:rPr>
-              <a:t>보고 → 허브 응답 (평균)</a:t>
+                  <a:schemeClr val="tx1"/>
+                </a:solidFill>
+              </a:rPr>
+              <a:t>SmartThings 등록 화면</a:t>
             </a:r>
             <a:endParaRPr lang="en-US" sz="1100" dirty="0"/>
           </a:p>
@@ -8332,7 +7991,7 @@
       </p:sp>
       <p:pic>
         <p:nvPicPr>
-          <p:cNvPr id="26" name="Image 7" descr="cpu">    </p:cNvPr>
+          <p:cNvPr id="20" name="Image 5" descr="wave"/>
           <p:cNvPicPr>
             <a:picLocks noChangeAspect="1"/>
           </p:cNvPicPr>
@@ -8346,7 +8005,7 @@
         </p:blipFill>
         <p:spPr>
           <a:xfrm>
-            <a:off x="9802368" y="3666744"/>
+            <a:off x="9802368" y="1655064"/>
             <a:ext cx="310896" cy="310896"/>
           </a:xfrm>
           <a:prstGeom prst="rect">
@@ -8356,13 +8015,13 @@
       </p:pic>
       <p:sp>
         <p:nvSpPr>
-          <p:cNvPr id="27" name="Text 16"/>
+          <p:cNvPr id="21" name="Text 12"/>
           <p:cNvSpPr txBox="1"/>
           <p:nvPr/>
         </p:nvSpPr>
         <p:spPr>
           <a:xfrm>
-            <a:off x="10168128" y="3611880"/>
+            <a:off x="10168128" y="1600200"/>
             <a:ext cx="1417320" cy="438912"/>
           </a:xfrm>
           <a:prstGeom prst="rect">
@@ -8375,16 +8034,16 @@
           <a:bodyPr wrap="square" lIns="0" tIns="0" rIns="0" bIns="0" rtlCol="0" anchor="t"/>
           <a:lstStyle/>
           <a:p>
-            <a:pPr indent="0" marL="0">
+            <a:pPr marL="0" indent="0">
               <a:buNone/>
             </a:pPr>
             <a:r>
               <a:rPr lang="en-US" sz="2200" b="1" dirty="0">
                 <a:solidFill>
-                  <a:schemeClr val="accent1"/>
-                </a:solidFill>
-              </a:rPr>
-              <a:t>42%</a:t>
+                  <a:schemeClr val="tx1"/>
+                </a:solidFill>
+              </a:rPr>
+              <a:t>11 / 11</a:t>
             </a:r>
             <a:endParaRPr lang="en-US" sz="2200" dirty="0"/>
           </a:p>
@@ -8392,13 +8051,13 @@
       </p:sp>
       <p:sp>
         <p:nvSpPr>
-          <p:cNvPr id="28" name="Text 17"/>
+          <p:cNvPr id="22" name="Text 13"/>
           <p:cNvSpPr txBox="1"/>
           <p:nvPr/>
         </p:nvSpPr>
         <p:spPr>
           <a:xfrm>
-            <a:off x="9802368" y="4069080"/>
+            <a:off x="9802368" y="2057400"/>
             <a:ext cx="1783080" cy="457200"/>
           </a:xfrm>
           <a:prstGeom prst="rect">
@@ -8411,16 +8070,16 @@
           <a:bodyPr wrap="square" lIns="0" tIns="0" rIns="0" bIns="0" rtlCol="0" anchor="t"/>
           <a:lstStyle/>
           <a:p>
-            <a:pPr indent="0" marL="0">
+            <a:pPr marL="0" indent="0">
               <a:buNone/>
             </a:pPr>
             <a:r>
               <a:rPr lang="en-US" sz="1100" dirty="0">
                 <a:solidFill>
-                  <a:schemeClr val="tx2"/>
-                </a:solidFill>
-              </a:rPr>
-              <a:t>Flash 사용 (RAM 36%)</a:t>
+                  <a:schemeClr val="tx1"/>
+                </a:solidFill>
+              </a:rPr>
+              <a:t>허브 보고 / 수신 확인 (시연 1회)</a:t>
             </a:r>
             <a:endParaRPr lang="en-US" sz="1100" dirty="0"/>
           </a:p>
@@ -8428,7 +8087,7 @@
       </p:sp>
       <p:pic>
         <p:nvPicPr>
-          <p:cNvPr id="29" name="Image 8" descr="db">    </p:cNvPr>
+          <p:cNvPr id="23" name="Image 6" descr="chart"/>
           <p:cNvPicPr>
             <a:picLocks noChangeAspect="1"/>
           </p:cNvPicPr>
@@ -8442,7 +8101,7 @@
         </p:blipFill>
         <p:spPr>
           <a:xfrm>
-            <a:off x="9802368" y="4672584"/>
+            <a:off x="9802368" y="2660904"/>
             <a:ext cx="310896" cy="310896"/>
           </a:xfrm>
           <a:prstGeom prst="rect">
@@ -8452,13 +8111,13 @@
       </p:pic>
       <p:sp>
         <p:nvSpPr>
-          <p:cNvPr id="30" name="Text 18"/>
+          <p:cNvPr id="24" name="Text 14"/>
           <p:cNvSpPr txBox="1"/>
           <p:nvPr/>
         </p:nvSpPr>
         <p:spPr>
           <a:xfrm>
-            <a:off x="10168128" y="4617720"/>
+            <a:off x="10168128" y="2606040"/>
             <a:ext cx="1417320" cy="438912"/>
           </a:xfrm>
           <a:prstGeom prst="rect">
@@ -8471,16 +8130,16 @@
           <a:bodyPr wrap="square" lIns="0" tIns="0" rIns="0" bIns="0" rtlCol="0" anchor="t"/>
           <a:lstStyle/>
           <a:p>
-            <a:pPr indent="0" marL="0">
+            <a:pPr marL="0" indent="0">
               <a:buNone/>
             </a:pPr>
             <a:r>
               <a:rPr lang="en-US" sz="2200" b="1" dirty="0">
                 <a:solidFill>
-                  <a:schemeClr val="accent1"/>
-                </a:solidFill>
-              </a:rPr>
-              <a:t>v3.4.1</a:t>
+                  <a:schemeClr val="tx1"/>
+                </a:solidFill>
+              </a:rPr>
+              <a:t>92 ms</a:t>
             </a:r>
             <a:endParaRPr lang="en-US" sz="2200" dirty="0"/>
           </a:p>
@@ -8488,13 +8147,13 @@
       </p:sp>
       <p:sp>
         <p:nvSpPr>
-          <p:cNvPr id="31" name="Text 19"/>
+          <p:cNvPr id="25" name="Text 15"/>
           <p:cNvSpPr txBox="1"/>
           <p:nvPr/>
         </p:nvSpPr>
         <p:spPr>
           <a:xfrm>
-            <a:off x="9802368" y="5074920"/>
+            <a:off x="9802368" y="3063240"/>
             <a:ext cx="1783080" cy="457200"/>
           </a:xfrm>
           <a:prstGeom prst="rect">
@@ -8507,31 +8166,55 @@
           <a:bodyPr wrap="square" lIns="0" tIns="0" rIns="0" bIns="0" rtlCol="0" anchor="t"/>
           <a:lstStyle/>
           <a:p>
-            <a:pPr indent="0" marL="0">
+            <a:pPr marL="0" indent="0">
               <a:buNone/>
             </a:pPr>
             <a:r>
               <a:rPr lang="en-US" sz="1100" dirty="0">
                 <a:solidFill>
-                  <a:schemeClr val="tx2"/>
-                </a:solidFill>
-              </a:rPr>
-              <a:t>nRF Connect SDK</a:t>
+                  <a:schemeClr val="tx1"/>
+                </a:solidFill>
+              </a:rPr>
+              <a:t>보고 후 허브 응답 (평균)</a:t>
             </a:r>
             <a:endParaRPr lang="en-US" sz="1100" dirty="0"/>
           </a:p>
         </p:txBody>
       </p:sp>
-      <p:sp>
-        <p:nvSpPr>
-          <p:cNvPr id="32" name="Text 20"/>
+      <p:pic>
+        <p:nvPicPr>
+          <p:cNvPr id="26" name="Image 7" descr="cpu"/>
+          <p:cNvPicPr>
+            <a:picLocks noChangeAspect="1"/>
+          </p:cNvPicPr>
+          <p:nvPr/>
+        </p:nvPicPr>
+        <p:blipFill>
+          <a:blip r:embed="rId10"/>
+          <a:stretch>
+            <a:fillRect/>
+          </a:stretch>
+        </p:blipFill>
+        <p:spPr>
+          <a:xfrm>
+            <a:off x="9802368" y="3666744"/>
+            <a:ext cx="310896" cy="310896"/>
+          </a:xfrm>
+          <a:prstGeom prst="rect">
+            <a:avLst/>
+          </a:prstGeom>
+        </p:spPr>
+      </p:pic>
+      <p:sp>
+        <p:nvSpPr>
+          <p:cNvPr id="27" name="Text 16"/>
           <p:cNvSpPr txBox="1"/>
           <p:nvPr/>
         </p:nvSpPr>
         <p:spPr>
           <a:xfrm>
-            <a:off x="8001000" y="5486400"/>
-            <a:ext cx="3520440" cy="640080"/>
+            <a:off x="10168128" y="3611880"/>
+            <a:ext cx="1417320" cy="438912"/>
           </a:xfrm>
           <a:prstGeom prst="rect">
             <a:avLst/>
@@ -8543,24 +8226,220 @@
           <a:bodyPr wrap="square" lIns="0" tIns="0" rIns="0" bIns="0" rtlCol="0" anchor="t"/>
           <a:lstStyle/>
           <a:p>
-            <a:pPr indent="0" marL="0">
+            <a:pPr marL="0" indent="0">
+              <a:buNone/>
+            </a:pPr>
+            <a:r>
+              <a:rPr lang="en-US" sz="2200" b="1" dirty="0">
+                <a:solidFill>
+                  <a:schemeClr val="tx1"/>
+                </a:solidFill>
+              </a:rPr>
+              <a:t>42%</a:t>
+            </a:r>
+            <a:endParaRPr lang="en-US" sz="2200" dirty="0"/>
+          </a:p>
+        </p:txBody>
+      </p:sp>
+      <p:sp>
+        <p:nvSpPr>
+          <p:cNvPr id="28" name="Text 17"/>
+          <p:cNvSpPr txBox="1"/>
+          <p:nvPr/>
+        </p:nvSpPr>
+        <p:spPr>
+          <a:xfrm>
+            <a:off x="9802368" y="4069080"/>
+            <a:ext cx="1783080" cy="457200"/>
+          </a:xfrm>
+          <a:prstGeom prst="rect">
+            <a:avLst/>
+          </a:prstGeom>
+          <a:noFill/>
+          <a:ln/>
+        </p:spPr>
+        <p:txBody>
+          <a:bodyPr wrap="square" lIns="0" tIns="0" rIns="0" bIns="0" rtlCol="0" anchor="t"/>
+          <a:lstStyle/>
+          <a:p>
+            <a:pPr marL="0" indent="0">
               <a:buNone/>
             </a:pPr>
             <a:r>
               <a:rPr lang="en-US" sz="1100" dirty="0">
                 <a:solidFill>
-                  <a:schemeClr val="tx2"/>
-                </a:solidFill>
-              </a:rPr>
-              <a:t>SmartThings 앱은 스위치와 센서가 섞인 기기에서 센서 엔드포인트를 표시하지 않아, EP2~EP4 값은 시연 화면에서 함께 보여줍니다.</a:t>
+                  <a:schemeClr val="tx1"/>
+                </a:solidFill>
+              </a:rPr>
+              <a:t>Flash 사용 (RAM 36%)</a:t>
             </a:r>
             <a:endParaRPr lang="en-US" sz="1100" dirty="0"/>
           </a:p>
         </p:txBody>
       </p:sp>
-      <p:sp>
-        <p:nvSpPr>
-          <p:cNvPr id="25" name="Slide Number Placeholder 0"/>
+      <p:pic>
+        <p:nvPicPr>
+          <p:cNvPr id="29" name="Image 8" descr="db"/>
+          <p:cNvPicPr>
+            <a:picLocks noChangeAspect="1"/>
+          </p:cNvPicPr>
+          <p:nvPr/>
+        </p:nvPicPr>
+        <p:blipFill>
+          <a:blip r:embed="rId11"/>
+          <a:stretch>
+            <a:fillRect/>
+          </a:stretch>
+        </p:blipFill>
+        <p:spPr>
+          <a:xfrm>
+            <a:off x="9802368" y="4672584"/>
+            <a:ext cx="310896" cy="310896"/>
+          </a:xfrm>
+          <a:prstGeom prst="rect">
+            <a:avLst/>
+          </a:prstGeom>
+        </p:spPr>
+      </p:pic>
+      <p:sp>
+        <p:nvSpPr>
+          <p:cNvPr id="30" name="Text 18"/>
+          <p:cNvSpPr txBox="1"/>
+          <p:nvPr/>
+        </p:nvSpPr>
+        <p:spPr>
+          <a:xfrm>
+            <a:off x="10168128" y="4617720"/>
+            <a:ext cx="1417320" cy="438912"/>
+          </a:xfrm>
+          <a:prstGeom prst="rect">
+            <a:avLst/>
+          </a:prstGeom>
+          <a:noFill/>
+          <a:ln/>
+        </p:spPr>
+        <p:txBody>
+          <a:bodyPr wrap="square" lIns="0" tIns="0" rIns="0" bIns="0" rtlCol="0" anchor="t"/>
+          <a:lstStyle/>
+          <a:p>
+            <a:pPr marL="0" indent="0">
+              <a:buNone/>
+            </a:pPr>
+            <a:r>
+              <a:rPr lang="en-US" sz="2200" b="1" dirty="0">
+                <a:solidFill>
+                  <a:schemeClr val="tx1"/>
+                </a:solidFill>
+              </a:rPr>
+              <a:t>v3.4.1</a:t>
+            </a:r>
+            <a:endParaRPr lang="en-US" sz="2200" dirty="0"/>
+          </a:p>
+        </p:txBody>
+      </p:sp>
+      <p:sp>
+        <p:nvSpPr>
+          <p:cNvPr id="31" name="Text 19"/>
+          <p:cNvSpPr txBox="1"/>
+          <p:nvPr/>
+        </p:nvSpPr>
+        <p:spPr>
+          <a:xfrm>
+            <a:off x="9802368" y="5074920"/>
+            <a:ext cx="1783080" cy="457200"/>
+          </a:xfrm>
+          <a:prstGeom prst="rect">
+            <a:avLst/>
+          </a:prstGeom>
+          <a:noFill/>
+          <a:ln/>
+        </p:spPr>
+        <p:txBody>
+          <a:bodyPr wrap="square" lIns="0" tIns="0" rIns="0" bIns="0" rtlCol="0" anchor="t"/>
+          <a:lstStyle/>
+          <a:p>
+            <a:pPr marL="0" indent="0">
+              <a:buNone/>
+            </a:pPr>
+            <a:r>
+              <a:rPr lang="en-US" sz="1100" dirty="0">
+                <a:solidFill>
+                  <a:schemeClr val="tx1"/>
+                </a:solidFill>
+              </a:rPr>
+              <a:t>nRF Connect SDK</a:t>
+            </a:r>
+            <a:endParaRPr lang="en-US" sz="1100" dirty="0"/>
+          </a:p>
+        </p:txBody>
+      </p:sp>
+      <p:sp>
+        <p:nvSpPr>
+          <p:cNvPr id="32" name="Text 20"/>
+          <p:cNvSpPr txBox="1"/>
+          <p:nvPr/>
+        </p:nvSpPr>
+        <p:spPr>
+          <a:xfrm>
+            <a:off x="8001000" y="5486400"/>
+            <a:ext cx="3520440" cy="640080"/>
+          </a:xfrm>
+          <a:prstGeom prst="rect">
+            <a:avLst/>
+          </a:prstGeom>
+          <a:noFill/>
+          <a:ln/>
+        </p:spPr>
+        <p:txBody>
+          <a:bodyPr wrap="square" lIns="0" tIns="0" rIns="0" bIns="0" rtlCol="0" anchor="t"/>
+          <a:lstStyle/>
+          <a:p>
+            <a:pPr marL="0" indent="0">
+              <a:buNone/>
+            </a:pPr>
+            <a:r>
+              <a:rPr lang="en-US" sz="1100" dirty="0">
+                <a:solidFill>
+                  <a:schemeClr val="tx1"/>
+                </a:solidFill>
+              </a:rPr>
+              <a:t>SmartThings 앱은 스위치와 센서가 섞인 기기에서</a:t>
+            </a:r>
+            <a:endParaRPr lang="en-US" sz="1100" dirty="0"/>
+          </a:p>
+          <a:p>
+            <a:pPr marL="0" indent="0">
+              <a:buNone/>
+            </a:pPr>
+            <a:r>
+              <a:rPr lang="en-US" sz="1100" dirty="0">
+                <a:solidFill>
+                  <a:schemeClr val="tx1"/>
+                </a:solidFill>
+              </a:rPr>
+              <a:t>센서 엔드포인트를 표시하지 않음.</a:t>
+            </a:r>
+            <a:endParaRPr lang="en-US" sz="1100" dirty="0"/>
+          </a:p>
+          <a:p>
+            <a:pPr marL="0" indent="0">
+              <a:buNone/>
+            </a:pPr>
+            <a:r>
+              <a:rPr lang="en-US" sz="1100" dirty="0">
+                <a:solidFill>
+                  <a:schemeClr val="tx1"/>
+                </a:solidFill>
+              </a:rPr>
+              <a:t>그래서 EP2~EP4 값은 시연 화면에서 함께 보여줌.</a:t>
+            </a:r>
+            <a:endParaRPr lang="en-US" sz="1100" dirty="0"/>
+          </a:p>
+        </p:txBody>
+      </p:sp>
+      <p:sp>
+        <p:nvSpPr>
+          <p:cNvPr id="33" name="Slide Number Placeholder 0"/>
           <p:cNvSpPr>
             <a:spLocks noGrp="1"/>
           </p:cNvSpPr>
@@ -8578,7 +8457,7 @@
           </a:prstGeom>
           <a:extLst>
             <a:ext uri="{C572A759-6A51-4108-AA02-DFA0A04FC94B}">
-              <ma14:wrappingTextBoxFlag xmlns:ma14="http://schemas.microsoft.com/office/mac/drawingml/2011/main" val="0"/>
+              <ma14:wrappingTextBoxFlag xmlns:ma14="http://schemas.microsoft.com/office/mac/drawingml/2011/main" xmlns="" val="0"/>
             </a:ext>
           </a:extLst>
         </p:spPr>
@@ -8588,7 +8467,7 @@
             <a:lvl1pPr>
               <a:defRPr sz="1000">
                 <a:solidFill>
-                  <a:schemeClr val="tx2"/>
+                  <a:schemeClr val="tx1"/>
                 </a:solidFill>
               </a:defRPr>
             </a:lvl1pPr>
@@ -8596,7 +8475,7 @@
           <a:p>
             <a:pPr algn="r"/>
             <a:fld id="{F7021451-1387-4CA6-816F-3879F97B5CBC}" type="slidenum">
-              <a:rPr b="0" lang="en-US"/>
+              <a:rPr lang="en-US" b="0"/>
               <a:t>3</a:t>
             </a:fld>
             <a:endParaRPr lang="en-US"/>
@@ -8631,9 +8510,11 @@
       <p:sp>
         <p:nvSpPr>
           <p:cNvPr id="2" name="Text 0"/>
-          <p:cNvSpPr/>
+          <p:cNvSpPr>
+            <a:spLocks noGrp="1"/>
+          </p:cNvSpPr>
           <p:nvPr>
-            <p:ph idx="100" type="body" hasCustomPrompt="1"/>
+            <p:ph type="body" idx="100" hasCustomPrompt="1"/>
           </p:nvPr>
         </p:nvSpPr>
         <p:spPr>
@@ -8651,13 +8532,13 @@
           <a:bodyPr wrap="square" lIns="0" tIns="0" rIns="0" bIns="0" rtlCol="0"/>
           <a:lstStyle/>
           <a:p>
-            <a:pPr indent="0" marL="0">
+            <a:pPr marL="0" indent="0">
               <a:buNone/>
             </a:pPr>
             <a:r>
               <a:rPr lang="en-US" sz="1300" b="1" dirty="0">
                 <a:solidFill>
-                  <a:schemeClr val="accent1"/>
+                  <a:schemeClr val="tx1"/>
                 </a:solidFill>
               </a:rPr>
               <a:t>주요 개발 내용 ③ 온디바이스 판단</a:t>
@@ -8669,9 +8550,11 @@
       <p:sp>
         <p:nvSpPr>
           <p:cNvPr id="3" name="Text 0"/>
-          <p:cNvSpPr/>
+          <p:cNvSpPr>
+            <a:spLocks noGrp="1"/>
+          </p:cNvSpPr>
           <p:nvPr>
-            <p:ph idx="101" type="title" hasCustomPrompt="1"/>
+            <p:ph type="title" idx="101" hasCustomPrompt="1"/>
           </p:nvPr>
         </p:nvSpPr>
         <p:spPr>
@@ -8689,7 +8572,7 @@
           <a:bodyPr wrap="square" lIns="0" tIns="0" rIns="0" bIns="0" rtlCol="0" anchor="t"/>
           <a:lstStyle/>
           <a:p>
-            <a:pPr algn="l" indent="0" marL="0">
+            <a:pPr marL="0" indent="0" algn="l">
               <a:buNone/>
             </a:pPr>
             <a:r>
@@ -8698,7 +8581,7 @@
                   <a:schemeClr val="tx1"/>
                 </a:solidFill>
               </a:rPr>
-              <a:t>노드가 스스로 계산하고, 학습하고, 개입합니다</a:t>
+              <a:t>노드가 스스로 계산하고 학습하고 개입함</a:t>
             </a:r>
             <a:endParaRPr lang="en-US" sz="3000" dirty="0"/>
           </a:p>
@@ -8758,14 +8641,14 @@
       </p:sp>
       <p:pic>
         <p:nvPicPr>
-          <p:cNvPr id="6" name="Image 0" descr="calc">    </p:cNvPr>
+          <p:cNvPr id="6" name="Image 0" descr="calc"/>
           <p:cNvPicPr>
             <a:picLocks noChangeAspect="1"/>
           </p:cNvPicPr>
           <p:nvPr/>
         </p:nvPicPr>
         <p:blipFill>
-          <a:blip r:embed="rId1"/>
+          <a:blip r:embed="rId3"/>
           <a:stretch>
             <a:fillRect/>
           </a:stretch>
@@ -8801,7 +8684,7 @@
           <a:bodyPr wrap="square" lIns="0" tIns="0" rIns="0" bIns="0" rtlCol="0" anchor="t"/>
           <a:lstStyle/>
           <a:p>
-            <a:pPr indent="0" marL="0">
+            <a:pPr marL="0" indent="0">
               <a:buNone/>
             </a:pPr>
             <a:r>
@@ -8824,8 +8707,8 @@
         </p:nvSpPr>
         <p:spPr>
           <a:xfrm>
-            <a:off x="777240" y="2148840"/>
-            <a:ext cx="3749040" cy="274320"/>
+            <a:off x="777240" y="2057400"/>
+            <a:ext cx="3749040" cy="256032"/>
           </a:xfrm>
           <a:prstGeom prst="rect">
             <a:avLst/>
@@ -8837,31 +8720,252 @@
           <a:bodyPr wrap="square" lIns="0" tIns="0" rIns="0" bIns="0" rtlCol="0" anchor="t"/>
           <a:lstStyle/>
           <a:p>
-            <a:pPr indent="0" marL="0">
+            <a:pPr marL="0" indent="0">
               <a:buNone/>
             </a:pPr>
             <a:r>
               <a:rPr lang="en-US" sz="1300" dirty="0">
                 <a:solidFill>
-                  <a:schemeClr val="tx2"/>
-                </a:solidFill>
-              </a:rPr>
-              <a:t>포화 수증기압 (Magnus)</a:t>
+                  <a:schemeClr val="tx1"/>
+                </a:solidFill>
+              </a:rPr>
+              <a:t>포화 수증기압 (Magnus 식, hPa)</a:t>
             </a:r>
             <a:endParaRPr lang="en-US" sz="1300" dirty="0"/>
           </a:p>
         </p:txBody>
       </p:sp>
-      <p:sp>
-        <p:nvSpPr>
-          <p:cNvPr id="9" name="Text 6"/>
+      <mc:AlternateContent xmlns:mc="http://schemas.openxmlformats.org/markup-compatibility/2006" xmlns:a14="http://schemas.microsoft.com/office/drawing/2010/main">
+        <mc:Choice Requires="a14">
+          <p:sp>
+            <p:nvSpPr>
+              <p:cNvPr id="9" name="eq0"/>
+              <p:cNvSpPr txBox="1"/>
+              <p:nvPr/>
+            </p:nvSpPr>
+            <p:spPr>
+              <a:xfrm>
+                <a:off x="777240" y="2304288"/>
+                <a:ext cx="3749040" cy="530352"/>
+              </a:xfrm>
+              <a:prstGeom prst="rect">
+                <a:avLst/>
+              </a:prstGeom>
+              <a:noFill/>
+              <a:ln/>
+            </p:spPr>
+            <p:txBody>
+              <a:bodyPr wrap="square" lIns="0" tIns="0" rIns="0" bIns="0" rtlCol="0" anchor="ctr"/>
+              <a:lstStyle/>
+              <a:p>
+                <a:pPr/>
+                <a14:m>
+                  <m:oMathPara xmlns:m="http://schemas.openxmlformats.org/officeDocument/2006/math">
+                    <m:oMathParaPr>
+                      <m:jc m:val="left"/>
+                    </m:oMathParaPr>
+                    <m:oMath>
+                      <m:sSub>
+                        <m:sSubPr>
+                          <m:ctrlPr>
+                            <a:rPr lang="ko-KR" altLang="en-US" sz="1500" b="0" i="0">
+                              <a:solidFill>
+                                <a:srgbClr val="000000"/>
+                              </a:solidFill>
+                              <a:latin typeface="Pretendard"/>
+                              <a:ea typeface="Pretendard"/>
+                            </a:rPr>
+                          </m:ctrlPr>
+                        </m:sSubPr>
+                        <m:e>
+                          <m:r>
+                            <m:rPr>
+                              <m:nor/>
+                            </m:rPr>
+                            <a:rPr lang="ko-KR" altLang="en-US" sz="1500" b="0" i="0">
+                              <a:solidFill>
+                                <a:srgbClr val="000000"/>
+                              </a:solidFill>
+                              <a:latin typeface="Pretendard"/>
+                              <a:ea typeface="Pretendard"/>
+                            </a:rPr>
+                            <m:t>P</m:t>
+                          </m:r>
+                        </m:e>
+                        <m:sub>
+                          <m:r>
+                            <m:rPr>
+                              <m:nor/>
+                            </m:rPr>
+                            <a:rPr lang="ko-KR" altLang="en-US" sz="1500" b="0" i="0">
+                              <a:solidFill>
+                                <a:srgbClr val="000000"/>
+                              </a:solidFill>
+                              <a:latin typeface="Pretendard"/>
+                              <a:ea typeface="Pretendard"/>
+                            </a:rPr>
+                            <m:t>s</m:t>
+                          </m:r>
+                        </m:sub>
+                      </m:sSub>
+                      <m:r>
+                        <m:rPr>
+                          <m:nor/>
+                        </m:rPr>
+                        <a:rPr lang="ko-KR" altLang="en-US" sz="1500" b="0" i="0">
+                          <a:solidFill>
+                            <a:srgbClr val="000000"/>
+                          </a:solidFill>
+                          <a:latin typeface="Pretendard"/>
+                          <a:ea typeface="Pretendard"/>
+                        </a:rPr>
+                        <m:t>(T) = 6.112 ×</m:t>
+                      </m:r>
+                      <m:func>
+                        <m:funcPr>
+                          <m:ctrlPr>
+                            <a:rPr lang="ko-KR" altLang="en-US" sz="1500" b="0" i="0">
+                              <a:solidFill>
+                                <a:srgbClr val="000000"/>
+                              </a:solidFill>
+                              <a:latin typeface="Pretendard"/>
+                              <a:ea typeface="Pretendard"/>
+                            </a:rPr>
+                          </m:ctrlPr>
+                        </m:funcPr>
+                        <m:fName>
+                          <m:r>
+                            <m:rPr>
+                              <m:nor/>
+                            </m:rPr>
+                            <a:rPr lang="ko-KR" altLang="en-US" sz="1500" b="0" i="0">
+                              <a:solidFill>
+                                <a:srgbClr val="000000"/>
+                              </a:solidFill>
+                              <a:latin typeface="Pretendard"/>
+                              <a:ea typeface="Pretendard"/>
+                            </a:rPr>
+                            <m:t>exp</m:t>
+                          </m:r>
+                        </m:fName>
+                        <m:e>
+                          <m:d>
+                            <m:dPr>
+                              <m:ctrlPr>
+                                <a:rPr lang="ko-KR" altLang="en-US" sz="1500" b="0" i="1">
+                                  <a:solidFill>
+                                    <a:srgbClr val="000000"/>
+                                  </a:solidFill>
+                                  <a:latin typeface="Cambria Math" panose="02040503050406030204" pitchFamily="18" charset="0"/>
+                                  <a:ea typeface="Pretendard"/>
+                                </a:rPr>
+                              </m:ctrlPr>
+                            </m:dPr>
+                            <m:e>
+                              <m:f>
+                                <m:fPr>
+                                  <m:ctrlPr>
+                                    <a:rPr lang="ko-KR" altLang="en-US" sz="1500" b="0" i="0">
+                                      <a:solidFill>
+                                        <a:srgbClr val="000000"/>
+                                      </a:solidFill>
+                                      <a:latin typeface="Pretendard"/>
+                                      <a:ea typeface="Pretendard"/>
+                                    </a:rPr>
+                                  </m:ctrlPr>
+                                </m:fPr>
+                                <m:num>
+                                  <m:r>
+                                    <m:rPr>
+                                      <m:nor/>
+                                    </m:rPr>
+                                    <a:rPr lang="ko-KR" altLang="en-US" sz="1500" b="0" i="0">
+                                      <a:solidFill>
+                                        <a:srgbClr val="000000"/>
+                                      </a:solidFill>
+                                      <a:latin typeface="Pretendard"/>
+                                      <a:ea typeface="Pretendard"/>
+                                    </a:rPr>
+                                    <m:t>17.62T</m:t>
+                                  </m:r>
+                                </m:num>
+                                <m:den>
+                                  <m:r>
+                                    <m:rPr>
+                                      <m:nor/>
+                                    </m:rPr>
+                                    <a:rPr lang="ko-KR" altLang="en-US" sz="1500" b="0" i="0">
+                                      <a:solidFill>
+                                        <a:srgbClr val="000000"/>
+                                      </a:solidFill>
+                                      <a:latin typeface="Pretendard"/>
+                                      <a:ea typeface="Pretendard"/>
+                                    </a:rPr>
+                                    <m:t>243.12 + T</m:t>
+                                  </m:r>
+                                </m:den>
+                              </m:f>
+                            </m:e>
+                          </m:d>
+                        </m:e>
+                      </m:func>
+                    </m:oMath>
+                  </m:oMathPara>
+                </a14:m>
+                <a:endParaRPr lang="ko-KR" sz="1500"/>
+              </a:p>
+            </p:txBody>
+          </p:sp>
+        </mc:Choice>
+        <mc:Fallback xmlns="">
+          <p:sp>
+            <p:nvSpPr>
+              <p:cNvPr id="9" name="eq0"/>
+              <p:cNvSpPr txBox="1"/>
+              <p:nvPr/>
+            </p:nvSpPr>
+            <p:spPr>
+              <a:xfrm>
+                <a:off x="777240" y="2304288"/>
+                <a:ext cx="3749040" cy="530352"/>
+              </a:xfrm>
+              <a:prstGeom prst="rect">
+                <a:avLst/>
+              </a:prstGeom>
+              <a:noFill/>
+              <a:ln/>
+            </p:spPr>
+            <p:txBody>
+              <a:bodyPr wrap="square" lIns="0" tIns="0" rIns="0" bIns="0" rtlCol="0" anchor="ctr"/>
+              <a:lstStyle/>
+              <a:p>
+                <a:pPr indent="0" marL="0">
+                  <a:buNone/>
+                </a:pPr>
+                <a:r>
+                  <a:rPr lang="en-US" sz="1500" dirty="0">
+                    <a:solidFill>
+                      <a:schemeClr val="tx1"/>
+                    </a:solidFill>
+                  </a:rPr>
+                  <a:t>Pₛ(T) = 6.112 × exp(17.62T / (243.12 + T))</a:t>
+                </a:r>
+                <a:endParaRPr lang="en-US" sz="1500" dirty="0"/>
+              </a:p>
+            </p:txBody>
+          </p:sp>
+        </mc:Fallback>
+      </mc:AlternateContent>
+      <p:sp>
+        <p:nvSpPr>
+          <p:cNvPr id="10" name="Text 7"/>
           <p:cNvSpPr txBox="1"/>
           <p:nvPr/>
         </p:nvSpPr>
         <p:spPr>
           <a:xfrm>
-            <a:off x="777240" y="2423160"/>
-            <a:ext cx="3749040" cy="411480"/>
+            <a:off x="777240" y="2926080"/>
+            <a:ext cx="3749040" cy="256032"/>
           </a:xfrm>
           <a:prstGeom prst="rect">
             <a:avLst/>
@@ -8873,31 +8977,461 @@
           <a:bodyPr wrap="square" lIns="0" tIns="0" rIns="0" bIns="0" rtlCol="0" anchor="t"/>
           <a:lstStyle/>
           <a:p>
-            <a:pPr indent="0" marL="0">
-              <a:buNone/>
-            </a:pPr>
-            <a:r>
-              <a:rPr lang="en-US" sz="1400" b="1" dirty="0">
-                <a:solidFill>
-                  <a:schemeClr val="tx1"/>
-                </a:solidFill>
-              </a:rPr>
-              <a:t>Pₛ(T) = 6.112 · exp(17.62T / (243.12 + T))</a:t>
-            </a:r>
-            <a:endParaRPr lang="en-US" sz="1400" dirty="0"/>
+            <a:pPr marL="0" indent="0">
+              <a:buNone/>
+            </a:pPr>
+            <a:r>
+              <a:rPr lang="en-US" sz="1300" dirty="0">
+                <a:solidFill>
+                  <a:schemeClr val="tx1"/>
+                </a:solidFill>
+              </a:rPr>
+              <a:t>벽 표면 상대습도</a:t>
+            </a:r>
+            <a:endParaRPr lang="en-US" sz="1300" dirty="0"/>
           </a:p>
         </p:txBody>
       </p:sp>
-      <p:sp>
-        <p:nvSpPr>
-          <p:cNvPr id="10" name="Text 7"/>
+      <mc:AlternateContent xmlns:mc="http://schemas.openxmlformats.org/markup-compatibility/2006" xmlns:a14="http://schemas.microsoft.com/office/drawing/2010/main">
+        <mc:Choice Requires="a14">
+          <p:sp>
+            <p:nvSpPr>
+              <p:cNvPr id="11" name="eq1"/>
+              <p:cNvSpPr txBox="1"/>
+              <p:nvPr/>
+            </p:nvSpPr>
+            <p:spPr>
+              <a:xfrm>
+                <a:off x="777240" y="3172968"/>
+                <a:ext cx="3749040" cy="530352"/>
+              </a:xfrm>
+              <a:prstGeom prst="rect">
+                <a:avLst/>
+              </a:prstGeom>
+              <a:noFill/>
+              <a:ln/>
+            </p:spPr>
+            <p:txBody>
+              <a:bodyPr wrap="square" lIns="0" tIns="0" rIns="0" bIns="0" rtlCol="0" anchor="ctr"/>
+              <a:lstStyle/>
+              <a:p>
+                <a:pPr/>
+                <a14:m>
+                  <m:oMathPara xmlns:m="http://schemas.openxmlformats.org/officeDocument/2006/math">
+                    <m:oMathParaPr>
+                      <m:jc m:val="left"/>
+                    </m:oMathParaPr>
+                    <m:oMath>
+                      <m:sSub>
+                        <m:sSubPr>
+                          <m:ctrlPr>
+                            <a:rPr lang="ko-KR" altLang="en-US" sz="1500" b="0" i="0">
+                              <a:solidFill>
+                                <a:srgbClr val="000000"/>
+                              </a:solidFill>
+                              <a:latin typeface="Pretendard"/>
+                              <a:ea typeface="Pretendard"/>
+                            </a:rPr>
+                          </m:ctrlPr>
+                        </m:sSubPr>
+                        <m:e>
+                          <m:r>
+                            <m:rPr>
+                              <m:nor/>
+                            </m:rPr>
+                            <a:rPr lang="ko-KR" altLang="en-US" sz="1500" b="0" i="0">
+                              <a:solidFill>
+                                <a:srgbClr val="000000"/>
+                              </a:solidFill>
+                              <a:latin typeface="Pretendard"/>
+                              <a:ea typeface="Pretendard"/>
+                            </a:rPr>
+                            <m:t>RH</m:t>
+                          </m:r>
+                        </m:e>
+                        <m:sub>
+                          <m:r>
+                            <m:rPr>
+                              <m:nor/>
+                            </m:rPr>
+                            <a:rPr lang="ko-KR" altLang="en-US" sz="1500" b="0" i="0">
+                              <a:solidFill>
+                                <a:srgbClr val="000000"/>
+                              </a:solidFill>
+                              <a:latin typeface="Pretendard"/>
+                              <a:ea typeface="Pretendard"/>
+                            </a:rPr>
+                            <m:t>표면</m:t>
+                          </m:r>
+                        </m:sub>
+                      </m:sSub>
+                      <m:r>
+                        <m:rPr>
+                          <m:nor/>
+                        </m:rPr>
+                        <a:rPr lang="ko-KR" altLang="en-US" sz="1500" b="0" i="0">
+                          <a:solidFill>
+                            <a:srgbClr val="000000"/>
+                          </a:solidFill>
+                          <a:latin typeface="Pretendard"/>
+                          <a:ea typeface="Pretendard"/>
+                        </a:rPr>
+                        <m:t> = </m:t>
+                      </m:r>
+                      <m:sSub>
+                        <m:sSubPr>
+                          <m:ctrlPr>
+                            <a:rPr lang="ko-KR" altLang="en-US" sz="1500" b="0" i="0">
+                              <a:solidFill>
+                                <a:srgbClr val="000000"/>
+                              </a:solidFill>
+                              <a:latin typeface="Pretendard"/>
+                              <a:ea typeface="Pretendard"/>
+                            </a:rPr>
+                          </m:ctrlPr>
+                        </m:sSubPr>
+                        <m:e>
+                          <m:r>
+                            <m:rPr>
+                              <m:nor/>
+                            </m:rPr>
+                            <a:rPr lang="ko-KR" altLang="en-US" sz="1500" b="0" i="0">
+                              <a:solidFill>
+                                <a:srgbClr val="000000"/>
+                              </a:solidFill>
+                              <a:latin typeface="Pretendard"/>
+                              <a:ea typeface="Pretendard"/>
+                            </a:rPr>
+                            <m:t>RH</m:t>
+                          </m:r>
+                        </m:e>
+                        <m:sub>
+                          <m:r>
+                            <m:rPr>
+                              <m:nor/>
+                            </m:rPr>
+                            <a:rPr lang="ko-KR" altLang="en-US" sz="1500" b="0" i="0">
+                              <a:solidFill>
+                                <a:srgbClr val="000000"/>
+                              </a:solidFill>
+                              <a:latin typeface="Pretendard"/>
+                              <a:ea typeface="Pretendard"/>
+                            </a:rPr>
+                            <m:t>실내</m:t>
+                          </m:r>
+                        </m:sub>
+                      </m:sSub>
+                      <m:r>
+                        <m:rPr>
+                          <m:nor/>
+                        </m:rPr>
+                        <a:rPr lang="ko-KR" altLang="en-US" sz="1500" b="0" i="0">
+                          <a:solidFill>
+                            <a:srgbClr val="000000"/>
+                          </a:solidFill>
+                          <a:latin typeface="Pretendard"/>
+                          <a:ea typeface="Pretendard"/>
+                        </a:rPr>
+                        <m:t> × </m:t>
+                      </m:r>
+                      <m:f>
+                        <m:fPr>
+                          <m:ctrlPr>
+                            <a:rPr lang="ko-KR" altLang="en-US" sz="1500" b="0" i="1">
+                              <a:solidFill>
+                                <a:srgbClr val="000000"/>
+                              </a:solidFill>
+                              <a:latin typeface="Cambria Math" panose="02040503050406030204" pitchFamily="18" charset="0"/>
+                              <a:ea typeface="Pretendard"/>
+                            </a:rPr>
+                          </m:ctrlPr>
+                        </m:fPr>
+                        <m:num>
+                          <m:sSub>
+                            <m:sSubPr>
+                              <m:ctrlPr>
+                                <a:rPr lang="ko-KR" altLang="en-US" sz="1500" b="0" i="0">
+                                  <a:solidFill>
+                                    <a:srgbClr val="000000"/>
+                                  </a:solidFill>
+                                  <a:latin typeface="Pretendard"/>
+                                  <a:ea typeface="Pretendard"/>
+                                </a:rPr>
+                              </m:ctrlPr>
+                            </m:sSubPr>
+                            <m:e>
+                              <m:r>
+                                <m:rPr>
+                                  <m:nor/>
+                                </m:rPr>
+                                <a:rPr lang="ko-KR" altLang="en-US" sz="1500" b="0" i="0">
+                                  <a:solidFill>
+                                    <a:srgbClr val="000000"/>
+                                  </a:solidFill>
+                                  <a:latin typeface="Pretendard"/>
+                                  <a:ea typeface="Pretendard"/>
+                                </a:rPr>
+                                <m:t>P</m:t>
+                              </m:r>
+                            </m:e>
+                            <m:sub>
+                              <m:r>
+                                <m:rPr>
+                                  <m:nor/>
+                                </m:rPr>
+                                <a:rPr lang="ko-KR" altLang="en-US" sz="1500" b="0" i="0">
+                                  <a:solidFill>
+                                    <a:srgbClr val="000000"/>
+                                  </a:solidFill>
+                                  <a:latin typeface="Pretendard"/>
+                                  <a:ea typeface="Pretendard"/>
+                                </a:rPr>
+                                <m:t>s</m:t>
+                              </m:r>
+                            </m:sub>
+                          </m:sSub>
+                          <m:r>
+                            <m:rPr>
+                              <m:nor/>
+                            </m:rPr>
+                            <a:rPr lang="ko-KR" altLang="en-US" sz="1500" b="0" i="0">
+                              <a:solidFill>
+                                <a:srgbClr val="000000"/>
+                              </a:solidFill>
+                              <a:latin typeface="Pretendard"/>
+                              <a:ea typeface="Pretendard"/>
+                            </a:rPr>
+                            <m:t>(</m:t>
+                          </m:r>
+                          <m:sSub>
+                            <m:sSubPr>
+                              <m:ctrlPr>
+                                <a:rPr lang="ko-KR" altLang="en-US" sz="1500" b="0" i="0">
+                                  <a:solidFill>
+                                    <a:srgbClr val="000000"/>
+                                  </a:solidFill>
+                                  <a:latin typeface="Pretendard"/>
+                                  <a:ea typeface="Pretendard"/>
+                                </a:rPr>
+                              </m:ctrlPr>
+                            </m:sSubPr>
+                            <m:e>
+                              <m:r>
+                                <m:rPr>
+                                  <m:nor/>
+                                </m:rPr>
+                                <a:rPr lang="ko-KR" altLang="en-US" sz="1500" b="0" i="0">
+                                  <a:solidFill>
+                                    <a:srgbClr val="000000"/>
+                                  </a:solidFill>
+                                  <a:latin typeface="Pretendard"/>
+                                  <a:ea typeface="Pretendard"/>
+                                </a:rPr>
+                                <m:t>T</m:t>
+                              </m:r>
+                            </m:e>
+                            <m:sub>
+                              <m:r>
+                                <m:rPr>
+                                  <m:nor/>
+                                </m:rPr>
+                                <a:rPr lang="ko-KR" altLang="en-US" sz="1500" b="0" i="0">
+                                  <a:solidFill>
+                                    <a:srgbClr val="000000"/>
+                                  </a:solidFill>
+                                  <a:latin typeface="Pretendard"/>
+                                  <a:ea typeface="Pretendard"/>
+                                </a:rPr>
+                                <m:t>실내</m:t>
+                              </m:r>
+                            </m:sub>
+                          </m:sSub>
+                          <m:r>
+                            <m:rPr>
+                              <m:nor/>
+                            </m:rPr>
+                            <a:rPr lang="ko-KR" altLang="en-US" sz="1500" b="0" i="0">
+                              <a:solidFill>
+                                <a:srgbClr val="000000"/>
+                              </a:solidFill>
+                              <a:latin typeface="Pretendard"/>
+                              <a:ea typeface="Pretendard"/>
+                            </a:rPr>
+                            <m:t>)</m:t>
+                          </m:r>
+                        </m:num>
+                        <m:den>
+                          <m:sSub>
+                            <m:sSubPr>
+                              <m:ctrlPr>
+                                <a:rPr lang="ko-KR" altLang="en-US" sz="1500" b="0" i="0">
+                                  <a:solidFill>
+                                    <a:srgbClr val="000000"/>
+                                  </a:solidFill>
+                                  <a:latin typeface="Pretendard"/>
+                                  <a:ea typeface="Pretendard"/>
+                                </a:rPr>
+                              </m:ctrlPr>
+                            </m:sSubPr>
+                            <m:e>
+                              <m:r>
+                                <m:rPr>
+                                  <m:nor/>
+                                </m:rPr>
+                                <a:rPr lang="ko-KR" altLang="en-US" sz="1500" b="0" i="0">
+                                  <a:solidFill>
+                                    <a:srgbClr val="000000"/>
+                                  </a:solidFill>
+                                  <a:latin typeface="Pretendard"/>
+                                  <a:ea typeface="Pretendard"/>
+                                </a:rPr>
+                                <m:t>P</m:t>
+                              </m:r>
+                            </m:e>
+                            <m:sub>
+                              <m:r>
+                                <m:rPr>
+                                  <m:nor/>
+                                </m:rPr>
+                                <a:rPr lang="ko-KR" altLang="en-US" sz="1500" b="0" i="0">
+                                  <a:solidFill>
+                                    <a:srgbClr val="000000"/>
+                                  </a:solidFill>
+                                  <a:latin typeface="Pretendard"/>
+                                  <a:ea typeface="Pretendard"/>
+                                </a:rPr>
+                                <m:t>s</m:t>
+                              </m:r>
+                            </m:sub>
+                          </m:sSub>
+                          <m:r>
+                            <m:rPr>
+                              <m:nor/>
+                            </m:rPr>
+                            <a:rPr lang="ko-KR" altLang="en-US" sz="1500" b="0" i="0">
+                              <a:solidFill>
+                                <a:srgbClr val="000000"/>
+                              </a:solidFill>
+                              <a:latin typeface="Pretendard"/>
+                              <a:ea typeface="Pretendard"/>
+                            </a:rPr>
+                            <m:t>(</m:t>
+                          </m:r>
+                          <m:sSub>
+                            <m:sSubPr>
+                              <m:ctrlPr>
+                                <a:rPr lang="ko-KR" altLang="en-US" sz="1500" b="0" i="0">
+                                  <a:solidFill>
+                                    <a:srgbClr val="000000"/>
+                                  </a:solidFill>
+                                  <a:latin typeface="Pretendard"/>
+                                  <a:ea typeface="Pretendard"/>
+                                </a:rPr>
+                              </m:ctrlPr>
+                            </m:sSubPr>
+                            <m:e>
+                              <m:r>
+                                <m:rPr>
+                                  <m:nor/>
+                                </m:rPr>
+                                <a:rPr lang="ko-KR" altLang="en-US" sz="1500" b="0" i="0">
+                                  <a:solidFill>
+                                    <a:srgbClr val="000000"/>
+                                  </a:solidFill>
+                                  <a:latin typeface="Pretendard"/>
+                                  <a:ea typeface="Pretendard"/>
+                                </a:rPr>
+                                <m:t>T</m:t>
+                              </m:r>
+                            </m:e>
+                            <m:sub>
+                              <m:r>
+                                <m:rPr>
+                                  <m:nor/>
+                                </m:rPr>
+                                <a:rPr lang="ko-KR" altLang="en-US" sz="1500" b="0" i="0">
+                                  <a:solidFill>
+                                    <a:srgbClr val="000000"/>
+                                  </a:solidFill>
+                                  <a:latin typeface="Pretendard"/>
+                                  <a:ea typeface="Pretendard"/>
+                                </a:rPr>
+                                <m:t>벽</m:t>
+                              </m:r>
+                            </m:sub>
+                          </m:sSub>
+                          <m:r>
+                            <m:rPr>
+                              <m:nor/>
+                            </m:rPr>
+                            <a:rPr lang="ko-KR" altLang="en-US" sz="1500" b="0" i="0">
+                              <a:solidFill>
+                                <a:srgbClr val="000000"/>
+                              </a:solidFill>
+                              <a:latin typeface="Pretendard"/>
+                              <a:ea typeface="Pretendard"/>
+                            </a:rPr>
+                            <m:t>)</m:t>
+                          </m:r>
+                        </m:den>
+                      </m:f>
+                    </m:oMath>
+                  </m:oMathPara>
+                </a14:m>
+                <a:endParaRPr lang="ko-KR" sz="1500"/>
+              </a:p>
+            </p:txBody>
+          </p:sp>
+        </mc:Choice>
+        <mc:Fallback xmlns="">
+          <p:sp>
+            <p:nvSpPr>
+              <p:cNvPr id="11" name="eq1"/>
+              <p:cNvSpPr txBox="1"/>
+              <p:nvPr/>
+            </p:nvSpPr>
+            <p:spPr>
+              <a:xfrm>
+                <a:off x="777240" y="3172968"/>
+                <a:ext cx="3749040" cy="530352"/>
+              </a:xfrm>
+              <a:prstGeom prst="rect">
+                <a:avLst/>
+              </a:prstGeom>
+              <a:noFill/>
+              <a:ln/>
+            </p:spPr>
+            <p:txBody>
+              <a:bodyPr wrap="square" lIns="0" tIns="0" rIns="0" bIns="0" rtlCol="0" anchor="ctr"/>
+              <a:lstStyle/>
+              <a:p>
+                <a:pPr indent="0" marL="0">
+                  <a:buNone/>
+                </a:pPr>
+                <a:r>
+                  <a:rPr lang="en-US" sz="1500" dirty="0">
+                    <a:solidFill>
+                      <a:schemeClr val="tx1"/>
+                    </a:solidFill>
+                  </a:rPr>
+                  <a:t>RH표면 = RH실내 × Pₛ(T실내) / Pₛ(T벽)</a:t>
+                </a:r>
+                <a:endParaRPr lang="en-US" sz="1500" dirty="0"/>
+              </a:p>
+            </p:txBody>
+          </p:sp>
+        </mc:Fallback>
+      </mc:AlternateContent>
+      <p:sp>
+        <p:nvSpPr>
+          <p:cNvPr id="12" name="Text 9"/>
           <p:cNvSpPr txBox="1"/>
           <p:nvPr/>
         </p:nvSpPr>
         <p:spPr>
           <a:xfrm>
-            <a:off x="777240" y="2971800"/>
-            <a:ext cx="3749040" cy="274320"/>
+            <a:off x="777240" y="3794760"/>
+            <a:ext cx="3749040" cy="256032"/>
           </a:xfrm>
           <a:prstGeom prst="rect">
             <a:avLst/>
@@ -8909,31 +9443,220 @@
           <a:bodyPr wrap="square" lIns="0" tIns="0" rIns="0" bIns="0" rtlCol="0" anchor="t"/>
           <a:lstStyle/>
           <a:p>
-            <a:pPr indent="0" marL="0">
+            <a:pPr marL="0" indent="0">
               <a:buNone/>
             </a:pPr>
             <a:r>
               <a:rPr lang="en-US" sz="1300" dirty="0">
                 <a:solidFill>
-                  <a:schemeClr val="tx2"/>
-                </a:solidFill>
-              </a:rPr>
-              <a:t>벽 표면 상대습도</a:t>
+                  <a:schemeClr val="tx1"/>
+                </a:solidFill>
+              </a:rPr>
+              <a:t>절대습도 (g/㎥)</a:t>
             </a:r>
             <a:endParaRPr lang="en-US" sz="1300" dirty="0"/>
           </a:p>
         </p:txBody>
       </p:sp>
-      <p:sp>
-        <p:nvSpPr>
-          <p:cNvPr id="11" name="Text 8"/>
+      <mc:AlternateContent xmlns:mc="http://schemas.openxmlformats.org/markup-compatibility/2006" xmlns:a14="http://schemas.microsoft.com/office/drawing/2010/main">
+        <mc:Choice Requires="a14">
+          <p:sp>
+            <p:nvSpPr>
+              <p:cNvPr id="13" name="eq2"/>
+              <p:cNvSpPr txBox="1"/>
+              <p:nvPr/>
+            </p:nvSpPr>
+            <p:spPr>
+              <a:xfrm>
+                <a:off x="777240" y="4041648"/>
+                <a:ext cx="3749040" cy="530352"/>
+              </a:xfrm>
+              <a:prstGeom prst="rect">
+                <a:avLst/>
+              </a:prstGeom>
+              <a:noFill/>
+              <a:ln/>
+            </p:spPr>
+            <p:txBody>
+              <a:bodyPr wrap="square" lIns="0" tIns="0" rIns="0" bIns="0" rtlCol="0" anchor="ctr"/>
+              <a:lstStyle/>
+              <a:p>
+                <a:pPr/>
+                <a14:m>
+                  <m:oMathPara xmlns:m="http://schemas.openxmlformats.org/officeDocument/2006/math">
+                    <m:oMathParaPr>
+                      <m:jc m:val="left"/>
+                    </m:oMathParaPr>
+                    <m:oMath>
+                      <m:r>
+                        <m:rPr>
+                          <m:nor/>
+                        </m:rPr>
+                        <a:rPr lang="ko-KR" altLang="en-US" sz="1500" b="0" i="0">
+                          <a:solidFill>
+                            <a:srgbClr val="000000"/>
+                          </a:solidFill>
+                          <a:latin typeface="Pretendard"/>
+                          <a:ea typeface="Pretendard"/>
+                        </a:rPr>
+                        <m:t>AH = </m:t>
+                      </m:r>
+                      <m:f>
+                        <m:fPr>
+                          <m:ctrlPr>
+                            <a:rPr lang="ko-KR" altLang="en-US" sz="1500" b="0" i="0">
+                              <a:solidFill>
+                                <a:srgbClr val="000000"/>
+                              </a:solidFill>
+                              <a:latin typeface="Pretendard"/>
+                              <a:ea typeface="Pretendard"/>
+                            </a:rPr>
+                          </m:ctrlPr>
+                        </m:fPr>
+                        <m:num>
+                          <m:r>
+                            <m:rPr>
+                              <m:nor/>
+                            </m:rPr>
+                            <a:rPr lang="ko-KR" altLang="en-US" sz="1500" b="0" i="0">
+                              <a:solidFill>
+                                <a:srgbClr val="000000"/>
+                              </a:solidFill>
+                              <a:latin typeface="Pretendard"/>
+                              <a:ea typeface="Pretendard"/>
+                            </a:rPr>
+                            <m:t>216.7 × RH × </m:t>
+                          </m:r>
+                          <m:sSub>
+                            <m:sSubPr>
+                              <m:ctrlPr>
+                                <a:rPr lang="ko-KR" altLang="en-US" sz="1500" b="0" i="0">
+                                  <a:solidFill>
+                                    <a:srgbClr val="000000"/>
+                                  </a:solidFill>
+                                  <a:latin typeface="Pretendard"/>
+                                  <a:ea typeface="Pretendard"/>
+                                </a:rPr>
+                              </m:ctrlPr>
+                            </m:sSubPr>
+                            <m:e>
+                              <m:r>
+                                <m:rPr>
+                                  <m:nor/>
+                                </m:rPr>
+                                <a:rPr lang="ko-KR" altLang="en-US" sz="1500" b="0" i="0">
+                                  <a:solidFill>
+                                    <a:srgbClr val="000000"/>
+                                  </a:solidFill>
+                                  <a:latin typeface="Pretendard"/>
+                                  <a:ea typeface="Pretendard"/>
+                                </a:rPr>
+                                <m:t>P</m:t>
+                              </m:r>
+                            </m:e>
+                            <m:sub>
+                              <m:r>
+                                <m:rPr>
+                                  <m:nor/>
+                                </m:rPr>
+                                <a:rPr lang="ko-KR" altLang="en-US" sz="1500" b="0" i="0">
+                                  <a:solidFill>
+                                    <a:srgbClr val="000000"/>
+                                  </a:solidFill>
+                                  <a:latin typeface="Pretendard"/>
+                                  <a:ea typeface="Pretendard"/>
+                                </a:rPr>
+                                <m:t>s</m:t>
+                              </m:r>
+                            </m:sub>
+                          </m:sSub>
+                          <m:r>
+                            <m:rPr>
+                              <m:nor/>
+                            </m:rPr>
+                            <a:rPr lang="ko-KR" altLang="en-US" sz="1500" b="0" i="0">
+                              <a:solidFill>
+                                <a:srgbClr val="000000"/>
+                              </a:solidFill>
+                              <a:latin typeface="Pretendard"/>
+                              <a:ea typeface="Pretendard"/>
+                            </a:rPr>
+                            <m:t>(T)</m:t>
+                          </m:r>
+                        </m:num>
+                        <m:den>
+                          <m:r>
+                            <m:rPr>
+                              <m:nor/>
+                            </m:rPr>
+                            <a:rPr lang="ko-KR" altLang="en-US" sz="1500" b="0" i="0">
+                              <a:solidFill>
+                                <a:srgbClr val="000000"/>
+                              </a:solidFill>
+                              <a:latin typeface="Pretendard"/>
+                              <a:ea typeface="Pretendard"/>
+                            </a:rPr>
+                            <m:t>100 × (273.15 + T)</m:t>
+                          </m:r>
+                        </m:den>
+                      </m:f>
+                    </m:oMath>
+                  </m:oMathPara>
+                </a14:m>
+                <a:endParaRPr lang="ko-KR" sz="1500"/>
+              </a:p>
+            </p:txBody>
+          </p:sp>
+        </mc:Choice>
+        <mc:Fallback xmlns="">
+          <p:sp>
+            <p:nvSpPr>
+              <p:cNvPr id="13" name="eq2"/>
+              <p:cNvSpPr txBox="1"/>
+              <p:nvPr/>
+            </p:nvSpPr>
+            <p:spPr>
+              <a:xfrm>
+                <a:off x="777240" y="4041648"/>
+                <a:ext cx="3749040" cy="530352"/>
+              </a:xfrm>
+              <a:prstGeom prst="rect">
+                <a:avLst/>
+              </a:prstGeom>
+              <a:noFill/>
+              <a:ln/>
+            </p:spPr>
+            <p:txBody>
+              <a:bodyPr wrap="square" lIns="0" tIns="0" rIns="0" bIns="0" rtlCol="0" anchor="ctr"/>
+              <a:lstStyle/>
+              <a:p>
+                <a:pPr indent="0" marL="0">
+                  <a:buNone/>
+                </a:pPr>
+                <a:r>
+                  <a:rPr lang="en-US" sz="1500" dirty="0">
+                    <a:solidFill>
+                      <a:schemeClr val="tx1"/>
+                    </a:solidFill>
+                  </a:rPr>
+                  <a:t>AH = 216.7 × RH × Pₛ(T) / (100 × (273.15 + T))</a:t>
+                </a:r>
+                <a:endParaRPr lang="en-US" sz="1500" dirty="0"/>
+              </a:p>
+            </p:txBody>
+          </p:sp>
+        </mc:Fallback>
+      </mc:AlternateContent>
+      <p:sp>
+        <p:nvSpPr>
+          <p:cNvPr id="14" name="Text 11"/>
           <p:cNvSpPr txBox="1"/>
           <p:nvPr/>
         </p:nvSpPr>
         <p:spPr>
           <a:xfrm>
-            <a:off x="777240" y="3246120"/>
-            <a:ext cx="3749040" cy="411480"/>
+            <a:off x="777240" y="4663440"/>
+            <a:ext cx="3749040" cy="256032"/>
           </a:xfrm>
           <a:prstGeom prst="rect">
             <a:avLst/>
@@ -8945,182 +9668,412 @@
           <a:bodyPr wrap="square" lIns="0" tIns="0" rIns="0" bIns="0" rtlCol="0" anchor="t"/>
           <a:lstStyle/>
           <a:p>
-            <a:pPr indent="0" marL="0">
-              <a:buNone/>
-            </a:pPr>
-            <a:r>
-              <a:rPr lang="en-US" sz="1400" b="1" dirty="0">
-                <a:solidFill>
-                  <a:schemeClr val="tx1"/>
-                </a:solidFill>
-              </a:rPr>
-              <a:t>RHₛ = RH실내 · Pₛ(T실내) / Pₛ(T벽)</a:t>
-            </a:r>
-            <a:endParaRPr lang="en-US" sz="1400" dirty="0"/>
+            <a:pPr marL="0" indent="0">
+              <a:buNone/>
+            </a:pPr>
+            <a:r>
+              <a:rPr lang="en-US" sz="1300" dirty="0">
+                <a:solidFill>
+                  <a:schemeClr val="tx1"/>
+                </a:solidFill>
+              </a:rPr>
+              <a:t>허용 상한 (표 3)</a:t>
+            </a:r>
+            <a:endParaRPr lang="en-US" sz="1300" dirty="0"/>
           </a:p>
         </p:txBody>
       </p:sp>
-      <p:sp>
-        <p:nvSpPr>
-          <p:cNvPr id="12" name="Text 9"/>
-          <p:cNvSpPr txBox="1"/>
-          <p:nvPr/>
-        </p:nvSpPr>
-        <p:spPr>
-          <a:xfrm>
-            <a:off x="777240" y="3794760"/>
-            <a:ext cx="3749040" cy="274320"/>
-          </a:xfrm>
-          <a:prstGeom prst="rect">
-            <a:avLst/>
-          </a:prstGeom>
-          <a:noFill/>
-          <a:ln/>
-        </p:spPr>
-        <p:txBody>
-          <a:bodyPr wrap="square" lIns="0" tIns="0" rIns="0" bIns="0" rtlCol="0" anchor="t"/>
-          <a:lstStyle/>
-          <a:p>
-            <a:pPr indent="0" marL="0">
-              <a:buNone/>
-            </a:pPr>
-            <a:r>
-              <a:rPr lang="en-US" sz="1300" dirty="0">
-                <a:solidFill>
-                  <a:schemeClr val="tx2"/>
-                </a:solidFill>
-              </a:rPr>
-              <a:t>절대습도</a:t>
-            </a:r>
-            <a:endParaRPr lang="en-US" sz="1300" dirty="0"/>
-          </a:p>
-        </p:txBody>
-      </p:sp>
-      <p:sp>
-        <p:nvSpPr>
-          <p:cNvPr id="13" name="Text 10"/>
-          <p:cNvSpPr txBox="1"/>
-          <p:nvPr/>
-        </p:nvSpPr>
-        <p:spPr>
-          <a:xfrm>
-            <a:off x="777240" y="4069080"/>
-            <a:ext cx="3749040" cy="411480"/>
-          </a:xfrm>
-          <a:prstGeom prst="rect">
-            <a:avLst/>
-          </a:prstGeom>
-          <a:noFill/>
-          <a:ln/>
-        </p:spPr>
-        <p:txBody>
-          <a:bodyPr wrap="square" lIns="0" tIns="0" rIns="0" bIns="0" rtlCol="0" anchor="t"/>
-          <a:lstStyle/>
-          <a:p>
-            <a:pPr indent="0" marL="0">
-              <a:buNone/>
-            </a:pPr>
-            <a:r>
-              <a:rPr lang="en-US" sz="1400" b="1" dirty="0">
-                <a:solidFill>
-                  <a:schemeClr val="tx1"/>
-                </a:solidFill>
-              </a:rPr>
-              <a:t>AH = 216.7 · (RH/100 · Pₛ(T)) / (273.15 + T)</a:t>
-            </a:r>
-            <a:endParaRPr lang="en-US" sz="1400" dirty="0"/>
-          </a:p>
-        </p:txBody>
-      </p:sp>
-      <p:sp>
-        <p:nvSpPr>
-          <p:cNvPr id="14" name="Text 11"/>
-          <p:cNvSpPr txBox="1"/>
-          <p:nvPr/>
-        </p:nvSpPr>
-        <p:spPr>
-          <a:xfrm>
-            <a:off x="777240" y="4617720"/>
-            <a:ext cx="3749040" cy="274320"/>
-          </a:xfrm>
-          <a:prstGeom prst="rect">
-            <a:avLst/>
-          </a:prstGeom>
-          <a:noFill/>
-          <a:ln/>
-        </p:spPr>
-        <p:txBody>
-          <a:bodyPr wrap="square" lIns="0" tIns="0" rIns="0" bIns="0" rtlCol="0" anchor="t"/>
-          <a:lstStyle/>
-          <a:p>
-            <a:pPr indent="0" marL="0">
-              <a:buNone/>
-            </a:pPr>
-            <a:r>
-              <a:rPr lang="en-US" sz="1300" dirty="0">
-                <a:solidFill>
-                  <a:schemeClr val="tx2"/>
-                </a:solidFill>
-              </a:rPr>
-              <a:t>허용 상한 (표 3)</a:t>
-            </a:r>
-            <a:endParaRPr lang="en-US" sz="1300" dirty="0"/>
-          </a:p>
-        </p:txBody>
-      </p:sp>
-      <p:sp>
-        <p:nvSpPr>
-          <p:cNvPr id="15" name="Text 12"/>
-          <p:cNvSpPr txBox="1"/>
-          <p:nvPr/>
-        </p:nvSpPr>
-        <p:spPr>
-          <a:xfrm>
-            <a:off x="777240" y="4892040"/>
-            <a:ext cx="3749040" cy="411480"/>
-          </a:xfrm>
-          <a:prstGeom prst="rect">
-            <a:avLst/>
-          </a:prstGeom>
-          <a:noFill/>
-          <a:ln/>
-        </p:spPr>
-        <p:txBody>
-          <a:bodyPr wrap="square" lIns="0" tIns="0" rIns="0" bIns="0" rtlCol="0" anchor="t"/>
-          <a:lstStyle/>
-          <a:p>
-            <a:pPr indent="0" marL="0">
-              <a:buNone/>
-            </a:pPr>
-            <a:r>
-              <a:rPr lang="en-US" sz="1400" b="1" dirty="0">
-                <a:solidFill>
-                  <a:schemeClr val="tx1"/>
-                </a:solidFill>
-              </a:rPr>
-              <a:t>RH상한 = 80 · Pₛ(T벽) / Pₛ(T실내)</a:t>
-            </a:r>
-            <a:endParaRPr lang="en-US" sz="1400" dirty="0"/>
-          </a:p>
-        </p:txBody>
-      </p:sp>
+      <mc:AlternateContent xmlns:mc="http://schemas.openxmlformats.org/markup-compatibility/2006" xmlns:a14="http://schemas.microsoft.com/office/drawing/2010/main">
+        <mc:Choice Requires="a14">
+          <p:sp>
+            <p:nvSpPr>
+              <p:cNvPr id="15" name="eq3"/>
+              <p:cNvSpPr txBox="1"/>
+              <p:nvPr/>
+            </p:nvSpPr>
+            <p:spPr>
+              <a:xfrm>
+                <a:off x="777240" y="4910328"/>
+                <a:ext cx="3749040" cy="530352"/>
+              </a:xfrm>
+              <a:prstGeom prst="rect">
+                <a:avLst/>
+              </a:prstGeom>
+              <a:noFill/>
+              <a:ln/>
+            </p:spPr>
+            <p:txBody>
+              <a:bodyPr wrap="square" lIns="0" tIns="0" rIns="0" bIns="0" rtlCol="0" anchor="ctr"/>
+              <a:lstStyle/>
+              <a:p>
+                <a:pPr/>
+                <a14:m>
+                  <m:oMathPara xmlns:m="http://schemas.openxmlformats.org/officeDocument/2006/math">
+                    <m:oMathParaPr>
+                      <m:jc m:val="left"/>
+                    </m:oMathParaPr>
+                    <m:oMath>
+                      <m:sSub>
+                        <m:sSubPr>
+                          <m:ctrlPr>
+                            <a:rPr lang="ko-KR" altLang="en-US" sz="1500" b="0" i="0">
+                              <a:solidFill>
+                                <a:srgbClr val="000000"/>
+                              </a:solidFill>
+                              <a:latin typeface="Pretendard"/>
+                              <a:ea typeface="Pretendard"/>
+                            </a:rPr>
+                          </m:ctrlPr>
+                        </m:sSubPr>
+                        <m:e>
+                          <m:r>
+                            <m:rPr>
+                              <m:nor/>
+                            </m:rPr>
+                            <a:rPr lang="ko-KR" altLang="en-US" sz="1500" b="0" i="0">
+                              <a:solidFill>
+                                <a:srgbClr val="000000"/>
+                              </a:solidFill>
+                              <a:latin typeface="Pretendard"/>
+                              <a:ea typeface="Pretendard"/>
+                            </a:rPr>
+                            <m:t>RH</m:t>
+                          </m:r>
+                        </m:e>
+                        <m:sub>
+                          <m:r>
+                            <m:rPr>
+                              <m:nor/>
+                            </m:rPr>
+                            <a:rPr lang="ko-KR" altLang="en-US" sz="1500" b="0" i="0">
+                              <a:solidFill>
+                                <a:srgbClr val="000000"/>
+                              </a:solidFill>
+                              <a:latin typeface="Pretendard"/>
+                              <a:ea typeface="Pretendard"/>
+                            </a:rPr>
+                            <m:t>상한</m:t>
+                          </m:r>
+                        </m:sub>
+                      </m:sSub>
+                      <m:r>
+                        <m:rPr>
+                          <m:nor/>
+                        </m:rPr>
+                        <a:rPr lang="ko-KR" altLang="en-US" sz="1500" b="0" i="0">
+                          <a:solidFill>
+                            <a:srgbClr val="000000"/>
+                          </a:solidFill>
+                          <a:latin typeface="Pretendard"/>
+                          <a:ea typeface="Pretendard"/>
+                        </a:rPr>
+                        <m:t> = 80 × </m:t>
+                      </m:r>
+                      <m:f>
+                        <m:fPr>
+                          <m:ctrlPr>
+                            <a:rPr lang="ko-KR" altLang="en-US" sz="1500" b="0" i="1">
+                              <a:solidFill>
+                                <a:srgbClr val="000000"/>
+                              </a:solidFill>
+                              <a:latin typeface="Cambria Math" panose="02040503050406030204" pitchFamily="18" charset="0"/>
+                              <a:ea typeface="Pretendard"/>
+                            </a:rPr>
+                          </m:ctrlPr>
+                        </m:fPr>
+                        <m:num>
+                          <m:sSub>
+                            <m:sSubPr>
+                              <m:ctrlPr>
+                                <a:rPr lang="ko-KR" altLang="en-US" sz="1500" b="0" i="0">
+                                  <a:solidFill>
+                                    <a:srgbClr val="000000"/>
+                                  </a:solidFill>
+                                  <a:latin typeface="Pretendard"/>
+                                  <a:ea typeface="Pretendard"/>
+                                </a:rPr>
+                              </m:ctrlPr>
+                            </m:sSubPr>
+                            <m:e>
+                              <m:r>
+                                <m:rPr>
+                                  <m:nor/>
+                                </m:rPr>
+                                <a:rPr lang="ko-KR" altLang="en-US" sz="1500" b="0" i="0">
+                                  <a:solidFill>
+                                    <a:srgbClr val="000000"/>
+                                  </a:solidFill>
+                                  <a:latin typeface="Pretendard"/>
+                                  <a:ea typeface="Pretendard"/>
+                                </a:rPr>
+                                <m:t>P</m:t>
+                              </m:r>
+                            </m:e>
+                            <m:sub>
+                              <m:r>
+                                <m:rPr>
+                                  <m:nor/>
+                                </m:rPr>
+                                <a:rPr lang="ko-KR" altLang="en-US" sz="1500" b="0" i="0">
+                                  <a:solidFill>
+                                    <a:srgbClr val="000000"/>
+                                  </a:solidFill>
+                                  <a:latin typeface="Pretendard"/>
+                                  <a:ea typeface="Pretendard"/>
+                                </a:rPr>
+                                <m:t>s</m:t>
+                              </m:r>
+                            </m:sub>
+                          </m:sSub>
+                          <m:r>
+                            <m:rPr>
+                              <m:nor/>
+                            </m:rPr>
+                            <a:rPr lang="ko-KR" altLang="en-US" sz="1500" b="0" i="0">
+                              <a:solidFill>
+                                <a:srgbClr val="000000"/>
+                              </a:solidFill>
+                              <a:latin typeface="Pretendard"/>
+                              <a:ea typeface="Pretendard"/>
+                            </a:rPr>
+                            <m:t>(</m:t>
+                          </m:r>
+                          <m:sSub>
+                            <m:sSubPr>
+                              <m:ctrlPr>
+                                <a:rPr lang="ko-KR" altLang="en-US" sz="1500" b="0" i="0">
+                                  <a:solidFill>
+                                    <a:srgbClr val="000000"/>
+                                  </a:solidFill>
+                                  <a:latin typeface="Pretendard"/>
+                                  <a:ea typeface="Pretendard"/>
+                                </a:rPr>
+                              </m:ctrlPr>
+                            </m:sSubPr>
+                            <m:e>
+                              <m:r>
+                                <m:rPr>
+                                  <m:nor/>
+                                </m:rPr>
+                                <a:rPr lang="ko-KR" altLang="en-US" sz="1500" b="0" i="0">
+                                  <a:solidFill>
+                                    <a:srgbClr val="000000"/>
+                                  </a:solidFill>
+                                  <a:latin typeface="Pretendard"/>
+                                  <a:ea typeface="Pretendard"/>
+                                </a:rPr>
+                                <m:t>T</m:t>
+                              </m:r>
+                            </m:e>
+                            <m:sub>
+                              <m:r>
+                                <m:rPr>
+                                  <m:nor/>
+                                </m:rPr>
+                                <a:rPr lang="ko-KR" altLang="en-US" sz="1500" b="0" i="0">
+                                  <a:solidFill>
+                                    <a:srgbClr val="000000"/>
+                                  </a:solidFill>
+                                  <a:latin typeface="Pretendard"/>
+                                  <a:ea typeface="Pretendard"/>
+                                </a:rPr>
+                                <m:t>벽</m:t>
+                              </m:r>
+                            </m:sub>
+                          </m:sSub>
+                          <m:r>
+                            <m:rPr>
+                              <m:nor/>
+                            </m:rPr>
+                            <a:rPr lang="ko-KR" altLang="en-US" sz="1500" b="0" i="0">
+                              <a:solidFill>
+                                <a:srgbClr val="000000"/>
+                              </a:solidFill>
+                              <a:latin typeface="Pretendard"/>
+                              <a:ea typeface="Pretendard"/>
+                            </a:rPr>
+                            <m:t>)</m:t>
+                          </m:r>
+                        </m:num>
+                        <m:den>
+                          <m:sSub>
+                            <m:sSubPr>
+                              <m:ctrlPr>
+                                <a:rPr lang="ko-KR" altLang="en-US" sz="1500" b="0" i="0">
+                                  <a:solidFill>
+                                    <a:srgbClr val="000000"/>
+                                  </a:solidFill>
+                                  <a:latin typeface="Pretendard"/>
+                                  <a:ea typeface="Pretendard"/>
+                                </a:rPr>
+                              </m:ctrlPr>
+                            </m:sSubPr>
+                            <m:e>
+                              <m:r>
+                                <m:rPr>
+                                  <m:nor/>
+                                </m:rPr>
+                                <a:rPr lang="ko-KR" altLang="en-US" sz="1500" b="0" i="0">
+                                  <a:solidFill>
+                                    <a:srgbClr val="000000"/>
+                                  </a:solidFill>
+                                  <a:latin typeface="Pretendard"/>
+                                  <a:ea typeface="Pretendard"/>
+                                </a:rPr>
+                                <m:t>P</m:t>
+                              </m:r>
+                            </m:e>
+                            <m:sub>
+                              <m:r>
+                                <m:rPr>
+                                  <m:nor/>
+                                </m:rPr>
+                                <a:rPr lang="ko-KR" altLang="en-US" sz="1500" b="0" i="0">
+                                  <a:solidFill>
+                                    <a:srgbClr val="000000"/>
+                                  </a:solidFill>
+                                  <a:latin typeface="Pretendard"/>
+                                  <a:ea typeface="Pretendard"/>
+                                </a:rPr>
+                                <m:t>s</m:t>
+                              </m:r>
+                            </m:sub>
+                          </m:sSub>
+                          <m:r>
+                            <m:rPr>
+                              <m:nor/>
+                            </m:rPr>
+                            <a:rPr lang="ko-KR" altLang="en-US" sz="1500" b="0" i="0">
+                              <a:solidFill>
+                                <a:srgbClr val="000000"/>
+                              </a:solidFill>
+                              <a:latin typeface="Pretendard"/>
+                              <a:ea typeface="Pretendard"/>
+                            </a:rPr>
+                            <m:t>(</m:t>
+                          </m:r>
+                          <m:sSub>
+                            <m:sSubPr>
+                              <m:ctrlPr>
+                                <a:rPr lang="ko-KR" altLang="en-US" sz="1500" b="0" i="0">
+                                  <a:solidFill>
+                                    <a:srgbClr val="000000"/>
+                                  </a:solidFill>
+                                  <a:latin typeface="Pretendard"/>
+                                  <a:ea typeface="Pretendard"/>
+                                </a:rPr>
+                              </m:ctrlPr>
+                            </m:sSubPr>
+                            <m:e>
+                              <m:r>
+                                <m:rPr>
+                                  <m:nor/>
+                                </m:rPr>
+                                <a:rPr lang="ko-KR" altLang="en-US" sz="1500" b="0" i="0">
+                                  <a:solidFill>
+                                    <a:srgbClr val="000000"/>
+                                  </a:solidFill>
+                                  <a:latin typeface="Pretendard"/>
+                                  <a:ea typeface="Pretendard"/>
+                                </a:rPr>
+                                <m:t>T</m:t>
+                              </m:r>
+                            </m:e>
+                            <m:sub>
+                              <m:r>
+                                <m:rPr>
+                                  <m:nor/>
+                                </m:rPr>
+                                <a:rPr lang="ko-KR" altLang="en-US" sz="1500" b="0" i="0">
+                                  <a:solidFill>
+                                    <a:srgbClr val="000000"/>
+                                  </a:solidFill>
+                                  <a:latin typeface="Pretendard"/>
+                                  <a:ea typeface="Pretendard"/>
+                                </a:rPr>
+                                <m:t>실내</m:t>
+                              </m:r>
+                            </m:sub>
+                          </m:sSub>
+                          <m:r>
+                            <m:rPr>
+                              <m:nor/>
+                            </m:rPr>
+                            <a:rPr lang="ko-KR" altLang="en-US" sz="1500" b="0" i="0">
+                              <a:solidFill>
+                                <a:srgbClr val="000000"/>
+                              </a:solidFill>
+                              <a:latin typeface="Pretendard"/>
+                              <a:ea typeface="Pretendard"/>
+                            </a:rPr>
+                            <m:t>)</m:t>
+                          </m:r>
+                        </m:den>
+                      </m:f>
+                    </m:oMath>
+                  </m:oMathPara>
+                </a14:m>
+                <a:endParaRPr lang="ko-KR" sz="1500"/>
+              </a:p>
+            </p:txBody>
+          </p:sp>
+        </mc:Choice>
+        <mc:Fallback xmlns="">
+          <p:sp>
+            <p:nvSpPr>
+              <p:cNvPr id="15" name="eq3"/>
+              <p:cNvSpPr txBox="1"/>
+              <p:nvPr/>
+            </p:nvSpPr>
+            <p:spPr>
+              <a:xfrm>
+                <a:off x="777240" y="4910328"/>
+                <a:ext cx="3749040" cy="530352"/>
+              </a:xfrm>
+              <a:prstGeom prst="rect">
+                <a:avLst/>
+              </a:prstGeom>
+              <a:noFill/>
+              <a:ln/>
+            </p:spPr>
+            <p:txBody>
+              <a:bodyPr wrap="square" lIns="0" tIns="0" rIns="0" bIns="0" rtlCol="0" anchor="ctr"/>
+              <a:lstStyle/>
+              <a:p>
+                <a:pPr indent="0" marL="0">
+                  <a:buNone/>
+                </a:pPr>
+                <a:r>
+                  <a:rPr lang="en-US" sz="1500" dirty="0">
+                    <a:solidFill>
+                      <a:schemeClr val="tx1"/>
+                    </a:solidFill>
+                  </a:rPr>
+                  <a:t>RH상한 = 80 × Pₛ(T벽) / Pₛ(T실내)</a:t>
+                </a:r>
+                <a:endParaRPr lang="en-US" sz="1500" dirty="0"/>
+              </a:p>
+            </p:txBody>
+          </p:sp>
+        </mc:Fallback>
+      </mc:AlternateContent>
       <p:pic>
         <p:nvPicPr>
-          <p:cNvPr id="16" name="Image 1" descr="클라우드 불필요">    </p:cNvPr>
+          <p:cNvPr id="16" name="Image 1" descr="클라우드 불필요"/>
           <p:cNvPicPr>
             <a:picLocks noChangeAspect="1"/>
           </p:cNvPicPr>
           <p:nvPr/>
         </p:nvPicPr>
         <p:blipFill>
-          <a:blip r:embed="rId2"/>
+          <a:blip r:embed="rId4"/>
           <a:stretch>
             <a:fillRect/>
           </a:stretch>
         </p:blipFill>
         <p:spPr>
           <a:xfrm>
-            <a:off x="777240" y="5532120"/>
+            <a:off x="777240" y="5623560"/>
             <a:ext cx="310896" cy="310896"/>
           </a:xfrm>
           <a:prstGeom prst="rect">
@@ -9136,7 +10089,7 @@
         </p:nvSpPr>
         <p:spPr>
           <a:xfrm>
-            <a:off x="1188720" y="5486400"/>
+            <a:off x="1188720" y="5577840"/>
             <a:ext cx="3383280" cy="594360"/>
           </a:xfrm>
           <a:prstGeom prst="rect">
@@ -9149,16 +10102,30 @@
           <a:bodyPr wrap="square" lIns="0" tIns="0" rIns="0" bIns="0" rtlCol="0" anchor="t"/>
           <a:lstStyle/>
           <a:p>
-            <a:pPr indent="0" marL="0">
+            <a:pPr marL="0" indent="0">
               <a:buNone/>
             </a:pPr>
             <a:r>
               <a:rPr lang="en-US" sz="1200" dirty="0">
                 <a:solidFill>
-                  <a:schemeClr val="tx2"/>
-                </a:solidFill>
-              </a:rPr>
-              <a:t>판단·학습·예측은 모두 DK 안에서. Wi-Fi나 클라우드가 끊겨도 방어는 계속됩니다.</a:t>
+                  <a:schemeClr val="tx1"/>
+                </a:solidFill>
+              </a:rPr>
+              <a:t>판단, 학습, 예측을 모두 DK 안에서 처리함.</a:t>
+            </a:r>
+            <a:endParaRPr lang="en-US" sz="1200" dirty="0"/>
+          </a:p>
+          <a:p>
+            <a:pPr marL="0" indent="0">
+              <a:buNone/>
+            </a:pPr>
+            <a:r>
+              <a:rPr lang="en-US" sz="1200" dirty="0">
+                <a:solidFill>
+                  <a:schemeClr val="tx1"/>
+                </a:solidFill>
+              </a:rPr>
+              <a:t>Wi-Fi나 클라우드가 끊겨도 방어가 계속됨.</a:t>
             </a:r>
             <a:endParaRPr lang="en-US" sz="1200" dirty="0"/>
           </a:p>
@@ -9191,14 +10158,14 @@
       </p:sp>
       <p:pic>
         <p:nvPicPr>
-          <p:cNvPr id="19" name="Image 2" descr="shield">    </p:cNvPr>
+          <p:cNvPr id="19" name="Image 2" descr="shield"/>
           <p:cNvPicPr>
             <a:picLocks noChangeAspect="1"/>
           </p:cNvPicPr>
           <p:nvPr/>
         </p:nvPicPr>
         <p:blipFill>
-          <a:blip r:embed="rId3"/>
+          <a:blip r:embed="rId5"/>
           <a:stretch>
             <a:fillRect/>
           </a:stretch>
@@ -9234,7 +10201,7 @@
           <a:bodyPr wrap="square" lIns="0" tIns="0" rIns="0" bIns="0" rtlCol="0" anchor="t"/>
           <a:lstStyle/>
           <a:p>
-            <a:pPr indent="0" marL="0">
+            <a:pPr marL="0" indent="0">
               <a:buNone/>
             </a:pPr>
             <a:r>
@@ -9248,16 +10215,16 @@
             <a:endParaRPr lang="en-US" sz="1400" dirty="0"/>
           </a:p>
           <a:p>
-            <a:pPr indent="0" marL="0">
+            <a:pPr marL="0" indent="0">
               <a:buNone/>
             </a:pPr>
             <a:r>
               <a:rPr lang="en-US" sz="1300" dirty="0">
                 <a:solidFill>
-                  <a:srgbClr val="6E6E73"/>
-                </a:solidFill>
-              </a:rPr>
-              <a:t>벽 표면 75%(ISO 80 − 불확실성 5%p)에서 가습 정지, 70% 아래에서만 재개</a:t>
+                  <a:schemeClr val="tx1"/>
+                </a:solidFill>
+              </a:rPr>
+              <a:t>벽 표면 75%에서 가습을 멈추고 70% 미만에서만 재개함 (임계 80%에 여유 5%p)</a:t>
             </a:r>
             <a:endParaRPr lang="en-US" sz="1400" dirty="0"/>
           </a:p>
@@ -9290,14 +10257,14 @@
       </p:sp>
       <p:pic>
         <p:nvPicPr>
-          <p:cNvPr id="22" name="Image 3" descr="droplet">    </p:cNvPr>
+          <p:cNvPr id="22" name="Image 3" descr="droplet"/>
           <p:cNvPicPr>
             <a:picLocks noChangeAspect="1"/>
           </p:cNvPicPr>
           <p:nvPr/>
         </p:nvPicPr>
         <p:blipFill>
-          <a:blip r:embed="rId4"/>
+          <a:blip r:embed="rId6"/>
           <a:stretch>
             <a:fillRect/>
           </a:stretch>
@@ -9333,7 +10300,7 @@
           <a:bodyPr wrap="square" lIns="0" tIns="0" rIns="0" bIns="0" rtlCol="0" anchor="t"/>
           <a:lstStyle/>
           <a:p>
-            <a:pPr indent="0" marL="0">
+            <a:pPr marL="0" indent="0">
               <a:buNone/>
             </a:pPr>
             <a:r>
@@ -9347,16 +10314,16 @@
             <a:endParaRPr lang="en-US" sz="1400" dirty="0"/>
           </a:p>
           <a:p>
-            <a:pPr indent="0" marL="0">
+            <a:pPr marL="0" indent="0">
               <a:buNone/>
             </a:pPr>
             <a:r>
               <a:rPr lang="en-US" sz="1300" dirty="0">
                 <a:solidFill>
-                  <a:srgbClr val="6E6E73"/>
-                </a:solidFill>
-              </a:rPr>
-              <a:t>절대습도 6.5 g/㎥ 아래면 가습, 8 g/㎥에서 정지</a:t>
+                  <a:schemeClr val="tx1"/>
+                </a:solidFill>
+              </a:rPr>
+              <a:t>절대습도 6.5 g/㎥ 미만이면 가습하고 8 g/㎥에서 정지함</a:t>
             </a:r>
             <a:endParaRPr lang="en-US" sz="1400" dirty="0"/>
           </a:p>
@@ -9389,14 +10356,14 @@
       </p:sp>
       <p:pic>
         <p:nvPicPr>
-          <p:cNvPr id="25" name="Image 4" descr="fan">    </p:cNvPr>
+          <p:cNvPr id="25" name="Image 4" descr="fan"/>
           <p:cNvPicPr>
             <a:picLocks noChangeAspect="1"/>
           </p:cNvPicPr>
           <p:nvPr/>
         </p:nvPicPr>
         <p:blipFill>
-          <a:blip r:embed="rId5"/>
+          <a:blip r:embed="rId7"/>
           <a:stretch>
             <a:fillRect/>
           </a:stretch>
@@ -9432,7 +10399,7 @@
           <a:bodyPr wrap="square" lIns="0" tIns="0" rIns="0" bIns="0" rtlCol="0" anchor="t"/>
           <a:lstStyle/>
           <a:p>
-            <a:pPr indent="0" marL="0">
+            <a:pPr marL="0" indent="0">
               <a:buNone/>
             </a:pPr>
             <a:r>
@@ -9446,16 +10413,16 @@
             <a:endParaRPr lang="en-US" sz="1400" dirty="0"/>
           </a:p>
           <a:p>
-            <a:pPr indent="0" marL="0">
+            <a:pPr marL="0" indent="0">
               <a:buNone/>
             </a:pPr>
             <a:r>
               <a:rPr lang="en-US" sz="1300" dirty="0">
                 <a:solidFill>
-                  <a:srgbClr val="6E6E73"/>
-                </a:solidFill>
-              </a:rPr>
-              <a:t>가습을 멈춰도 75% 이상이면 0.5초 뒤 선풍기 ON → 벽 표면을 데움</a:t>
+                  <a:schemeClr val="tx1"/>
+                </a:solidFill>
+              </a:rPr>
+              <a:t>가습을 멈춰도 75% 이상이면 0.5초 뒤 선풍기를 켜 벽 표면을 데움</a:t>
             </a:r>
             <a:endParaRPr lang="en-US" sz="1400" dirty="0"/>
           </a:p>
@@ -9488,14 +10455,14 @@
       </p:sp>
       <p:pic>
         <p:nvPicPr>
-          <p:cNvPr id="28" name="Image 5" descr="brain">    </p:cNvPr>
+          <p:cNvPr id="28" name="Image 5" descr="brain"/>
           <p:cNvPicPr>
             <a:picLocks noChangeAspect="1"/>
           </p:cNvPicPr>
           <p:nvPr/>
         </p:nvPicPr>
         <p:blipFill>
-          <a:blip r:embed="rId6"/>
+          <a:blip r:embed="rId8"/>
           <a:stretch>
             <a:fillRect/>
           </a:stretch>
@@ -9531,7 +10498,7 @@
           <a:bodyPr wrap="square" lIns="0" tIns="0" rIns="0" bIns="0" rtlCol="0" anchor="t"/>
           <a:lstStyle/>
           <a:p>
-            <a:pPr indent="0" marL="0">
+            <a:pPr marL="0" indent="0">
               <a:buNone/>
             </a:pPr>
             <a:r>
@@ -9545,16 +10512,16 @@
             <a:endParaRPr lang="en-US" sz="1400" dirty="0"/>
           </a:p>
           <a:p>
-            <a:pPr indent="0" marL="0">
+            <a:pPr marL="0" indent="0">
               <a:buNone/>
             </a:pPr>
             <a:r>
               <a:rPr lang="en-US" sz="1300" dirty="0">
                 <a:solidFill>
-                  <a:srgbClr val="6E6E73"/>
-                </a:solidFill>
-              </a:rPr>
-              <a:t>선풍기 ON 후 3분간 벽 표면 상승폭을 재고(시연 +2.8℃) 끄는 시점을 판단</a:t>
+                  <a:schemeClr val="tx1"/>
+                </a:solidFill>
+              </a:rPr>
+              <a:t>선풍기를 켠 뒤 벽 표면 상승폭을 재고(시연 +2.8℃) 끄는 시점을 판단함</a:t>
             </a:r>
             <a:endParaRPr lang="en-US" sz="1400" dirty="0"/>
           </a:p>
@@ -9587,14 +10554,14 @@
       </p:sp>
       <p:pic>
         <p:nvPicPr>
-          <p:cNvPr id="31" name="Image 6" descr="chart">    </p:cNvPr>
+          <p:cNvPr id="31" name="Image 6" descr="chart"/>
           <p:cNvPicPr>
             <a:picLocks noChangeAspect="1"/>
           </p:cNvPicPr>
           <p:nvPr/>
         </p:nvPicPr>
         <p:blipFill>
-          <a:blip r:embed="rId7"/>
+          <a:blip r:embed="rId9"/>
           <a:stretch>
             <a:fillRect/>
           </a:stretch>
@@ -9630,7 +10597,7 @@
           <a:bodyPr wrap="square" lIns="0" tIns="0" rIns="0" bIns="0" rtlCol="0" anchor="t"/>
           <a:lstStyle/>
           <a:p>
-            <a:pPr indent="0" marL="0">
+            <a:pPr marL="0" indent="0">
               <a:buNone/>
             </a:pPr>
             <a:r>
@@ -9644,16 +10611,16 @@
             <a:endParaRPr lang="en-US" sz="1400" dirty="0"/>
           </a:p>
           <a:p>
-            <a:pPr indent="0" marL="0">
+            <a:pPr marL="0" indent="0">
               <a:buNone/>
             </a:pPr>
             <a:r>
               <a:rPr lang="en-US" sz="1300" dirty="0">
                 <a:solidFill>
-                  <a:srgbClr val="6E6E73"/>
-                </a:solidFill>
-              </a:rPr>
-              <a:t>벽 표면 온도 추세로 임계 80% 도달까지 남은 시간 계산</a:t>
+                  <a:schemeClr val="tx1"/>
+                </a:solidFill>
+              </a:rPr>
+              <a:t>벽 표면 온도 추세로 임계 80% 도달까지 남은 시간을 계산함</a:t>
             </a:r>
             <a:endParaRPr lang="en-US" sz="1400" dirty="0"/>
           </a:p>
@@ -9686,14 +10653,14 @@
       </p:sp>
       <p:pic>
         <p:nvPicPr>
-          <p:cNvPr id="34" name="Image 7" descr="join">    </p:cNvPr>
+          <p:cNvPr id="34" name="Image 7" descr="join"/>
           <p:cNvPicPr>
             <a:picLocks noChangeAspect="1"/>
           </p:cNvPicPr>
           <p:nvPr/>
         </p:nvPicPr>
         <p:blipFill>
-          <a:blip r:embed="rId8"/>
+          <a:blip r:embed="rId10"/>
           <a:stretch>
             <a:fillRect/>
           </a:stretch>
@@ -9729,7 +10696,7 @@
           <a:bodyPr wrap="square" lIns="0" tIns="0" rIns="0" bIns="0" rtlCol="0" anchor="t"/>
           <a:lstStyle/>
           <a:p>
-            <a:pPr indent="0" marL="0">
+            <a:pPr marL="0" indent="0">
               <a:buNone/>
             </a:pPr>
             <a:r>
@@ -9743,16 +10710,16 @@
             <a:endParaRPr lang="en-US" sz="1400" dirty="0"/>
           </a:p>
           <a:p>
-            <a:pPr indent="0" marL="0">
+            <a:pPr marL="0" indent="0">
               <a:buNone/>
             </a:pPr>
             <a:r>
               <a:rPr lang="en-US" sz="1300" dirty="0">
                 <a:solidFill>
-                  <a:srgbClr val="6E6E73"/>
-                </a:solidFill>
-              </a:rPr>
-              <a:t>선풍기로 넓힌 구간 안에서 선풍기를 켠 채 가습 재개 (②·③ 동시 충족)</a:t>
+                  <a:schemeClr val="tx1"/>
+                </a:solidFill>
+              </a:rPr>
+              <a:t>선풍기로 넓힌 구간 안에서 선풍기를 켠 채 가습을 재개함 (②, ③ 동시 충족)</a:t>
             </a:r>
             <a:endParaRPr lang="en-US" sz="1400" dirty="0"/>
           </a:p>
@@ -9785,14 +10752,14 @@
       </p:sp>
       <p:pic>
         <p:nvPicPr>
-          <p:cNvPr id="37" name="Image 8" descr="user">    </p:cNvPr>
+          <p:cNvPr id="37" name="Image 8" descr="user"/>
           <p:cNvPicPr>
             <a:picLocks noChangeAspect="1"/>
           </p:cNvPicPr>
           <p:nvPr/>
         </p:nvPicPr>
         <p:blipFill>
-          <a:blip r:embed="rId9"/>
+          <a:blip r:embed="rId11"/>
           <a:stretch>
             <a:fillRect/>
           </a:stretch>
@@ -9828,7 +10795,7 @@
           <a:bodyPr wrap="square" lIns="0" tIns="0" rIns="0" bIns="0" rtlCol="0" anchor="t"/>
           <a:lstStyle/>
           <a:p>
-            <a:pPr indent="0" marL="0">
+            <a:pPr marL="0" indent="0">
               <a:buNone/>
             </a:pPr>
             <a:r>
@@ -9842,16 +10809,16 @@
             <a:endParaRPr lang="en-US" sz="1400" dirty="0"/>
           </a:p>
           <a:p>
-            <a:pPr indent="0" marL="0">
+            <a:pPr marL="0" indent="0">
               <a:buNone/>
             </a:pPr>
             <a:r>
               <a:rPr lang="en-US" sz="1300" dirty="0">
                 <a:solidFill>
-                  <a:srgbClr val="6E6E73"/>
-                </a:solidFill>
-              </a:rPr>
-              <a:t>앱·버튼 조작은 30분 존중, 벽 표면 80%를 넘으면 방어 우선</a:t>
+                  <a:schemeClr val="tx1"/>
+                </a:solidFill>
+              </a:rPr>
+              <a:t>앱과 버튼 조작은 30분간 존중하고, 벽 표면 80%를 넘으면 방어를 우선함</a:t>
             </a:r>
             <a:endParaRPr lang="en-US" sz="1400" dirty="0"/>
           </a:p>
@@ -9884,14 +10851,14 @@
       </p:sp>
       <p:pic>
         <p:nvPicPr>
-          <p:cNvPr id="40" name="Image 9" descr="history">    </p:cNvPr>
+          <p:cNvPr id="40" name="Image 9" descr="history"/>
           <p:cNvPicPr>
             <a:picLocks noChangeAspect="1"/>
           </p:cNvPicPr>
           <p:nvPr/>
         </p:nvPicPr>
         <p:blipFill>
-          <a:blip r:embed="rId10"/>
+          <a:blip r:embed="rId12"/>
           <a:stretch>
             <a:fillRect/>
           </a:stretch>
@@ -9927,7 +10894,7 @@
           <a:bodyPr wrap="square" lIns="0" tIns="0" rIns="0" bIns="0" rtlCol="0" anchor="t"/>
           <a:lstStyle/>
           <a:p>
-            <a:pPr indent="0" marL="0">
+            <a:pPr marL="0" indent="0">
               <a:buNone/>
             </a:pPr>
             <a:r>
@@ -9941,16 +10908,16 @@
             <a:endParaRPr lang="en-US" sz="1400" dirty="0"/>
           </a:p>
           <a:p>
-            <a:pPr indent="0" marL="0">
+            <a:pPr marL="0" indent="0">
               <a:buNone/>
             </a:pPr>
             <a:r>
               <a:rPr lang="en-US" sz="1300" dirty="0">
                 <a:solidFill>
-                  <a:srgbClr val="6E6E73"/>
-                </a:solidFill>
-              </a:rPr>
-              <a:t>벽 표면 80% 이상이었던 시간을 누적 위험 시간으로 기록</a:t>
+                  <a:schemeClr val="tx1"/>
+                </a:solidFill>
+              </a:rPr>
+              <a:t>벽 표면 80% 이상이었던 시간을 누적 위험 시간으로 기록함</a:t>
             </a:r>
             <a:endParaRPr lang="en-US" sz="1400" dirty="0"/>
           </a:p>
@@ -9958,7 +10925,7 @@
       </p:sp>
       <p:sp>
         <p:nvSpPr>
-          <p:cNvPr id="25" name="Slide Number Placeholder 0"/>
+          <p:cNvPr id="42" name="Slide Number Placeholder 0"/>
           <p:cNvSpPr>
             <a:spLocks noGrp="1"/>
           </p:cNvSpPr>
@@ -9976,7 +10943,7 @@
           </a:prstGeom>
           <a:extLst>
             <a:ext uri="{C572A759-6A51-4108-AA02-DFA0A04FC94B}">
-              <ma14:wrappingTextBoxFlag xmlns:ma14="http://schemas.microsoft.com/office/mac/drawingml/2011/main" val="0"/>
+              <ma14:wrappingTextBoxFlag xmlns:ma14="http://schemas.microsoft.com/office/mac/drawingml/2011/main" xmlns="" val="0"/>
             </a:ext>
           </a:extLst>
         </p:spPr>
@@ -9986,7 +10953,7 @@
             <a:lvl1pPr>
               <a:defRPr sz="1000">
                 <a:solidFill>
-                  <a:schemeClr val="tx2"/>
+                  <a:schemeClr val="tx1"/>
                 </a:solidFill>
               </a:defRPr>
             </a:lvl1pPr>
@@ -9994,7 +10961,7 @@
           <a:p>
             <a:pPr algn="r"/>
             <a:fld id="{F7021451-1387-4CA6-816F-3879F97B5CBC}" type="slidenum">
-              <a:rPr b="0" lang="en-US"/>
+              <a:rPr lang="en-US" b="0"/>
               <a:t>4</a:t>
             </a:fld>
             <a:endParaRPr lang="en-US"/>
@@ -10029,9 +10996,11 @@
       <p:sp>
         <p:nvSpPr>
           <p:cNvPr id="2" name="Text 0"/>
-          <p:cNvSpPr/>
+          <p:cNvSpPr>
+            <a:spLocks noGrp="1"/>
+          </p:cNvSpPr>
           <p:nvPr>
-            <p:ph idx="100" type="body" hasCustomPrompt="1"/>
+            <p:ph type="body" idx="100" hasCustomPrompt="1"/>
           </p:nvPr>
         </p:nvSpPr>
         <p:spPr>
@@ -10049,13 +11018,13 @@
           <a:bodyPr wrap="square" lIns="0" tIns="0" rIns="0" bIns="0" rtlCol="0"/>
           <a:lstStyle/>
           <a:p>
-            <a:pPr indent="0" marL="0">
+            <a:pPr marL="0" indent="0">
               <a:buNone/>
             </a:pPr>
             <a:r>
               <a:rPr lang="en-US" sz="1300" b="1" dirty="0">
                 <a:solidFill>
-                  <a:schemeClr val="accent1"/>
+                  <a:schemeClr val="tx1"/>
                 </a:solidFill>
               </a:rPr>
               <a:t>시연 내용</a:t>
@@ -10067,9 +11036,11 @@
       <p:sp>
         <p:nvSpPr>
           <p:cNvPr id="3" name="Text 0"/>
-          <p:cNvSpPr/>
+          <p:cNvSpPr>
+            <a:spLocks noGrp="1"/>
+          </p:cNvSpPr>
           <p:nvPr>
-            <p:ph idx="101" type="title" hasCustomPrompt="1"/>
+            <p:ph type="title" idx="101" hasCustomPrompt="1"/>
           </p:nvPr>
         </p:nvSpPr>
         <p:spPr>
@@ -10087,7 +11058,7 @@
           <a:bodyPr wrap="square" lIns="0" tIns="0" rIns="0" bIns="0" rtlCol="0" anchor="t"/>
           <a:lstStyle/>
           <a:p>
-            <a:pPr algn="l" indent="0" marL="0">
+            <a:pPr marL="0" indent="0" algn="l">
               <a:buNone/>
             </a:pPr>
             <a:r>
@@ -10096,7 +11067,7 @@
                   <a:schemeClr val="tx1"/>
                 </a:solidFill>
               </a:rPr>
-              <a:t>한파의 밤 10시간을 60초에: 누적 위험 시간 0분</a:t>
+              <a:t>한파의 밤 10시간을 60초로 재현해 누적 위험 시간 0분을 달성함</a:t>
             </a:r>
             <a:endParaRPr lang="en-US" sz="3000" dirty="0"/>
           </a:p>
@@ -10104,14 +11075,14 @@
       </p:sp>
       <p:pic>
         <p:nvPicPr>
-          <p:cNvPr id="4" name="Image 0" descr="시연 화면: 가상 침실과 판단 노드">    </p:cNvPr>
+          <p:cNvPr id="4" name="Image 0" descr="시연 화면: 가상 침실과 판단 노드"/>
           <p:cNvPicPr>
             <a:picLocks noChangeAspect="1"/>
           </p:cNvPicPr>
           <p:nvPr/>
         </p:nvPicPr>
         <p:blipFill>
-          <a:blip r:embed="rId1"/>
+          <a:blip r:embed="rId3"/>
           <a:stretch>
             <a:fillRect/>
           </a:stretch>
@@ -10147,16 +11118,16 @@
           <a:bodyPr wrap="square" lIns="0" tIns="0" rIns="0" bIns="0" rtlCol="0" anchor="t"/>
           <a:lstStyle/>
           <a:p>
-            <a:pPr indent="0" marL="0">
+            <a:pPr marL="0" indent="0">
               <a:buNone/>
             </a:pPr>
             <a:r>
               <a:rPr lang="en-US" sz="1100" dirty="0">
                 <a:solidFill>
-                  <a:schemeClr val="tx2"/>
-                </a:solidFill>
-              </a:rPr>
-              <a:t>실제 보드를 연결한 03:00 화면 · 실내·벽 표면 습도, 노드의 판단, 가습기·선풍기, 허브 보고가 한 화면에</a:t>
+                  <a:schemeClr val="tx1"/>
+                </a:solidFill>
+              </a:rPr>
+              <a:t>실제 보드를 연결한 03:00 화면. 실내와 벽 표면 습도, 노드의 판단, 가습기와 선풍기, 허브 보고를 한 화면에 보여줌</a:t>
             </a:r>
             <a:endParaRPr lang="en-US" sz="1100" dirty="0"/>
           </a:p>
@@ -10189,14 +11160,14 @@
       </p:sp>
       <p:pic>
         <p:nvPicPr>
-          <p:cNvPr id="7" name="Image 1" descr="shield">    </p:cNvPr>
+          <p:cNvPr id="7" name="Image 1" descr="shield"/>
           <p:cNvPicPr>
             <a:picLocks noChangeAspect="1"/>
           </p:cNvPicPr>
           <p:nvPr/>
         </p:nvPicPr>
         <p:blipFill>
-          <a:blip r:embed="rId2"/>
+          <a:blip r:embed="rId4"/>
           <a:stretch>
             <a:fillRect/>
           </a:stretch>
@@ -10232,13 +11203,13 @@
           <a:bodyPr wrap="square" lIns="0" tIns="0" rIns="0" bIns="0" rtlCol="0" anchor="t"/>
           <a:lstStyle/>
           <a:p>
-            <a:pPr indent="0" marL="0">
+            <a:pPr marL="0" indent="0">
               <a:buNone/>
             </a:pPr>
             <a:r>
               <a:rPr lang="en-US" sz="3000" b="1" dirty="0">
                 <a:solidFill>
-                  <a:schemeClr val="accent1"/>
+                  <a:schemeClr val="tx1"/>
                 </a:solidFill>
               </a:rPr>
               <a:t>0분</a:t>
@@ -10268,16 +11239,16 @@
           <a:bodyPr wrap="square" lIns="0" tIns="0" rIns="0" bIns="0" rtlCol="0" anchor="t"/>
           <a:lstStyle/>
           <a:p>
-            <a:pPr indent="0" marL="0">
+            <a:pPr marL="0" indent="0">
               <a:buNone/>
             </a:pPr>
             <a:r>
               <a:rPr lang="en-US" sz="1200" dirty="0">
                 <a:solidFill>
-                  <a:schemeClr val="tx2"/>
-                </a:solidFill>
-              </a:rPr>
-              <a:t>누적 위험 시간 · 우리 노드 (실제 보드)</a:t>
+                  <a:schemeClr val="tx1"/>
+                </a:solidFill>
+              </a:rPr>
+              <a:t>누적 위험 시간, 우리 노드 (실제 보드)</a:t>
             </a:r>
             <a:endParaRPr lang="en-US" sz="1200" dirty="0"/>
           </a:p>
@@ -10310,14 +11281,14 @@
       </p:sp>
       <p:pic>
         <p:nvPicPr>
-          <p:cNvPr id="11" name="Image 2" descr="alert">    </p:cNvPr>
+          <p:cNvPr id="11" name="Image 2" descr="alert"/>
           <p:cNvPicPr>
             <a:picLocks noChangeAspect="1"/>
           </p:cNvPicPr>
           <p:nvPr/>
         </p:nvPicPr>
         <p:blipFill>
-          <a:blip r:embed="rId3"/>
+          <a:blip r:embed="rId5"/>
           <a:stretch>
             <a:fillRect/>
           </a:stretch>
@@ -10353,13 +11324,13 @@
           <a:bodyPr wrap="square" lIns="0" tIns="0" rIns="0" bIns="0" rtlCol="0" anchor="t"/>
           <a:lstStyle/>
           <a:p>
-            <a:pPr indent="0" marL="0">
+            <a:pPr marL="0" indent="0">
               <a:buNone/>
             </a:pPr>
             <a:r>
               <a:rPr lang="en-US" sz="3000" b="1" dirty="0">
                 <a:solidFill>
-                  <a:schemeClr val="accent3"/>
+                  <a:schemeClr val="tx1"/>
                 </a:solidFill>
               </a:rPr>
               <a:t>8시간 38분</a:t>
@@ -10389,16 +11360,16 @@
           <a:bodyPr wrap="square" lIns="0" tIns="0" rIns="0" bIns="0" rtlCol="0" anchor="t"/>
           <a:lstStyle/>
           <a:p>
-            <a:pPr indent="0" marL="0">
+            <a:pPr marL="0" indent="0">
               <a:buNone/>
             </a:pPr>
             <a:r>
               <a:rPr lang="en-US" sz="1200" dirty="0">
                 <a:solidFill>
-                  <a:schemeClr val="tx2"/>
-                </a:solidFill>
-              </a:rPr>
-              <a:t>같은 밤 · 일반 가습기(60% 목표)였다면</a:t>
+                  <a:schemeClr val="tx1"/>
+                </a:solidFill>
+              </a:rPr>
+              <a:t>같은 밤 일반 가습기(60% 목표)였다면</a:t>
             </a:r>
             <a:endParaRPr lang="en-US" sz="1200" dirty="0"/>
           </a:p>
@@ -10431,14 +11402,14 @@
       </p:sp>
       <p:pic>
         <p:nvPicPr>
-          <p:cNvPr id="15" name="Image 3" descr="droplet">    </p:cNvPr>
+          <p:cNvPr id="15" name="Image 3" descr="droplet"/>
           <p:cNvPicPr>
             <a:picLocks noChangeAspect="1"/>
           </p:cNvPicPr>
           <p:nvPr/>
         </p:nvPicPr>
         <p:blipFill>
-          <a:blip r:embed="rId4"/>
+          <a:blip r:embed="rId6"/>
           <a:stretch>
             <a:fillRect/>
           </a:stretch>
@@ -10474,7 +11445,7 @@
           <a:bodyPr wrap="square" lIns="0" tIns="0" rIns="0" bIns="0" rtlCol="0" anchor="t"/>
           <a:lstStyle/>
           <a:p>
-            <a:pPr indent="0" marL="0">
+            <a:pPr marL="0" indent="0">
               <a:buNone/>
             </a:pPr>
             <a:r>
@@ -10483,7 +11454,7 @@
                   <a:schemeClr val="tx1"/>
                 </a:solidFill>
               </a:rPr>
-              <a:t>77% / 119%</a:t>
+              <a:t>78% / 119%</a:t>
             </a:r>
             <a:endParaRPr lang="en-US" sz="3000" dirty="0"/>
           </a:p>
@@ -10510,16 +11481,16 @@
           <a:bodyPr wrap="square" lIns="0" tIns="0" rIns="0" bIns="0" rtlCol="0" anchor="t"/>
           <a:lstStyle/>
           <a:p>
-            <a:pPr indent="0" marL="0">
+            <a:pPr marL="0" indent="0">
               <a:buNone/>
             </a:pPr>
             <a:r>
               <a:rPr lang="en-US" sz="1200" dirty="0">
                 <a:solidFill>
-                  <a:schemeClr val="tx2"/>
-                </a:solidFill>
-              </a:rPr>
-              <a:t>최고 벽 표면 습도 · 우리 노드 / 일반 가습기</a:t>
+                  <a:schemeClr val="tx1"/>
+                </a:solidFill>
+              </a:rPr>
+              <a:t>최고 벽 표면 습도 (우리 노드 / 일반 가습기)</a:t>
             </a:r>
             <a:endParaRPr lang="en-US" sz="1200" dirty="0"/>
           </a:p>
@@ -10552,14 +11523,14 @@
       </p:sp>
       <p:pic>
         <p:nvPicPr>
-          <p:cNvPr id="19" name="Image 4" descr="fan">    </p:cNvPr>
+          <p:cNvPr id="19" name="Image 4" descr="fan"/>
           <p:cNvPicPr>
             <a:picLocks noChangeAspect="1"/>
           </p:cNvPicPr>
           <p:nvPr/>
         </p:nvPicPr>
         <p:blipFill>
-          <a:blip r:embed="rId5"/>
+          <a:blip r:embed="rId7"/>
           <a:stretch>
             <a:fillRect/>
           </a:stretch>
@@ -10595,7 +11566,7 @@
           <a:bodyPr wrap="square" lIns="0" tIns="0" rIns="0" bIns="0" rtlCol="0" anchor="t"/>
           <a:lstStyle/>
           <a:p>
-            <a:pPr indent="0" marL="0">
+            <a:pPr marL="0" indent="0">
               <a:buNone/>
             </a:pPr>
             <a:r>
@@ -10631,13 +11602,13 @@
           <a:bodyPr wrap="square" lIns="0" tIns="0" rIns="0" bIns="0" rtlCol="0" anchor="t"/>
           <a:lstStyle/>
           <a:p>
-            <a:pPr indent="0" marL="0">
+            <a:pPr marL="0" indent="0">
               <a:buNone/>
             </a:pPr>
             <a:r>
               <a:rPr lang="en-US" sz="1200" dirty="0">
                 <a:solidFill>
-                  <a:schemeClr val="tx2"/>
+                  <a:schemeClr val="tx1"/>
                 </a:solidFill>
               </a:rPr>
               <a:t>노드가 학습한 선풍기 효과</a:t>
@@ -10715,7 +11686,7 @@
           <a:bodyPr wrap="square" lIns="0" tIns="0" rIns="0" bIns="0" rtlCol="0" anchor="t"/>
           <a:lstStyle/>
           <a:p>
-            <a:pPr indent="0" marL="0">
+            <a:pPr marL="0" indent="0">
               <a:buNone/>
             </a:pPr>
             <a:r>
@@ -10729,13 +11700,13 @@
             <a:endParaRPr lang="en-US" sz="1200" dirty="0"/>
           </a:p>
           <a:p>
-            <a:pPr indent="0" marL="0">
+            <a:pPr marL="0" indent="0">
               <a:buNone/>
             </a:pPr>
             <a:r>
               <a:rPr lang="en-US" sz="1200" dirty="0">
                 <a:solidFill>
-                  <a:srgbClr val="6E6E73"/>
+                  <a:schemeClr val="tx1"/>
                 </a:solidFill>
               </a:rPr>
               <a:t>건조 → 가습 시작</a:t>
@@ -10790,7 +11761,7 @@
           <a:bodyPr wrap="square" lIns="0" tIns="0" rIns="0" bIns="0" rtlCol="0" anchor="t"/>
           <a:lstStyle/>
           <a:p>
-            <a:pPr indent="0" marL="0">
+            <a:pPr marL="0" indent="0">
               <a:buNone/>
             </a:pPr>
             <a:r>
@@ -10799,18 +11770,18 @@
                   <a:schemeClr val="tx1"/>
                 </a:solidFill>
               </a:rPr>
-              <a:t>01:05</a:t>
+              <a:t>01:00</a:t>
             </a:r>
             <a:endParaRPr lang="en-US" sz="1200" dirty="0"/>
           </a:p>
           <a:p>
-            <a:pPr indent="0" marL="0">
+            <a:pPr marL="0" indent="0">
               <a:buNone/>
             </a:pPr>
             <a:r>
               <a:rPr lang="en-US" sz="1200" dirty="0">
                 <a:solidFill>
-                  <a:srgbClr val="6E6E73"/>
+                  <a:schemeClr val="tx1"/>
                 </a:solidFill>
               </a:rPr>
               <a:t>표면 75% → 가습 정지</a:t>
@@ -10865,7 +11836,7 @@
           <a:bodyPr wrap="square" lIns="0" tIns="0" rIns="0" bIns="0" rtlCol="0" anchor="t"/>
           <a:lstStyle/>
           <a:p>
-            <a:pPr indent="0" marL="0">
+            <a:pPr marL="0" indent="0">
               <a:buNone/>
             </a:pPr>
             <a:r>
@@ -10879,16 +11850,16 @@
             <a:endParaRPr lang="en-US" sz="1200" dirty="0"/>
           </a:p>
           <a:p>
-            <a:pPr indent="0" marL="0">
+            <a:pPr marL="0" indent="0">
               <a:buNone/>
             </a:pPr>
             <a:r>
               <a:rPr lang="en-US" sz="1200" dirty="0">
                 <a:solidFill>
-                  <a:srgbClr val="6E6E73"/>
-                </a:solidFill>
-              </a:rPr>
-              <a:t>선풍기 ON · 효과 학습</a:t>
+                  <a:schemeClr val="tx1"/>
+                </a:solidFill>
+              </a:rPr>
+              <a:t>선풍기 ON, 효과 학습</a:t>
             </a:r>
             <a:endParaRPr lang="en-US" sz="1200" dirty="0"/>
           </a:p>
@@ -10940,7 +11911,7 @@
           <a:bodyPr wrap="square" lIns="0" tIns="0" rIns="0" bIns="0" rtlCol="0" anchor="t"/>
           <a:lstStyle/>
           <a:p>
-            <a:pPr indent="0" marL="0">
+            <a:pPr marL="0" indent="0">
               <a:buNone/>
             </a:pPr>
             <a:r>
@@ -10949,18 +11920,18 @@
                   <a:schemeClr val="tx1"/>
                 </a:solidFill>
               </a:rPr>
-              <a:t>02:45~</a:t>
+              <a:t>02:55~</a:t>
             </a:r>
             <a:endParaRPr lang="en-US" sz="1200" dirty="0"/>
           </a:p>
           <a:p>
-            <a:pPr indent="0" marL="0">
+            <a:pPr marL="0" indent="0">
               <a:buNone/>
             </a:pPr>
             <a:r>
               <a:rPr lang="en-US" sz="1200" dirty="0">
                 <a:solidFill>
-                  <a:srgbClr val="6E6E73"/>
+                  <a:schemeClr val="tx1"/>
                 </a:solidFill>
               </a:rPr>
               <a:t>선풍기 켠 채 가습</a:t>
@@ -11015,7 +11986,7 @@
           <a:bodyPr wrap="square" lIns="0" tIns="0" rIns="0" bIns="0" rtlCol="0" anchor="t"/>
           <a:lstStyle/>
           <a:p>
-            <a:pPr indent="0" marL="0">
+            <a:pPr marL="0" indent="0">
               <a:buNone/>
             </a:pPr>
             <a:r>
@@ -11029,13 +12000,13 @@
             <a:endParaRPr lang="en-US" sz="1200" dirty="0"/>
           </a:p>
           <a:p>
-            <a:pPr indent="0" marL="0">
+            <a:pPr marL="0" indent="0">
               <a:buNone/>
             </a:pPr>
             <a:r>
               <a:rPr lang="en-US" sz="1200" dirty="0">
                 <a:solidFill>
-                  <a:srgbClr val="6E6E73"/>
+                  <a:schemeClr val="tx1"/>
                 </a:solidFill>
               </a:rPr>
               <a:t>벽 회복 → 선풍기 OFF</a:t>
@@ -11046,7 +12017,7 @@
       </p:sp>
       <p:sp>
         <p:nvSpPr>
-          <p:cNvPr id="25" name="Slide Number Placeholder 0"/>
+          <p:cNvPr id="33" name="Slide Number Placeholder 0"/>
           <p:cNvSpPr>
             <a:spLocks noGrp="1"/>
           </p:cNvSpPr>
@@ -11064,7 +12035,7 @@
           </a:prstGeom>
           <a:extLst>
             <a:ext uri="{C572A759-6A51-4108-AA02-DFA0A04FC94B}">
-              <ma14:wrappingTextBoxFlag xmlns:ma14="http://schemas.microsoft.com/office/mac/drawingml/2011/main" val="0"/>
+              <ma14:wrappingTextBoxFlag xmlns:ma14="http://schemas.microsoft.com/office/mac/drawingml/2011/main" xmlns="" val="0"/>
             </a:ext>
           </a:extLst>
         </p:spPr>
@@ -11074,7 +12045,7 @@
             <a:lvl1pPr>
               <a:defRPr sz="1000">
                 <a:solidFill>
-                  <a:schemeClr val="tx2"/>
+                  <a:schemeClr val="tx1"/>
                 </a:solidFill>
               </a:defRPr>
             </a:lvl1pPr>
@@ -11082,7 +12053,7 @@
           <a:p>
             <a:pPr algn="r"/>
             <a:fld id="{F7021451-1387-4CA6-816F-3879F97B5CBC}" type="slidenum">
-              <a:rPr b="0" lang="en-US"/>
+              <a:rPr lang="en-US" b="0"/>
               <a:t>5</a:t>
             </a:fld>
             <a:endParaRPr lang="en-US"/>
@@ -11102,13 +12073,13 @@
   <a:themeElements>
     <a:clrScheme name="Bedroom Node">
       <a:dk1>
-        <a:srgbClr val="1D1D1F"/>
+        <a:srgbClr val="000000"/>
       </a:dk1>
       <a:lt1>
         <a:srgbClr val="FFFFFF"/>
       </a:lt1>
       <a:dk2>
-        <a:srgbClr val="6E6E73"/>
+        <a:srgbClr val="000000"/>
       </a:dk2>
       <a:lt2>
         <a:srgbClr val="F5F5F7"/>
@@ -11135,16 +12106,16 @@
         <a:srgbClr val="0066CC"/>
       </a:hlink>
       <a:folHlink>
-        <a:srgbClr val="6E6E73"/>
+        <a:srgbClr val="000000"/>
       </a:folHlink>
     </a:clrScheme>
     <a:fontScheme name="Bedroom Node">
       <a:majorFont>
         <a:latin typeface="Pretendard"/>
-        <a:ea typeface=""/>
+        <a:ea typeface="Pretendard"/>
         <a:cs typeface=""/>
         <a:font script="Jpan" typeface="游ゴシック Light"/>
-        <a:font script="Hang" typeface="맑은 고딕"/>
+        <a:font script="Hang" typeface="Pretendard"/>
         <a:font script="Hans" typeface="等线 Light"/>
         <a:font script="Hant" typeface="新細明體"/>
         <a:font script="Arab" typeface="Times New Roman"/>
@@ -11193,10 +12164,10 @@
       </a:majorFont>
       <a:minorFont>
         <a:latin typeface="Pretendard"/>
-        <a:ea typeface=""/>
+        <a:ea typeface="Pretendard"/>
         <a:cs typeface=""/>
         <a:font script="Jpan" typeface="游ゴシック"/>
-        <a:font script="Hang" typeface="맑은 고딕"/>
+        <a:font script="Hang" typeface="Pretendard"/>
         <a:font script="Hans" typeface="等线"/>
         <a:font script="Hant" typeface="新細明體"/>
         <a:font script="Arab" typeface="Arial"/>
@@ -11390,4 +12361,319 @@
     </a:ext>
   </a:extLst>
 </a:theme>
+</file>
+
+<file path=ppt/theme/theme2.xml><?xml version="1.0" encoding="utf-8"?>
+<a:theme xmlns:a="http://schemas.openxmlformats.org/drawingml/2006/main" name="Office 테마">
+  <a:themeElements>
+    <a:clrScheme name="Office">
+      <a:dk1>
+        <a:sysClr val="windowText" lastClr="000000"/>
+      </a:dk1>
+      <a:lt1>
+        <a:sysClr val="window" lastClr="FFFFFF"/>
+      </a:lt1>
+      <a:dk2>
+        <a:srgbClr val="0E2841"/>
+      </a:dk2>
+      <a:lt2>
+        <a:srgbClr val="E8E8E8"/>
+      </a:lt2>
+      <a:accent1>
+        <a:srgbClr val="156082"/>
+      </a:accent1>
+      <a:accent2>
+        <a:srgbClr val="E97132"/>
+      </a:accent2>
+      <a:accent3>
+        <a:srgbClr val="196B24"/>
+      </a:accent3>
+      <a:accent4>
+        <a:srgbClr val="0F9ED5"/>
+      </a:accent4>
+      <a:accent5>
+        <a:srgbClr val="A02B93"/>
+      </a:accent5>
+      <a:accent6>
+        <a:srgbClr val="4EA72E"/>
+      </a:accent6>
+      <a:hlink>
+        <a:srgbClr val="467886"/>
+      </a:hlink>
+      <a:folHlink>
+        <a:srgbClr val="96607D"/>
+      </a:folHlink>
+    </a:clrScheme>
+    <a:fontScheme name="Office">
+      <a:majorFont>
+        <a:latin typeface="맑은 고딕" panose="02110004020202020204"/>
+        <a:ea typeface=""/>
+        <a:cs typeface=""/>
+        <a:font script="Jpan" typeface="游ゴシック Light"/>
+        <a:font script="Hang" typeface="맑은 고딕"/>
+        <a:font script="Hans" typeface="等线 Light"/>
+        <a:font script="Hant" typeface="新細明體"/>
+        <a:font script="Arab" typeface="Times New Roman"/>
+        <a:font script="Hebr" typeface="Times New Roman"/>
+        <a:font script="Thai" typeface="Angsana New"/>
+        <a:font script="Ethi" typeface="Nyala"/>
+        <a:font script="Beng" typeface="Vrinda"/>
+        <a:font script="Gujr" typeface="Shruti"/>
+        <a:font script="Khmr" typeface="MoolBoran"/>
+        <a:font script="Knda" typeface="Tunga"/>
+        <a:font script="Guru" typeface="Raavi"/>
+        <a:font script="Cans" typeface="Euphemia"/>
+        <a:font script="Cher" typeface="Plantagenet Cherokee"/>
+        <a:font script="Yiii" typeface="Microsoft Yi Baiti"/>
+        <a:font script="Tibt" typeface="Microsoft Himalaya"/>
+        <a:font script="Thaa" typeface="MV Boli"/>
+        <a:font script="Deva" typeface="Mangal"/>
+        <a:font script="Telu" typeface="Gautami"/>
+        <a:font script="Taml" typeface="Latha"/>
+        <a:font script="Syrc" typeface="Estrangelo Edessa"/>
+        <a:font script="Orya" typeface="Kalinga"/>
+        <a:font script="Mlym" typeface="Kartika"/>
+        <a:font script="Laoo" typeface="DokChampa"/>
+        <a:font script="Sinh" typeface="Iskoola Pota"/>
+        <a:font script="Mong" typeface="Mongolian Baiti"/>
+        <a:font script="Viet" typeface="Times New Roman"/>
+        <a:font script="Uigh" typeface="Microsoft Uighur"/>
+        <a:font script="Geor" typeface="Sylfaen"/>
+        <a:font script="Armn" typeface="Arial"/>
+        <a:font script="Bugi" typeface="Leelawadee UI"/>
+        <a:font script="Bopo" typeface="Microsoft JhengHei"/>
+        <a:font script="Java" typeface="Javanese Text"/>
+        <a:font script="Lisu" typeface="Segoe UI"/>
+        <a:font script="Mymr" typeface="Myanmar Text"/>
+        <a:font script="Nkoo" typeface="Ebrima"/>
+        <a:font script="Olck" typeface="Nirmala UI"/>
+        <a:font script="Osma" typeface="Ebrima"/>
+        <a:font script="Phag" typeface="Phagspa"/>
+        <a:font script="Syrn" typeface="Estrangelo Edessa"/>
+        <a:font script="Syrj" typeface="Estrangelo Edessa"/>
+        <a:font script="Syre" typeface="Estrangelo Edessa"/>
+        <a:font script="Sora" typeface="Nirmala UI"/>
+        <a:font script="Tale" typeface="Microsoft Tai Le"/>
+        <a:font script="Talu" typeface="Microsoft New Tai Lue"/>
+        <a:font script="Tfng" typeface="Ebrima"/>
+      </a:majorFont>
+      <a:minorFont>
+        <a:latin typeface="맑은 고딕" panose="02110004020202020204"/>
+        <a:ea typeface=""/>
+        <a:cs typeface=""/>
+        <a:font script="Jpan" typeface="游ゴシック"/>
+        <a:font script="Hang" typeface="맑은 고딕"/>
+        <a:font script="Hans" typeface="等线"/>
+        <a:font script="Hant" typeface="新細明體"/>
+        <a:font script="Arab" typeface="Arial"/>
+        <a:font script="Hebr" typeface="Arial"/>
+        <a:font script="Thai" typeface="Cordia New"/>
+        <a:font script="Ethi" typeface="Nyala"/>
+        <a:font script="Beng" typeface="Vrinda"/>
+        <a:font script="Gujr" typeface="Shruti"/>
+        <a:font script="Khmr" typeface="DaunPenh"/>
+        <a:font script="Knda" typeface="Tunga"/>
+        <a:font script="Guru" typeface="Raavi"/>
+        <a:font script="Cans" typeface="Euphemia"/>
+        <a:font script="Cher" typeface="Plantagenet Cherokee"/>
+        <a:font script="Yiii" typeface="Microsoft Yi Baiti"/>
+        <a:font script="Tibt" typeface="Microsoft Himalaya"/>
+        <a:font script="Thaa" typeface="MV Boli"/>
+        <a:font script="Deva" typeface="Mangal"/>
+        <a:font script="Telu" typeface="Gautami"/>
+        <a:font script="Taml" typeface="Latha"/>
+        <a:font script="Syrc" typeface="Estrangelo Edessa"/>
+        <a:font script="Orya" typeface="Kalinga"/>
+        <a:font script="Mlym" typeface="Kartika"/>
+        <a:font script="Laoo" typeface="DokChampa"/>
+        <a:font script="Sinh" typeface="Iskoola Pota"/>
+        <a:font script="Mong" typeface="Mongolian Baiti"/>
+        <a:font script="Viet" typeface="Arial"/>
+        <a:font script="Uigh" typeface="Microsoft Uighur"/>
+        <a:font script="Geor" typeface="Sylfaen"/>
+        <a:font script="Armn" typeface="Arial"/>
+        <a:font script="Bugi" typeface="Leelawadee UI"/>
+        <a:font script="Bopo" typeface="Microsoft JhengHei"/>
+        <a:font script="Java" typeface="Javanese Text"/>
+        <a:font script="Lisu" typeface="Segoe UI"/>
+        <a:font script="Mymr" typeface="Myanmar Text"/>
+        <a:font script="Nkoo" typeface="Ebrima"/>
+        <a:font script="Olck" typeface="Nirmala UI"/>
+        <a:font script="Osma" typeface="Ebrima"/>
+        <a:font script="Phag" typeface="Phagspa"/>
+        <a:font script="Syrn" typeface="Estrangelo Edessa"/>
+        <a:font script="Syrj" typeface="Estrangelo Edessa"/>
+        <a:font script="Syre" typeface="Estrangelo Edessa"/>
+        <a:font script="Sora" typeface="Nirmala UI"/>
+        <a:font script="Tale" typeface="Microsoft Tai Le"/>
+        <a:font script="Talu" typeface="Microsoft New Tai Lue"/>
+        <a:font script="Tfng" typeface="Ebrima"/>
+      </a:minorFont>
+    </a:fontScheme>
+    <a:fmtScheme name="Office">
+      <a:fillStyleLst>
+        <a:solidFill>
+          <a:schemeClr val="phClr"/>
+        </a:solidFill>
+        <a:gradFill rotWithShape="1">
+          <a:gsLst>
+            <a:gs pos="0">
+              <a:schemeClr val="phClr">
+                <a:lumMod val="110000"/>
+                <a:satMod val="105000"/>
+                <a:tint val="67000"/>
+              </a:schemeClr>
+            </a:gs>
+            <a:gs pos="50000">
+              <a:schemeClr val="phClr">
+                <a:lumMod val="105000"/>
+                <a:satMod val="103000"/>
+                <a:tint val="73000"/>
+              </a:schemeClr>
+            </a:gs>
+            <a:gs pos="100000">
+              <a:schemeClr val="phClr">
+                <a:lumMod val="105000"/>
+                <a:satMod val="109000"/>
+                <a:tint val="81000"/>
+              </a:schemeClr>
+            </a:gs>
+          </a:gsLst>
+          <a:lin ang="5400000" scaled="0"/>
+        </a:gradFill>
+        <a:gradFill rotWithShape="1">
+          <a:gsLst>
+            <a:gs pos="0">
+              <a:schemeClr val="phClr">
+                <a:satMod val="103000"/>
+                <a:lumMod val="102000"/>
+                <a:tint val="94000"/>
+              </a:schemeClr>
+            </a:gs>
+            <a:gs pos="50000">
+              <a:schemeClr val="phClr">
+                <a:satMod val="110000"/>
+                <a:lumMod val="100000"/>
+                <a:shade val="100000"/>
+              </a:schemeClr>
+            </a:gs>
+            <a:gs pos="100000">
+              <a:schemeClr val="phClr">
+                <a:lumMod val="99000"/>
+                <a:satMod val="120000"/>
+                <a:shade val="78000"/>
+              </a:schemeClr>
+            </a:gs>
+          </a:gsLst>
+          <a:lin ang="5400000" scaled="0"/>
+        </a:gradFill>
+      </a:fillStyleLst>
+      <a:lnStyleLst>
+        <a:ln w="12700" cap="flat" cmpd="sng" algn="ctr">
+          <a:solidFill>
+            <a:schemeClr val="phClr"/>
+          </a:solidFill>
+          <a:prstDash val="solid"/>
+          <a:miter lim="800000"/>
+        </a:ln>
+        <a:ln w="19050" cap="flat" cmpd="sng" algn="ctr">
+          <a:solidFill>
+            <a:schemeClr val="phClr"/>
+          </a:solidFill>
+          <a:prstDash val="solid"/>
+          <a:miter lim="800000"/>
+        </a:ln>
+        <a:ln w="25400" cap="flat" cmpd="sng" algn="ctr">
+          <a:solidFill>
+            <a:schemeClr val="phClr"/>
+          </a:solidFill>
+          <a:prstDash val="solid"/>
+          <a:miter lim="800000"/>
+        </a:ln>
+      </a:lnStyleLst>
+      <a:effectStyleLst>
+        <a:effectStyle>
+          <a:effectLst/>
+        </a:effectStyle>
+        <a:effectStyle>
+          <a:effectLst/>
+        </a:effectStyle>
+        <a:effectStyle>
+          <a:effectLst>
+            <a:outerShdw blurRad="57150" dist="19050" dir="5400000" algn="ctr" rotWithShape="0">
+              <a:srgbClr val="000000">
+                <a:alpha val="63000"/>
+              </a:srgbClr>
+            </a:outerShdw>
+          </a:effectLst>
+        </a:effectStyle>
+      </a:effectStyleLst>
+      <a:bgFillStyleLst>
+        <a:solidFill>
+          <a:schemeClr val="phClr"/>
+        </a:solidFill>
+        <a:solidFill>
+          <a:schemeClr val="phClr">
+            <a:tint val="95000"/>
+            <a:satMod val="170000"/>
+          </a:schemeClr>
+        </a:solidFill>
+        <a:gradFill rotWithShape="1">
+          <a:gsLst>
+            <a:gs pos="0">
+              <a:schemeClr val="phClr">
+                <a:tint val="93000"/>
+                <a:satMod val="150000"/>
+                <a:shade val="98000"/>
+                <a:lumMod val="102000"/>
+              </a:schemeClr>
+            </a:gs>
+            <a:gs pos="50000">
+              <a:schemeClr val="phClr">
+                <a:tint val="98000"/>
+                <a:satMod val="130000"/>
+                <a:shade val="90000"/>
+                <a:lumMod val="103000"/>
+              </a:schemeClr>
+            </a:gs>
+            <a:gs pos="100000">
+              <a:schemeClr val="phClr">
+                <a:shade val="63000"/>
+                <a:satMod val="120000"/>
+              </a:schemeClr>
+            </a:gs>
+          </a:gsLst>
+          <a:lin ang="5400000" scaled="0"/>
+        </a:gradFill>
+      </a:bgFillStyleLst>
+    </a:fmtScheme>
+  </a:themeElements>
+  <a:objectDefaults>
+    <a:lnDef>
+      <a:spPr/>
+      <a:bodyPr/>
+      <a:lstStyle/>
+      <a:style>
+        <a:lnRef idx="2">
+          <a:schemeClr val="accent1"/>
+        </a:lnRef>
+        <a:fillRef idx="0">
+          <a:schemeClr val="accent1"/>
+        </a:fillRef>
+        <a:effectRef idx="1">
+          <a:schemeClr val="accent1"/>
+        </a:effectRef>
+        <a:fontRef idx="minor">
+          <a:schemeClr val="tx1"/>
+        </a:fontRef>
+      </a:style>
+    </a:lnDef>
+  </a:objectDefaults>
+  <a:extraClrSchemeLst/>
+  <a:extLst>
+    <a:ext uri="{05A4C25C-085E-4340-85A3-A5531E510DB2}">
+      <thm15:themeFamily xmlns:thm15="http://schemas.microsoft.com/office/thememl/2012/main" name="Office Theme" id="{2E142A2C-CD16-42D6-873A-C26D2A0506FA}" vid="{1BDDFF52-6CD6-40A5-AB3C-68EB2F1E4D0A}"/>
+    </a:ext>
+  </a:extLst>
+</a:theme>
 </file>
--- a/docs/발표자료_침실노드.pptx
+++ b/docs/발표자료_침실노드.pptx
@@ -122,19 +122,19 @@
   <p:extLst>
     <p:ext uri="{521415D9-36F7-43E2-AB2F-B90AF26B5E84}">
       <p14:sectionLst xmlns:p14="http://schemas.microsoft.com/office/powerpoint/2010/main">
-        <p14:section name="핵심 주제" id="{6EE65434-1D3B-C3BC-EE32-BE5F1F28179D}">
+        <p14:section name="핵심 주제" id="{783015BC-E6B8-98A4-26BD-1060C8D1A662}">
           <p14:sldIdLst>
             <p14:sldId id="256"/>
           </p14:sldIdLst>
         </p14:section>
-        <p14:section name="주요 개발 내용" id="{E8F5A8FA-7909-62C2-211D-476F9436B8FC}">
+        <p14:section name="주요 개발 내용" id="{894A4B94-EB12-ED5E-7E09-C19F4547A02A}">
           <p14:sldIdLst>
             <p14:sldId id="257"/>
             <p14:sldId id="258"/>
             <p14:sldId id="259"/>
           </p14:sldIdLst>
         </p14:section>
-        <p14:section name="시연 내용" id="{5A7C79EF-4315-EA4A-22E4-7C795879DE2D}">
+        <p14:section name="시연 내용" id="{D314828D-14A6-FF84-4C81-0492C254F982}">
           <p14:sldIdLst>
             <p14:sldId id="260"/>
           </p14:sldIdLst>
@@ -325,7 +325,7 @@
           </c:val>
           <c:extLst>
             <c:ext xmlns:c16="http://schemas.microsoft.com/office/drawing/2014/chart" uri="{C3380CC4-5D6E-409C-BE32-E72D297353CC}">
-              <c16:uniqueId val="{00000000-98B5-43D6-ADB5-C79E5AC1D6BE}"/>
+              <c16:uniqueId val="{00000000-FDAA-4CC8-A624-0064054CDF67}"/>
             </c:ext>
           </c:extLst>
         </c:ser>
@@ -422,7 +422,7 @@
           <c:smooth val="0"/>
           <c:extLst>
             <c:ext xmlns:c16="http://schemas.microsoft.com/office/drawing/2014/chart" uri="{C3380CC4-5D6E-409C-BE32-E72D297353CC}">
-              <c16:uniqueId val="{00000001-98B5-43D6-ADB5-C79E5AC1D6BE}"/>
+              <c16:uniqueId val="{00000001-FDAA-4CC8-A624-0064054CDF67}"/>
             </c:ext>
           </c:extLst>
         </c:ser>
@@ -604,7 +604,7 @@
     </p:spTree>
     <p:extLst>
       <p:ext uri="{BB962C8B-B14F-4D97-AF65-F5344CB8AC3E}">
-        <p14:creationId xmlns:p14="http://schemas.microsoft.com/office/powerpoint/2010/main" val="2587067134"/>
+        <p14:creationId xmlns:p14="http://schemas.microsoft.com/office/powerpoint/2010/main" val="1009119167"/>
       </p:ext>
     </p:extLst>
   </p:cSld>
@@ -1011,7 +1011,7 @@
           <a:p>
             <a:r>
               <a:rPr lang="en-US" dirty="0"/>
-              <a:t>노드는 0.5초마다 표면 습도와 절대습도를 계산함. 75%에서 가습을 멈추고, 그래도 오르면 선풍기를 켬. 선풍기를 켤 때 벽이 몇 도 오르는지 스스로 재서, 선풍기를 꺼도 안전한지를 판단함. 선풍기로 허용 구간을 넓힌 뒤에는 선풍기를 켠 채로 가습을 이어가 점막 방어와 곰팡이 방어를 동시에 지킴.</a:t>
+              <a:t>노드는 0.5초마다 벽 표면 습도와 절대습도를 계산함. 예를 들어 방이 21℃, 45%이고 벽이 12℃이면 벽 표면 습도는 약 80%로 곰팡이 임계에 닿음. 75%에서 가습을 멈추고, 그래도 오르면 선풍기를 켬. 선풍기를 켤 때 벽이 몇 도 오르는지 스스로 재서, 선풍기를 꺼도 안전한지를 판단함. 선풍기로 허용 구간을 넓힌 뒤에는 선풍기를 켠 채로 가습을 이어가 점막 방어와 곰팡이 방어를 동시에 지킴.</a:t>
             </a:r>
           </a:p>
         </p:txBody>
@@ -8596,11 +8596,11 @@
         <p:spPr>
           <a:xfrm>
             <a:off x="548640" y="1371600"/>
-            <a:ext cx="4206240" cy="4846320"/>
+            <a:ext cx="5989320" cy="4846320"/>
           </a:xfrm>
           <a:prstGeom prst="roundRect">
             <a:avLst>
-              <a:gd name="adj" fmla="val 2609"/>
+              <a:gd name="adj" fmla="val 2264"/>
             </a:avLst>
           </a:prstGeom>
           <a:solidFill>
@@ -8671,8 +8671,8 @@
         </p:nvSpPr>
         <p:spPr>
           <a:xfrm>
-            <a:off x="1298448" y="1627632"/>
-            <a:ext cx="3200400" cy="320040"/>
+            <a:off x="1298448" y="1536192"/>
+            <a:ext cx="5029200" cy="274320"/>
           </a:xfrm>
           <a:prstGeom prst="rect">
             <a:avLst/>
@@ -8693,7 +8693,7 @@
                   <a:schemeClr val="tx1"/>
                 </a:solidFill>
               </a:rPr>
-              <a:t>계산 (0.5초마다)</a:t>
+              <a:t>계산: 차가운 벽 앞 공기의 습도를 구함</a:t>
             </a:r>
             <a:endParaRPr lang="en-US" sz="1600" dirty="0"/>
           </a:p>
@@ -8707,8 +8707,8 @@
         </p:nvSpPr>
         <p:spPr>
           <a:xfrm>
-            <a:off x="777240" y="2057400"/>
-            <a:ext cx="3749040" cy="256032"/>
+            <a:off x="1298448" y="1819656"/>
+            <a:ext cx="5029200" cy="219456"/>
           </a:xfrm>
           <a:prstGeom prst="rect">
             <a:avLst/>
@@ -8724,14 +8724,14 @@
               <a:buNone/>
             </a:pPr>
             <a:r>
-              <a:rPr lang="en-US" sz="1300" dirty="0">
-                <a:solidFill>
-                  <a:schemeClr val="tx1"/>
-                </a:solidFill>
-              </a:rPr>
-              <a:t>포화 수증기압 (Magnus 식, hPa)</a:t>
-            </a:r>
-            <a:endParaRPr lang="en-US" sz="1300" dirty="0"/>
+              <a:rPr lang="en-US" sz="1150" dirty="0">
+                <a:solidFill>
+                  <a:schemeClr val="tx1"/>
+                </a:solidFill>
+              </a:rPr>
+              <a:t>DK가 0.5초마다 직접 계산함, 클라우드 불필요</a:t>
+            </a:r>
+            <a:endParaRPr lang="en-US" sz="1150" dirty="0"/>
           </a:p>
         </p:txBody>
       </p:sp>
@@ -8739,14 +8739,14 @@
         <mc:Choice Requires="a14">
           <p:sp>
             <p:nvSpPr>
-              <p:cNvPr id="9" name="eq0"/>
+              <p:cNvPr id="9" name="mx_lg"/>
               <p:cNvSpPr txBox="1"/>
               <p:nvPr/>
             </p:nvSpPr>
             <p:spPr>
               <a:xfrm>
-                <a:off x="777240" y="2304288"/>
-                <a:ext cx="3749040" cy="530352"/>
+                <a:off x="777240" y="2157984"/>
+                <a:ext cx="5577840" cy="310896"/>
               </a:xfrm>
               <a:prstGeom prst="rect">
                 <a:avLst/>
@@ -8758,7 +8758,339 @@
               <a:bodyPr wrap="square" lIns="0" tIns="0" rIns="0" bIns="0" rtlCol="0" anchor="ctr"/>
               <a:lstStyle/>
               <a:p>
-                <a:pPr/>
+                <a:pPr marL="0" indent="0">
+                  <a:buNone/>
+                </a:pPr>
+                <a14:m>
+                  <m:oMath xmlns:m="http://schemas.openxmlformats.org/officeDocument/2006/math">
+                    <m:sSub>
+                      <m:sSubPr>
+                        <m:ctrlPr>
+                          <a:rPr lang="en-US" sz="1150" b="0" i="1">
+                            <a:solidFill>
+                              <a:srgbClr val="000000"/>
+                            </a:solidFill>
+                            <a:latin typeface="Cambria Math" panose="02040503050406030204" pitchFamily="18" charset="0"/>
+                          </a:rPr>
+                        </m:ctrlPr>
+                      </m:sSubPr>
+                      <m:e>
+                        <m:r>
+                          <a:rPr lang="en-US" sz="1150" b="0" i="1">
+                            <a:solidFill>
+                              <a:srgbClr val="000000"/>
+                            </a:solidFill>
+                            <a:latin typeface="Cambria Math" panose="02040503050406030204" pitchFamily="18" charset="0"/>
+                          </a:rPr>
+                          <m:t>𝑇</m:t>
+                        </m:r>
+                      </m:e>
+                      <m:sub>
+                        <m:r>
+                          <m:rPr>
+                            <m:nor/>
+                          </m:rPr>
+                          <a:rPr lang="ko-KR" altLang="en-US" sz="1150" b="0" i="0">
+                            <a:solidFill>
+                              <a:srgbClr val="000000"/>
+                            </a:solidFill>
+                            <a:latin typeface="Pretendard"/>
+                            <a:ea typeface="Pretendard"/>
+                          </a:rPr>
+                          <m:t>실내</m:t>
+                        </m:r>
+                      </m:sub>
+                    </m:sSub>
+                  </m:oMath>
+                </a14:m>
+                <a:r>
+                  <a:rPr lang="ko-KR" altLang="en-US" sz="1150" dirty="0">
+                    <a:solidFill>
+                      <a:srgbClr val="000000"/>
+                    </a:solidFill>
+                  </a:rPr>
+                  <a:t> 방 온도,   </a:t>
+                </a:r>
+                <a14:m>
+                  <m:oMath xmlns:m="http://schemas.openxmlformats.org/officeDocument/2006/math">
+                    <m:sSub>
+                      <m:sSubPr>
+                        <m:ctrlPr>
+                          <a:rPr lang="en-US" sz="1150" b="0" i="1">
+                            <a:solidFill>
+                              <a:srgbClr val="000000"/>
+                            </a:solidFill>
+                            <a:latin typeface="Cambria Math" panose="02040503050406030204" pitchFamily="18" charset="0"/>
+                          </a:rPr>
+                        </m:ctrlPr>
+                      </m:sSubPr>
+                      <m:e>
+                        <m:r>
+                          <a:rPr lang="en-US" sz="1150" b="0" i="1">
+                            <a:solidFill>
+                              <a:srgbClr val="000000"/>
+                            </a:solidFill>
+                            <a:latin typeface="Cambria Math" panose="02040503050406030204" pitchFamily="18" charset="0"/>
+                          </a:rPr>
+                          <m:t>𝑇</m:t>
+                        </m:r>
+                      </m:e>
+                      <m:sub>
+                        <m:r>
+                          <m:rPr>
+                            <m:nor/>
+                          </m:rPr>
+                          <a:rPr lang="ko-KR" altLang="en-US" sz="1150" b="0" i="0">
+                            <a:solidFill>
+                              <a:srgbClr val="000000"/>
+                            </a:solidFill>
+                            <a:latin typeface="Pretendard"/>
+                            <a:ea typeface="Pretendard"/>
+                          </a:rPr>
+                          <m:t>벽</m:t>
+                        </m:r>
+                      </m:sub>
+                    </m:sSub>
+                  </m:oMath>
+                </a14:m>
+                <a:r>
+                  <a:rPr lang="ko-KR" altLang="en-US" sz="1150" dirty="0">
+                    <a:solidFill>
+                      <a:srgbClr val="000000"/>
+                    </a:solidFill>
+                  </a:rPr>
+                  <a:t> 벽 표면 온도,   </a:t>
+                </a:r>
+                <a14:m>
+                  <m:oMath xmlns:m="http://schemas.openxmlformats.org/officeDocument/2006/math">
+                    <m:r>
+                      <m:rPr>
+                        <m:sty m:val="p"/>
+                      </m:rPr>
+                      <a:rPr lang="en-US" sz="1150" b="0" i="0">
+                        <a:solidFill>
+                          <a:srgbClr val="000000"/>
+                        </a:solidFill>
+                        <a:latin typeface="Cambria Math" panose="02040503050406030204" pitchFamily="18" charset="0"/>
+                      </a:rPr>
+                      <m:t>RH</m:t>
+                    </m:r>
+                  </m:oMath>
+                </a14:m>
+                <a:r>
+                  <a:rPr lang="ko-KR" altLang="en-US" sz="1150" dirty="0">
+                    <a:solidFill>
+                      <a:srgbClr val="000000"/>
+                    </a:solidFill>
+                  </a:rPr>
+                  <a:t> 상대습도(%),   </a:t>
+                </a:r>
+                <a14:m>
+                  <m:oMath xmlns:m="http://schemas.openxmlformats.org/officeDocument/2006/math">
+                    <m:sSub>
+                      <m:sSubPr>
+                        <m:ctrlPr>
+                          <a:rPr lang="en-US" sz="1150" b="0" i="1">
+                            <a:solidFill>
+                              <a:srgbClr val="000000"/>
+                            </a:solidFill>
+                            <a:latin typeface="Cambria Math" panose="02040503050406030204" pitchFamily="18" charset="0"/>
+                          </a:rPr>
+                        </m:ctrlPr>
+                      </m:sSubPr>
+                      <m:e>
+                        <m:r>
+                          <a:rPr lang="en-US" sz="1150" b="0" i="1">
+                            <a:solidFill>
+                              <a:srgbClr val="000000"/>
+                            </a:solidFill>
+                            <a:latin typeface="Cambria Math" panose="02040503050406030204" pitchFamily="18" charset="0"/>
+                          </a:rPr>
+                          <m:t>𝑃</m:t>
+                        </m:r>
+                      </m:e>
+                      <m:sub>
+                        <m:r>
+                          <m:rPr>
+                            <m:sty m:val="p"/>
+                          </m:rPr>
+                          <a:rPr lang="en-US" sz="1150" b="0" i="0">
+                            <a:solidFill>
+                              <a:srgbClr val="000000"/>
+                            </a:solidFill>
+                            <a:latin typeface="Cambria Math" panose="02040503050406030204" pitchFamily="18" charset="0"/>
+                          </a:rPr>
+                          <m:t>s</m:t>
+                        </m:r>
+                      </m:sub>
+                    </m:sSub>
+                  </m:oMath>
+                </a14:m>
+                <a:r>
+                  <a:rPr lang="ko-KR" altLang="en-US" sz="1150" dirty="0">
+                    <a:solidFill>
+                      <a:srgbClr val="000000"/>
+                    </a:solidFill>
+                  </a:rPr>
+                  <a:t> 포화 수증기압(hPa)</a:t>
+                </a:r>
+                <a:endParaRPr lang="ko-KR" sz="1150"/>
+              </a:p>
+            </p:txBody>
+          </p:sp>
+        </mc:Choice>
+        <mc:Fallback xmlns="">
+          <p:sp>
+            <p:nvSpPr>
+              <p:cNvPr id="9" name="mx_lg"/>
+              <p:cNvSpPr txBox="1"/>
+              <p:nvPr/>
+            </p:nvSpPr>
+            <p:spPr>
+              <a:xfrm>
+                <a:off x="777240" y="2157984"/>
+                <a:ext cx="5577840" cy="310896"/>
+              </a:xfrm>
+              <a:prstGeom prst="rect">
+                <a:avLst/>
+              </a:prstGeom>
+              <a:noFill/>
+              <a:ln/>
+            </p:spPr>
+            <p:txBody>
+              <a:bodyPr wrap="square" lIns="0" tIns="0" rIns="0" bIns="0" rtlCol="0" anchor="ctr"/>
+              <a:lstStyle/>
+              <a:p>
+                <a:pPr indent="0" marL="0">
+                  <a:buNone/>
+                </a:pPr>
+                <a:r>
+                  <a:rPr lang="en-US" sz="1150" dirty="0">
+                    <a:solidFill>
+                      <a:schemeClr val="tx1"/>
+                    </a:solidFill>
+                  </a:rPr>
+                  <a:t>T실내 방 온도, T벽 벽 표면 온도, RH 상대습도(%), Pₛ 포화 수증기압(hPa)</a:t>
+                </a:r>
+                <a:endParaRPr lang="en-US" sz="1150" dirty="0"/>
+              </a:p>
+            </p:txBody>
+          </p:sp>
+        </mc:Fallback>
+      </mc:AlternateContent>
+      <p:sp>
+        <p:nvSpPr>
+          <p:cNvPr id="10" name="Shape 7"/>
+          <p:cNvSpPr/>
+          <p:nvPr/>
+        </p:nvSpPr>
+        <p:spPr>
+          <a:xfrm>
+            <a:off x="777240" y="2560320"/>
+            <a:ext cx="5532120" cy="0"/>
+          </a:xfrm>
+          <a:prstGeom prst="line">
+            <a:avLst/>
+          </a:prstGeom>
+          <a:noFill/>
+          <a:ln w="9525">
+            <a:solidFill>
+              <a:srgbClr val="E0E0E0"/>
+            </a:solidFill>
+            <a:prstDash val="solid"/>
+          </a:ln>
+        </p:spPr>
+      </p:sp>
+      <p:sp>
+        <p:nvSpPr>
+          <p:cNvPr id="11" name="Text 8"/>
+          <p:cNvSpPr txBox="1"/>
+          <p:nvPr/>
+        </p:nvSpPr>
+        <p:spPr>
+          <a:xfrm>
+            <a:off x="777240" y="2651760"/>
+            <a:ext cx="2331720" cy="676656"/>
+          </a:xfrm>
+          <a:prstGeom prst="rect">
+            <a:avLst/>
+          </a:prstGeom>
+          <a:noFill/>
+          <a:ln/>
+        </p:spPr>
+        <p:txBody>
+          <a:bodyPr wrap="square" lIns="0" tIns="0" rIns="0" bIns="0" rtlCol="0" anchor="ctr"/>
+          <a:lstStyle/>
+          <a:p>
+            <a:pPr marL="0" indent="0">
+              <a:buNone/>
+            </a:pPr>
+            <a:r>
+              <a:rPr lang="en-US" sz="1300" b="1" dirty="0">
+                <a:solidFill>
+                  <a:schemeClr val="tx1"/>
+                </a:solidFill>
+              </a:rPr>
+              <a:t>① 포화 수증기압</a:t>
+            </a:r>
+            <a:endParaRPr lang="en-US" sz="1300" dirty="0"/>
+          </a:p>
+          <a:p>
+            <a:pPr marL="0" indent="0">
+              <a:buNone/>
+            </a:pPr>
+            <a:r>
+              <a:rPr lang="en-US" sz="1150" dirty="0">
+                <a:solidFill>
+                  <a:schemeClr val="tx1"/>
+                </a:solidFill>
+              </a:rPr>
+              <a:t>온도별로 공기가 품을 수 있는</a:t>
+            </a:r>
+            <a:endParaRPr lang="en-US" sz="1300" dirty="0"/>
+          </a:p>
+          <a:p>
+            <a:pPr marL="0" indent="0">
+              <a:buNone/>
+            </a:pPr>
+            <a:r>
+              <a:rPr lang="en-US" sz="1150" dirty="0">
+                <a:solidFill>
+                  <a:schemeClr val="tx1"/>
+                </a:solidFill>
+              </a:rPr>
+              <a:t>수증기의 최대치임</a:t>
+            </a:r>
+            <a:endParaRPr lang="en-US" sz="1300" dirty="0"/>
+          </a:p>
+        </p:txBody>
+      </p:sp>
+      <mc:AlternateContent xmlns:mc="http://schemas.openxmlformats.org/markup-compatibility/2006" xmlns:a14="http://schemas.microsoft.com/office/drawing/2010/main">
+        <mc:Choice Requires="a14">
+          <p:sp>
+            <p:nvSpPr>
+              <p:cNvPr id="12" name="eq0"/>
+              <p:cNvSpPr txBox="1"/>
+              <p:nvPr/>
+            </p:nvSpPr>
+            <p:spPr>
+              <a:xfrm>
+                <a:off x="3200400" y="2651760"/>
+                <a:ext cx="3200400" cy="676656"/>
+              </a:xfrm>
+              <a:prstGeom prst="rect">
+                <a:avLst/>
+              </a:prstGeom>
+              <a:noFill/>
+              <a:ln/>
+            </p:spPr>
+            <p:txBody>
+              <a:bodyPr wrap="square" lIns="0" tIns="0" rIns="0" bIns="0" rtlCol="0" anchor="ctr"/>
+              <a:lstStyle/>
+              <a:p>
+                <a:pPr marL="0" indent="0">
+                  <a:buNone/>
+                </a:pPr>
                 <a14:m>
                   <m:oMathPara xmlns:m="http://schemas.openxmlformats.org/officeDocument/2006/math">
                     <m:oMathParaPr>
@@ -8768,82 +9100,88 @@
                       <m:sSub>
                         <m:sSubPr>
                           <m:ctrlPr>
-                            <a:rPr lang="ko-KR" altLang="en-US" sz="1500" b="0" i="0">
+                            <a:rPr lang="en-US" sz="1500" b="0" i="1">
                               <a:solidFill>
                                 <a:srgbClr val="000000"/>
                               </a:solidFill>
-                              <a:latin typeface="Pretendard"/>
-                              <a:ea typeface="Pretendard"/>
+                              <a:latin typeface="Cambria Math" panose="02040503050406030204" pitchFamily="18" charset="0"/>
                             </a:rPr>
                           </m:ctrlPr>
                         </m:sSubPr>
                         <m:e>
                           <m:r>
-                            <m:rPr>
-                              <m:nor/>
-                            </m:rPr>
-                            <a:rPr lang="ko-KR" altLang="en-US" sz="1500" b="0" i="0">
+                            <a:rPr lang="en-US" sz="1500" b="0" i="1">
                               <a:solidFill>
                                 <a:srgbClr val="000000"/>
                               </a:solidFill>
-                              <a:latin typeface="Pretendard"/>
-                              <a:ea typeface="Pretendard"/>
+                              <a:latin typeface="Cambria Math" panose="02040503050406030204" pitchFamily="18" charset="0"/>
                             </a:rPr>
-                            <m:t>P</m:t>
+                            <m:t>𝑃</m:t>
                           </m:r>
                         </m:e>
                         <m:sub>
                           <m:r>
                             <m:rPr>
-                              <m:nor/>
+                              <m:sty m:val="p"/>
                             </m:rPr>
-                            <a:rPr lang="ko-KR" altLang="en-US" sz="1500" b="0" i="0">
+                            <a:rPr lang="en-US" sz="1500" b="0" i="0">
                               <a:solidFill>
                                 <a:srgbClr val="000000"/>
                               </a:solidFill>
-                              <a:latin typeface="Pretendard"/>
-                              <a:ea typeface="Pretendard"/>
+                              <a:latin typeface="Cambria Math" panose="02040503050406030204" pitchFamily="18" charset="0"/>
                             </a:rPr>
                             <m:t>s</m:t>
                           </m:r>
                         </m:sub>
                       </m:sSub>
                       <m:r>
-                        <m:rPr>
-                          <m:nor/>
-                        </m:rPr>
-                        <a:rPr lang="ko-KR" altLang="en-US" sz="1500" b="0" i="0">
+                        <a:rPr lang="en-US" sz="1500" b="0" i="0">
                           <a:solidFill>
                             <a:srgbClr val="000000"/>
                           </a:solidFill>
-                          <a:latin typeface="Pretendard"/>
-                          <a:ea typeface="Pretendard"/>
+                          <a:latin typeface="Cambria Math" panose="02040503050406030204" pitchFamily="18" charset="0"/>
                         </a:rPr>
-                        <m:t>(T) = 6.112 ×</m:t>
+                        <m:t>(</m:t>
+                      </m:r>
+                      <m:r>
+                        <a:rPr lang="en-US" sz="1500" b="0" i="1">
+                          <a:solidFill>
+                            <a:srgbClr val="000000"/>
+                          </a:solidFill>
+                          <a:latin typeface="Cambria Math" panose="02040503050406030204" pitchFamily="18" charset="0"/>
+                        </a:rPr>
+                        <m:t>𝑇</m:t>
+                      </m:r>
+                      <m:r>
+                        <a:rPr lang="en-US" sz="1500" b="0" i="0">
+                          <a:solidFill>
+                            <a:srgbClr val="000000"/>
+                          </a:solidFill>
+                          <a:latin typeface="Cambria Math" panose="02040503050406030204" pitchFamily="18" charset="0"/>
+                        </a:rPr>
+                        <m:t>)=6.112</m:t>
                       </m:r>
                       <m:func>
                         <m:funcPr>
                           <m:ctrlPr>
-                            <a:rPr lang="ko-KR" altLang="en-US" sz="1500" b="0" i="0">
+                            <a:rPr lang="en-US" sz="1500" b="0" i="0">
                               <a:solidFill>
                                 <a:srgbClr val="000000"/>
                               </a:solidFill>
-                              <a:latin typeface="Pretendard"/>
-                              <a:ea typeface="Pretendard"/>
+                              <a:latin typeface="Cambria Math" panose="02040503050406030204" pitchFamily="18" charset="0"/>
                             </a:rPr>
                           </m:ctrlPr>
                         </m:funcPr>
                         <m:fName>
                           <m:r>
                             <m:rPr>
-                              <m:nor/>
+                              <m:sty m:val="p"/>
                             </m:rPr>
-                            <a:rPr lang="ko-KR" altLang="en-US" sz="1500" b="0" i="0">
+                            <a:rPr lang="en-US" sz="1500" b="0" i="0">
                               <a:solidFill>
                                 <a:srgbClr val="000000"/>
                               </a:solidFill>
-                              <a:latin typeface="Pretendard"/>
-                              <a:ea typeface="Pretendard"/>
+                              <a:latin typeface="Cambria Math" panose="02040503050406030204" pitchFamily="18" charset="0"/>
                             </a:rPr>
                             <m:t>exp</m:t>
                           </m:r>
@@ -8852,12 +9190,11 @@
                           <m:d>
                             <m:dPr>
                               <m:ctrlPr>
-                                <a:rPr lang="ko-KR" altLang="en-US" sz="1500" b="0" i="1">
+                                <a:rPr lang="en-US" sz="1500" b="0" i="1">
                                   <a:solidFill>
                                     <a:srgbClr val="000000"/>
                                   </a:solidFill>
                                   <a:latin typeface="Cambria Math" panose="02040503050406030204" pitchFamily="18" charset="0"/>
-                                  <a:ea typeface="Pretendard"/>
                                 </a:rPr>
                               </m:ctrlPr>
                             </m:dPr>
@@ -8865,43 +9202,52 @@
                               <m:f>
                                 <m:fPr>
                                   <m:ctrlPr>
-                                    <a:rPr lang="ko-KR" altLang="en-US" sz="1500" b="0" i="0">
+                                    <a:rPr lang="en-US" sz="1500" b="0" i="0">
                                       <a:solidFill>
                                         <a:srgbClr val="000000"/>
                                       </a:solidFill>
-                                      <a:latin typeface="Pretendard"/>
-                                      <a:ea typeface="Pretendard"/>
+                                      <a:latin typeface="Cambria Math" panose="02040503050406030204" pitchFamily="18" charset="0"/>
                                     </a:rPr>
                                   </m:ctrlPr>
                                 </m:fPr>
                                 <m:num>
                                   <m:r>
-                                    <m:rPr>
-                                      <m:nor/>
-                                    </m:rPr>
-                                    <a:rPr lang="ko-KR" altLang="en-US" sz="1500" b="0" i="0">
+                                    <a:rPr lang="en-US" sz="1500" b="0" i="0">
                                       <a:solidFill>
                                         <a:srgbClr val="000000"/>
                                       </a:solidFill>
-                                      <a:latin typeface="Pretendard"/>
-                                      <a:ea typeface="Pretendard"/>
+                                      <a:latin typeface="Cambria Math" panose="02040503050406030204" pitchFamily="18" charset="0"/>
                                     </a:rPr>
-                                    <m:t>17.62T</m:t>
+                                    <m:t>17.62</m:t>
+                                  </m:r>
+                                  <m:r>
+                                    <a:rPr lang="en-US" sz="1500" b="0" i="1">
+                                      <a:solidFill>
+                                        <a:srgbClr val="000000"/>
+                                      </a:solidFill>
+                                      <a:latin typeface="Cambria Math" panose="02040503050406030204" pitchFamily="18" charset="0"/>
+                                    </a:rPr>
+                                    <m:t>𝑇</m:t>
                                   </m:r>
                                 </m:num>
                                 <m:den>
                                   <m:r>
-                                    <m:rPr>
-                                      <m:nor/>
-                                    </m:rPr>
-                                    <a:rPr lang="ko-KR" altLang="en-US" sz="1500" b="0" i="0">
+                                    <a:rPr lang="en-US" sz="1500" b="0" i="0">
                                       <a:solidFill>
                                         <a:srgbClr val="000000"/>
                                       </a:solidFill>
-                                      <a:latin typeface="Pretendard"/>
-                                      <a:ea typeface="Pretendard"/>
+                                      <a:latin typeface="Cambria Math" panose="02040503050406030204" pitchFamily="18" charset="0"/>
                                     </a:rPr>
-                                    <m:t>243.12 + T</m:t>
+                                    <m:t>243.12+</m:t>
+                                  </m:r>
+                                  <m:r>
+                                    <a:rPr lang="en-US" sz="1500" b="0" i="1">
+                                      <a:solidFill>
+                                        <a:srgbClr val="000000"/>
+                                      </a:solidFill>
+                                      <a:latin typeface="Cambria Math" panose="02040503050406030204" pitchFamily="18" charset="0"/>
+                                    </a:rPr>
+                                    <m:t>𝑇</m:t>
                                   </m:r>
                                 </m:den>
                               </m:f>
@@ -8920,14 +9266,14 @@
         <mc:Fallback xmlns="">
           <p:sp>
             <p:nvSpPr>
-              <p:cNvPr id="9" name="eq0"/>
+              <p:cNvPr id="12" name="eq0"/>
               <p:cNvSpPr txBox="1"/>
               <p:nvPr/>
             </p:nvSpPr>
             <p:spPr>
               <a:xfrm>
-                <a:off x="777240" y="2304288"/>
-                <a:ext cx="3749040" cy="530352"/>
+                <a:off x="3200400" y="2651760"/>
+                <a:ext cx="3200400" cy="676656"/>
               </a:xfrm>
               <a:prstGeom prst="rect">
                 <a:avLst/>
@@ -8948,7 +9294,7 @@
                       <a:schemeClr val="tx1"/>
                     </a:solidFill>
                   </a:rPr>
-                  <a:t>Pₛ(T) = 6.112 × exp(17.62T / (243.12 + T))</a:t>
+                  <a:t>Pₛ(T) = 6.112 exp(17.62T / (243.12 + T))</a:t>
                 </a:r>
                 <a:endParaRPr lang="en-US" sz="1500" dirty="0"/>
               </a:p>
@@ -8958,14 +9304,14 @@
       </mc:AlternateContent>
       <p:sp>
         <p:nvSpPr>
-          <p:cNvPr id="10" name="Text 7"/>
+          <p:cNvPr id="13" name="Text 10"/>
           <p:cNvSpPr txBox="1"/>
           <p:nvPr/>
         </p:nvSpPr>
         <p:spPr>
           <a:xfrm>
-            <a:off x="777240" y="2926080"/>
-            <a:ext cx="3749040" cy="256032"/>
+            <a:off x="777240" y="3401568"/>
+            <a:ext cx="2331720" cy="676656"/>
           </a:xfrm>
           <a:prstGeom prst="rect">
             <a:avLst/>
@@ -8974,19 +9320,47 @@
           <a:ln/>
         </p:spPr>
         <p:txBody>
-          <a:bodyPr wrap="square" lIns="0" tIns="0" rIns="0" bIns="0" rtlCol="0" anchor="t"/>
+          <a:bodyPr wrap="square" lIns="0" tIns="0" rIns="0" bIns="0" rtlCol="0" anchor="ctr"/>
           <a:lstStyle/>
           <a:p>
             <a:pPr marL="0" indent="0">
               <a:buNone/>
             </a:pPr>
             <a:r>
-              <a:rPr lang="en-US" sz="1300" dirty="0">
-                <a:solidFill>
-                  <a:schemeClr val="tx1"/>
-                </a:solidFill>
-              </a:rPr>
-              <a:t>벽 표면 상대습도</a:t>
+              <a:rPr lang="en-US" sz="1300" b="1" dirty="0">
+                <a:solidFill>
+                  <a:schemeClr val="tx1"/>
+                </a:solidFill>
+              </a:rPr>
+              <a:t>② 벽 표면 상대습도</a:t>
+            </a:r>
+            <a:endParaRPr lang="en-US" sz="1300" dirty="0"/>
+          </a:p>
+          <a:p>
+            <a:pPr marL="0" indent="0">
+              <a:buNone/>
+            </a:pPr>
+            <a:r>
+              <a:rPr lang="en-US" sz="1150" dirty="0">
+                <a:solidFill>
+                  <a:schemeClr val="tx1"/>
+                </a:solidFill>
+              </a:rPr>
+              <a:t>방 공기가 벽 온도로</a:t>
+            </a:r>
+            <a:endParaRPr lang="en-US" sz="1300" dirty="0"/>
+          </a:p>
+          <a:p>
+            <a:pPr marL="0" indent="0">
+              <a:buNone/>
+            </a:pPr>
+            <a:r>
+              <a:rPr lang="en-US" sz="1150" dirty="0">
+                <a:solidFill>
+                  <a:schemeClr val="tx1"/>
+                </a:solidFill>
+              </a:rPr>
+              <a:t>식었을 때의 습도임</a:t>
             </a:r>
             <a:endParaRPr lang="en-US" sz="1300" dirty="0"/>
           </a:p>
@@ -8996,14 +9370,14 @@
         <mc:Choice Requires="a14">
           <p:sp>
             <p:nvSpPr>
-              <p:cNvPr id="11" name="eq1"/>
+              <p:cNvPr id="14" name="eq1"/>
               <p:cNvSpPr txBox="1"/>
               <p:nvPr/>
             </p:nvSpPr>
             <p:spPr>
               <a:xfrm>
-                <a:off x="777240" y="3172968"/>
-                <a:ext cx="3749040" cy="530352"/>
+                <a:off x="3200400" y="3401568"/>
+                <a:ext cx="3200400" cy="676656"/>
               </a:xfrm>
               <a:prstGeom prst="rect">
                 <a:avLst/>
@@ -9015,7 +9389,9 @@
               <a:bodyPr wrap="square" lIns="0" tIns="0" rIns="0" bIns="0" rtlCol="0" anchor="ctr"/>
               <a:lstStyle/>
               <a:p>
-                <a:pPr/>
+                <a:pPr marL="0" indent="0">
+                  <a:buNone/>
+                </a:pPr>
                 <a14:m>
                   <m:oMathPara xmlns:m="http://schemas.openxmlformats.org/officeDocument/2006/math">
                     <m:oMathParaPr>
@@ -9025,26 +9401,24 @@
                       <m:sSub>
                         <m:sSubPr>
                           <m:ctrlPr>
-                            <a:rPr lang="ko-KR" altLang="en-US" sz="1500" b="0" i="0">
+                            <a:rPr lang="en-US" sz="1500" b="0" i="0">
                               <a:solidFill>
                                 <a:srgbClr val="000000"/>
                               </a:solidFill>
-                              <a:latin typeface="Pretendard"/>
-                              <a:ea typeface="Pretendard"/>
+                              <a:latin typeface="Cambria Math" panose="02040503050406030204" pitchFamily="18" charset="0"/>
                             </a:rPr>
                           </m:ctrlPr>
                         </m:sSubPr>
                         <m:e>
                           <m:r>
                             <m:rPr>
-                              <m:nor/>
+                              <m:sty m:val="p"/>
                             </m:rPr>
-                            <a:rPr lang="ko-KR" altLang="en-US" sz="1500" b="0" i="0">
+                            <a:rPr lang="en-US" sz="1500" b="0" i="0">
                               <a:solidFill>
                                 <a:srgbClr val="000000"/>
                               </a:solidFill>
-                              <a:latin typeface="Pretendard"/>
-                              <a:ea typeface="Pretendard"/>
+                              <a:latin typeface="Cambria Math" panose="02040503050406030204" pitchFamily="18" charset="0"/>
                             </a:rPr>
                             <m:t>RH</m:t>
                           </m:r>
@@ -9066,41 +9440,35 @@
                         </m:sub>
                       </m:sSub>
                       <m:r>
-                        <m:rPr>
-                          <m:nor/>
-                        </m:rPr>
-                        <a:rPr lang="ko-KR" altLang="en-US" sz="1500" b="0" i="0">
+                        <a:rPr lang="en-US" sz="1500" b="0" i="0">
                           <a:solidFill>
                             <a:srgbClr val="000000"/>
                           </a:solidFill>
-                          <a:latin typeface="Pretendard"/>
-                          <a:ea typeface="Pretendard"/>
+                          <a:latin typeface="Cambria Math" panose="02040503050406030204" pitchFamily="18" charset="0"/>
                         </a:rPr>
-                        <m:t> = </m:t>
+                        <m:t>=</m:t>
                       </m:r>
                       <m:sSub>
                         <m:sSubPr>
                           <m:ctrlPr>
-                            <a:rPr lang="ko-KR" altLang="en-US" sz="1500" b="0" i="0">
+                            <a:rPr lang="en-US" sz="1500" b="0" i="0">
                               <a:solidFill>
                                 <a:srgbClr val="000000"/>
                               </a:solidFill>
-                              <a:latin typeface="Pretendard"/>
-                              <a:ea typeface="Pretendard"/>
+                              <a:latin typeface="Cambria Math" panose="02040503050406030204" pitchFamily="18" charset="0"/>
                             </a:rPr>
                           </m:ctrlPr>
                         </m:sSubPr>
                         <m:e>
                           <m:r>
                             <m:rPr>
-                              <m:nor/>
+                              <m:sty m:val="p"/>
                             </m:rPr>
-                            <a:rPr lang="ko-KR" altLang="en-US" sz="1500" b="0" i="0">
+                            <a:rPr lang="en-US" sz="1500" b="0" i="0">
                               <a:solidFill>
                                 <a:srgbClr val="000000"/>
                               </a:solidFill>
-                              <a:latin typeface="Pretendard"/>
-                              <a:ea typeface="Pretendard"/>
+                              <a:latin typeface="Cambria Math" panose="02040503050406030204" pitchFamily="18" charset="0"/>
                             </a:rPr>
                             <m:t>RH</m:t>
                           </m:r>
@@ -9122,27 +9490,22 @@
                         </m:sub>
                       </m:sSub>
                       <m:r>
-                        <m:rPr>
-                          <m:nor/>
-                        </m:rPr>
-                        <a:rPr lang="ko-KR" altLang="en-US" sz="1500" b="0" i="0">
+                        <a:rPr lang="en-US" sz="1500" b="0" i="0">
                           <a:solidFill>
                             <a:srgbClr val="000000"/>
                           </a:solidFill>
-                          <a:latin typeface="Pretendard"/>
-                          <a:ea typeface="Pretendard"/>
+                          <a:latin typeface="Cambria Math" panose="02040503050406030204" pitchFamily="18" charset="0"/>
                         </a:rPr>
-                        <m:t> × </m:t>
+                        <m:t>×</m:t>
                       </m:r>
                       <m:f>
                         <m:fPr>
                           <m:ctrlPr>
-                            <a:rPr lang="ko-KR" altLang="en-US" sz="1500" b="0" i="1">
+                            <a:rPr lang="en-US" sz="1500" b="0" i="1">
                               <a:solidFill>
                                 <a:srgbClr val="000000"/>
                               </a:solidFill>
                               <a:latin typeface="Cambria Math" panose="02040503050406030204" pitchFamily="18" charset="0"/>
-                              <a:ea typeface="Pretendard"/>
                             </a:rPr>
                           </m:ctrlPr>
                         </m:fPr>
@@ -9150,84 +9513,69 @@
                           <m:sSub>
                             <m:sSubPr>
                               <m:ctrlPr>
-                                <a:rPr lang="ko-KR" altLang="en-US" sz="1500" b="0" i="0">
+                                <a:rPr lang="en-US" sz="1500" b="0" i="1">
                                   <a:solidFill>
                                     <a:srgbClr val="000000"/>
                                   </a:solidFill>
-                                  <a:latin typeface="Pretendard"/>
-                                  <a:ea typeface="Pretendard"/>
+                                  <a:latin typeface="Cambria Math" panose="02040503050406030204" pitchFamily="18" charset="0"/>
                                 </a:rPr>
                               </m:ctrlPr>
                             </m:sSubPr>
                             <m:e>
                               <m:r>
-                                <m:rPr>
-                                  <m:nor/>
-                                </m:rPr>
-                                <a:rPr lang="ko-KR" altLang="en-US" sz="1500" b="0" i="0">
+                                <a:rPr lang="en-US" sz="1500" b="0" i="1">
                                   <a:solidFill>
                                     <a:srgbClr val="000000"/>
                                   </a:solidFill>
-                                  <a:latin typeface="Pretendard"/>
-                                  <a:ea typeface="Pretendard"/>
+                                  <a:latin typeface="Cambria Math" panose="02040503050406030204" pitchFamily="18" charset="0"/>
                                 </a:rPr>
-                                <m:t>P</m:t>
+                                <m:t>𝑃</m:t>
                               </m:r>
                             </m:e>
                             <m:sub>
                               <m:r>
                                 <m:rPr>
-                                  <m:nor/>
+                                  <m:sty m:val="p"/>
                                 </m:rPr>
-                                <a:rPr lang="ko-KR" altLang="en-US" sz="1500" b="0" i="0">
+                                <a:rPr lang="en-US" sz="1500" b="0" i="0">
                                   <a:solidFill>
                                     <a:srgbClr val="000000"/>
                                   </a:solidFill>
-                                  <a:latin typeface="Pretendard"/>
-                                  <a:ea typeface="Pretendard"/>
+                                  <a:latin typeface="Cambria Math" panose="02040503050406030204" pitchFamily="18" charset="0"/>
                                 </a:rPr>
                                 <m:t>s</m:t>
                               </m:r>
                             </m:sub>
                           </m:sSub>
                           <m:r>
-                            <m:rPr>
-                              <m:nor/>
-                            </m:rPr>
-                            <a:rPr lang="ko-KR" altLang="en-US" sz="1500" b="0" i="0">
+                            <a:rPr lang="en-US" sz="1500" b="0" i="0">
                               <a:solidFill>
                                 <a:srgbClr val="000000"/>
                               </a:solidFill>
-                              <a:latin typeface="Pretendard"/>
-                              <a:ea typeface="Pretendard"/>
+                              <a:latin typeface="Cambria Math" panose="02040503050406030204" pitchFamily="18" charset="0"/>
                             </a:rPr>
                             <m:t>(</m:t>
                           </m:r>
                           <m:sSub>
                             <m:sSubPr>
                               <m:ctrlPr>
-                                <a:rPr lang="ko-KR" altLang="en-US" sz="1500" b="0" i="0">
+                                <a:rPr lang="en-US" sz="1500" b="0" i="1">
                                   <a:solidFill>
                                     <a:srgbClr val="000000"/>
                                   </a:solidFill>
-                                  <a:latin typeface="Pretendard"/>
-                                  <a:ea typeface="Pretendard"/>
+                                  <a:latin typeface="Cambria Math" panose="02040503050406030204" pitchFamily="18" charset="0"/>
                                 </a:rPr>
                               </m:ctrlPr>
                             </m:sSubPr>
                             <m:e>
                               <m:r>
-                                <m:rPr>
-                                  <m:nor/>
-                                </m:rPr>
-                                <a:rPr lang="ko-KR" altLang="en-US" sz="1500" b="0" i="0">
+                                <a:rPr lang="en-US" sz="1500" b="0" i="1">
                                   <a:solidFill>
                                     <a:srgbClr val="000000"/>
                                   </a:solidFill>
-                                  <a:latin typeface="Pretendard"/>
-                                  <a:ea typeface="Pretendard"/>
+                                  <a:latin typeface="Cambria Math" panose="02040503050406030204" pitchFamily="18" charset="0"/>
                                 </a:rPr>
-                                <m:t>T</m:t>
+                                <m:t>𝑇</m:t>
                               </m:r>
                             </m:e>
                             <m:sub>
@@ -9247,15 +9595,11 @@
                             </m:sub>
                           </m:sSub>
                           <m:r>
-                            <m:rPr>
-                              <m:nor/>
-                            </m:rPr>
-                            <a:rPr lang="ko-KR" altLang="en-US" sz="1500" b="0" i="0">
+                            <a:rPr lang="en-US" sz="1500" b="0" i="0">
                               <a:solidFill>
                                 <a:srgbClr val="000000"/>
                               </a:solidFill>
-                              <a:latin typeface="Pretendard"/>
-                              <a:ea typeface="Pretendard"/>
+                              <a:latin typeface="Cambria Math" panose="02040503050406030204" pitchFamily="18" charset="0"/>
                             </a:rPr>
                             <m:t>)</m:t>
                           </m:r>
@@ -9264,84 +9608,69 @@
                           <m:sSub>
                             <m:sSubPr>
                               <m:ctrlPr>
-                                <a:rPr lang="ko-KR" altLang="en-US" sz="1500" b="0" i="0">
+                                <a:rPr lang="en-US" sz="1500" b="0" i="1">
                                   <a:solidFill>
                                     <a:srgbClr val="000000"/>
                                   </a:solidFill>
-                                  <a:latin typeface="Pretendard"/>
-                                  <a:ea typeface="Pretendard"/>
+                                  <a:latin typeface="Cambria Math" panose="02040503050406030204" pitchFamily="18" charset="0"/>
                                 </a:rPr>
                               </m:ctrlPr>
                             </m:sSubPr>
                             <m:e>
                               <m:r>
-                                <m:rPr>
-                                  <m:nor/>
-                                </m:rPr>
-                                <a:rPr lang="ko-KR" altLang="en-US" sz="1500" b="0" i="0">
+                                <a:rPr lang="en-US" sz="1500" b="0" i="1">
                                   <a:solidFill>
                                     <a:srgbClr val="000000"/>
                                   </a:solidFill>
-                                  <a:latin typeface="Pretendard"/>
-                                  <a:ea typeface="Pretendard"/>
+                                  <a:latin typeface="Cambria Math" panose="02040503050406030204" pitchFamily="18" charset="0"/>
                                 </a:rPr>
-                                <m:t>P</m:t>
+                                <m:t>𝑃</m:t>
                               </m:r>
                             </m:e>
                             <m:sub>
                               <m:r>
                                 <m:rPr>
-                                  <m:nor/>
+                                  <m:sty m:val="p"/>
                                 </m:rPr>
-                                <a:rPr lang="ko-KR" altLang="en-US" sz="1500" b="0" i="0">
+                                <a:rPr lang="en-US" sz="1500" b="0" i="0">
                                   <a:solidFill>
                                     <a:srgbClr val="000000"/>
                                   </a:solidFill>
-                                  <a:latin typeface="Pretendard"/>
-                                  <a:ea typeface="Pretendard"/>
+                                  <a:latin typeface="Cambria Math" panose="02040503050406030204" pitchFamily="18" charset="0"/>
                                 </a:rPr>
                                 <m:t>s</m:t>
                               </m:r>
                             </m:sub>
                           </m:sSub>
                           <m:r>
-                            <m:rPr>
-                              <m:nor/>
-                            </m:rPr>
-                            <a:rPr lang="ko-KR" altLang="en-US" sz="1500" b="0" i="0">
+                            <a:rPr lang="en-US" sz="1500" b="0" i="0">
                               <a:solidFill>
                                 <a:srgbClr val="000000"/>
                               </a:solidFill>
-                              <a:latin typeface="Pretendard"/>
-                              <a:ea typeface="Pretendard"/>
+                              <a:latin typeface="Cambria Math" panose="02040503050406030204" pitchFamily="18" charset="0"/>
                             </a:rPr>
                             <m:t>(</m:t>
                           </m:r>
                           <m:sSub>
                             <m:sSubPr>
                               <m:ctrlPr>
-                                <a:rPr lang="ko-KR" altLang="en-US" sz="1500" b="0" i="0">
+                                <a:rPr lang="en-US" sz="1500" b="0" i="1">
                                   <a:solidFill>
                                     <a:srgbClr val="000000"/>
                                   </a:solidFill>
-                                  <a:latin typeface="Pretendard"/>
-                                  <a:ea typeface="Pretendard"/>
+                                  <a:latin typeface="Cambria Math" panose="02040503050406030204" pitchFamily="18" charset="0"/>
                                 </a:rPr>
                               </m:ctrlPr>
                             </m:sSubPr>
                             <m:e>
                               <m:r>
-                                <m:rPr>
-                                  <m:nor/>
-                                </m:rPr>
-                                <a:rPr lang="ko-KR" altLang="en-US" sz="1500" b="0" i="0">
+                                <a:rPr lang="en-US" sz="1500" b="0" i="1">
                                   <a:solidFill>
                                     <a:srgbClr val="000000"/>
                                   </a:solidFill>
-                                  <a:latin typeface="Pretendard"/>
-                                  <a:ea typeface="Pretendard"/>
+                                  <a:latin typeface="Cambria Math" panose="02040503050406030204" pitchFamily="18" charset="0"/>
                                 </a:rPr>
-                                <m:t>T</m:t>
+                                <m:t>𝑇</m:t>
                               </m:r>
                             </m:e>
                             <m:sub>
@@ -9361,15 +9690,11 @@
                             </m:sub>
                           </m:sSub>
                           <m:r>
-                            <m:rPr>
-                              <m:nor/>
-                            </m:rPr>
-                            <a:rPr lang="ko-KR" altLang="en-US" sz="1500" b="0" i="0">
+                            <a:rPr lang="en-US" sz="1500" b="0" i="0">
                               <a:solidFill>
                                 <a:srgbClr val="000000"/>
                               </a:solidFill>
-                              <a:latin typeface="Pretendard"/>
-                              <a:ea typeface="Pretendard"/>
+                              <a:latin typeface="Cambria Math" panose="02040503050406030204" pitchFamily="18" charset="0"/>
                             </a:rPr>
                             <m:t>)</m:t>
                           </m:r>
@@ -9386,14 +9711,14 @@
         <mc:Fallback xmlns="">
           <p:sp>
             <p:nvSpPr>
-              <p:cNvPr id="11" name="eq1"/>
+              <p:cNvPr id="14" name="eq1"/>
               <p:cNvSpPr txBox="1"/>
               <p:nvPr/>
             </p:nvSpPr>
             <p:spPr>
               <a:xfrm>
-                <a:off x="777240" y="3172968"/>
-                <a:ext cx="3749040" cy="530352"/>
+                <a:off x="3200400" y="3401568"/>
+                <a:ext cx="3200400" cy="676656"/>
               </a:xfrm>
               <a:prstGeom prst="rect">
                 <a:avLst/>
@@ -9424,14 +9749,14 @@
       </mc:AlternateContent>
       <p:sp>
         <p:nvSpPr>
-          <p:cNvPr id="12" name="Text 9"/>
+          <p:cNvPr id="15" name="Text 12"/>
           <p:cNvSpPr txBox="1"/>
           <p:nvPr/>
         </p:nvSpPr>
         <p:spPr>
           <a:xfrm>
-            <a:off x="777240" y="3794760"/>
-            <a:ext cx="3749040" cy="256032"/>
+            <a:off x="777240" y="4151376"/>
+            <a:ext cx="2331720" cy="676656"/>
           </a:xfrm>
           <a:prstGeom prst="rect">
             <a:avLst/>
@@ -9440,19 +9765,47 @@
           <a:ln/>
         </p:spPr>
         <p:txBody>
-          <a:bodyPr wrap="square" lIns="0" tIns="0" rIns="0" bIns="0" rtlCol="0" anchor="t"/>
+          <a:bodyPr wrap="square" lIns="0" tIns="0" rIns="0" bIns="0" rtlCol="0" anchor="ctr"/>
           <a:lstStyle/>
           <a:p>
             <a:pPr marL="0" indent="0">
               <a:buNone/>
             </a:pPr>
             <a:r>
-              <a:rPr lang="en-US" sz="1300" dirty="0">
-                <a:solidFill>
-                  <a:schemeClr val="tx1"/>
-                </a:solidFill>
-              </a:rPr>
-              <a:t>절대습도 (g/㎥)</a:t>
+              <a:rPr lang="en-US" sz="1300" b="1" dirty="0">
+                <a:solidFill>
+                  <a:schemeClr val="tx1"/>
+                </a:solidFill>
+              </a:rPr>
+              <a:t>③ 절대습도 (g/㎥)</a:t>
+            </a:r>
+            <a:endParaRPr lang="en-US" sz="1300" dirty="0"/>
+          </a:p>
+          <a:p>
+            <a:pPr marL="0" indent="0">
+              <a:buNone/>
+            </a:pPr>
+            <a:r>
+              <a:rPr lang="en-US" sz="1150" dirty="0">
+                <a:solidFill>
+                  <a:schemeClr val="tx1"/>
+                </a:solidFill>
+              </a:rPr>
+              <a:t>공기 1㎥에 든 수증기 양,</a:t>
+            </a:r>
+            <a:endParaRPr lang="en-US" sz="1300" dirty="0"/>
+          </a:p>
+          <a:p>
+            <a:pPr marL="0" indent="0">
+              <a:buNone/>
+            </a:pPr>
+            <a:r>
+              <a:rPr lang="en-US" sz="1150" dirty="0">
+                <a:solidFill>
+                  <a:schemeClr val="tx1"/>
+                </a:solidFill>
+              </a:rPr>
+              <a:t>점막 방어의 기준임</a:t>
             </a:r>
             <a:endParaRPr lang="en-US" sz="1300" dirty="0"/>
           </a:p>
@@ -9462,14 +9815,14 @@
         <mc:Choice Requires="a14">
           <p:sp>
             <p:nvSpPr>
-              <p:cNvPr id="13" name="eq2"/>
+              <p:cNvPr id="16" name="eq2"/>
               <p:cNvSpPr txBox="1"/>
               <p:nvPr/>
             </p:nvSpPr>
             <p:spPr>
               <a:xfrm>
-                <a:off x="777240" y="4041648"/>
-                <a:ext cx="3749040" cy="530352"/>
+                <a:off x="3200400" y="4151376"/>
+                <a:ext cx="3200400" cy="676656"/>
               </a:xfrm>
               <a:prstGeom prst="rect">
                 <a:avLst/>
@@ -9481,7 +9834,9 @@
               <a:bodyPr wrap="square" lIns="0" tIns="0" rIns="0" bIns="0" rtlCol="0" anchor="ctr"/>
               <a:lstStyle/>
               <a:p>
-                <a:pPr/>
+                <a:pPr marL="0" indent="0">
+                  <a:buNone/>
+                </a:pPr>
                 <a14:m>
                   <m:oMathPara xmlns:m="http://schemas.openxmlformats.org/officeDocument/2006/math">
                     <m:oMathParaPr>
@@ -9490,114 +9845,174 @@
                     <m:oMath>
                       <m:r>
                         <m:rPr>
-                          <m:nor/>
+                          <m:sty m:val="p"/>
                         </m:rPr>
-                        <a:rPr lang="ko-KR" altLang="en-US" sz="1500" b="0" i="0">
+                        <a:rPr lang="en-US" sz="1500" b="0" i="0">
                           <a:solidFill>
                             <a:srgbClr val="000000"/>
                           </a:solidFill>
-                          <a:latin typeface="Pretendard"/>
-                          <a:ea typeface="Pretendard"/>
+                          <a:latin typeface="Cambria Math" panose="02040503050406030204" pitchFamily="18" charset="0"/>
                         </a:rPr>
-                        <m:t>AH = </m:t>
+                        <m:t>AH</m:t>
+                      </m:r>
+                      <m:r>
+                        <a:rPr lang="en-US" sz="1500" b="0" i="0">
+                          <a:solidFill>
+                            <a:srgbClr val="000000"/>
+                          </a:solidFill>
+                          <a:latin typeface="Cambria Math" panose="02040503050406030204" pitchFamily="18" charset="0"/>
+                        </a:rPr>
+                        <m:t>=</m:t>
                       </m:r>
                       <m:f>
                         <m:fPr>
                           <m:ctrlPr>
-                            <a:rPr lang="ko-KR" altLang="en-US" sz="1500" b="0" i="0">
+                            <a:rPr lang="en-US" sz="1500" b="0" i="0">
                               <a:solidFill>
                                 <a:srgbClr val="000000"/>
                               </a:solidFill>
-                              <a:latin typeface="Pretendard"/>
-                              <a:ea typeface="Pretendard"/>
+                              <a:latin typeface="Cambria Math" panose="02040503050406030204" pitchFamily="18" charset="0"/>
                             </a:rPr>
                           </m:ctrlPr>
                         </m:fPr>
                         <m:num>
                           <m:r>
-                            <m:rPr>
-                              <m:nor/>
-                            </m:rPr>
-                            <a:rPr lang="ko-KR" altLang="en-US" sz="1500" b="0" i="0">
+                            <a:rPr lang="en-US" sz="1500" b="0" i="0">
                               <a:solidFill>
                                 <a:srgbClr val="000000"/>
                               </a:solidFill>
-                              <a:latin typeface="Pretendard"/>
-                              <a:ea typeface="Pretendard"/>
+                              <a:latin typeface="Cambria Math" panose="02040503050406030204" pitchFamily="18" charset="0"/>
                             </a:rPr>
-                            <m:t>216.7 × RH × </m:t>
+                            <m:t>216.7×</m:t>
+                          </m:r>
+                          <m:r>
+                            <m:rPr>
+                              <m:sty m:val="p"/>
+                            </m:rPr>
+                            <a:rPr lang="en-US" sz="1500" b="0" i="0">
+                              <a:solidFill>
+                                <a:srgbClr val="000000"/>
+                              </a:solidFill>
+                              <a:latin typeface="Cambria Math" panose="02040503050406030204" pitchFamily="18" charset="0"/>
+                            </a:rPr>
+                            <m:t>RH</m:t>
+                          </m:r>
+                          <m:r>
+                            <a:rPr lang="en-US" sz="1500" b="0" i="0">
+                              <a:solidFill>
+                                <a:srgbClr val="000000"/>
+                              </a:solidFill>
+                              <a:latin typeface="Cambria Math" panose="02040503050406030204" pitchFamily="18" charset="0"/>
+                            </a:rPr>
+                            <m:t>×</m:t>
                           </m:r>
                           <m:sSub>
                             <m:sSubPr>
                               <m:ctrlPr>
-                                <a:rPr lang="ko-KR" altLang="en-US" sz="1500" b="0" i="0">
+                                <a:rPr lang="en-US" sz="1500" b="0" i="1">
                                   <a:solidFill>
                                     <a:srgbClr val="000000"/>
                                   </a:solidFill>
-                                  <a:latin typeface="Pretendard"/>
-                                  <a:ea typeface="Pretendard"/>
+                                  <a:latin typeface="Cambria Math" panose="02040503050406030204" pitchFamily="18" charset="0"/>
                                 </a:rPr>
                               </m:ctrlPr>
                             </m:sSubPr>
                             <m:e>
                               <m:r>
-                                <m:rPr>
-                                  <m:nor/>
-                                </m:rPr>
-                                <a:rPr lang="ko-KR" altLang="en-US" sz="1500" b="0" i="0">
+                                <a:rPr lang="en-US" sz="1500" b="0" i="1">
                                   <a:solidFill>
                                     <a:srgbClr val="000000"/>
                                   </a:solidFill>
-                                  <a:latin typeface="Pretendard"/>
-                                  <a:ea typeface="Pretendard"/>
+                                  <a:latin typeface="Cambria Math" panose="02040503050406030204" pitchFamily="18" charset="0"/>
                                 </a:rPr>
-                                <m:t>P</m:t>
+                                <m:t>𝑃</m:t>
                               </m:r>
                             </m:e>
                             <m:sub>
                               <m:r>
                                 <m:rPr>
-                                  <m:nor/>
+                                  <m:sty m:val="p"/>
                                 </m:rPr>
-                                <a:rPr lang="ko-KR" altLang="en-US" sz="1500" b="0" i="0">
+                                <a:rPr lang="en-US" sz="1500" b="0" i="0">
                                   <a:solidFill>
                                     <a:srgbClr val="000000"/>
                                   </a:solidFill>
-                                  <a:latin typeface="Pretendard"/>
-                                  <a:ea typeface="Pretendard"/>
+                                  <a:latin typeface="Cambria Math" panose="02040503050406030204" pitchFamily="18" charset="0"/>
                                 </a:rPr>
                                 <m:t>s</m:t>
                               </m:r>
                             </m:sub>
                           </m:sSub>
                           <m:r>
-                            <m:rPr>
-                              <m:nor/>
-                            </m:rPr>
-                            <a:rPr lang="ko-KR" altLang="en-US" sz="1500" b="0" i="0">
+                            <a:rPr lang="en-US" sz="1500" b="0" i="0">
                               <a:solidFill>
                                 <a:srgbClr val="000000"/>
                               </a:solidFill>
-                              <a:latin typeface="Pretendard"/>
-                              <a:ea typeface="Pretendard"/>
+                              <a:latin typeface="Cambria Math" panose="02040503050406030204" pitchFamily="18" charset="0"/>
                             </a:rPr>
-                            <m:t>(T)</m:t>
+                            <m:t>(</m:t>
+                          </m:r>
+                          <m:r>
+                            <a:rPr lang="en-US" sz="1500" b="0" i="1">
+                              <a:solidFill>
+                                <a:srgbClr val="000000"/>
+                              </a:solidFill>
+                              <a:latin typeface="Cambria Math" panose="02040503050406030204" pitchFamily="18" charset="0"/>
+                            </a:rPr>
+                            <m:t>𝑇</m:t>
+                          </m:r>
+                          <m:r>
+                            <a:rPr lang="en-US" sz="1500" b="0" i="0">
+                              <a:solidFill>
+                                <a:srgbClr val="000000"/>
+                              </a:solidFill>
+                              <a:latin typeface="Cambria Math" panose="02040503050406030204" pitchFamily="18" charset="0"/>
+                            </a:rPr>
+                            <m:t>)</m:t>
                           </m:r>
                         </m:num>
                         <m:den>
                           <m:r>
-                            <m:rPr>
-                              <m:nor/>
-                            </m:rPr>
-                            <a:rPr lang="ko-KR" altLang="en-US" sz="1500" b="0" i="0">
+                            <a:rPr lang="en-US" sz="1500" b="0" i="0">
                               <a:solidFill>
                                 <a:srgbClr val="000000"/>
                               </a:solidFill>
-                              <a:latin typeface="Pretendard"/>
-                              <a:ea typeface="Pretendard"/>
+                              <a:latin typeface="Cambria Math" panose="02040503050406030204" pitchFamily="18" charset="0"/>
                             </a:rPr>
-                            <m:t>100 × (273.15 + T)</m:t>
+                            <m:t>100</m:t>
                           </m:r>
+                          <m:d>
+                            <m:dPr>
+                              <m:ctrlPr>
+                                <a:rPr lang="en-US" sz="1500" b="0" i="0">
+                                  <a:solidFill>
+                                    <a:srgbClr val="000000"/>
+                                  </a:solidFill>
+                                  <a:latin typeface="Cambria Math" panose="02040503050406030204" pitchFamily="18" charset="0"/>
+                                </a:rPr>
+                              </m:ctrlPr>
+                            </m:dPr>
+                            <m:e>
+                              <m:r>
+                                <a:rPr lang="en-US" sz="1500" b="0" i="0">
+                                  <a:solidFill>
+                                    <a:srgbClr val="000000"/>
+                                  </a:solidFill>
+                                  <a:latin typeface="Cambria Math" panose="02040503050406030204" pitchFamily="18" charset="0"/>
+                                </a:rPr>
+                                <m:t>273.15+</m:t>
+                              </m:r>
+                              <m:r>
+                                <a:rPr lang="en-US" sz="1500" b="0" i="1">
+                                  <a:solidFill>
+                                    <a:srgbClr val="000000"/>
+                                  </a:solidFill>
+                                  <a:latin typeface="Cambria Math" panose="02040503050406030204" pitchFamily="18" charset="0"/>
+                                </a:rPr>
+                                <m:t>𝑇</m:t>
+                              </m:r>
+                            </m:e>
+                          </m:d>
                         </m:den>
                       </m:f>
                     </m:oMath>
@@ -9611,14 +10026,14 @@
         <mc:Fallback xmlns="">
           <p:sp>
             <p:nvSpPr>
-              <p:cNvPr id="13" name="eq2"/>
+              <p:cNvPr id="16" name="eq2"/>
               <p:cNvSpPr txBox="1"/>
               <p:nvPr/>
             </p:nvSpPr>
             <p:spPr>
               <a:xfrm>
-                <a:off x="777240" y="4041648"/>
-                <a:ext cx="3749040" cy="530352"/>
+                <a:off x="3200400" y="4151376"/>
+                <a:ext cx="3200400" cy="676656"/>
               </a:xfrm>
               <a:prstGeom prst="rect">
                 <a:avLst/>
@@ -9639,7 +10054,7 @@
                       <a:schemeClr val="tx1"/>
                     </a:solidFill>
                   </a:rPr>
-                  <a:t>AH = 216.7 × RH × Pₛ(T) / (100 × (273.15 + T))</a:t>
+                  <a:t>AH = 216.7 × RH × Pₛ(T) / (100 (273.15 + T))</a:t>
                 </a:r>
                 <a:endParaRPr lang="en-US" sz="1500" dirty="0"/>
               </a:p>
@@ -9649,14 +10064,14 @@
       </mc:AlternateContent>
       <p:sp>
         <p:nvSpPr>
-          <p:cNvPr id="14" name="Text 11"/>
+          <p:cNvPr id="17" name="Text 14"/>
           <p:cNvSpPr txBox="1"/>
           <p:nvPr/>
         </p:nvSpPr>
         <p:spPr>
           <a:xfrm>
-            <a:off x="777240" y="4663440"/>
-            <a:ext cx="3749040" cy="256032"/>
+            <a:off x="777240" y="4901184"/>
+            <a:ext cx="2331720" cy="676656"/>
           </a:xfrm>
           <a:prstGeom prst="rect">
             <a:avLst/>
@@ -9665,19 +10080,47 @@
           <a:ln/>
         </p:spPr>
         <p:txBody>
-          <a:bodyPr wrap="square" lIns="0" tIns="0" rIns="0" bIns="0" rtlCol="0" anchor="t"/>
+          <a:bodyPr wrap="square" lIns="0" tIns="0" rIns="0" bIns="0" rtlCol="0" anchor="ctr"/>
           <a:lstStyle/>
           <a:p>
             <a:pPr marL="0" indent="0">
               <a:buNone/>
             </a:pPr>
             <a:r>
-              <a:rPr lang="en-US" sz="1300" dirty="0">
-                <a:solidFill>
-                  <a:schemeClr val="tx1"/>
-                </a:solidFill>
-              </a:rPr>
-              <a:t>허용 상한 (표 3)</a:t>
+              <a:rPr lang="en-US" sz="1300" b="1" dirty="0">
+                <a:solidFill>
+                  <a:schemeClr val="tx1"/>
+                </a:solidFill>
+              </a:rPr>
+              <a:t>④ 허용 상한 (표 3)</a:t>
+            </a:r>
+            <a:endParaRPr lang="en-US" sz="1300" dirty="0"/>
+          </a:p>
+          <a:p>
+            <a:pPr marL="0" indent="0">
+              <a:buNone/>
+            </a:pPr>
+            <a:r>
+              <a:rPr lang="en-US" sz="1150" dirty="0">
+                <a:solidFill>
+                  <a:schemeClr val="tx1"/>
+                </a:solidFill>
+              </a:rPr>
+              <a:t>벽 표면이 80%를 넘지 않는</a:t>
+            </a:r>
+            <a:endParaRPr lang="en-US" sz="1300" dirty="0"/>
+          </a:p>
+          <a:p>
+            <a:pPr marL="0" indent="0">
+              <a:buNone/>
+            </a:pPr>
+            <a:r>
+              <a:rPr lang="en-US" sz="1150" dirty="0">
+                <a:solidFill>
+                  <a:schemeClr val="tx1"/>
+                </a:solidFill>
+              </a:rPr>
+              <a:t>실내 습도의 최댓값임</a:t>
             </a:r>
             <a:endParaRPr lang="en-US" sz="1300" dirty="0"/>
           </a:p>
@@ -9687,14 +10130,14 @@
         <mc:Choice Requires="a14">
           <p:sp>
             <p:nvSpPr>
-              <p:cNvPr id="15" name="eq3"/>
+              <p:cNvPr id="18" name="eq3"/>
               <p:cNvSpPr txBox="1"/>
               <p:nvPr/>
             </p:nvSpPr>
             <p:spPr>
               <a:xfrm>
-                <a:off x="777240" y="4910328"/>
-                <a:ext cx="3749040" cy="530352"/>
+                <a:off x="3200400" y="4901184"/>
+                <a:ext cx="3200400" cy="676656"/>
               </a:xfrm>
               <a:prstGeom prst="rect">
                 <a:avLst/>
@@ -9706,7 +10149,9 @@
               <a:bodyPr wrap="square" lIns="0" tIns="0" rIns="0" bIns="0" rtlCol="0" anchor="ctr"/>
               <a:lstStyle/>
               <a:p>
-                <a:pPr/>
+                <a:pPr marL="0" indent="0">
+                  <a:buNone/>
+                </a:pPr>
                 <a14:m>
                   <m:oMathPara xmlns:m="http://schemas.openxmlformats.org/officeDocument/2006/math">
                     <m:oMathParaPr>
@@ -9716,26 +10161,24 @@
                       <m:sSub>
                         <m:sSubPr>
                           <m:ctrlPr>
-                            <a:rPr lang="ko-KR" altLang="en-US" sz="1500" b="0" i="0">
+                            <a:rPr lang="en-US" sz="1500" b="0" i="0">
                               <a:solidFill>
                                 <a:srgbClr val="000000"/>
                               </a:solidFill>
-                              <a:latin typeface="Pretendard"/>
-                              <a:ea typeface="Pretendard"/>
+                              <a:latin typeface="Cambria Math" panose="02040503050406030204" pitchFamily="18" charset="0"/>
                             </a:rPr>
                           </m:ctrlPr>
                         </m:sSubPr>
                         <m:e>
                           <m:r>
                             <m:rPr>
-                              <m:nor/>
+                              <m:sty m:val="p"/>
                             </m:rPr>
-                            <a:rPr lang="ko-KR" altLang="en-US" sz="1500" b="0" i="0">
+                            <a:rPr lang="en-US" sz="1500" b="0" i="0">
                               <a:solidFill>
                                 <a:srgbClr val="000000"/>
                               </a:solidFill>
-                              <a:latin typeface="Pretendard"/>
-                              <a:ea typeface="Pretendard"/>
+                              <a:latin typeface="Cambria Math" panose="02040503050406030204" pitchFamily="18" charset="0"/>
                             </a:rPr>
                             <m:t>RH</m:t>
                           </m:r>
@@ -9757,27 +10200,22 @@
                         </m:sub>
                       </m:sSub>
                       <m:r>
-                        <m:rPr>
-                          <m:nor/>
-                        </m:rPr>
-                        <a:rPr lang="ko-KR" altLang="en-US" sz="1500" b="0" i="0">
+                        <a:rPr lang="en-US" sz="1500" b="0" i="0">
                           <a:solidFill>
                             <a:srgbClr val="000000"/>
                           </a:solidFill>
-                          <a:latin typeface="Pretendard"/>
-                          <a:ea typeface="Pretendard"/>
+                          <a:latin typeface="Cambria Math" panose="02040503050406030204" pitchFamily="18" charset="0"/>
                         </a:rPr>
-                        <m:t> = 80 × </m:t>
+                        <m:t>=80×</m:t>
                       </m:r>
                       <m:f>
                         <m:fPr>
                           <m:ctrlPr>
-                            <a:rPr lang="ko-KR" altLang="en-US" sz="1500" b="0" i="1">
+                            <a:rPr lang="en-US" sz="1500" b="0" i="1">
                               <a:solidFill>
                                 <a:srgbClr val="000000"/>
                               </a:solidFill>
                               <a:latin typeface="Cambria Math" panose="02040503050406030204" pitchFamily="18" charset="0"/>
-                              <a:ea typeface="Pretendard"/>
                             </a:rPr>
                           </m:ctrlPr>
                         </m:fPr>
@@ -9785,84 +10223,69 @@
                           <m:sSub>
                             <m:sSubPr>
                               <m:ctrlPr>
-                                <a:rPr lang="ko-KR" altLang="en-US" sz="1500" b="0" i="0">
+                                <a:rPr lang="en-US" sz="1500" b="0" i="1">
                                   <a:solidFill>
                                     <a:srgbClr val="000000"/>
                                   </a:solidFill>
-                                  <a:latin typeface="Pretendard"/>
-                                  <a:ea typeface="Pretendard"/>
+                                  <a:latin typeface="Cambria Math" panose="02040503050406030204" pitchFamily="18" charset="0"/>
                                 </a:rPr>
                               </m:ctrlPr>
                             </m:sSubPr>
                             <m:e>
                               <m:r>
-                                <m:rPr>
-                                  <m:nor/>
-                                </m:rPr>
-                                <a:rPr lang="ko-KR" altLang="en-US" sz="1500" b="0" i="0">
+                                <a:rPr lang="en-US" sz="1500" b="0" i="1">
                                   <a:solidFill>
                                     <a:srgbClr val="000000"/>
                                   </a:solidFill>
-                                  <a:latin typeface="Pretendard"/>
-                                  <a:ea typeface="Pretendard"/>
+                                  <a:latin typeface="Cambria Math" panose="02040503050406030204" pitchFamily="18" charset="0"/>
                                 </a:rPr>
-                                <m:t>P</m:t>
+                                <m:t>𝑃</m:t>
                               </m:r>
                             </m:e>
                             <m:sub>
                               <m:r>
                                 <m:rPr>
-                                  <m:nor/>
+                                  <m:sty m:val="p"/>
                                 </m:rPr>
-                                <a:rPr lang="ko-KR" altLang="en-US" sz="1500" b="0" i="0">
+                                <a:rPr lang="en-US" sz="1500" b="0" i="0">
                                   <a:solidFill>
                                     <a:srgbClr val="000000"/>
                                   </a:solidFill>
-                                  <a:latin typeface="Pretendard"/>
-                                  <a:ea typeface="Pretendard"/>
+                                  <a:latin typeface="Cambria Math" panose="02040503050406030204" pitchFamily="18" charset="0"/>
                                 </a:rPr>
                                 <m:t>s</m:t>
                               </m:r>
                             </m:sub>
                           </m:sSub>
                           <m:r>
-                            <m:rPr>
-                              <m:nor/>
-                            </m:rPr>
-                            <a:rPr lang="ko-KR" altLang="en-US" sz="1500" b="0" i="0">
+                            <a:rPr lang="en-US" sz="1500" b="0" i="0">
                               <a:solidFill>
                                 <a:srgbClr val="000000"/>
                               </a:solidFill>
-                              <a:latin typeface="Pretendard"/>
-                              <a:ea typeface="Pretendard"/>
+                              <a:latin typeface="Cambria Math" panose="02040503050406030204" pitchFamily="18" charset="0"/>
                             </a:rPr>
                             <m:t>(</m:t>
                           </m:r>
                           <m:sSub>
                             <m:sSubPr>
                               <m:ctrlPr>
-                                <a:rPr lang="ko-KR" altLang="en-US" sz="1500" b="0" i="0">
+                                <a:rPr lang="en-US" sz="1500" b="0" i="1">
                                   <a:solidFill>
                                     <a:srgbClr val="000000"/>
                                   </a:solidFill>
-                                  <a:latin typeface="Pretendard"/>
-                                  <a:ea typeface="Pretendard"/>
+                                  <a:latin typeface="Cambria Math" panose="02040503050406030204" pitchFamily="18" charset="0"/>
                                 </a:rPr>
                               </m:ctrlPr>
                             </m:sSubPr>
                             <m:e>
                               <m:r>
-                                <m:rPr>
-                                  <m:nor/>
-                                </m:rPr>
-                                <a:rPr lang="ko-KR" altLang="en-US" sz="1500" b="0" i="0">
+                                <a:rPr lang="en-US" sz="1500" b="0" i="1">
                                   <a:solidFill>
                                     <a:srgbClr val="000000"/>
                                   </a:solidFill>
-                                  <a:latin typeface="Pretendard"/>
-                                  <a:ea typeface="Pretendard"/>
+                                  <a:latin typeface="Cambria Math" panose="02040503050406030204" pitchFamily="18" charset="0"/>
                                 </a:rPr>
-                                <m:t>T</m:t>
+                                <m:t>𝑇</m:t>
                               </m:r>
                             </m:e>
                             <m:sub>
@@ -9882,15 +10305,11 @@
                             </m:sub>
                           </m:sSub>
                           <m:r>
-                            <m:rPr>
-                              <m:nor/>
-                            </m:rPr>
-                            <a:rPr lang="ko-KR" altLang="en-US" sz="1500" b="0" i="0">
+                            <a:rPr lang="en-US" sz="1500" b="0" i="0">
                               <a:solidFill>
                                 <a:srgbClr val="000000"/>
                               </a:solidFill>
-                              <a:latin typeface="Pretendard"/>
-                              <a:ea typeface="Pretendard"/>
+                              <a:latin typeface="Cambria Math" panose="02040503050406030204" pitchFamily="18" charset="0"/>
                             </a:rPr>
                             <m:t>)</m:t>
                           </m:r>
@@ -9899,84 +10318,69 @@
                           <m:sSub>
                             <m:sSubPr>
                               <m:ctrlPr>
-                                <a:rPr lang="ko-KR" altLang="en-US" sz="1500" b="0" i="0">
+                                <a:rPr lang="en-US" sz="1500" b="0" i="1">
                                   <a:solidFill>
                                     <a:srgbClr val="000000"/>
                                   </a:solidFill>
-                                  <a:latin typeface="Pretendard"/>
-                                  <a:ea typeface="Pretendard"/>
+                                  <a:latin typeface="Cambria Math" panose="02040503050406030204" pitchFamily="18" charset="0"/>
                                 </a:rPr>
                               </m:ctrlPr>
                             </m:sSubPr>
                             <m:e>
                               <m:r>
-                                <m:rPr>
-                                  <m:nor/>
-                                </m:rPr>
-                                <a:rPr lang="ko-KR" altLang="en-US" sz="1500" b="0" i="0">
+                                <a:rPr lang="en-US" sz="1500" b="0" i="1">
                                   <a:solidFill>
                                     <a:srgbClr val="000000"/>
                                   </a:solidFill>
-                                  <a:latin typeface="Pretendard"/>
-                                  <a:ea typeface="Pretendard"/>
+                                  <a:latin typeface="Cambria Math" panose="02040503050406030204" pitchFamily="18" charset="0"/>
                                 </a:rPr>
-                                <m:t>P</m:t>
+                                <m:t>𝑃</m:t>
                               </m:r>
                             </m:e>
                             <m:sub>
                               <m:r>
                                 <m:rPr>
-                                  <m:nor/>
+                                  <m:sty m:val="p"/>
                                 </m:rPr>
-                                <a:rPr lang="ko-KR" altLang="en-US" sz="1500" b="0" i="0">
+                                <a:rPr lang="en-US" sz="1500" b="0" i="0">
                                   <a:solidFill>
                                     <a:srgbClr val="000000"/>
                                   </a:solidFill>
-                                  <a:latin typeface="Pretendard"/>
-                                  <a:ea typeface="Pretendard"/>
+                                  <a:latin typeface="Cambria Math" panose="02040503050406030204" pitchFamily="18" charset="0"/>
                                 </a:rPr>
                                 <m:t>s</m:t>
                               </m:r>
                             </m:sub>
                           </m:sSub>
                           <m:r>
-                            <m:rPr>
-                              <m:nor/>
-                            </m:rPr>
-                            <a:rPr lang="ko-KR" altLang="en-US" sz="1500" b="0" i="0">
+                            <a:rPr lang="en-US" sz="1500" b="0" i="0">
                               <a:solidFill>
                                 <a:srgbClr val="000000"/>
                               </a:solidFill>
-                              <a:latin typeface="Pretendard"/>
-                              <a:ea typeface="Pretendard"/>
+                              <a:latin typeface="Cambria Math" panose="02040503050406030204" pitchFamily="18" charset="0"/>
                             </a:rPr>
                             <m:t>(</m:t>
                           </m:r>
                           <m:sSub>
                             <m:sSubPr>
                               <m:ctrlPr>
-                                <a:rPr lang="ko-KR" altLang="en-US" sz="1500" b="0" i="0">
+                                <a:rPr lang="en-US" sz="1500" b="0" i="1">
                                   <a:solidFill>
                                     <a:srgbClr val="000000"/>
                                   </a:solidFill>
-                                  <a:latin typeface="Pretendard"/>
-                                  <a:ea typeface="Pretendard"/>
+                                  <a:latin typeface="Cambria Math" panose="02040503050406030204" pitchFamily="18" charset="0"/>
                                 </a:rPr>
                               </m:ctrlPr>
                             </m:sSubPr>
                             <m:e>
                               <m:r>
-                                <m:rPr>
-                                  <m:nor/>
-                                </m:rPr>
-                                <a:rPr lang="ko-KR" altLang="en-US" sz="1500" b="0" i="0">
+                                <a:rPr lang="en-US" sz="1500" b="0" i="1">
                                   <a:solidFill>
                                     <a:srgbClr val="000000"/>
                                   </a:solidFill>
-                                  <a:latin typeface="Pretendard"/>
-                                  <a:ea typeface="Pretendard"/>
+                                  <a:latin typeface="Cambria Math" panose="02040503050406030204" pitchFamily="18" charset="0"/>
                                 </a:rPr>
-                                <m:t>T</m:t>
+                                <m:t>𝑇</m:t>
                               </m:r>
                             </m:e>
                             <m:sub>
@@ -9996,15 +10400,11 @@
                             </m:sub>
                           </m:sSub>
                           <m:r>
-                            <m:rPr>
-                              <m:nor/>
-                            </m:rPr>
-                            <a:rPr lang="ko-KR" altLang="en-US" sz="1500" b="0" i="0">
+                            <a:rPr lang="en-US" sz="1500" b="0" i="0">
                               <a:solidFill>
                                 <a:srgbClr val="000000"/>
                               </a:solidFill>
-                              <a:latin typeface="Pretendard"/>
-                              <a:ea typeface="Pretendard"/>
+                              <a:latin typeface="Cambria Math" panose="02040503050406030204" pitchFamily="18" charset="0"/>
                             </a:rPr>
                             <m:t>)</m:t>
                           </m:r>
@@ -10021,14 +10421,14 @@
         <mc:Fallback xmlns="">
           <p:sp>
             <p:nvSpPr>
-              <p:cNvPr id="15" name="eq3"/>
+              <p:cNvPr id="18" name="eq3"/>
               <p:cNvSpPr txBox="1"/>
               <p:nvPr/>
             </p:nvSpPr>
             <p:spPr>
               <a:xfrm>
-                <a:off x="777240" y="4910328"/>
-                <a:ext cx="3749040" cy="530352"/>
+                <a:off x="3200400" y="4901184"/>
+                <a:ext cx="3200400" cy="676656"/>
               </a:xfrm>
               <a:prstGeom prst="rect">
                 <a:avLst/>
@@ -10057,40 +10457,265 @@
           </p:sp>
         </mc:Fallback>
       </mc:AlternateContent>
-      <p:pic>
-        <p:nvPicPr>
-          <p:cNvPr id="16" name="Image 1" descr="클라우드 불필요"/>
-          <p:cNvPicPr>
-            <a:picLocks noChangeAspect="1"/>
-          </p:cNvPicPr>
-          <p:nvPr/>
-        </p:nvPicPr>
-        <p:blipFill>
-          <a:blip r:embed="rId4"/>
-          <a:stretch>
-            <a:fillRect/>
-          </a:stretch>
-        </p:blipFill>
-        <p:spPr>
-          <a:xfrm>
-            <a:off x="777240" y="5623560"/>
-            <a:ext cx="310896" cy="310896"/>
-          </a:xfrm>
-          <a:prstGeom prst="rect">
-            <a:avLst/>
-          </a:prstGeom>
-        </p:spPr>
-      </p:pic>
-      <p:sp>
-        <p:nvSpPr>
-          <p:cNvPr id="17" name="Text 13"/>
+      <p:sp>
+        <p:nvSpPr>
+          <p:cNvPr id="19" name="Shape 16"/>
+          <p:cNvSpPr/>
+          <p:nvPr/>
+        </p:nvSpPr>
+        <p:spPr>
+          <a:xfrm>
+            <a:off x="731520" y="5641848"/>
+            <a:ext cx="5623560" cy="512064"/>
+          </a:xfrm>
+          <a:prstGeom prst="roundRect">
+            <a:avLst>
+              <a:gd name="adj" fmla="val 14286"/>
+            </a:avLst>
+          </a:prstGeom>
+          <a:solidFill>
+            <a:srgbClr val="FFFFFF"/>
+          </a:solidFill>
+          <a:ln w="9525">
+            <a:solidFill>
+              <a:srgbClr val="E0E0E0"/>
+            </a:solidFill>
+            <a:prstDash val="solid"/>
+          </a:ln>
+        </p:spPr>
+      </p:sp>
+      <p:sp>
+        <p:nvSpPr>
+          <p:cNvPr id="20" name="Text 17"/>
           <p:cNvSpPr txBox="1"/>
           <p:nvPr/>
         </p:nvSpPr>
         <p:spPr>
           <a:xfrm>
-            <a:off x="1188720" y="5577840"/>
-            <a:ext cx="3383280" cy="594360"/>
+            <a:off x="868680" y="5641848"/>
+            <a:ext cx="2240280" cy="512064"/>
+          </a:xfrm>
+          <a:prstGeom prst="rect">
+            <a:avLst/>
+          </a:prstGeom>
+          <a:noFill/>
+          <a:ln/>
+        </p:spPr>
+        <p:txBody>
+          <a:bodyPr wrap="square" lIns="0" tIns="0" rIns="0" bIns="0" rtlCol="0" anchor="ctr"/>
+          <a:lstStyle/>
+          <a:p>
+            <a:pPr marL="0" indent="0">
+              <a:buNone/>
+            </a:pPr>
+            <a:r>
+              <a:rPr lang="en-US" sz="1200" dirty="0">
+                <a:solidFill>
+                  <a:schemeClr val="tx1"/>
+                </a:solidFill>
+              </a:rPr>
+              <a:t>예) 방 21℃, 45%이고</a:t>
+            </a:r>
+            <a:endParaRPr lang="en-US" sz="1200" dirty="0"/>
+          </a:p>
+          <a:p>
+            <a:pPr marL="0" indent="0">
+              <a:buNone/>
+            </a:pPr>
+            <a:r>
+              <a:rPr lang="en-US" sz="1200" dirty="0">
+                <a:solidFill>
+                  <a:schemeClr val="tx1"/>
+                </a:solidFill>
+              </a:rPr>
+              <a:t>벽이 12℃이면</a:t>
+            </a:r>
+            <a:endParaRPr lang="en-US" sz="1200" dirty="0"/>
+          </a:p>
+        </p:txBody>
+      </p:sp>
+      <mc:AlternateContent xmlns:mc="http://schemas.openxmlformats.org/markup-compatibility/2006" xmlns:a14="http://schemas.microsoft.com/office/drawing/2010/main">
+        <mc:Choice Requires="a14">
+          <p:sp>
+            <p:nvSpPr>
+              <p:cNvPr id="21" name="eq4"/>
+              <p:cNvSpPr txBox="1"/>
+              <p:nvPr/>
+            </p:nvSpPr>
+            <p:spPr>
+              <a:xfrm>
+                <a:off x="3200400" y="5641848"/>
+                <a:ext cx="3108960" cy="512064"/>
+              </a:xfrm>
+              <a:prstGeom prst="rect">
+                <a:avLst/>
+              </a:prstGeom>
+              <a:noFill/>
+              <a:ln/>
+            </p:spPr>
+            <p:txBody>
+              <a:bodyPr wrap="square" lIns="0" tIns="0" rIns="0" bIns="0" rtlCol="0" anchor="ctr"/>
+              <a:lstStyle/>
+              <a:p>
+                <a:pPr marL="0" indent="0">
+                  <a:buNone/>
+                </a:pPr>
+                <a14:m>
+                  <m:oMathPara xmlns:m="http://schemas.openxmlformats.org/officeDocument/2006/math">
+                    <m:oMathParaPr>
+                      <m:jc m:val="left"/>
+                    </m:oMathParaPr>
+                    <m:oMath>
+                      <m:sSub>
+                        <m:sSubPr>
+                          <m:ctrlPr>
+                            <a:rPr lang="en-US" sz="1400" b="0" i="0">
+                              <a:solidFill>
+                                <a:srgbClr val="000000"/>
+                              </a:solidFill>
+                              <a:latin typeface="Cambria Math" panose="02040503050406030204" pitchFamily="18" charset="0"/>
+                            </a:rPr>
+                          </m:ctrlPr>
+                        </m:sSubPr>
+                        <m:e>
+                          <m:r>
+                            <m:rPr>
+                              <m:sty m:val="p"/>
+                            </m:rPr>
+                            <a:rPr lang="en-US" sz="1400" b="0" i="0">
+                              <a:solidFill>
+                                <a:srgbClr val="000000"/>
+                              </a:solidFill>
+                              <a:latin typeface="Cambria Math" panose="02040503050406030204" pitchFamily="18" charset="0"/>
+                            </a:rPr>
+                            <m:t>RH</m:t>
+                          </m:r>
+                        </m:e>
+                        <m:sub>
+                          <m:r>
+                            <m:rPr>
+                              <m:nor/>
+                            </m:rPr>
+                            <a:rPr lang="ko-KR" altLang="en-US" sz="1400" b="0" i="0">
+                              <a:solidFill>
+                                <a:srgbClr val="000000"/>
+                              </a:solidFill>
+                              <a:latin typeface="Pretendard"/>
+                              <a:ea typeface="Pretendard"/>
+                            </a:rPr>
+                            <m:t>표면</m:t>
+                          </m:r>
+                        </m:sub>
+                      </m:sSub>
+                      <m:r>
+                        <a:rPr lang="en-US" sz="1400" b="0" i="0">
+                          <a:solidFill>
+                            <a:srgbClr val="000000"/>
+                          </a:solidFill>
+                          <a:latin typeface="Cambria Math" panose="02040503050406030204" pitchFamily="18" charset="0"/>
+                        </a:rPr>
+                        <m:t>=45×</m:t>
+                      </m:r>
+                      <m:f>
+                        <m:fPr>
+                          <m:ctrlPr>
+                            <a:rPr lang="en-US" sz="1400" b="0" i="0">
+                              <a:solidFill>
+                                <a:srgbClr val="000000"/>
+                              </a:solidFill>
+                              <a:latin typeface="Cambria Math" panose="02040503050406030204" pitchFamily="18" charset="0"/>
+                            </a:rPr>
+                          </m:ctrlPr>
+                        </m:fPr>
+                        <m:num>
+                          <m:r>
+                            <a:rPr lang="en-US" sz="1400" b="0" i="0">
+                              <a:solidFill>
+                                <a:srgbClr val="000000"/>
+                              </a:solidFill>
+                              <a:latin typeface="Cambria Math" panose="02040503050406030204" pitchFamily="18" charset="0"/>
+                            </a:rPr>
+                            <m:t>24.8</m:t>
+                          </m:r>
+                        </m:num>
+                        <m:den>
+                          <m:r>
+                            <a:rPr lang="en-US" sz="1400" b="0" i="0">
+                              <a:solidFill>
+                                <a:srgbClr val="000000"/>
+                              </a:solidFill>
+                              <a:latin typeface="Cambria Math" panose="02040503050406030204" pitchFamily="18" charset="0"/>
+                            </a:rPr>
+                            <m:t>14.0</m:t>
+                          </m:r>
+                        </m:den>
+                      </m:f>
+                      <m:r>
+                        <a:rPr lang="en-US" sz="1400" b="0" i="0">
+                          <a:solidFill>
+                            <a:srgbClr val="000000"/>
+                          </a:solidFill>
+                          <a:latin typeface="Cambria Math" panose="02040503050406030204" pitchFamily="18" charset="0"/>
+                        </a:rPr>
+                        <m:t>≈80%</m:t>
+                      </m:r>
+                    </m:oMath>
+                  </m:oMathPara>
+                </a14:m>
+                <a:endParaRPr lang="ko-KR" sz="1400"/>
+              </a:p>
+            </p:txBody>
+          </p:sp>
+        </mc:Choice>
+        <mc:Fallback xmlns="">
+          <p:sp>
+            <p:nvSpPr>
+              <p:cNvPr id="21" name="eq4"/>
+              <p:cNvSpPr txBox="1"/>
+              <p:nvPr/>
+            </p:nvSpPr>
+            <p:spPr>
+              <a:xfrm>
+                <a:off x="3200400" y="5641848"/>
+                <a:ext cx="3108960" cy="512064"/>
+              </a:xfrm>
+              <a:prstGeom prst="rect">
+                <a:avLst/>
+              </a:prstGeom>
+              <a:noFill/>
+              <a:ln/>
+            </p:spPr>
+            <p:txBody>
+              <a:bodyPr wrap="square" lIns="0" tIns="0" rIns="0" bIns="0" rtlCol="0" anchor="ctr"/>
+              <a:lstStyle/>
+              <a:p>
+                <a:pPr indent="0" marL="0">
+                  <a:buNone/>
+                </a:pPr>
+                <a:r>
+                  <a:rPr lang="en-US" sz="1400" dirty="0">
+                    <a:solidFill>
+                      <a:schemeClr val="tx1"/>
+                    </a:solidFill>
+                  </a:rPr>
+                  <a:t>RH표면 = 45 × 24.8 / 14.0 ≈ 80%</a:t>
+                </a:r>
+                <a:endParaRPr lang="en-US" sz="1400" dirty="0"/>
+              </a:p>
+            </p:txBody>
+          </p:sp>
+        </mc:Fallback>
+      </mc:AlternateContent>
+      <p:sp>
+        <p:nvSpPr>
+          <p:cNvPr id="22" name="Text 19"/>
+          <p:cNvSpPr txBox="1"/>
+          <p:nvPr/>
+        </p:nvSpPr>
+        <p:spPr>
+          <a:xfrm>
+            <a:off x="6812280" y="1371600"/>
+            <a:ext cx="4846320" cy="292608"/>
           </a:xfrm>
           <a:prstGeom prst="rect">
             <a:avLst/>
@@ -10106,41 +10731,27 @@
               <a:buNone/>
             </a:pPr>
             <a:r>
-              <a:rPr lang="en-US" sz="1200" dirty="0">
-                <a:solidFill>
-                  <a:schemeClr val="tx1"/>
-                </a:solidFill>
-              </a:rPr>
-              <a:t>판단, 학습, 예측을 모두 DK 안에서 처리함.</a:t>
-            </a:r>
-            <a:endParaRPr lang="en-US" sz="1200" dirty="0"/>
-          </a:p>
-          <a:p>
-            <a:pPr marL="0" indent="0">
-              <a:buNone/>
-            </a:pPr>
-            <a:r>
-              <a:rPr lang="en-US" sz="1200" dirty="0">
-                <a:solidFill>
-                  <a:schemeClr val="tx1"/>
-                </a:solidFill>
-              </a:rPr>
-              <a:t>Wi-Fi나 클라우드가 끊겨도 방어가 계속됨.</a:t>
-            </a:r>
-            <a:endParaRPr lang="en-US" sz="1200" dirty="0"/>
+              <a:rPr lang="en-US" sz="1500" b="1" dirty="0">
+                <a:solidFill>
+                  <a:schemeClr val="tx1"/>
+                </a:solidFill>
+              </a:rPr>
+              <a:t>판단 규칙</a:t>
+            </a:r>
+            <a:endParaRPr lang="en-US" sz="1500" dirty="0"/>
           </a:p>
         </p:txBody>
       </p:sp>
       <p:sp>
         <p:nvSpPr>
-          <p:cNvPr id="18" name="Shape 14"/>
+          <p:cNvPr id="23" name="Shape 20"/>
           <p:cNvSpPr/>
           <p:nvPr/>
         </p:nvSpPr>
         <p:spPr>
           <a:xfrm>
-            <a:off x="5074920" y="1371600"/>
-            <a:ext cx="384048" cy="384048"/>
+            <a:off x="6812280" y="1810512"/>
+            <a:ext cx="365760" cy="365760"/>
           </a:xfrm>
           <a:prstGeom prst="ellipse">
             <a:avLst/>
@@ -10158,22 +10769,22 @@
       </p:sp>
       <p:pic>
         <p:nvPicPr>
-          <p:cNvPr id="19" name="Image 2" descr="shield"/>
+          <p:cNvPr id="24" name="Image 1" descr="shield"/>
           <p:cNvPicPr>
             <a:picLocks noChangeAspect="1"/>
           </p:cNvPicPr>
           <p:nvPr/>
         </p:nvPicPr>
         <p:blipFill>
-          <a:blip r:embed="rId5"/>
+          <a:blip r:embed="rId4"/>
           <a:stretch>
             <a:fillRect/>
           </a:stretch>
         </p:blipFill>
         <p:spPr>
           <a:xfrm>
-            <a:off x="5159411" y="1456091"/>
-            <a:ext cx="215067" cy="215067"/>
+            <a:off x="6892747" y="1890979"/>
+            <a:ext cx="204826" cy="204826"/>
           </a:xfrm>
           <a:prstGeom prst="rect">
             <a:avLst/>
@@ -10182,14 +10793,14 @@
       </p:pic>
       <p:sp>
         <p:nvSpPr>
-          <p:cNvPr id="20" name="Text 15"/>
+          <p:cNvPr id="25" name="Text 21"/>
           <p:cNvSpPr txBox="1"/>
           <p:nvPr/>
         </p:nvSpPr>
         <p:spPr>
           <a:xfrm>
-            <a:off x="5641848" y="1335024"/>
-            <a:ext cx="6016752" cy="566928"/>
+            <a:off x="7360920" y="1773936"/>
+            <a:ext cx="4297680" cy="512064"/>
           </a:xfrm>
           <a:prstGeom prst="rect">
             <a:avLst/>
@@ -10205,41 +10816,41 @@
               <a:buNone/>
             </a:pPr>
             <a:r>
-              <a:rPr lang="en-US" sz="1400" b="1" dirty="0">
+              <a:rPr lang="en-US" sz="1300" b="1" dirty="0">
                 <a:solidFill>
                   <a:schemeClr val="tx1"/>
                 </a:solidFill>
               </a:rPr>
               <a:t>A 곰팡이 방어</a:t>
             </a:r>
-            <a:endParaRPr lang="en-US" sz="1400" dirty="0"/>
+            <a:endParaRPr lang="en-US" sz="1300" dirty="0"/>
           </a:p>
           <a:p>
             <a:pPr marL="0" indent="0">
               <a:buNone/>
             </a:pPr>
             <a:r>
-              <a:rPr lang="en-US" sz="1300" dirty="0">
-                <a:solidFill>
-                  <a:schemeClr val="tx1"/>
-                </a:solidFill>
-              </a:rPr>
-              <a:t>벽 표면 75%에서 가습을 멈추고 70% 미만에서만 재개함 (임계 80%에 여유 5%p)</a:t>
-            </a:r>
-            <a:endParaRPr lang="en-US" sz="1400" dirty="0"/>
+              <a:rPr lang="en-US" sz="1200" dirty="0">
+                <a:solidFill>
+                  <a:schemeClr val="tx1"/>
+                </a:solidFill>
+              </a:rPr>
+              <a:t>벽 표면 75%에서 가습 정지, 70% 미만에서만 재개함</a:t>
+            </a:r>
+            <a:endParaRPr lang="en-US" sz="1300" dirty="0"/>
           </a:p>
         </p:txBody>
       </p:sp>
       <p:sp>
         <p:nvSpPr>
-          <p:cNvPr id="21" name="Shape 16"/>
+          <p:cNvPr id="26" name="Shape 22"/>
           <p:cNvSpPr/>
           <p:nvPr/>
         </p:nvSpPr>
         <p:spPr>
           <a:xfrm>
-            <a:off x="5074920" y="1975104"/>
-            <a:ext cx="384048" cy="384048"/>
+            <a:off x="6812280" y="2359152"/>
+            <a:ext cx="365760" cy="365760"/>
           </a:xfrm>
           <a:prstGeom prst="ellipse">
             <a:avLst/>
@@ -10257,22 +10868,22 @@
       </p:sp>
       <p:pic>
         <p:nvPicPr>
-          <p:cNvPr id="22" name="Image 3" descr="droplet"/>
+          <p:cNvPr id="27" name="Image 2" descr="droplet"/>
           <p:cNvPicPr>
             <a:picLocks noChangeAspect="1"/>
           </p:cNvPicPr>
           <p:nvPr/>
         </p:nvPicPr>
         <p:blipFill>
-          <a:blip r:embed="rId6"/>
+          <a:blip r:embed="rId5"/>
           <a:stretch>
             <a:fillRect/>
           </a:stretch>
         </p:blipFill>
         <p:spPr>
           <a:xfrm>
-            <a:off x="5159411" y="2059595"/>
-            <a:ext cx="215067" cy="215067"/>
+            <a:off x="6892747" y="2439619"/>
+            <a:ext cx="204826" cy="204826"/>
           </a:xfrm>
           <a:prstGeom prst="rect">
             <a:avLst/>
@@ -10281,14 +10892,14 @@
       </p:pic>
       <p:sp>
         <p:nvSpPr>
-          <p:cNvPr id="23" name="Text 17"/>
+          <p:cNvPr id="28" name="Text 23"/>
           <p:cNvSpPr txBox="1"/>
           <p:nvPr/>
         </p:nvSpPr>
         <p:spPr>
           <a:xfrm>
-            <a:off x="5641848" y="1938528"/>
-            <a:ext cx="6016752" cy="566928"/>
+            <a:off x="7360920" y="2322576"/>
+            <a:ext cx="4297680" cy="512064"/>
           </a:xfrm>
           <a:prstGeom prst="rect">
             <a:avLst/>
@@ -10304,41 +10915,41 @@
               <a:buNone/>
             </a:pPr>
             <a:r>
-              <a:rPr lang="en-US" sz="1400" b="1" dirty="0">
+              <a:rPr lang="en-US" sz="1300" b="1" dirty="0">
                 <a:solidFill>
                   <a:schemeClr val="tx1"/>
                 </a:solidFill>
               </a:rPr>
               <a:t>B 점막 방어</a:t>
             </a:r>
-            <a:endParaRPr lang="en-US" sz="1400" dirty="0"/>
+            <a:endParaRPr lang="en-US" sz="1300" dirty="0"/>
           </a:p>
           <a:p>
             <a:pPr marL="0" indent="0">
               <a:buNone/>
             </a:pPr>
             <a:r>
-              <a:rPr lang="en-US" sz="1300" dirty="0">
-                <a:solidFill>
-                  <a:schemeClr val="tx1"/>
-                </a:solidFill>
-              </a:rPr>
-              <a:t>절대습도 6.5 g/㎥ 미만이면 가습하고 8 g/㎥에서 정지함</a:t>
-            </a:r>
-            <a:endParaRPr lang="en-US" sz="1400" dirty="0"/>
+              <a:rPr lang="en-US" sz="1200" dirty="0">
+                <a:solidFill>
+                  <a:schemeClr val="tx1"/>
+                </a:solidFill>
+              </a:rPr>
+              <a:t>절대습도 6.5 g/㎥ 미만이면 가습, 8 g/㎥에서 정지함</a:t>
+            </a:r>
+            <a:endParaRPr lang="en-US" sz="1300" dirty="0"/>
           </a:p>
         </p:txBody>
       </p:sp>
       <p:sp>
         <p:nvSpPr>
-          <p:cNvPr id="24" name="Shape 18"/>
+          <p:cNvPr id="29" name="Shape 24"/>
           <p:cNvSpPr/>
           <p:nvPr/>
         </p:nvSpPr>
         <p:spPr>
           <a:xfrm>
-            <a:off x="5074920" y="2578608"/>
-            <a:ext cx="384048" cy="384048"/>
+            <a:off x="6812280" y="2907792"/>
+            <a:ext cx="365760" cy="365760"/>
           </a:xfrm>
           <a:prstGeom prst="ellipse">
             <a:avLst/>
@@ -10356,22 +10967,22 @@
       </p:sp>
       <p:pic>
         <p:nvPicPr>
-          <p:cNvPr id="25" name="Image 4" descr="fan"/>
+          <p:cNvPr id="30" name="Image 3" descr="fan"/>
           <p:cNvPicPr>
             <a:picLocks noChangeAspect="1"/>
           </p:cNvPicPr>
           <p:nvPr/>
         </p:nvPicPr>
         <p:blipFill>
-          <a:blip r:embed="rId7"/>
+          <a:blip r:embed="rId6"/>
           <a:stretch>
             <a:fillRect/>
           </a:stretch>
         </p:blipFill>
         <p:spPr>
           <a:xfrm>
-            <a:off x="5159411" y="2663099"/>
-            <a:ext cx="215067" cy="215067"/>
+            <a:off x="6892747" y="2988259"/>
+            <a:ext cx="204826" cy="204826"/>
           </a:xfrm>
           <a:prstGeom prst="rect">
             <a:avLst/>
@@ -10380,14 +10991,14 @@
       </p:pic>
       <p:sp>
         <p:nvSpPr>
-          <p:cNvPr id="26" name="Text 19"/>
+          <p:cNvPr id="31" name="Text 25"/>
           <p:cNvSpPr txBox="1"/>
           <p:nvPr/>
         </p:nvSpPr>
         <p:spPr>
           <a:xfrm>
-            <a:off x="5641848" y="2542032"/>
-            <a:ext cx="6016752" cy="566928"/>
+            <a:off x="7360920" y="2871216"/>
+            <a:ext cx="4297680" cy="512064"/>
           </a:xfrm>
           <a:prstGeom prst="rect">
             <a:avLst/>
@@ -10403,41 +11014,41 @@
               <a:buNone/>
             </a:pPr>
             <a:r>
-              <a:rPr lang="en-US" sz="1400" b="1" dirty="0">
+              <a:rPr lang="en-US" sz="1300" b="1" dirty="0">
                 <a:solidFill>
                   <a:schemeClr val="tx1"/>
                 </a:solidFill>
               </a:rPr>
               <a:t>선풍기 개입</a:t>
             </a:r>
-            <a:endParaRPr lang="en-US" sz="1400" dirty="0"/>
+            <a:endParaRPr lang="en-US" sz="1300" dirty="0"/>
           </a:p>
           <a:p>
             <a:pPr marL="0" indent="0">
               <a:buNone/>
             </a:pPr>
             <a:r>
-              <a:rPr lang="en-US" sz="1300" dirty="0">
-                <a:solidFill>
-                  <a:schemeClr val="tx1"/>
-                </a:solidFill>
-              </a:rPr>
-              <a:t>가습을 멈춰도 75% 이상이면 0.5초 뒤 선풍기를 켜 벽 표면을 데움</a:t>
-            </a:r>
-            <a:endParaRPr lang="en-US" sz="1400" dirty="0"/>
+              <a:rPr lang="en-US" sz="1200" dirty="0">
+                <a:solidFill>
+                  <a:schemeClr val="tx1"/>
+                </a:solidFill>
+              </a:rPr>
+              <a:t>가습을 멈춰도 75% 이상이면 선풍기로 벽 표면을 데움</a:t>
+            </a:r>
+            <a:endParaRPr lang="en-US" sz="1300" dirty="0"/>
           </a:p>
         </p:txBody>
       </p:sp>
       <p:sp>
         <p:nvSpPr>
-          <p:cNvPr id="27" name="Shape 20"/>
+          <p:cNvPr id="32" name="Shape 26"/>
           <p:cNvSpPr/>
           <p:nvPr/>
         </p:nvSpPr>
         <p:spPr>
           <a:xfrm>
-            <a:off x="5074920" y="3182112"/>
-            <a:ext cx="384048" cy="384048"/>
+            <a:off x="6812280" y="3456432"/>
+            <a:ext cx="365760" cy="365760"/>
           </a:xfrm>
           <a:prstGeom prst="ellipse">
             <a:avLst/>
@@ -10455,22 +11066,22 @@
       </p:sp>
       <p:pic>
         <p:nvPicPr>
-          <p:cNvPr id="28" name="Image 5" descr="brain"/>
+          <p:cNvPr id="33" name="Image 4" descr="brain"/>
           <p:cNvPicPr>
             <a:picLocks noChangeAspect="1"/>
           </p:cNvPicPr>
           <p:nvPr/>
         </p:nvPicPr>
         <p:blipFill>
-          <a:blip r:embed="rId8"/>
+          <a:blip r:embed="rId7"/>
           <a:stretch>
             <a:fillRect/>
           </a:stretch>
         </p:blipFill>
         <p:spPr>
           <a:xfrm>
-            <a:off x="5159411" y="3266603"/>
-            <a:ext cx="215067" cy="215067"/>
+            <a:off x="6892747" y="3536899"/>
+            <a:ext cx="204826" cy="204826"/>
           </a:xfrm>
           <a:prstGeom prst="rect">
             <a:avLst/>
@@ -10479,14 +11090,14 @@
       </p:pic>
       <p:sp>
         <p:nvSpPr>
-          <p:cNvPr id="29" name="Text 21"/>
+          <p:cNvPr id="34" name="Text 27"/>
           <p:cNvSpPr txBox="1"/>
           <p:nvPr/>
         </p:nvSpPr>
         <p:spPr>
           <a:xfrm>
-            <a:off x="5641848" y="3145536"/>
-            <a:ext cx="6016752" cy="566928"/>
+            <a:off x="7360920" y="3419856"/>
+            <a:ext cx="4297680" cy="512064"/>
           </a:xfrm>
           <a:prstGeom prst="rect">
             <a:avLst/>
@@ -10502,41 +11113,41 @@
               <a:buNone/>
             </a:pPr>
             <a:r>
-              <a:rPr lang="en-US" sz="1400" b="1" dirty="0">
+              <a:rPr lang="en-US" sz="1300" b="1" dirty="0">
                 <a:solidFill>
                   <a:schemeClr val="tx1"/>
                 </a:solidFill>
               </a:rPr>
               <a:t>E 학습</a:t>
             </a:r>
-            <a:endParaRPr lang="en-US" sz="1400" dirty="0"/>
+            <a:endParaRPr lang="en-US" sz="1300" dirty="0"/>
           </a:p>
           <a:p>
             <a:pPr marL="0" indent="0">
               <a:buNone/>
             </a:pPr>
             <a:r>
-              <a:rPr lang="en-US" sz="1300" dirty="0">
-                <a:solidFill>
-                  <a:schemeClr val="tx1"/>
-                </a:solidFill>
-              </a:rPr>
-              <a:t>선풍기를 켠 뒤 벽 표면 상승폭을 재고(시연 +2.8℃) 끄는 시점을 판단함</a:t>
-            </a:r>
-            <a:endParaRPr lang="en-US" sz="1400" dirty="0"/>
+              <a:rPr lang="en-US" sz="1200" dirty="0">
+                <a:solidFill>
+                  <a:schemeClr val="tx1"/>
+                </a:solidFill>
+              </a:rPr>
+              <a:t>선풍기 효과(시연 +2.8℃)를 재서 끄는 시점을 판단함</a:t>
+            </a:r>
+            <a:endParaRPr lang="en-US" sz="1300" dirty="0"/>
           </a:p>
         </p:txBody>
       </p:sp>
       <p:sp>
         <p:nvSpPr>
-          <p:cNvPr id="30" name="Shape 22"/>
+          <p:cNvPr id="35" name="Shape 28"/>
           <p:cNvSpPr/>
           <p:nvPr/>
         </p:nvSpPr>
         <p:spPr>
           <a:xfrm>
-            <a:off x="5074920" y="3785616"/>
-            <a:ext cx="384048" cy="384048"/>
+            <a:off x="6812280" y="4005072"/>
+            <a:ext cx="365760" cy="365760"/>
           </a:xfrm>
           <a:prstGeom prst="ellipse">
             <a:avLst/>
@@ -10554,22 +11165,22 @@
       </p:sp>
       <p:pic>
         <p:nvPicPr>
-          <p:cNvPr id="31" name="Image 6" descr="chart"/>
+          <p:cNvPr id="36" name="Image 5" descr="chart"/>
           <p:cNvPicPr>
             <a:picLocks noChangeAspect="1"/>
           </p:cNvPicPr>
           <p:nvPr/>
         </p:nvPicPr>
         <p:blipFill>
-          <a:blip r:embed="rId9"/>
+          <a:blip r:embed="rId8"/>
           <a:stretch>
             <a:fillRect/>
           </a:stretch>
         </p:blipFill>
         <p:spPr>
           <a:xfrm>
-            <a:off x="5159411" y="3870107"/>
-            <a:ext cx="215067" cy="215067"/>
+            <a:off x="6892747" y="4085539"/>
+            <a:ext cx="204826" cy="204826"/>
           </a:xfrm>
           <a:prstGeom prst="rect">
             <a:avLst/>
@@ -10578,14 +11189,14 @@
       </p:pic>
       <p:sp>
         <p:nvSpPr>
-          <p:cNvPr id="32" name="Text 23"/>
+          <p:cNvPr id="37" name="Text 29"/>
           <p:cNvSpPr txBox="1"/>
           <p:nvPr/>
         </p:nvSpPr>
         <p:spPr>
           <a:xfrm>
-            <a:off x="5641848" y="3749040"/>
-            <a:ext cx="6016752" cy="566928"/>
+            <a:off x="7360920" y="3968496"/>
+            <a:ext cx="4297680" cy="512064"/>
           </a:xfrm>
           <a:prstGeom prst="rect">
             <a:avLst/>
@@ -10601,41 +11212,41 @@
               <a:buNone/>
             </a:pPr>
             <a:r>
-              <a:rPr lang="en-US" sz="1400" b="1" dirty="0">
+              <a:rPr lang="en-US" sz="1300" b="1" dirty="0">
                 <a:solidFill>
                   <a:schemeClr val="tx1"/>
                 </a:solidFill>
               </a:rPr>
               <a:t>E 예측</a:t>
             </a:r>
-            <a:endParaRPr lang="en-US" sz="1400" dirty="0"/>
+            <a:endParaRPr lang="en-US" sz="1300" dirty="0"/>
           </a:p>
           <a:p>
             <a:pPr marL="0" indent="0">
               <a:buNone/>
             </a:pPr>
             <a:r>
-              <a:rPr lang="en-US" sz="1300" dirty="0">
-                <a:solidFill>
-                  <a:schemeClr val="tx1"/>
-                </a:solidFill>
-              </a:rPr>
-              <a:t>벽 표면 온도 추세로 임계 80% 도달까지 남은 시간을 계산함</a:t>
-            </a:r>
-            <a:endParaRPr lang="en-US" sz="1400" dirty="0"/>
+              <a:rPr lang="en-US" sz="1200" dirty="0">
+                <a:solidFill>
+                  <a:schemeClr val="tx1"/>
+                </a:solidFill>
+              </a:rPr>
+              <a:t>벽 온도 추세로 임계 80%까지 남은 시간을 계산함</a:t>
+            </a:r>
+            <a:endParaRPr lang="en-US" sz="1300" dirty="0"/>
           </a:p>
         </p:txBody>
       </p:sp>
       <p:sp>
         <p:nvSpPr>
-          <p:cNvPr id="33" name="Shape 24"/>
+          <p:cNvPr id="38" name="Shape 30"/>
           <p:cNvSpPr/>
           <p:nvPr/>
         </p:nvSpPr>
         <p:spPr>
           <a:xfrm>
-            <a:off x="5074920" y="4389120"/>
-            <a:ext cx="384048" cy="384048"/>
+            <a:off x="6812280" y="4553712"/>
+            <a:ext cx="365760" cy="365760"/>
           </a:xfrm>
           <a:prstGeom prst="ellipse">
             <a:avLst/>
@@ -10653,22 +11264,22 @@
       </p:sp>
       <p:pic>
         <p:nvPicPr>
-          <p:cNvPr id="34" name="Image 7" descr="join"/>
+          <p:cNvPr id="39" name="Image 6" descr="join"/>
           <p:cNvPicPr>
             <a:picLocks noChangeAspect="1"/>
           </p:cNvPicPr>
           <p:nvPr/>
         </p:nvPicPr>
         <p:blipFill>
-          <a:blip r:embed="rId10"/>
+          <a:blip r:embed="rId9"/>
           <a:stretch>
             <a:fillRect/>
           </a:stretch>
         </p:blipFill>
         <p:spPr>
           <a:xfrm>
-            <a:off x="5159411" y="4473611"/>
-            <a:ext cx="215067" cy="215067"/>
+            <a:off x="6892747" y="4634179"/>
+            <a:ext cx="204826" cy="204826"/>
           </a:xfrm>
           <a:prstGeom prst="rect">
             <a:avLst/>
@@ -10677,14 +11288,14 @@
       </p:pic>
       <p:sp>
         <p:nvSpPr>
-          <p:cNvPr id="35" name="Text 25"/>
+          <p:cNvPr id="40" name="Text 31"/>
           <p:cNvSpPr txBox="1"/>
           <p:nvPr/>
         </p:nvSpPr>
         <p:spPr>
           <a:xfrm>
-            <a:off x="5641848" y="4352544"/>
-            <a:ext cx="6016752" cy="566928"/>
+            <a:off x="7360920" y="4517136"/>
+            <a:ext cx="4297680" cy="512064"/>
           </a:xfrm>
           <a:prstGeom prst="rect">
             <a:avLst/>
@@ -10700,41 +11311,41 @@
               <a:buNone/>
             </a:pPr>
             <a:r>
-              <a:rPr lang="en-US" sz="1400" b="1" dirty="0">
+              <a:rPr lang="en-US" sz="1300" b="1" dirty="0">
                 <a:solidFill>
                   <a:schemeClr val="tx1"/>
                 </a:solidFill>
               </a:rPr>
               <a:t>동시 가동</a:t>
             </a:r>
-            <a:endParaRPr lang="en-US" sz="1400" dirty="0"/>
+            <a:endParaRPr lang="en-US" sz="1300" dirty="0"/>
           </a:p>
           <a:p>
             <a:pPr marL="0" indent="0">
               <a:buNone/>
             </a:pPr>
             <a:r>
-              <a:rPr lang="en-US" sz="1300" dirty="0">
-                <a:solidFill>
-                  <a:schemeClr val="tx1"/>
-                </a:solidFill>
-              </a:rPr>
-              <a:t>선풍기로 넓힌 구간 안에서 선풍기를 켠 채 가습을 재개함 (②, ③ 동시 충족)</a:t>
-            </a:r>
-            <a:endParaRPr lang="en-US" sz="1400" dirty="0"/>
+              <a:rPr lang="en-US" sz="1200" dirty="0">
+                <a:solidFill>
+                  <a:schemeClr val="tx1"/>
+                </a:solidFill>
+              </a:rPr>
+              <a:t>선풍기로 넓힌 구간에서 켠 채 가습해 ②, ③을 함께 지킴</a:t>
+            </a:r>
+            <a:endParaRPr lang="en-US" sz="1300" dirty="0"/>
           </a:p>
         </p:txBody>
       </p:sp>
       <p:sp>
         <p:nvSpPr>
-          <p:cNvPr id="36" name="Shape 26"/>
+          <p:cNvPr id="41" name="Shape 32"/>
           <p:cNvSpPr/>
           <p:nvPr/>
         </p:nvSpPr>
         <p:spPr>
           <a:xfrm>
-            <a:off x="5074920" y="4992624"/>
-            <a:ext cx="384048" cy="384048"/>
+            <a:off x="6812280" y="5102352"/>
+            <a:ext cx="365760" cy="365760"/>
           </a:xfrm>
           <a:prstGeom prst="ellipse">
             <a:avLst/>
@@ -10752,22 +11363,22 @@
       </p:sp>
       <p:pic>
         <p:nvPicPr>
-          <p:cNvPr id="37" name="Image 8" descr="user"/>
+          <p:cNvPr id="42" name="Image 7" descr="user"/>
           <p:cNvPicPr>
             <a:picLocks noChangeAspect="1"/>
           </p:cNvPicPr>
           <p:nvPr/>
         </p:nvPicPr>
         <p:blipFill>
-          <a:blip r:embed="rId11"/>
+          <a:blip r:embed="rId10"/>
           <a:stretch>
             <a:fillRect/>
           </a:stretch>
         </p:blipFill>
         <p:spPr>
           <a:xfrm>
-            <a:off x="5159411" y="5077115"/>
-            <a:ext cx="215067" cy="215067"/>
+            <a:off x="6892747" y="5182819"/>
+            <a:ext cx="204826" cy="204826"/>
           </a:xfrm>
           <a:prstGeom prst="rect">
             <a:avLst/>
@@ -10776,14 +11387,14 @@
       </p:pic>
       <p:sp>
         <p:nvSpPr>
-          <p:cNvPr id="38" name="Text 27"/>
+          <p:cNvPr id="43" name="Text 33"/>
           <p:cNvSpPr txBox="1"/>
           <p:nvPr/>
         </p:nvSpPr>
         <p:spPr>
           <a:xfrm>
-            <a:off x="5641848" y="4956048"/>
-            <a:ext cx="6016752" cy="566928"/>
+            <a:off x="7360920" y="5065776"/>
+            <a:ext cx="4297680" cy="512064"/>
           </a:xfrm>
           <a:prstGeom prst="rect">
             <a:avLst/>
@@ -10799,41 +11410,41 @@
               <a:buNone/>
             </a:pPr>
             <a:r>
-              <a:rPr lang="en-US" sz="1400" b="1" dirty="0">
+              <a:rPr lang="en-US" sz="1300" b="1" dirty="0">
                 <a:solidFill>
                   <a:schemeClr val="tx1"/>
                 </a:solidFill>
               </a:rPr>
               <a:t>사용자 우선</a:t>
             </a:r>
-            <a:endParaRPr lang="en-US" sz="1400" dirty="0"/>
+            <a:endParaRPr lang="en-US" sz="1300" dirty="0"/>
           </a:p>
           <a:p>
             <a:pPr marL="0" indent="0">
               <a:buNone/>
             </a:pPr>
             <a:r>
-              <a:rPr lang="en-US" sz="1300" dirty="0">
-                <a:solidFill>
-                  <a:schemeClr val="tx1"/>
-                </a:solidFill>
-              </a:rPr>
-              <a:t>앱과 버튼 조작은 30분간 존중하고, 벽 표면 80%를 넘으면 방어를 우선함</a:t>
-            </a:r>
-            <a:endParaRPr lang="en-US" sz="1400" dirty="0"/>
+              <a:rPr lang="en-US" sz="1200" dirty="0">
+                <a:solidFill>
+                  <a:schemeClr val="tx1"/>
+                </a:solidFill>
+              </a:rPr>
+              <a:t>앱 조작은 30분 존중, 벽 표면 80%를 넘으면 방어를 우선함</a:t>
+            </a:r>
+            <a:endParaRPr lang="en-US" sz="1300" dirty="0"/>
           </a:p>
         </p:txBody>
       </p:sp>
       <p:sp>
         <p:nvSpPr>
-          <p:cNvPr id="39" name="Shape 28"/>
+          <p:cNvPr id="44" name="Shape 34"/>
           <p:cNvSpPr/>
           <p:nvPr/>
         </p:nvSpPr>
         <p:spPr>
           <a:xfrm>
-            <a:off x="5074920" y="5596128"/>
-            <a:ext cx="384048" cy="384048"/>
+            <a:off x="6812280" y="5650992"/>
+            <a:ext cx="365760" cy="365760"/>
           </a:xfrm>
           <a:prstGeom prst="ellipse">
             <a:avLst/>
@@ -10851,22 +11462,22 @@
       </p:sp>
       <p:pic>
         <p:nvPicPr>
-          <p:cNvPr id="40" name="Image 9" descr="history"/>
+          <p:cNvPr id="45" name="Image 8" descr="history"/>
           <p:cNvPicPr>
             <a:picLocks noChangeAspect="1"/>
           </p:cNvPicPr>
           <p:nvPr/>
         </p:nvPicPr>
         <p:blipFill>
-          <a:blip r:embed="rId12"/>
+          <a:blip r:embed="rId11"/>
           <a:stretch>
             <a:fillRect/>
           </a:stretch>
         </p:blipFill>
         <p:spPr>
           <a:xfrm>
-            <a:off x="5159411" y="5680619"/>
-            <a:ext cx="215067" cy="215067"/>
+            <a:off x="6892747" y="5731459"/>
+            <a:ext cx="204826" cy="204826"/>
           </a:xfrm>
           <a:prstGeom prst="rect">
             <a:avLst/>
@@ -10875,14 +11486,14 @@
       </p:pic>
       <p:sp>
         <p:nvSpPr>
-          <p:cNvPr id="41" name="Text 29"/>
+          <p:cNvPr id="46" name="Text 35"/>
           <p:cNvSpPr txBox="1"/>
           <p:nvPr/>
         </p:nvSpPr>
         <p:spPr>
           <a:xfrm>
-            <a:off x="5641848" y="5559552"/>
-            <a:ext cx="6016752" cy="566928"/>
+            <a:off x="7360920" y="5614416"/>
+            <a:ext cx="4297680" cy="512064"/>
           </a:xfrm>
           <a:prstGeom prst="rect">
             <a:avLst/>
@@ -10898,34 +11509,34 @@
               <a:buNone/>
             </a:pPr>
             <a:r>
-              <a:rPr lang="en-US" sz="1400" b="1" dirty="0">
+              <a:rPr lang="en-US" sz="1300" b="1" dirty="0">
                 <a:solidFill>
                   <a:schemeClr val="tx1"/>
                 </a:solidFill>
               </a:rPr>
               <a:t>기록</a:t>
             </a:r>
-            <a:endParaRPr lang="en-US" sz="1400" dirty="0"/>
+            <a:endParaRPr lang="en-US" sz="1300" dirty="0"/>
           </a:p>
           <a:p>
             <a:pPr marL="0" indent="0">
               <a:buNone/>
             </a:pPr>
             <a:r>
-              <a:rPr lang="en-US" sz="1300" dirty="0">
-                <a:solidFill>
-                  <a:schemeClr val="tx1"/>
-                </a:solidFill>
-              </a:rPr>
-              <a:t>벽 표면 80% 이상이었던 시간을 누적 위험 시간으로 기록함</a:t>
-            </a:r>
-            <a:endParaRPr lang="en-US" sz="1400" dirty="0"/>
+              <a:rPr lang="en-US" sz="1200" dirty="0">
+                <a:solidFill>
+                  <a:schemeClr val="tx1"/>
+                </a:solidFill>
+              </a:rPr>
+              <a:t>벽 표면 80% 이상인 시간을 누적 위험 시간으로 기록함</a:t>
+            </a:r>
+            <a:endParaRPr lang="en-US" sz="1300" dirty="0"/>
           </a:p>
         </p:txBody>
       </p:sp>
       <p:sp>
         <p:nvSpPr>
-          <p:cNvPr id="42" name="Slide Number Placeholder 0"/>
+          <p:cNvPr id="47" name="Slide Number Placeholder 0"/>
           <p:cNvSpPr>
             <a:spLocks noGrp="1"/>
           </p:cNvSpPr>

--- a/docs/발표자료_침실노드.pptx
+++ b/docs/발표자료_침실노드.pptx
@@ -122,19 +122,19 @@
   <p:extLst>
     <p:ext uri="{521415D9-36F7-43E2-AB2F-B90AF26B5E84}">
       <p14:sectionLst xmlns:p14="http://schemas.microsoft.com/office/powerpoint/2010/main">
-        <p14:section name="핵심 주제" id="{783015BC-E6B8-98A4-26BD-1060C8D1A662}">
+        <p14:section name="핵심 주제" id="{2864DEA7-A673-FD39-26E9-B11709C8C41C}">
           <p14:sldIdLst>
             <p14:sldId id="256"/>
           </p14:sldIdLst>
         </p14:section>
-        <p14:section name="주요 개발 내용" id="{894A4B94-EB12-ED5E-7E09-C19F4547A02A}">
+        <p14:section name="주요 개발 내용" id="{78EBECBD-2D61-DB37-27FA-E8F134142481}">
           <p14:sldIdLst>
             <p14:sldId id="257"/>
             <p14:sldId id="258"/>
             <p14:sldId id="259"/>
           </p14:sldIdLst>
         </p14:section>
-        <p14:section name="시연 내용" id="{D314828D-14A6-FF84-4C81-0492C254F982}">
+        <p14:section name="시연 내용" id="{ECA580E5-1BC9-632A-7F7C-5EE53EB186CD}">
           <p14:sldIdLst>
             <p14:sldId id="260"/>
           </p14:sldIdLst>
@@ -325,7 +325,7 @@
           </c:val>
           <c:extLst>
             <c:ext xmlns:c16="http://schemas.microsoft.com/office/drawing/2014/chart" uri="{C3380CC4-5D6E-409C-BE32-E72D297353CC}">
-              <c16:uniqueId val="{00000000-FDAA-4CC8-A624-0064054CDF67}"/>
+              <c16:uniqueId val="{00000000-9984-4163-81F1-C224DDEC997F}"/>
             </c:ext>
           </c:extLst>
         </c:ser>
@@ -422,7 +422,7 @@
           <c:smooth val="0"/>
           <c:extLst>
             <c:ext xmlns:c16="http://schemas.microsoft.com/office/drawing/2014/chart" uri="{C3380CC4-5D6E-409C-BE32-E72D297353CC}">
-              <c16:uniqueId val="{00000001-FDAA-4CC8-A624-0064054CDF67}"/>
+              <c16:uniqueId val="{00000001-9984-4163-81F1-C224DDEC997F}"/>
             </c:ext>
           </c:extLst>
         </c:ser>
@@ -604,7 +604,7 @@
     </p:spTree>
     <p:extLst>
       <p:ext uri="{BB962C8B-B14F-4D97-AF65-F5344CB8AC3E}">
-        <p14:creationId xmlns:p14="http://schemas.microsoft.com/office/powerpoint/2010/main" val="1009119167"/>
+        <p14:creationId xmlns:p14="http://schemas.microsoft.com/office/powerpoint/2010/main" val="3829850991"/>
       </p:ext>
     </p:extLst>
   </p:cSld>
@@ -8809,7 +8809,7 @@
                       <a:srgbClr val="000000"/>
                     </a:solidFill>
                   </a:rPr>
-                  <a:t> 방 온도,   </a:t>
+                  <a:t>: 방 온도,  </a:t>
                 </a:r>
                 <a14:m>
                   <m:oMath xmlns:m="http://schemas.openxmlformats.org/officeDocument/2006/math">
@@ -8859,7 +8859,7 @@
                       <a:srgbClr val="000000"/>
                     </a:solidFill>
                   </a:rPr>
-                  <a:t> 벽 표면 온도,   </a:t>
+                  <a:t>: 벽 표면 온도,  </a:t>
                 </a:r>
                 <a14:m>
                   <m:oMath xmlns:m="http://schemas.openxmlformats.org/officeDocument/2006/math">
@@ -8883,7 +8883,7 @@
                       <a:srgbClr val="000000"/>
                     </a:solidFill>
                   </a:rPr>
-                  <a:t> 상대습도(%),   </a:t>
+                  <a:t>: 상대습도(%),  </a:t>
                 </a:r>
                 <a14:m>
                   <m:oMath xmlns:m="http://schemas.openxmlformats.org/officeDocument/2006/math">
@@ -8932,7 +8932,7 @@
                       <a:srgbClr val="000000"/>
                     </a:solidFill>
                   </a:rPr>
-                  <a:t> 포화 수증기압(hPa)</a:t>
+                  <a:t>: 포화 수증기압(hPa)</a:t>
                 </a:r>
                 <a:endParaRPr lang="ko-KR" sz="1150"/>
               </a:p>
@@ -8970,7 +8970,7 @@
                       <a:schemeClr val="tx1"/>
                     </a:solidFill>
                   </a:rPr>
-                  <a:t>T실내 방 온도, T벽 벽 표면 온도, RH 상대습도(%), Pₛ 포화 수증기압(hPa)</a:t>
+                  <a:t>T실내: 방 온도, T벽: 벽 표면 온도, RH: 상대습도(%), Pₛ: 포화 수증기압(hPa)</a:t>
                 </a:r>
                 <a:endParaRPr lang="en-US" sz="1150" dirty="0"/>
               </a:p>

--- a/docs/발표자료_침실노드.pptx
+++ b/docs/발표자료_침실노드.pptx
@@ -122,19 +122,19 @@
   <p:extLst>
     <p:ext uri="{521415D9-36F7-43E2-AB2F-B90AF26B5E84}">
       <p14:sectionLst xmlns:p14="http://schemas.microsoft.com/office/powerpoint/2010/main">
-        <p14:section name="핵심 주제" id="{2864DEA7-A673-FD39-26E9-B11709C8C41C}">
+        <p14:section name="핵심 주제" id="{9453E5FE-6A3D-5A91-782B-D399CB2631BF}">
           <p14:sldIdLst>
             <p14:sldId id="256"/>
           </p14:sldIdLst>
         </p14:section>
-        <p14:section name="주요 개발 내용" id="{78EBECBD-2D61-DB37-27FA-E8F134142481}">
+        <p14:section name="주요 개발 내용" id="{48698E11-F1C6-EFA5-2880-2181755A9D3B}">
           <p14:sldIdLst>
             <p14:sldId id="257"/>
             <p14:sldId id="258"/>
             <p14:sldId id="259"/>
           </p14:sldIdLst>
         </p14:section>
-        <p14:section name="시연 내용" id="{ECA580E5-1BC9-632A-7F7C-5EE53EB186CD}">
+        <p14:section name="시연 내용" id="{B1716346-E395-CDAC-E62E-754BA9916C0F}">
           <p14:sldIdLst>
             <p14:sldId id="260"/>
           </p14:sldIdLst>
@@ -325,7 +325,7 @@
           </c:val>
           <c:extLst>
             <c:ext xmlns:c16="http://schemas.microsoft.com/office/drawing/2014/chart" uri="{C3380CC4-5D6E-409C-BE32-E72D297353CC}">
-              <c16:uniqueId val="{00000000-9984-4163-81F1-C224DDEC997F}"/>
+              <c16:uniqueId val="{00000000-6930-4E3D-88FD-DCEB6BA1A3DD}"/>
             </c:ext>
           </c:extLst>
         </c:ser>
@@ -422,7 +422,7 @@
           <c:smooth val="0"/>
           <c:extLst>
             <c:ext xmlns:c16="http://schemas.microsoft.com/office/drawing/2014/chart" uri="{C3380CC4-5D6E-409C-BE32-E72D297353CC}">
-              <c16:uniqueId val="{00000001-9984-4163-81F1-C224DDEC997F}"/>
+              <c16:uniqueId val="{00000001-6930-4E3D-88FD-DCEB6BA1A3DD}"/>
             </c:ext>
           </c:extLst>
         </c:ser>
@@ -604,7 +604,7 @@
     </p:spTree>
     <p:extLst>
       <p:ext uri="{BB962C8B-B14F-4D97-AF65-F5344CB8AC3E}">
-        <p14:creationId xmlns:p14="http://schemas.microsoft.com/office/powerpoint/2010/main" val="3829850991"/>
+        <p14:creationId xmlns:p14="http://schemas.microsoft.com/office/powerpoint/2010/main" val="3923341190"/>
       </p:ext>
     </p:extLst>
   </p:cSld>
@@ -1098,7 +1098,7 @@
           <a:p>
             <a:r>
               <a:rPr lang="en-US" dirty="0"/>
-              <a:t>노트북 화면 하나로 시연함. 22시부터 08시까지를 60초로 압축함. 실내 습도는 40%대에 머무는데 벽 표면 습도만 올라가고, 75%에서 노드가 가습을 멈춘 뒤 선풍기로 벽을 데움. 그 순간 릴레이가 딸깍하고, 노드가 허브로 보고하는 것이 화면에 표시됨. 같은 밤 일반 가습기였다면 8시간 넘게 곰팡이 임계를 넘었을 것을 우리 노드는 0분으로 막음.</a:t>
+              <a:t>시연은 오른쪽 순서로 동작함. 노트북의 가상 침실이 한파의 밤을 진행하며 0.5초마다 센서값을 DK로 보내고, DK가 벽 표면 습도를 계산해 릴레이로 가습기와 선풍기를 켜고 끄며, 같은 결과를 SmartThings 허브에 보고함. 바뀐 가전 상태는 다시 가상 침실에 반영됨. 실내 습도는 40%대에 머무는데 벽 표면 습도만 올라가고, 75%에서 노드가 가습을 멈춘 뒤 선풍기로 벽을 데움. 같은 밤 일반 가습기였다면 8시간 넘게 곰팡이 임계를 넘었을 것을 우리 노드는 0분으로 막음.</a:t>
             </a:r>
           </a:p>
         </p:txBody>
@@ -11752,8 +11752,101 @@
         </p:nvSpPr>
         <p:spPr>
           <a:xfrm>
-            <a:off x="8092440" y="1444752"/>
-            <a:ext cx="420624" cy="420624"/>
+            <a:off x="8284464" y="1563624"/>
+            <a:ext cx="0" cy="3291840"/>
+          </a:xfrm>
+          <a:prstGeom prst="line">
+            <a:avLst/>
+          </a:prstGeom>
+          <a:noFill/>
+          <a:ln w="19050">
+            <a:solidFill>
+              <a:srgbClr val="E0E0E0"/>
+            </a:solidFill>
+            <a:prstDash val="solid"/>
+          </a:ln>
+        </p:spPr>
+      </p:sp>
+      <p:sp>
+        <p:nvSpPr>
+          <p:cNvPr id="7" name="Shape 4"/>
+          <p:cNvSpPr/>
+          <p:nvPr/>
+        </p:nvSpPr>
+        <p:spPr>
+          <a:xfrm>
+            <a:off x="7900416" y="4197096"/>
+            <a:ext cx="192024" cy="0"/>
+          </a:xfrm>
+          <a:prstGeom prst="line">
+            <a:avLst/>
+          </a:prstGeom>
+          <a:noFill/>
+          <a:ln w="19050">
+            <a:solidFill>
+              <a:srgbClr val="8E8E93"/>
+            </a:solidFill>
+            <a:prstDash val="dash"/>
+          </a:ln>
+        </p:spPr>
+      </p:sp>
+      <p:sp>
+        <p:nvSpPr>
+          <p:cNvPr id="8" name="Shape 5"/>
+          <p:cNvSpPr/>
+          <p:nvPr/>
+        </p:nvSpPr>
+        <p:spPr>
+          <a:xfrm>
+            <a:off x="7900416" y="1563624"/>
+            <a:ext cx="0" cy="2633472"/>
+          </a:xfrm>
+          <a:prstGeom prst="line">
+            <a:avLst/>
+          </a:prstGeom>
+          <a:noFill/>
+          <a:ln w="19050">
+            <a:solidFill>
+              <a:srgbClr val="8E8E93"/>
+            </a:solidFill>
+            <a:prstDash val="dash"/>
+          </a:ln>
+        </p:spPr>
+      </p:sp>
+      <p:sp>
+        <p:nvSpPr>
+          <p:cNvPr id="9" name="Shape 6"/>
+          <p:cNvSpPr/>
+          <p:nvPr/>
+        </p:nvSpPr>
+        <p:spPr>
+          <a:xfrm>
+            <a:off x="7900416" y="1563624"/>
+            <a:ext cx="192024" cy="0"/>
+          </a:xfrm>
+          <a:prstGeom prst="line">
+            <a:avLst/>
+          </a:prstGeom>
+          <a:noFill/>
+          <a:ln w="19050">
+            <a:solidFill>
+              <a:srgbClr val="8E8E93"/>
+            </a:solidFill>
+            <a:prstDash val="dash"/>
+            <a:tailEnd type="triangle"/>
+          </a:ln>
+        </p:spPr>
+      </p:sp>
+      <p:sp>
+        <p:nvSpPr>
+          <p:cNvPr id="10" name="Shape 7"/>
+          <p:cNvSpPr/>
+          <p:nvPr/>
+        </p:nvSpPr>
+        <p:spPr>
+          <a:xfrm>
+            <a:off x="8092440" y="1371600"/>
+            <a:ext cx="384048" cy="384048"/>
           </a:xfrm>
           <a:prstGeom prst="ellipse">
             <a:avLst/>
@@ -11771,7 +11864,7 @@
       </p:sp>
       <p:pic>
         <p:nvPicPr>
-          <p:cNvPr id="7" name="Image 1" descr="shield"/>
+          <p:cNvPr id="11" name="Image 1" descr="laptop"/>
           <p:cNvPicPr>
             <a:picLocks noChangeAspect="1"/>
           </p:cNvPicPr>
@@ -11785,8 +11878,8 @@
         </p:blipFill>
         <p:spPr>
           <a:xfrm>
-            <a:off x="8184977" y="1537289"/>
-            <a:ext cx="235549" cy="235549"/>
+            <a:off x="8176931" y="1456091"/>
+            <a:ext cx="215067" cy="215067"/>
           </a:xfrm>
           <a:prstGeom prst="rect">
             <a:avLst/>
@@ -11795,14 +11888,14 @@
       </p:pic>
       <p:sp>
         <p:nvSpPr>
-          <p:cNvPr id="8" name="Text 4"/>
+          <p:cNvPr id="12" name="Text 8"/>
           <p:cNvSpPr txBox="1"/>
           <p:nvPr/>
         </p:nvSpPr>
         <p:spPr>
           <a:xfrm>
-            <a:off x="8659368" y="1371600"/>
-            <a:ext cx="3200400" cy="548640"/>
+            <a:off x="8659368" y="1335024"/>
+            <a:ext cx="2999232" cy="603504"/>
           </a:xfrm>
           <a:prstGeom prst="rect">
             <a:avLst/>
@@ -11818,184 +11911,55 @@
               <a:buNone/>
             </a:pPr>
             <a:r>
-              <a:rPr lang="en-US" sz="3000" b="1" dirty="0">
-                <a:solidFill>
-                  <a:schemeClr val="tx1"/>
-                </a:solidFill>
-              </a:rPr>
-              <a:t>0분</a:t>
-            </a:r>
-            <a:endParaRPr lang="en-US" sz="3000" dirty="0"/>
+              <a:rPr lang="en-US" sz="1300" b="1" dirty="0">
+                <a:solidFill>
+                  <a:schemeClr val="tx1"/>
+                </a:solidFill>
+              </a:rPr>
+              <a:t>① 가상 침실</a:t>
+            </a:r>
+            <a:endParaRPr lang="en-US" sz="1300" dirty="0"/>
+          </a:p>
+          <a:p>
+            <a:pPr marL="0" indent="0">
+              <a:buNone/>
+            </a:pPr>
+            <a:r>
+              <a:rPr lang="en-US" sz="1150" dirty="0">
+                <a:solidFill>
+                  <a:schemeClr val="tx1"/>
+                </a:solidFill>
+              </a:rPr>
+              <a:t>한파의 밤 10시간을 60초로 진행함</a:t>
+            </a:r>
+            <a:endParaRPr lang="en-US" sz="1300" dirty="0"/>
+          </a:p>
+          <a:p>
+            <a:pPr marL="0" indent="0">
+              <a:buNone/>
+            </a:pPr>
+            <a:r>
+              <a:rPr lang="en-US" sz="1150" dirty="0">
+                <a:solidFill>
+                  <a:schemeClr val="tx1"/>
+                </a:solidFill>
+              </a:rPr>
+              <a:t>가전 상태를 반영해 온습도와 벽 온도를 만듦</a:t>
+            </a:r>
+            <a:endParaRPr lang="en-US" sz="1300" dirty="0"/>
           </a:p>
         </p:txBody>
       </p:sp>
       <p:sp>
         <p:nvSpPr>
-          <p:cNvPr id="9" name="Text 5"/>
-          <p:cNvSpPr txBox="1"/>
-          <p:nvPr/>
-        </p:nvSpPr>
-        <p:spPr>
-          <a:xfrm>
-            <a:off x="8659368" y="1920240"/>
-            <a:ext cx="3200400" cy="274320"/>
-          </a:xfrm>
-          <a:prstGeom prst="rect">
-            <a:avLst/>
-          </a:prstGeom>
-          <a:noFill/>
-          <a:ln/>
-        </p:spPr>
-        <p:txBody>
-          <a:bodyPr wrap="square" lIns="0" tIns="0" rIns="0" bIns="0" rtlCol="0" anchor="t"/>
-          <a:lstStyle/>
-          <a:p>
-            <a:pPr marL="0" indent="0">
-              <a:buNone/>
-            </a:pPr>
-            <a:r>
-              <a:rPr lang="en-US" sz="1200" dirty="0">
-                <a:solidFill>
-                  <a:schemeClr val="tx1"/>
-                </a:solidFill>
-              </a:rPr>
-              <a:t>누적 위험 시간, 우리 노드 (실제 보드)</a:t>
-            </a:r>
-            <a:endParaRPr lang="en-US" sz="1200" dirty="0"/>
-          </a:p>
-        </p:txBody>
-      </p:sp>
-      <p:sp>
-        <p:nvSpPr>
-          <p:cNvPr id="10" name="Shape 6"/>
+          <p:cNvPr id="13" name="Shape 9"/>
           <p:cNvSpPr/>
           <p:nvPr/>
         </p:nvSpPr>
         <p:spPr>
           <a:xfrm>
-            <a:off x="8092440" y="2359152"/>
-            <a:ext cx="420624" cy="420624"/>
-          </a:xfrm>
-          <a:prstGeom prst="ellipse">
-            <a:avLst/>
-          </a:prstGeom>
-          <a:solidFill>
-            <a:schemeClr val="accent3"/>
-          </a:solidFill>
-          <a:ln w="12700">
-            <a:solidFill>
-              <a:srgbClr val="0066CC"/>
-            </a:solidFill>
-            <a:prstDash val="solid"/>
-          </a:ln>
-        </p:spPr>
-      </p:sp>
-      <p:pic>
-        <p:nvPicPr>
-          <p:cNvPr id="11" name="Image 2" descr="alert"/>
-          <p:cNvPicPr>
-            <a:picLocks noChangeAspect="1"/>
-          </p:cNvPicPr>
-          <p:nvPr/>
-        </p:nvPicPr>
-        <p:blipFill>
-          <a:blip r:embed="rId5"/>
-          <a:stretch>
-            <a:fillRect/>
-          </a:stretch>
-        </p:blipFill>
-        <p:spPr>
-          <a:xfrm>
-            <a:off x="8184977" y="2451689"/>
-            <a:ext cx="235549" cy="235549"/>
-          </a:xfrm>
-          <a:prstGeom prst="rect">
-            <a:avLst/>
-          </a:prstGeom>
-        </p:spPr>
-      </p:pic>
-      <p:sp>
-        <p:nvSpPr>
-          <p:cNvPr id="12" name="Text 7"/>
-          <p:cNvSpPr txBox="1"/>
-          <p:nvPr/>
-        </p:nvSpPr>
-        <p:spPr>
-          <a:xfrm>
-            <a:off x="8659368" y="2286000"/>
-            <a:ext cx="3200400" cy="548640"/>
-          </a:xfrm>
-          <a:prstGeom prst="rect">
-            <a:avLst/>
-          </a:prstGeom>
-          <a:noFill/>
-          <a:ln/>
-        </p:spPr>
-        <p:txBody>
-          <a:bodyPr wrap="square" lIns="0" tIns="0" rIns="0" bIns="0" rtlCol="0" anchor="t"/>
-          <a:lstStyle/>
-          <a:p>
-            <a:pPr marL="0" indent="0">
-              <a:buNone/>
-            </a:pPr>
-            <a:r>
-              <a:rPr lang="en-US" sz="3000" b="1" dirty="0">
-                <a:solidFill>
-                  <a:schemeClr val="tx1"/>
-                </a:solidFill>
-              </a:rPr>
-              <a:t>8시간 38분</a:t>
-            </a:r>
-            <a:endParaRPr lang="en-US" sz="3000" dirty="0"/>
-          </a:p>
-        </p:txBody>
-      </p:sp>
-      <p:sp>
-        <p:nvSpPr>
-          <p:cNvPr id="13" name="Text 8"/>
-          <p:cNvSpPr txBox="1"/>
-          <p:nvPr/>
-        </p:nvSpPr>
-        <p:spPr>
-          <a:xfrm>
-            <a:off x="8659368" y="2834640"/>
-            <a:ext cx="3200400" cy="274320"/>
-          </a:xfrm>
-          <a:prstGeom prst="rect">
-            <a:avLst/>
-          </a:prstGeom>
-          <a:noFill/>
-          <a:ln/>
-        </p:spPr>
-        <p:txBody>
-          <a:bodyPr wrap="square" lIns="0" tIns="0" rIns="0" bIns="0" rtlCol="0" anchor="t"/>
-          <a:lstStyle/>
-          <a:p>
-            <a:pPr marL="0" indent="0">
-              <a:buNone/>
-            </a:pPr>
-            <a:r>
-              <a:rPr lang="en-US" sz="1200" dirty="0">
-                <a:solidFill>
-                  <a:schemeClr val="tx1"/>
-                </a:solidFill>
-              </a:rPr>
-              <a:t>같은 밤 일반 가습기(60% 목표)였다면</a:t>
-            </a:r>
-            <a:endParaRPr lang="en-US" sz="1200" dirty="0"/>
-          </a:p>
-        </p:txBody>
-      </p:sp>
-      <p:sp>
-        <p:nvSpPr>
-          <p:cNvPr id="14" name="Shape 9"/>
-          <p:cNvSpPr/>
-          <p:nvPr/>
-        </p:nvSpPr>
-        <p:spPr>
-          <a:xfrm>
-            <a:off x="8092440" y="3273552"/>
-            <a:ext cx="420624" cy="420624"/>
+            <a:off x="8092440" y="2029968"/>
+            <a:ext cx="384048" cy="384048"/>
           </a:xfrm>
           <a:prstGeom prst="ellipse">
             <a:avLst/>
@@ -12013,22 +11977,22 @@
       </p:sp>
       <p:pic>
         <p:nvPicPr>
-          <p:cNvPr id="15" name="Image 3" descr="droplet"/>
+          <p:cNvPr id="14" name="Image 2" descr="upload"/>
           <p:cNvPicPr>
             <a:picLocks noChangeAspect="1"/>
           </p:cNvPicPr>
           <p:nvPr/>
         </p:nvPicPr>
         <p:blipFill>
-          <a:blip r:embed="rId6"/>
+          <a:blip r:embed="rId5"/>
           <a:stretch>
             <a:fillRect/>
           </a:stretch>
         </p:blipFill>
         <p:spPr>
           <a:xfrm>
-            <a:off x="8184977" y="3366089"/>
-            <a:ext cx="235549" cy="235549"/>
+            <a:off x="8176931" y="2114459"/>
+            <a:ext cx="215067" cy="215067"/>
           </a:xfrm>
           <a:prstGeom prst="rect">
             <a:avLst/>
@@ -12037,14 +12001,14 @@
       </p:pic>
       <p:sp>
         <p:nvSpPr>
-          <p:cNvPr id="16" name="Text 10"/>
+          <p:cNvPr id="15" name="Text 10"/>
           <p:cNvSpPr txBox="1"/>
           <p:nvPr/>
         </p:nvSpPr>
         <p:spPr>
           <a:xfrm>
-            <a:off x="8659368" y="3200400"/>
-            <a:ext cx="3200400" cy="548640"/>
+            <a:off x="8659368" y="1993392"/>
+            <a:ext cx="2999232" cy="603504"/>
           </a:xfrm>
           <a:prstGeom prst="rect">
             <a:avLst/>
@@ -12060,63 +12024,55 @@
               <a:buNone/>
             </a:pPr>
             <a:r>
-              <a:rPr lang="en-US" sz="3000" b="1" dirty="0">
-                <a:solidFill>
-                  <a:schemeClr val="tx1"/>
-                </a:solidFill>
-              </a:rPr>
-              <a:t>78% / 119%</a:t>
-            </a:r>
-            <a:endParaRPr lang="en-US" sz="3000" dirty="0"/>
+              <a:rPr lang="en-US" sz="1300" b="1" dirty="0">
+                <a:solidFill>
+                  <a:schemeClr val="tx1"/>
+                </a:solidFill>
+              </a:rPr>
+              <a:t>② 센서값 전송</a:t>
+            </a:r>
+            <a:endParaRPr lang="en-US" sz="1300" dirty="0"/>
+          </a:p>
+          <a:p>
+            <a:pPr marL="0" indent="0">
+              <a:buNone/>
+            </a:pPr>
+            <a:r>
+              <a:rPr lang="en-US" sz="1150" dirty="0">
+                <a:solidFill>
+                  <a:schemeClr val="tx1"/>
+                </a:solidFill>
+              </a:rPr>
+              <a:t>0.5초마다 USB로 DK에 보냄</a:t>
+            </a:r>
+            <a:endParaRPr lang="en-US" sz="1300" dirty="0"/>
+          </a:p>
+          <a:p>
+            <a:pPr marL="0" indent="0">
+              <a:buNone/>
+            </a:pPr>
+            <a:r>
+              <a:rPr lang="en-US" sz="1150" dirty="0">
+                <a:solidFill>
+                  <a:schemeClr val="tx1"/>
+                </a:solidFill>
+              </a:rPr>
+              <a:t>실제 제품에서는 센서가 이 값을 측정함</a:t>
+            </a:r>
+            <a:endParaRPr lang="en-US" sz="1300" dirty="0"/>
           </a:p>
         </p:txBody>
       </p:sp>
       <p:sp>
         <p:nvSpPr>
-          <p:cNvPr id="17" name="Text 11"/>
-          <p:cNvSpPr txBox="1"/>
-          <p:nvPr/>
-        </p:nvSpPr>
-        <p:spPr>
-          <a:xfrm>
-            <a:off x="8659368" y="3749040"/>
-            <a:ext cx="3200400" cy="274320"/>
-          </a:xfrm>
-          <a:prstGeom prst="rect">
-            <a:avLst/>
-          </a:prstGeom>
-          <a:noFill/>
-          <a:ln/>
-        </p:spPr>
-        <p:txBody>
-          <a:bodyPr wrap="square" lIns="0" tIns="0" rIns="0" bIns="0" rtlCol="0" anchor="t"/>
-          <a:lstStyle/>
-          <a:p>
-            <a:pPr marL="0" indent="0">
-              <a:buNone/>
-            </a:pPr>
-            <a:r>
-              <a:rPr lang="en-US" sz="1200" dirty="0">
-                <a:solidFill>
-                  <a:schemeClr val="tx1"/>
-                </a:solidFill>
-              </a:rPr>
-              <a:t>최고 벽 표면 습도 (우리 노드 / 일반 가습기)</a:t>
-            </a:r>
-            <a:endParaRPr lang="en-US" sz="1200" dirty="0"/>
-          </a:p>
-        </p:txBody>
-      </p:sp>
-      <p:sp>
-        <p:nvSpPr>
-          <p:cNvPr id="18" name="Shape 12"/>
+          <p:cNvPr id="16" name="Shape 11"/>
           <p:cNvSpPr/>
           <p:nvPr/>
         </p:nvSpPr>
         <p:spPr>
           <a:xfrm>
-            <a:off x="8092440" y="4187952"/>
-            <a:ext cx="420624" cy="420624"/>
+            <a:off x="8092440" y="2688336"/>
+            <a:ext cx="384048" cy="384048"/>
           </a:xfrm>
           <a:prstGeom prst="ellipse">
             <a:avLst/>
@@ -12134,22 +12090,22 @@
       </p:sp>
       <p:pic>
         <p:nvPicPr>
-          <p:cNvPr id="19" name="Image 4" descr="fan"/>
+          <p:cNvPr id="17" name="Image 3" descr="cpu"/>
           <p:cNvPicPr>
             <a:picLocks noChangeAspect="1"/>
           </p:cNvPicPr>
           <p:nvPr/>
         </p:nvPicPr>
         <p:blipFill>
-          <a:blip r:embed="rId7"/>
+          <a:blip r:embed="rId6"/>
           <a:stretch>
             <a:fillRect/>
           </a:stretch>
         </p:blipFill>
         <p:spPr>
           <a:xfrm>
-            <a:off x="8184977" y="4280489"/>
-            <a:ext cx="235549" cy="235549"/>
+            <a:off x="8176931" y="2772827"/>
+            <a:ext cx="215067" cy="215067"/>
           </a:xfrm>
           <a:prstGeom prst="rect">
             <a:avLst/>
@@ -12158,14 +12114,14 @@
       </p:pic>
       <p:sp>
         <p:nvSpPr>
-          <p:cNvPr id="20" name="Text 13"/>
+          <p:cNvPr id="18" name="Text 12"/>
           <p:cNvSpPr txBox="1"/>
           <p:nvPr/>
         </p:nvSpPr>
         <p:spPr>
           <a:xfrm>
-            <a:off x="8659368" y="4114800"/>
-            <a:ext cx="3200400" cy="548640"/>
+            <a:off x="8659368" y="2651760"/>
+            <a:ext cx="2999232" cy="603504"/>
           </a:xfrm>
           <a:prstGeom prst="rect">
             <a:avLst/>
@@ -12181,86 +12137,55 @@
               <a:buNone/>
             </a:pPr>
             <a:r>
-              <a:rPr lang="en-US" sz="3000" b="1" dirty="0">
-                <a:solidFill>
-                  <a:schemeClr val="tx1"/>
-                </a:solidFill>
-              </a:rPr>
-              <a:t>+2.8℃</a:t>
-            </a:r>
-            <a:endParaRPr lang="en-US" sz="3000" dirty="0"/>
+              <a:rPr lang="en-US" sz="1300" b="1" dirty="0">
+                <a:solidFill>
+                  <a:schemeClr val="tx1"/>
+                </a:solidFill>
+              </a:rPr>
+              <a:t>③ DK 판단</a:t>
+            </a:r>
+            <a:endParaRPr lang="en-US" sz="1300" dirty="0"/>
+          </a:p>
+          <a:p>
+            <a:pPr marL="0" indent="0">
+              <a:buNone/>
+            </a:pPr>
+            <a:r>
+              <a:rPr lang="en-US" sz="1150" dirty="0">
+                <a:solidFill>
+                  <a:schemeClr val="tx1"/>
+                </a:solidFill>
+              </a:rPr>
+              <a:t>벽 표면 습도와 절대습도를 계산해</a:t>
+            </a:r>
+            <a:endParaRPr lang="en-US" sz="1300" dirty="0"/>
+          </a:p>
+          <a:p>
+            <a:pPr marL="0" indent="0">
+              <a:buNone/>
+            </a:pPr>
+            <a:r>
+              <a:rPr lang="en-US" sz="1150" dirty="0">
+                <a:solidFill>
+                  <a:schemeClr val="tx1"/>
+                </a:solidFill>
+              </a:rPr>
+              <a:t>가습기와 선풍기 ON/OFF를 결정함</a:t>
+            </a:r>
+            <a:endParaRPr lang="en-US" sz="1300" dirty="0"/>
           </a:p>
         </p:txBody>
       </p:sp>
       <p:sp>
         <p:nvSpPr>
-          <p:cNvPr id="21" name="Text 14"/>
-          <p:cNvSpPr txBox="1"/>
-          <p:nvPr/>
-        </p:nvSpPr>
-        <p:spPr>
-          <a:xfrm>
-            <a:off x="8659368" y="4663440"/>
-            <a:ext cx="3200400" cy="274320"/>
-          </a:xfrm>
-          <a:prstGeom prst="rect">
-            <a:avLst/>
-          </a:prstGeom>
-          <a:noFill/>
-          <a:ln/>
-        </p:spPr>
-        <p:txBody>
-          <a:bodyPr wrap="square" lIns="0" tIns="0" rIns="0" bIns="0" rtlCol="0" anchor="t"/>
-          <a:lstStyle/>
-          <a:p>
-            <a:pPr marL="0" indent="0">
-              <a:buNone/>
-            </a:pPr>
-            <a:r>
-              <a:rPr lang="en-US" sz="1200" dirty="0">
-                <a:solidFill>
-                  <a:schemeClr val="tx1"/>
-                </a:solidFill>
-              </a:rPr>
-              <a:t>노드가 학습한 선풍기 효과</a:t>
-            </a:r>
-            <a:endParaRPr lang="en-US" sz="1200" dirty="0"/>
-          </a:p>
-        </p:txBody>
-      </p:sp>
-      <p:sp>
-        <p:nvSpPr>
-          <p:cNvPr id="22" name="Shape 15"/>
+          <p:cNvPr id="19" name="Shape 13"/>
           <p:cNvSpPr/>
           <p:nvPr/>
         </p:nvSpPr>
         <p:spPr>
           <a:xfrm>
-            <a:off x="640080" y="5815584"/>
-            <a:ext cx="10927080" cy="0"/>
-          </a:xfrm>
-          <a:prstGeom prst="line">
-            <a:avLst/>
-          </a:prstGeom>
-          <a:noFill/>
-          <a:ln w="19050">
-            <a:solidFill>
-              <a:srgbClr val="E0E0E0"/>
-            </a:solidFill>
-            <a:prstDash val="solid"/>
-          </a:ln>
-        </p:spPr>
-      </p:sp>
-      <p:sp>
-        <p:nvSpPr>
-          <p:cNvPr id="23" name="Shape 16"/>
-          <p:cNvSpPr/>
-          <p:nvPr/>
-        </p:nvSpPr>
-        <p:spPr>
-          <a:xfrm>
-            <a:off x="548640" y="5733288"/>
-            <a:ext cx="164592" cy="164592"/>
+            <a:off x="8092440" y="3346704"/>
+            <a:ext cx="384048" cy="384048"/>
           </a:xfrm>
           <a:prstGeom prst="ellipse">
             <a:avLst/>
@@ -12276,16 +12201,40 @@
           </a:ln>
         </p:spPr>
       </p:sp>
-      <p:sp>
-        <p:nvSpPr>
-          <p:cNvPr id="24" name="Text 17"/>
+      <p:pic>
+        <p:nvPicPr>
+          <p:cNvPr id="20" name="Image 4" descr="plug"/>
+          <p:cNvPicPr>
+            <a:picLocks noChangeAspect="1"/>
+          </p:cNvPicPr>
+          <p:nvPr/>
+        </p:nvPicPr>
+        <p:blipFill>
+          <a:blip r:embed="rId7"/>
+          <a:stretch>
+            <a:fillRect/>
+          </a:stretch>
+        </p:blipFill>
+        <p:spPr>
+          <a:xfrm>
+            <a:off x="8176931" y="3431195"/>
+            <a:ext cx="215067" cy="215067"/>
+          </a:xfrm>
+          <a:prstGeom prst="rect">
+            <a:avLst/>
+          </a:prstGeom>
+        </p:spPr>
+      </p:pic>
+      <p:sp>
+        <p:nvSpPr>
+          <p:cNvPr id="21" name="Text 14"/>
           <p:cNvSpPr txBox="1"/>
           <p:nvPr/>
         </p:nvSpPr>
         <p:spPr>
           <a:xfrm>
-            <a:off x="548640" y="5943600"/>
-            <a:ext cx="2103120" cy="457200"/>
+            <a:off x="8659368" y="3310128"/>
+            <a:ext cx="2999232" cy="603504"/>
           </a:xfrm>
           <a:prstGeom prst="rect">
             <a:avLst/>
@@ -12301,41 +12250,55 @@
               <a:buNone/>
             </a:pPr>
             <a:r>
-              <a:rPr lang="en-US" sz="1200" b="1" dirty="0">
-                <a:solidFill>
-                  <a:schemeClr val="tx1"/>
-                </a:solidFill>
-              </a:rPr>
-              <a:t>22:00</a:t>
-            </a:r>
-            <a:endParaRPr lang="en-US" sz="1200" dirty="0"/>
-          </a:p>
-          <a:p>
-            <a:pPr marL="0" indent="0">
-              <a:buNone/>
-            </a:pPr>
-            <a:r>
-              <a:rPr lang="en-US" sz="1200" dirty="0">
-                <a:solidFill>
-                  <a:schemeClr val="tx1"/>
-                </a:solidFill>
-              </a:rPr>
-              <a:t>건조 → 가습 시작</a:t>
-            </a:r>
-            <a:endParaRPr lang="en-US" sz="1200" dirty="0"/>
+              <a:rPr lang="en-US" sz="1300" b="1" dirty="0">
+                <a:solidFill>
+                  <a:schemeClr val="tx1"/>
+                </a:solidFill>
+              </a:rPr>
+              <a:t>④ 릴레이 구동</a:t>
+            </a:r>
+            <a:endParaRPr lang="en-US" sz="1300" dirty="0"/>
+          </a:p>
+          <a:p>
+            <a:pPr marL="0" indent="0">
+              <a:buNone/>
+            </a:pPr>
+            <a:r>
+              <a:rPr lang="en-US" sz="1150" dirty="0">
+                <a:solidFill>
+                  <a:schemeClr val="tx1"/>
+                </a:solidFill>
+              </a:rPr>
+              <a:t>CH1 선풍기, CH2 가습기 전원을 켜고 끔</a:t>
+            </a:r>
+            <a:endParaRPr lang="en-US" sz="1300" dirty="0"/>
+          </a:p>
+          <a:p>
+            <a:pPr marL="0" indent="0">
+              <a:buNone/>
+            </a:pPr>
+            <a:r>
+              <a:rPr lang="en-US" sz="1150" dirty="0">
+                <a:solidFill>
+                  <a:schemeClr val="tx1"/>
+                </a:solidFill>
+              </a:rPr>
+              <a:t>딸깍 소리와 함께 가전이 실제로 바뀜</a:t>
+            </a:r>
+            <a:endParaRPr lang="en-US" sz="1300" dirty="0"/>
           </a:p>
         </p:txBody>
       </p:sp>
       <p:sp>
         <p:nvSpPr>
-          <p:cNvPr id="25" name="Shape 18"/>
+          <p:cNvPr id="22" name="Shape 15"/>
           <p:cNvSpPr/>
           <p:nvPr/>
         </p:nvSpPr>
         <p:spPr>
           <a:xfrm>
-            <a:off x="2788920" y="5733288"/>
-            <a:ext cx="164592" cy="164592"/>
+            <a:off x="8092440" y="4005072"/>
+            <a:ext cx="384048" cy="384048"/>
           </a:xfrm>
           <a:prstGeom prst="ellipse">
             <a:avLst/>
@@ -12351,16 +12314,40 @@
           </a:ln>
         </p:spPr>
       </p:sp>
-      <p:sp>
-        <p:nvSpPr>
-          <p:cNvPr id="26" name="Text 19"/>
+      <p:pic>
+        <p:nvPicPr>
+          <p:cNvPr id="23" name="Image 5" descr="wave"/>
+          <p:cNvPicPr>
+            <a:picLocks noChangeAspect="1"/>
+          </p:cNvPicPr>
+          <p:nvPr/>
+        </p:nvPicPr>
+        <p:blipFill>
+          <a:blip r:embed="rId8"/>
+          <a:stretch>
+            <a:fillRect/>
+          </a:stretch>
+        </p:blipFill>
+        <p:spPr>
+          <a:xfrm>
+            <a:off x="8176931" y="4089563"/>
+            <a:ext cx="215067" cy="215067"/>
+          </a:xfrm>
+          <a:prstGeom prst="rect">
+            <a:avLst/>
+          </a:prstGeom>
+        </p:spPr>
+      </p:pic>
+      <p:sp>
+        <p:nvSpPr>
+          <p:cNvPr id="24" name="Text 16"/>
           <p:cNvSpPr txBox="1"/>
           <p:nvPr/>
         </p:nvSpPr>
         <p:spPr>
           <a:xfrm>
-            <a:off x="2788920" y="5943600"/>
-            <a:ext cx="2103120" cy="457200"/>
+            <a:off x="8659368" y="3968496"/>
+            <a:ext cx="2999232" cy="603504"/>
           </a:xfrm>
           <a:prstGeom prst="rect">
             <a:avLst/>
@@ -12376,41 +12363,55 @@
               <a:buNone/>
             </a:pPr>
             <a:r>
-              <a:rPr lang="en-US" sz="1200" b="1" dirty="0">
-                <a:solidFill>
-                  <a:schemeClr val="tx1"/>
-                </a:solidFill>
-              </a:rPr>
-              <a:t>01:00</a:t>
-            </a:r>
-            <a:endParaRPr lang="en-US" sz="1200" dirty="0"/>
-          </a:p>
-          <a:p>
-            <a:pPr marL="0" indent="0">
-              <a:buNone/>
-            </a:pPr>
-            <a:r>
-              <a:rPr lang="en-US" sz="1200" dirty="0">
-                <a:solidFill>
-                  <a:schemeClr val="tx1"/>
-                </a:solidFill>
-              </a:rPr>
-              <a:t>표면 75% → 가습 정지</a:t>
-            </a:r>
-            <a:endParaRPr lang="en-US" sz="1200" dirty="0"/>
+              <a:rPr lang="en-US" sz="1300" b="1" dirty="0">
+                <a:solidFill>
+                  <a:schemeClr val="tx1"/>
+                </a:solidFill>
+              </a:rPr>
+              <a:t>⑤ Matter 보고</a:t>
+            </a:r>
+            <a:endParaRPr lang="en-US" sz="1300" dirty="0"/>
+          </a:p>
+          <a:p>
+            <a:pPr marL="0" indent="0">
+              <a:buNone/>
+            </a:pPr>
+            <a:r>
+              <a:rPr lang="en-US" sz="1150" dirty="0">
+                <a:solidFill>
+                  <a:schemeClr val="tx1"/>
+                </a:solidFill>
+              </a:rPr>
+              <a:t>같은 결과를 SmartThings 허브에 보고함</a:t>
+            </a:r>
+            <a:endParaRPr lang="en-US" sz="1300" dirty="0"/>
+          </a:p>
+          <a:p>
+            <a:pPr marL="0" indent="0">
+              <a:buNone/>
+            </a:pPr>
+            <a:r>
+              <a:rPr lang="en-US" sz="1150" dirty="0">
+                <a:solidFill>
+                  <a:schemeClr val="tx1"/>
+                </a:solidFill>
+              </a:rPr>
+              <a:t>11회 모두 수신 확인, 평균 92ms</a:t>
+            </a:r>
+            <a:endParaRPr lang="en-US" sz="1300" dirty="0"/>
           </a:p>
         </p:txBody>
       </p:sp>
       <p:sp>
         <p:nvSpPr>
-          <p:cNvPr id="27" name="Shape 20"/>
+          <p:cNvPr id="25" name="Shape 17"/>
           <p:cNvSpPr/>
           <p:nvPr/>
         </p:nvSpPr>
         <p:spPr>
           <a:xfrm>
-            <a:off x="5029200" y="5733288"/>
-            <a:ext cx="164592" cy="164592"/>
+            <a:off x="8092440" y="4663440"/>
+            <a:ext cx="384048" cy="384048"/>
           </a:xfrm>
           <a:prstGeom prst="ellipse">
             <a:avLst/>
@@ -12426,16 +12427,40 @@
           </a:ln>
         </p:spPr>
       </p:sp>
-      <p:sp>
-        <p:nvSpPr>
-          <p:cNvPr id="28" name="Text 21"/>
+      <p:pic>
+        <p:nvPicPr>
+          <p:cNvPr id="26" name="Image 6" descr="shield"/>
+          <p:cNvPicPr>
+            <a:picLocks noChangeAspect="1"/>
+          </p:cNvPicPr>
+          <p:nvPr/>
+        </p:nvPicPr>
+        <p:blipFill>
+          <a:blip r:embed="rId9"/>
+          <a:stretch>
+            <a:fillRect/>
+          </a:stretch>
+        </p:blipFill>
+        <p:spPr>
+          <a:xfrm>
+            <a:off x="8176931" y="4747931"/>
+            <a:ext cx="215067" cy="215067"/>
+          </a:xfrm>
+          <a:prstGeom prst="rect">
+            <a:avLst/>
+          </a:prstGeom>
+        </p:spPr>
+      </p:pic>
+      <p:sp>
+        <p:nvSpPr>
+          <p:cNvPr id="27" name="Text 18"/>
           <p:cNvSpPr txBox="1"/>
           <p:nvPr/>
         </p:nvSpPr>
         <p:spPr>
           <a:xfrm>
-            <a:off x="5029200" y="5943600"/>
-            <a:ext cx="2103120" cy="457200"/>
+            <a:off x="8659368" y="4626864"/>
+            <a:ext cx="2999232" cy="603504"/>
           </a:xfrm>
           <a:prstGeom prst="rect">
             <a:avLst/>
@@ -12451,40 +12476,77 @@
               <a:buNone/>
             </a:pPr>
             <a:r>
-              <a:rPr lang="en-US" sz="1200" b="1" dirty="0">
-                <a:solidFill>
-                  <a:schemeClr val="tx1"/>
-                </a:solidFill>
-              </a:rPr>
-              <a:t>01:10</a:t>
-            </a:r>
-            <a:endParaRPr lang="en-US" sz="1200" dirty="0"/>
-          </a:p>
-          <a:p>
-            <a:pPr marL="0" indent="0">
-              <a:buNone/>
-            </a:pPr>
-            <a:r>
-              <a:rPr lang="en-US" sz="1200" dirty="0">
-                <a:solidFill>
-                  <a:schemeClr val="tx1"/>
-                </a:solidFill>
-              </a:rPr>
-              <a:t>선풍기 ON, 효과 학습</a:t>
-            </a:r>
-            <a:endParaRPr lang="en-US" sz="1200" dirty="0"/>
+              <a:rPr lang="en-US" sz="1300" b="1" dirty="0">
+                <a:solidFill>
+                  <a:schemeClr val="tx1"/>
+                </a:solidFill>
+              </a:rPr>
+              <a:t>⑥ 결과: 누적 위험 시간</a:t>
+            </a:r>
+            <a:endParaRPr lang="en-US" sz="1300" dirty="0"/>
+          </a:p>
+          <a:p>
+            <a:pPr marL="0" indent="0">
+              <a:buNone/>
+            </a:pPr>
+            <a:r>
+              <a:rPr lang="en-US" sz="1150" dirty="0">
+                <a:solidFill>
+                  <a:schemeClr val="tx1"/>
+                </a:solidFill>
+              </a:rPr>
+              <a:t>우리 노드 0분, 최고 벽 표면 78%</a:t>
+            </a:r>
+            <a:endParaRPr lang="en-US" sz="1300" dirty="0"/>
+          </a:p>
+          <a:p>
+            <a:pPr marL="0" indent="0">
+              <a:buNone/>
+            </a:pPr>
+            <a:r>
+              <a:rPr lang="en-US" sz="1150" dirty="0">
+                <a:solidFill>
+                  <a:schemeClr val="tx1"/>
+                </a:solidFill>
+              </a:rPr>
+              <a:t>일반 가습기였다면 8시간 38분, 최고 119%</a:t>
+            </a:r>
+            <a:endParaRPr lang="en-US" sz="1300" dirty="0"/>
           </a:p>
         </p:txBody>
       </p:sp>
       <p:sp>
         <p:nvSpPr>
-          <p:cNvPr id="29" name="Shape 22"/>
+          <p:cNvPr id="28" name="Shape 19"/>
           <p:cNvSpPr/>
           <p:nvPr/>
         </p:nvSpPr>
         <p:spPr>
           <a:xfrm>
-            <a:off x="7269480" y="5733288"/>
+            <a:off x="640080" y="5815584"/>
+            <a:ext cx="10927080" cy="0"/>
+          </a:xfrm>
+          <a:prstGeom prst="line">
+            <a:avLst/>
+          </a:prstGeom>
+          <a:noFill/>
+          <a:ln w="19050">
+            <a:solidFill>
+              <a:srgbClr val="E0E0E0"/>
+            </a:solidFill>
+            <a:prstDash val="solid"/>
+          </a:ln>
+        </p:spPr>
+      </p:sp>
+      <p:sp>
+        <p:nvSpPr>
+          <p:cNvPr id="29" name="Shape 20"/>
+          <p:cNvSpPr/>
+          <p:nvPr/>
+        </p:nvSpPr>
+        <p:spPr>
+          <a:xfrm>
+            <a:off x="548640" y="5733288"/>
             <a:ext cx="164592" cy="164592"/>
           </a:xfrm>
           <a:prstGeom prst="ellipse">
@@ -12503,13 +12565,13 @@
       </p:sp>
       <p:sp>
         <p:nvSpPr>
-          <p:cNvPr id="30" name="Text 23"/>
+          <p:cNvPr id="30" name="Text 21"/>
           <p:cNvSpPr txBox="1"/>
           <p:nvPr/>
         </p:nvSpPr>
         <p:spPr>
           <a:xfrm>
-            <a:off x="7269480" y="5943600"/>
+            <a:off x="548640" y="5943600"/>
             <a:ext cx="2103120" cy="457200"/>
           </a:xfrm>
           <a:prstGeom prst="rect">
@@ -12531,7 +12593,7 @@
                   <a:schemeClr val="tx1"/>
                 </a:solidFill>
               </a:rPr>
-              <a:t>02:55~</a:t>
+              <a:t>22:00</a:t>
             </a:r>
             <a:endParaRPr lang="en-US" sz="1200" dirty="0"/>
           </a:p>
@@ -12545,7 +12607,7 @@
                   <a:schemeClr val="tx1"/>
                 </a:solidFill>
               </a:rPr>
-              <a:t>선풍기 켠 채 가습</a:t>
+              <a:t>건조 → 가습 시작</a:t>
             </a:r>
             <a:endParaRPr lang="en-US" sz="1200" dirty="0"/>
           </a:p>
@@ -12553,13 +12615,13 @@
       </p:sp>
       <p:sp>
         <p:nvSpPr>
-          <p:cNvPr id="31" name="Shape 24"/>
+          <p:cNvPr id="31" name="Shape 22"/>
           <p:cNvSpPr/>
           <p:nvPr/>
         </p:nvSpPr>
         <p:spPr>
           <a:xfrm>
-            <a:off x="9509760" y="5733288"/>
+            <a:off x="2788920" y="5733288"/>
             <a:ext cx="164592" cy="164592"/>
           </a:xfrm>
           <a:prstGeom prst="ellipse">
@@ -12578,13 +12640,13 @@
       </p:sp>
       <p:sp>
         <p:nvSpPr>
-          <p:cNvPr id="32" name="Text 25"/>
+          <p:cNvPr id="32" name="Text 23"/>
           <p:cNvSpPr txBox="1"/>
           <p:nvPr/>
         </p:nvSpPr>
         <p:spPr>
           <a:xfrm>
-            <a:off x="9509760" y="5943600"/>
+            <a:off x="2788920" y="5943600"/>
             <a:ext cx="2103120" cy="457200"/>
           </a:xfrm>
           <a:prstGeom prst="rect">
@@ -12606,6 +12668,231 @@
                   <a:schemeClr val="tx1"/>
                 </a:solidFill>
               </a:rPr>
+              <a:t>01:00</a:t>
+            </a:r>
+            <a:endParaRPr lang="en-US" sz="1200" dirty="0"/>
+          </a:p>
+          <a:p>
+            <a:pPr marL="0" indent="0">
+              <a:buNone/>
+            </a:pPr>
+            <a:r>
+              <a:rPr lang="en-US" sz="1200" dirty="0">
+                <a:solidFill>
+                  <a:schemeClr val="tx1"/>
+                </a:solidFill>
+              </a:rPr>
+              <a:t>표면 75% → 가습 정지</a:t>
+            </a:r>
+            <a:endParaRPr lang="en-US" sz="1200" dirty="0"/>
+          </a:p>
+        </p:txBody>
+      </p:sp>
+      <p:sp>
+        <p:nvSpPr>
+          <p:cNvPr id="33" name="Shape 24"/>
+          <p:cNvSpPr/>
+          <p:nvPr/>
+        </p:nvSpPr>
+        <p:spPr>
+          <a:xfrm>
+            <a:off x="5029200" y="5733288"/>
+            <a:ext cx="164592" cy="164592"/>
+          </a:xfrm>
+          <a:prstGeom prst="ellipse">
+            <a:avLst/>
+          </a:prstGeom>
+          <a:solidFill>
+            <a:schemeClr val="accent1"/>
+          </a:solidFill>
+          <a:ln w="12700">
+            <a:solidFill>
+              <a:srgbClr val="0066CC"/>
+            </a:solidFill>
+            <a:prstDash val="solid"/>
+          </a:ln>
+        </p:spPr>
+      </p:sp>
+      <p:sp>
+        <p:nvSpPr>
+          <p:cNvPr id="34" name="Text 25"/>
+          <p:cNvSpPr txBox="1"/>
+          <p:nvPr/>
+        </p:nvSpPr>
+        <p:spPr>
+          <a:xfrm>
+            <a:off x="5029200" y="5943600"/>
+            <a:ext cx="2103120" cy="457200"/>
+          </a:xfrm>
+          <a:prstGeom prst="rect">
+            <a:avLst/>
+          </a:prstGeom>
+          <a:noFill/>
+          <a:ln/>
+        </p:spPr>
+        <p:txBody>
+          <a:bodyPr wrap="square" lIns="0" tIns="0" rIns="0" bIns="0" rtlCol="0" anchor="t"/>
+          <a:lstStyle/>
+          <a:p>
+            <a:pPr marL="0" indent="0">
+              <a:buNone/>
+            </a:pPr>
+            <a:r>
+              <a:rPr lang="en-US" sz="1200" b="1" dirty="0">
+                <a:solidFill>
+                  <a:schemeClr val="tx1"/>
+                </a:solidFill>
+              </a:rPr>
+              <a:t>01:10</a:t>
+            </a:r>
+            <a:endParaRPr lang="en-US" sz="1200" dirty="0"/>
+          </a:p>
+          <a:p>
+            <a:pPr marL="0" indent="0">
+              <a:buNone/>
+            </a:pPr>
+            <a:r>
+              <a:rPr lang="en-US" sz="1200" dirty="0">
+                <a:solidFill>
+                  <a:schemeClr val="tx1"/>
+                </a:solidFill>
+              </a:rPr>
+              <a:t>선풍기 ON, 효과 학습</a:t>
+            </a:r>
+            <a:endParaRPr lang="en-US" sz="1200" dirty="0"/>
+          </a:p>
+        </p:txBody>
+      </p:sp>
+      <p:sp>
+        <p:nvSpPr>
+          <p:cNvPr id="35" name="Shape 26"/>
+          <p:cNvSpPr/>
+          <p:nvPr/>
+        </p:nvSpPr>
+        <p:spPr>
+          <a:xfrm>
+            <a:off x="7269480" y="5733288"/>
+            <a:ext cx="164592" cy="164592"/>
+          </a:xfrm>
+          <a:prstGeom prst="ellipse">
+            <a:avLst/>
+          </a:prstGeom>
+          <a:solidFill>
+            <a:schemeClr val="accent1"/>
+          </a:solidFill>
+          <a:ln w="12700">
+            <a:solidFill>
+              <a:srgbClr val="0066CC"/>
+            </a:solidFill>
+            <a:prstDash val="solid"/>
+          </a:ln>
+        </p:spPr>
+      </p:sp>
+      <p:sp>
+        <p:nvSpPr>
+          <p:cNvPr id="36" name="Text 27"/>
+          <p:cNvSpPr txBox="1"/>
+          <p:nvPr/>
+        </p:nvSpPr>
+        <p:spPr>
+          <a:xfrm>
+            <a:off x="7269480" y="5943600"/>
+            <a:ext cx="2103120" cy="457200"/>
+          </a:xfrm>
+          <a:prstGeom prst="rect">
+            <a:avLst/>
+          </a:prstGeom>
+          <a:noFill/>
+          <a:ln/>
+        </p:spPr>
+        <p:txBody>
+          <a:bodyPr wrap="square" lIns="0" tIns="0" rIns="0" bIns="0" rtlCol="0" anchor="t"/>
+          <a:lstStyle/>
+          <a:p>
+            <a:pPr marL="0" indent="0">
+              <a:buNone/>
+            </a:pPr>
+            <a:r>
+              <a:rPr lang="en-US" sz="1200" b="1" dirty="0">
+                <a:solidFill>
+                  <a:schemeClr val="tx1"/>
+                </a:solidFill>
+              </a:rPr>
+              <a:t>02:55~</a:t>
+            </a:r>
+            <a:endParaRPr lang="en-US" sz="1200" dirty="0"/>
+          </a:p>
+          <a:p>
+            <a:pPr marL="0" indent="0">
+              <a:buNone/>
+            </a:pPr>
+            <a:r>
+              <a:rPr lang="en-US" sz="1200" dirty="0">
+                <a:solidFill>
+                  <a:schemeClr val="tx1"/>
+                </a:solidFill>
+              </a:rPr>
+              <a:t>선풍기 켠 채 가습</a:t>
+            </a:r>
+            <a:endParaRPr lang="en-US" sz="1200" dirty="0"/>
+          </a:p>
+        </p:txBody>
+      </p:sp>
+      <p:sp>
+        <p:nvSpPr>
+          <p:cNvPr id="37" name="Shape 28"/>
+          <p:cNvSpPr/>
+          <p:nvPr/>
+        </p:nvSpPr>
+        <p:spPr>
+          <a:xfrm>
+            <a:off x="9509760" y="5733288"/>
+            <a:ext cx="164592" cy="164592"/>
+          </a:xfrm>
+          <a:prstGeom prst="ellipse">
+            <a:avLst/>
+          </a:prstGeom>
+          <a:solidFill>
+            <a:schemeClr val="accent1"/>
+          </a:solidFill>
+          <a:ln w="12700">
+            <a:solidFill>
+              <a:srgbClr val="0066CC"/>
+            </a:solidFill>
+            <a:prstDash val="solid"/>
+          </a:ln>
+        </p:spPr>
+      </p:sp>
+      <p:sp>
+        <p:nvSpPr>
+          <p:cNvPr id="38" name="Text 29"/>
+          <p:cNvSpPr txBox="1"/>
+          <p:nvPr/>
+        </p:nvSpPr>
+        <p:spPr>
+          <a:xfrm>
+            <a:off x="9509760" y="5943600"/>
+            <a:ext cx="2103120" cy="457200"/>
+          </a:xfrm>
+          <a:prstGeom prst="rect">
+            <a:avLst/>
+          </a:prstGeom>
+          <a:noFill/>
+          <a:ln/>
+        </p:spPr>
+        <p:txBody>
+          <a:bodyPr wrap="square" lIns="0" tIns="0" rIns="0" bIns="0" rtlCol="0" anchor="t"/>
+          <a:lstStyle/>
+          <a:p>
+            <a:pPr marL="0" indent="0">
+              <a:buNone/>
+            </a:pPr>
+            <a:r>
+              <a:rPr lang="en-US" sz="1200" b="1" dirty="0">
+                <a:solidFill>
+                  <a:schemeClr val="tx1"/>
+                </a:solidFill>
+              </a:rPr>
               <a:t>07:25</a:t>
             </a:r>
             <a:endParaRPr lang="en-US" sz="1200" dirty="0"/>
@@ -12628,7 +12915,7 @@
       </p:sp>
       <p:sp>
         <p:nvSpPr>
-          <p:cNvPr id="33" name="Slide Number Placeholder 0"/>
+          <p:cNvPr id="39" name="Slide Number Placeholder 0"/>
           <p:cNvSpPr>
             <a:spLocks noGrp="1"/>
           </p:cNvSpPr>

--- a/docs/발표자료_침실노드.pptx
+++ b/docs/발표자료_침실노드.pptx
@@ -122,19 +122,19 @@
   <p:extLst>
     <p:ext uri="{521415D9-36F7-43E2-AB2F-B90AF26B5E84}">
       <p14:sectionLst xmlns:p14="http://schemas.microsoft.com/office/powerpoint/2010/main">
-        <p14:section name="핵심 주제" id="{9453E5FE-6A3D-5A91-782B-D399CB2631BF}">
+        <p14:section name="핵심 주제" id="{689C6C88-72E9-1E51-89F8-C749CF744295}">
           <p14:sldIdLst>
             <p14:sldId id="256"/>
           </p14:sldIdLst>
         </p14:section>
-        <p14:section name="주요 개발 내용" id="{48698E11-F1C6-EFA5-2880-2181755A9D3B}">
+        <p14:section name="주요 개발 내용" id="{46F6B7B3-0F13-D520-9C4A-41514C2F408B}">
           <p14:sldIdLst>
             <p14:sldId id="257"/>
             <p14:sldId id="258"/>
             <p14:sldId id="259"/>
           </p14:sldIdLst>
         </p14:section>
-        <p14:section name="시연 내용" id="{B1716346-E395-CDAC-E62E-754BA9916C0F}">
+        <p14:section name="시연 내용" id="{047EEC36-9F7F-0D14-C0A4-22563502B5B7}">
           <p14:sldIdLst>
             <p14:sldId id="260"/>
           </p14:sldIdLst>
@@ -325,7 +325,7 @@
           </c:val>
           <c:extLst>
             <c:ext xmlns:c16="http://schemas.microsoft.com/office/drawing/2014/chart" uri="{C3380CC4-5D6E-409C-BE32-E72D297353CC}">
-              <c16:uniqueId val="{00000000-6930-4E3D-88FD-DCEB6BA1A3DD}"/>
+              <c16:uniqueId val="{00000000-B1CF-4FFC-B523-5A38D82C41C7}"/>
             </c:ext>
           </c:extLst>
         </c:ser>
@@ -422,7 +422,7 @@
           <c:smooth val="0"/>
           <c:extLst>
             <c:ext xmlns:c16="http://schemas.microsoft.com/office/drawing/2014/chart" uri="{C3380CC4-5D6E-409C-BE32-E72D297353CC}">
-              <c16:uniqueId val="{00000001-6930-4E3D-88FD-DCEB6BA1A3DD}"/>
+              <c16:uniqueId val="{00000001-B1CF-4FFC-B523-5A38D82C41C7}"/>
             </c:ext>
           </c:extLst>
         </c:ser>
@@ -604,7 +604,7 @@
     </p:spTree>
     <p:extLst>
       <p:ext uri="{BB962C8B-B14F-4D97-AF65-F5344CB8AC3E}">
-        <p14:creationId xmlns:p14="http://schemas.microsoft.com/office/powerpoint/2010/main" val="3923341190"/>
+        <p14:creationId xmlns:p14="http://schemas.microsoft.com/office/powerpoint/2010/main" val="435705045"/>
       </p:ext>
     </p:extLst>
   </p:cSld>
@@ -924,7 +924,7 @@
           <a:p>
             <a:r>
               <a:rPr lang="en-US" dirty="0"/>
-              <a:t>SDK 예제 위에 엔드포인트를 직접 추가함. 습도와 온도는 표준 측정 클러스터로, 가습기와 선풍기는 On/Off로 노출함. 판단부가 속성을 설정하면 SDK가 허브로 ReportData를 보내고, 시연 1회 동안 11번 보고해 11번 모두 수신 확인을 받았으며 응답은 평균 92ms였음. 앱에서 직접 조작한 값은 콜백으로 받아 판단부에 반영함.</a:t>
+              <a:t>SDK 예제 위에 엔드포인트를 직접 추가함. 습도와 온도는 표준 측정 클러스터로, 가습기와 선풍기는 On/Off로 노출함. 판단부가 속성을 설정하면 SDK가 허브로 ReportData를 보내고, 시연 1회 동안 12번 보고해 12번 모두 수신 확인을 받았으며 응답은 평균 92ms였음. 앱에서 직접 조작한 값은 콜백으로 받아 판단부에 반영함.</a:t>
             </a:r>
           </a:p>
         </p:txBody>
@@ -1098,7 +1098,7 @@
           <a:p>
             <a:r>
               <a:rPr lang="en-US" dirty="0"/>
-              <a:t>시연은 오른쪽 순서로 동작함. 노트북의 가상 침실이 한파의 밤을 진행하며 0.5초마다 센서값을 DK로 보내고, DK가 벽 표면 습도를 계산해 릴레이로 가습기와 선풍기를 켜고 끄며, 같은 결과를 SmartThings 허브에 보고함. 바뀐 가전 상태는 다시 가상 침실에 반영됨. 실내 습도는 40%대에 머무는데 벽 표면 습도만 올라가고, 75%에서 노드가 가습을 멈춘 뒤 선풍기로 벽을 데움. 같은 밤 일반 가습기였다면 8시간 넘게 곰팡이 임계를 넘었을 것을 우리 노드는 0분으로 막음.</a:t>
+              <a:t>시연은 오른쪽 순서로 동작함. 노트북의 가상 침실이 한파의 밤을 진행하며 0.5초마다 센서값을 DK로 보내고, DK가 벽 표면 습도를 계산해 릴레이로 가습기와 선풍기를 켜고 끄며, 같은 결과를 SmartThings 허브에 보고함. 바뀐 가전 상태는 다시 가상 침실에 반영됨. 실내 습도는 40%대에 머무는데 벽 표면 습도만 올라가고, 75%에서 노드가 가습을 멈춘 뒤 선풍기로 벽을 데움. 같은 밤 일반 가습기였다면 8시간 넘게 곰팡이 임계를 넘고, 그중 6시간 넘게 벽이 이슬점(12.9℃)보다 차가워 결로가 생겼을 것을 우리 노드는 0분으로 막음.</a:t>
             </a:r>
           </a:p>
         </p:txBody>
@@ -8043,7 +8043,7 @@
                   <a:schemeClr val="tx1"/>
                 </a:solidFill>
               </a:rPr>
-              <a:t>11 / 11</a:t>
+              <a:t>12 / 12</a:t>
             </a:r>
             <a:endParaRPr lang="en-US" sz="2200" dirty="0"/>
           </a:p>
@@ -12396,7 +12396,7 @@
                   <a:schemeClr val="tx1"/>
                 </a:solidFill>
               </a:rPr>
-              <a:t>11회 모두 수신 확인, 평균 92ms</a:t>
+              <a:t>12회 모두 수신 확인, 평균 92ms</a:t>
             </a:r>
             <a:endParaRPr lang="en-US" sz="1300" dirty="0"/>
           </a:p>
@@ -12509,7 +12509,7 @@
                   <a:schemeClr val="tx1"/>
                 </a:solidFill>
               </a:rPr>
-              <a:t>일반 가습기였다면 8시간 38분, 최고 119%</a:t>
+              <a:t>일반 가습기였다면 8시간 38분, 결로 6시간 14분</a:t>
             </a:r>
             <a:endParaRPr lang="en-US" sz="1300" dirty="0"/>
           </a:p>
@@ -12893,7 +12893,7 @@
                   <a:schemeClr val="tx1"/>
                 </a:solidFill>
               </a:rPr>
-              <a:t>07:25</a:t>
+              <a:t>07:30</a:t>
             </a:r>
             <a:endParaRPr lang="en-US" sz="1200" dirty="0"/>
           </a:p>

--- a/docs/발표자료_침실노드.pptx
+++ b/docs/발표자료_침실노드.pptx
@@ -122,18 +122,18 @@
   <p:extLst>
     <p:ext uri="{521415D9-36F7-43E2-AB2F-B90AF26B5E84}">
       <p14:sectionLst xmlns:p14="http://schemas.microsoft.com/office/powerpoint/2010/main">
-        <p14:section name="핵심 주제" id="{D0CA97D2-FEF8-296B-FB8F-C370505C267E}">
+        <p14:section name="핵심 주제" id="{0D64C906-DF39-3DB8-1315-7B25F797396A}">
           <p14:sldIdLst>
             <p14:sldId id="256"/>
           </p14:sldIdLst>
         </p14:section>
-        <p14:section name="주요 개발 내용" id="{09AAF208-B5B0-3BC0-539D-DAC3DF917B3F}">
+        <p14:section name="주요 개발 내용" id="{D3ED934E-AF12-8183-97B9-DC3D3011353A}">
           <p14:sldIdLst>
             <p14:sldId id="257"/>
             <p14:sldId id="258"/>
           </p14:sldIdLst>
         </p14:section>
-        <p14:section name="시연 내용" id="{D07245AF-4013-F2D8-2A20-E984D622239F}">
+        <p14:section name="시연 내용" id="{1FAFBEBB-B859-BEFA-BCF4-C21EADC6AC41}">
           <p14:sldIdLst>
             <p14:sldId id="259"/>
             <p14:sldId id="260"/>
@@ -325,7 +325,7 @@
           </c:val>
           <c:extLst>
             <c:ext xmlns:c16="http://schemas.microsoft.com/office/drawing/2014/chart" uri="{C3380CC4-5D6E-409C-BE32-E72D297353CC}">
-              <c16:uniqueId val="{00000000-7B07-4D9E-8294-E54EC1043E4A}"/>
+              <c16:uniqueId val="{00000000-7162-411D-8FE9-1273DD0C0688}"/>
             </c:ext>
           </c:extLst>
         </c:ser>
@@ -422,7 +422,7 @@
           <c:smooth val="0"/>
           <c:extLst>
             <c:ext xmlns:c16="http://schemas.microsoft.com/office/drawing/2014/chart" uri="{C3380CC4-5D6E-409C-BE32-E72D297353CC}">
-              <c16:uniqueId val="{00000001-7B07-4D9E-8294-E54EC1043E4A}"/>
+              <c16:uniqueId val="{00000001-7162-411D-8FE9-1273DD0C0688}"/>
             </c:ext>
           </c:extLst>
         </c:ser>
@@ -604,7 +604,7 @@
     </p:spTree>
     <p:extLst>
       <p:ext uri="{BB962C8B-B14F-4D97-AF65-F5344CB8AC3E}">
-        <p14:creationId xmlns:p14="http://schemas.microsoft.com/office/powerpoint/2010/main" val="1094995302"/>
+        <p14:creationId xmlns:p14="http://schemas.microsoft.com/office/powerpoint/2010/main" val="3961732313"/>
       </p:ext>
     </p:extLst>
   </p:cSld>
@@ -10196,61 +10196,9 @@
           </a:p>
         </p:txBody>
       </p:sp>
-      <p:sp>
-        <p:nvSpPr>
-          <p:cNvPr id="8" name="Shape 6"/>
-          <p:cNvSpPr/>
-          <p:nvPr/>
-        </p:nvSpPr>
-        <p:spPr>
-          <a:xfrm>
-            <a:off x="548640" y="1417320"/>
-            <a:ext cx="2286000" cy="914400"/>
-          </a:xfrm>
-          <a:prstGeom prst="roundRect">
-            <a:avLst>
-              <a:gd name="adj" fmla="val 12000"/>
-            </a:avLst>
-          </a:prstGeom>
-          <a:solidFill>
-            <a:schemeClr val="bg2"/>
-          </a:solidFill>
-          <a:ln w="9525">
-            <a:solidFill>
-              <a:srgbClr val="E0E0E0"/>
-            </a:solidFill>
-            <a:prstDash val="solid"/>
-          </a:ln>
-        </p:spPr>
-      </p:sp>
-      <p:sp>
-        <p:nvSpPr>
-          <p:cNvPr id="9" name="Shape 7"/>
-          <p:cNvSpPr/>
-          <p:nvPr/>
-        </p:nvSpPr>
-        <p:spPr>
-          <a:xfrm>
-            <a:off x="694944" y="1664208"/>
-            <a:ext cx="420624" cy="420624"/>
-          </a:xfrm>
-          <a:prstGeom prst="ellipse">
-            <a:avLst/>
-          </a:prstGeom>
-          <a:solidFill>
-            <a:schemeClr val="accent1"/>
-          </a:solidFill>
-          <a:ln w="12700">
-            <a:solidFill>
-              <a:srgbClr val="0066CC"/>
-            </a:solidFill>
-            <a:prstDash val="solid"/>
-          </a:ln>
-        </p:spPr>
-      </p:sp>
       <p:pic>
         <p:nvPicPr>
-          <p:cNvPr id="10" name="Image 0" descr="laptop"/>
+          <p:cNvPr id="8" name="Image 0" descr="노트북"/>
           <p:cNvPicPr>
             <a:picLocks noChangeAspect="1"/>
           </p:cNvPicPr>
@@ -10264,8 +10212,8 @@
         </p:blipFill>
         <p:spPr>
           <a:xfrm>
-            <a:off x="787481" y="1756745"/>
-            <a:ext cx="235549" cy="235549"/>
+            <a:off x="1348740" y="1371600"/>
+            <a:ext cx="685800" cy="685800"/>
           </a:xfrm>
           <a:prstGeom prst="rect">
             <a:avLst/>
@@ -10274,14 +10222,14 @@
       </p:pic>
       <p:sp>
         <p:nvSpPr>
-          <p:cNvPr id="11" name="Text 8"/>
+          <p:cNvPr id="9" name="Text 6"/>
           <p:cNvSpPr txBox="1"/>
           <p:nvPr/>
         </p:nvSpPr>
         <p:spPr>
           <a:xfrm>
-            <a:off x="1225296" y="1508760"/>
-            <a:ext cx="1536192" cy="731520"/>
+            <a:off x="502920" y="2084832"/>
+            <a:ext cx="2377440" cy="420624"/>
           </a:xfrm>
           <a:prstGeom prst="rect">
             <a:avLst/>
@@ -10290,93 +10238,41 @@
           <a:ln/>
         </p:spPr>
         <p:txBody>
-          <a:bodyPr wrap="square" lIns="0" tIns="0" rIns="0" bIns="0" rtlCol="0" anchor="ctr"/>
+          <a:bodyPr wrap="square" lIns="0" tIns="0" rIns="0" bIns="0" rtlCol="0" anchor="t"/>
           <a:lstStyle/>
           <a:p>
-            <a:pPr marL="0" indent="0">
-              <a:buNone/>
-            </a:pPr>
-            <a:r>
-              <a:rPr lang="en-US" sz="1250" b="1" dirty="0">
+            <a:pPr marL="0" indent="0" algn="ctr">
+              <a:buNone/>
+            </a:pPr>
+            <a:r>
+              <a:rPr lang="en-US" sz="1200" b="1" dirty="0">
                 <a:solidFill>
                   <a:schemeClr val="tx1"/>
                 </a:solidFill>
               </a:rPr>
               <a:t>노트북</a:t>
             </a:r>
-            <a:endParaRPr lang="en-US" sz="1250" dirty="0"/>
-          </a:p>
-          <a:p>
-            <a:pPr marL="0" indent="0">
-              <a:buNone/>
-            </a:pPr>
-            <a:r>
-              <a:rPr lang="en-US" sz="1100" dirty="0">
-                <a:solidFill>
-                  <a:schemeClr val="tx1"/>
-                </a:solidFill>
-              </a:rPr>
-              <a:t>가상 침실, 시연 화면</a:t>
-            </a:r>
-            <a:endParaRPr lang="en-US" sz="1250" dirty="0"/>
+            <a:endParaRPr lang="en-US" sz="1200" dirty="0"/>
+          </a:p>
+          <a:p>
+            <a:pPr marL="0" indent="0" algn="ctr">
+              <a:buNone/>
+            </a:pPr>
+            <a:r>
+              <a:rPr lang="en-US" sz="1050" dirty="0">
+                <a:solidFill>
+                  <a:schemeClr val="tx1"/>
+                </a:solidFill>
+              </a:rPr>
+              <a:t>가상 침실 계산, 시연 화면</a:t>
+            </a:r>
+            <a:endParaRPr lang="en-US" sz="1200" dirty="0"/>
           </a:p>
         </p:txBody>
-      </p:sp>
-      <p:sp>
-        <p:nvSpPr>
-          <p:cNvPr id="12" name="Shape 9"/>
-          <p:cNvSpPr/>
-          <p:nvPr/>
-        </p:nvSpPr>
-        <p:spPr>
-          <a:xfrm>
-            <a:off x="3493008" y="1417320"/>
-            <a:ext cx="2286000" cy="914400"/>
-          </a:xfrm>
-          <a:prstGeom prst="roundRect">
-            <a:avLst>
-              <a:gd name="adj" fmla="val 12000"/>
-            </a:avLst>
-          </a:prstGeom>
-          <a:solidFill>
-            <a:srgbClr val="FFFFFF"/>
-          </a:solidFill>
-          <a:ln w="19050">
-            <a:solidFill>
-              <a:srgbClr val="1D5C45"/>
-            </a:solidFill>
-            <a:prstDash val="solid"/>
-          </a:ln>
-        </p:spPr>
-      </p:sp>
-      <p:sp>
-        <p:nvSpPr>
-          <p:cNvPr id="13" name="Shape 10"/>
-          <p:cNvSpPr/>
-          <p:nvPr/>
-        </p:nvSpPr>
-        <p:spPr>
-          <a:xfrm>
-            <a:off x="3639312" y="1664208"/>
-            <a:ext cx="420624" cy="420624"/>
-          </a:xfrm>
-          <a:prstGeom prst="ellipse">
-            <a:avLst/>
-          </a:prstGeom>
-          <a:solidFill>
-            <a:schemeClr val="accent2"/>
-          </a:solidFill>
-          <a:ln w="12700">
-            <a:solidFill>
-              <a:srgbClr val="0066CC"/>
-            </a:solidFill>
-            <a:prstDash val="solid"/>
-          </a:ln>
-        </p:spPr>
       </p:sp>
       <p:pic>
         <p:nvPicPr>
-          <p:cNvPr id="14" name="Image 1" descr="cpu"/>
+          <p:cNvPr id="10" name="Image 1" descr="nRF54LM20 DK"/>
           <p:cNvPicPr>
             <a:picLocks noChangeAspect="1"/>
           </p:cNvPicPr>
@@ -10390,8 +10286,8 @@
         </p:blipFill>
         <p:spPr>
           <a:xfrm>
-            <a:off x="3731849" y="1756745"/>
-            <a:ext cx="235549" cy="235549"/>
+            <a:off x="4293108" y="1371600"/>
+            <a:ext cx="685800" cy="685800"/>
           </a:xfrm>
           <a:prstGeom prst="rect">
             <a:avLst/>
@@ -10400,14 +10296,14 @@
       </p:pic>
       <p:sp>
         <p:nvSpPr>
-          <p:cNvPr id="15" name="Text 11"/>
+          <p:cNvPr id="11" name="Text 7"/>
           <p:cNvSpPr txBox="1"/>
           <p:nvPr/>
         </p:nvSpPr>
         <p:spPr>
           <a:xfrm>
-            <a:off x="4169664" y="1508760"/>
-            <a:ext cx="1536192" cy="731520"/>
+            <a:off x="3447288" y="2084832"/>
+            <a:ext cx="2377440" cy="420624"/>
           </a:xfrm>
           <a:prstGeom prst="rect">
             <a:avLst/>
@@ -10416,93 +10312,41 @@
           <a:ln/>
         </p:spPr>
         <p:txBody>
-          <a:bodyPr wrap="square" lIns="0" tIns="0" rIns="0" bIns="0" rtlCol="0" anchor="ctr"/>
+          <a:bodyPr wrap="square" lIns="0" tIns="0" rIns="0" bIns="0" rtlCol="0" anchor="t"/>
           <a:lstStyle/>
           <a:p>
-            <a:pPr marL="0" indent="0">
-              <a:buNone/>
-            </a:pPr>
-            <a:r>
-              <a:rPr lang="en-US" sz="1250" b="1" dirty="0">
+            <a:pPr marL="0" indent="0" algn="ctr">
+              <a:buNone/>
+            </a:pPr>
+            <a:r>
+              <a:rPr lang="en-US" sz="1200" b="1" dirty="0">
                 <a:solidFill>
                   <a:schemeClr val="tx1"/>
                 </a:solidFill>
               </a:rPr>
               <a:t>nRF54LM20 DK</a:t>
             </a:r>
-            <a:endParaRPr lang="en-US" sz="1250" dirty="0"/>
-          </a:p>
-          <a:p>
-            <a:pPr marL="0" indent="0">
-              <a:buNone/>
-            </a:pPr>
-            <a:r>
-              <a:rPr lang="en-US" sz="1100" dirty="0">
+            <a:endParaRPr lang="en-US" sz="1200" dirty="0"/>
+          </a:p>
+          <a:p>
+            <a:pPr marL="0" indent="0" algn="ctr">
+              <a:buNone/>
+            </a:pPr>
+            <a:r>
+              <a:rPr lang="en-US" sz="1050" dirty="0">
                 <a:solidFill>
                   <a:schemeClr val="tx1"/>
                 </a:solidFill>
               </a:rPr>
               <a:t>판단 노드, Matter 기기</a:t>
             </a:r>
-            <a:endParaRPr lang="en-US" sz="1250" dirty="0"/>
+            <a:endParaRPr lang="en-US" sz="1200" dirty="0"/>
           </a:p>
         </p:txBody>
-      </p:sp>
-      <p:sp>
-        <p:nvSpPr>
-          <p:cNvPr id="16" name="Shape 12"/>
-          <p:cNvSpPr/>
-          <p:nvPr/>
-        </p:nvSpPr>
-        <p:spPr>
-          <a:xfrm>
-            <a:off x="6437376" y="1417320"/>
-            <a:ext cx="2286000" cy="914400"/>
-          </a:xfrm>
-          <a:prstGeom prst="roundRect">
-            <a:avLst>
-              <a:gd name="adj" fmla="val 12000"/>
-            </a:avLst>
-          </a:prstGeom>
-          <a:solidFill>
-            <a:schemeClr val="bg2"/>
-          </a:solidFill>
-          <a:ln w="9525">
-            <a:solidFill>
-              <a:srgbClr val="E0E0E0"/>
-            </a:solidFill>
-            <a:prstDash val="solid"/>
-          </a:ln>
-        </p:spPr>
-      </p:sp>
-      <p:sp>
-        <p:nvSpPr>
-          <p:cNvPr id="17" name="Shape 13"/>
-          <p:cNvSpPr/>
-          <p:nvPr/>
-        </p:nvSpPr>
-        <p:spPr>
-          <a:xfrm>
-            <a:off x="6583680" y="1664208"/>
-            <a:ext cx="420624" cy="420624"/>
-          </a:xfrm>
-          <a:prstGeom prst="ellipse">
-            <a:avLst/>
-          </a:prstGeom>
-          <a:solidFill>
-            <a:schemeClr val="accent1"/>
-          </a:solidFill>
-          <a:ln w="12700">
-            <a:solidFill>
-              <a:srgbClr val="0066CC"/>
-            </a:solidFill>
-            <a:prstDash val="solid"/>
-          </a:ln>
-        </p:spPr>
       </p:sp>
       <p:pic>
         <p:nvPicPr>
-          <p:cNvPr id="18" name="Image 2" descr="plug"/>
+          <p:cNvPr id="12" name="Image 2" descr="2채널 릴레이"/>
           <p:cNvPicPr>
             <a:picLocks noChangeAspect="1"/>
           </p:cNvPicPr>
@@ -10516,8 +10360,8 @@
         </p:blipFill>
         <p:spPr>
           <a:xfrm>
-            <a:off x="6676217" y="1756745"/>
-            <a:ext cx="235549" cy="235549"/>
+            <a:off x="7237476" y="1371600"/>
+            <a:ext cx="685800" cy="685800"/>
           </a:xfrm>
           <a:prstGeom prst="rect">
             <a:avLst/>
@@ -10526,14 +10370,14 @@
       </p:pic>
       <p:sp>
         <p:nvSpPr>
-          <p:cNvPr id="19" name="Text 14"/>
+          <p:cNvPr id="13" name="Text 8"/>
           <p:cNvSpPr txBox="1"/>
           <p:nvPr/>
         </p:nvSpPr>
         <p:spPr>
           <a:xfrm>
-            <a:off x="7114032" y="1508760"/>
-            <a:ext cx="1536192" cy="731520"/>
+            <a:off x="6391656" y="2084832"/>
+            <a:ext cx="2377440" cy="420624"/>
           </a:xfrm>
           <a:prstGeom prst="rect">
             <a:avLst/>
@@ -10542,93 +10386,41 @@
           <a:ln/>
         </p:spPr>
         <p:txBody>
-          <a:bodyPr wrap="square" lIns="0" tIns="0" rIns="0" bIns="0" rtlCol="0" anchor="ctr"/>
+          <a:bodyPr wrap="square" lIns="0" tIns="0" rIns="0" bIns="0" rtlCol="0" anchor="t"/>
           <a:lstStyle/>
           <a:p>
-            <a:pPr marL="0" indent="0">
-              <a:buNone/>
-            </a:pPr>
-            <a:r>
-              <a:rPr lang="en-US" sz="1250" b="1" dirty="0">
+            <a:pPr marL="0" indent="0" algn="ctr">
+              <a:buNone/>
+            </a:pPr>
+            <a:r>
+              <a:rPr lang="en-US" sz="1200" b="1" dirty="0">
                 <a:solidFill>
                   <a:schemeClr val="tx1"/>
                 </a:solidFill>
               </a:rPr>
               <a:t>2채널 릴레이</a:t>
             </a:r>
-            <a:endParaRPr lang="en-US" sz="1250" dirty="0"/>
-          </a:p>
-          <a:p>
-            <a:pPr marL="0" indent="0">
-              <a:buNone/>
-            </a:pPr>
-            <a:r>
-              <a:rPr lang="en-US" sz="1100" dirty="0">
+            <a:endParaRPr lang="en-US" sz="1200" dirty="0"/>
+          </a:p>
+          <a:p>
+            <a:pPr marL="0" indent="0" algn="ctr">
+              <a:buNone/>
+            </a:pPr>
+            <a:r>
+              <a:rPr lang="en-US" sz="1050" dirty="0">
                 <a:solidFill>
                   <a:schemeClr val="tx1"/>
                 </a:solidFill>
               </a:rPr>
               <a:t>가전 전원 개입</a:t>
             </a:r>
-            <a:endParaRPr lang="en-US" sz="1250" dirty="0"/>
+            <a:endParaRPr lang="en-US" sz="1200" dirty="0"/>
           </a:p>
         </p:txBody>
-      </p:sp>
-      <p:sp>
-        <p:nvSpPr>
-          <p:cNvPr id="20" name="Shape 15"/>
-          <p:cNvSpPr/>
-          <p:nvPr/>
-        </p:nvSpPr>
-        <p:spPr>
-          <a:xfrm>
-            <a:off x="9381744" y="1417320"/>
-            <a:ext cx="2286000" cy="914400"/>
-          </a:xfrm>
-          <a:prstGeom prst="roundRect">
-            <a:avLst>
-              <a:gd name="adj" fmla="val 12000"/>
-            </a:avLst>
-          </a:prstGeom>
-          <a:solidFill>
-            <a:schemeClr val="bg2"/>
-          </a:solidFill>
-          <a:ln w="9525">
-            <a:solidFill>
-              <a:srgbClr val="E0E0E0"/>
-            </a:solidFill>
-            <a:prstDash val="solid"/>
-          </a:ln>
-        </p:spPr>
-      </p:sp>
-      <p:sp>
-        <p:nvSpPr>
-          <p:cNvPr id="21" name="Shape 16"/>
-          <p:cNvSpPr/>
-          <p:nvPr/>
-        </p:nvSpPr>
-        <p:spPr>
-          <a:xfrm>
-            <a:off x="9528048" y="1664208"/>
-            <a:ext cx="420624" cy="420624"/>
-          </a:xfrm>
-          <a:prstGeom prst="ellipse">
-            <a:avLst/>
-          </a:prstGeom>
-          <a:solidFill>
-            <a:schemeClr val="accent1"/>
-          </a:solidFill>
-          <a:ln w="12700">
-            <a:solidFill>
-              <a:srgbClr val="0066CC"/>
-            </a:solidFill>
-            <a:prstDash val="solid"/>
-          </a:ln>
-        </p:spPr>
       </p:sp>
       <p:pic>
         <p:nvPicPr>
-          <p:cNvPr id="22" name="Image 3" descr="fan"/>
+          <p:cNvPr id="14" name="Image 3" descr="선풍기, 가습기"/>
           <p:cNvPicPr>
             <a:picLocks noChangeAspect="1"/>
           </p:cNvPicPr>
@@ -10642,119 +10434,17 @@
         </p:blipFill>
         <p:spPr>
           <a:xfrm>
-            <a:off x="9620585" y="1756745"/>
-            <a:ext cx="235549" cy="235549"/>
+            <a:off x="9797796" y="1371600"/>
+            <a:ext cx="685800" cy="685800"/>
           </a:xfrm>
           <a:prstGeom prst="rect">
             <a:avLst/>
           </a:prstGeom>
         </p:spPr>
       </p:pic>
-      <p:sp>
-        <p:nvSpPr>
-          <p:cNvPr id="23" name="Text 17"/>
-          <p:cNvSpPr txBox="1"/>
-          <p:nvPr/>
-        </p:nvSpPr>
-        <p:spPr>
-          <a:xfrm>
-            <a:off x="10058400" y="1508760"/>
-            <a:ext cx="1536192" cy="731520"/>
-          </a:xfrm>
-          <a:prstGeom prst="rect">
-            <a:avLst/>
-          </a:prstGeom>
-          <a:noFill/>
-          <a:ln/>
-        </p:spPr>
-        <p:txBody>
-          <a:bodyPr wrap="square" lIns="0" tIns="0" rIns="0" bIns="0" rtlCol="0" anchor="ctr"/>
-          <a:lstStyle/>
-          <a:p>
-            <a:pPr marL="0" indent="0">
-              <a:buNone/>
-            </a:pPr>
-            <a:r>
-              <a:rPr lang="en-US" sz="1250" b="1" dirty="0">
-                <a:solidFill>
-                  <a:schemeClr val="tx1"/>
-                </a:solidFill>
-              </a:rPr>
-              <a:t>선풍기, 가습기</a:t>
-            </a:r>
-            <a:endParaRPr lang="en-US" sz="1250" dirty="0"/>
-          </a:p>
-          <a:p>
-            <a:pPr marL="0" indent="0">
-              <a:buNone/>
-            </a:pPr>
-            <a:r>
-              <a:rPr lang="en-US" sz="1100" dirty="0">
-                <a:solidFill>
-                  <a:schemeClr val="tx1"/>
-                </a:solidFill>
-              </a:rPr>
-              <a:t>벽 데움, 가습</a:t>
-            </a:r>
-            <a:endParaRPr lang="en-US" sz="1250" dirty="0"/>
-          </a:p>
-        </p:txBody>
-      </p:sp>
-      <p:sp>
-        <p:nvSpPr>
-          <p:cNvPr id="24" name="Shape 18"/>
-          <p:cNvSpPr/>
-          <p:nvPr/>
-        </p:nvSpPr>
-        <p:spPr>
-          <a:xfrm>
-            <a:off x="548640" y="2788920"/>
-            <a:ext cx="2286000" cy="914400"/>
-          </a:xfrm>
-          <a:prstGeom prst="roundRect">
-            <a:avLst>
-              <a:gd name="adj" fmla="val 12000"/>
-            </a:avLst>
-          </a:prstGeom>
-          <a:solidFill>
-            <a:srgbClr val="FFFFFF"/>
-          </a:solidFill>
-          <a:ln w="12700">
-            <a:solidFill>
-              <a:srgbClr val="8E8E93"/>
-            </a:solidFill>
-            <a:prstDash val="dash"/>
-          </a:ln>
-        </p:spPr>
-      </p:sp>
-      <p:sp>
-        <p:nvSpPr>
-          <p:cNvPr id="25" name="Shape 19"/>
-          <p:cNvSpPr/>
-          <p:nvPr/>
-        </p:nvSpPr>
-        <p:spPr>
-          <a:xfrm>
-            <a:off x="694944" y="3035808"/>
-            <a:ext cx="420624" cy="420624"/>
-          </a:xfrm>
-          <a:prstGeom prst="ellipse">
-            <a:avLst/>
-          </a:prstGeom>
-          <a:solidFill>
-            <a:schemeClr val="accent1"/>
-          </a:solidFill>
-          <a:ln w="12700">
-            <a:solidFill>
-              <a:srgbClr val="0066CC"/>
-            </a:solidFill>
-            <a:prstDash val="solid"/>
-          </a:ln>
-        </p:spPr>
-      </p:sp>
       <p:pic>
         <p:nvPicPr>
-          <p:cNvPr id="26" name="Image 4" descr="gauge"/>
+          <p:cNvPr id="15" name="Image 4" descr="선풍기, 가습기"/>
           <p:cNvPicPr>
             <a:picLocks noChangeAspect="1"/>
           </p:cNvPicPr>
@@ -10768,8 +10458,8 @@
         </p:blipFill>
         <p:spPr>
           <a:xfrm>
-            <a:off x="787481" y="3128345"/>
-            <a:ext cx="235549" cy="235549"/>
+            <a:off x="10565892" y="1371600"/>
+            <a:ext cx="685800" cy="685800"/>
           </a:xfrm>
           <a:prstGeom prst="rect">
             <a:avLst/>
@@ -10778,14 +10468,14 @@
       </p:pic>
       <p:sp>
         <p:nvSpPr>
-          <p:cNvPr id="27" name="Text 20"/>
+          <p:cNvPr id="16" name="Text 9"/>
           <p:cNvSpPr txBox="1"/>
           <p:nvPr/>
         </p:nvSpPr>
         <p:spPr>
           <a:xfrm>
-            <a:off x="1225296" y="2880360"/>
-            <a:ext cx="1536192" cy="731520"/>
+            <a:off x="9336024" y="2084832"/>
+            <a:ext cx="2377440" cy="420624"/>
           </a:xfrm>
           <a:prstGeom prst="rect">
             <a:avLst/>
@@ -10794,108 +10484,58 @@
           <a:ln/>
         </p:spPr>
         <p:txBody>
-          <a:bodyPr wrap="square" lIns="0" tIns="0" rIns="0" bIns="0" rtlCol="0" anchor="ctr"/>
+          <a:bodyPr wrap="square" lIns="0" tIns="0" rIns="0" bIns="0" rtlCol="0" anchor="t"/>
           <a:lstStyle/>
           <a:p>
-            <a:pPr marL="0" indent="0">
-              <a:buNone/>
-            </a:pPr>
-            <a:r>
-              <a:rPr lang="en-US" sz="1250" b="1" dirty="0">
-                <a:solidFill>
-                  <a:schemeClr val="tx1"/>
-                </a:solidFill>
-              </a:rPr>
-              <a:t>온습도, 벽 온도 센서</a:t>
-            </a:r>
-            <a:endParaRPr lang="en-US" sz="1250" dirty="0"/>
-          </a:p>
-          <a:p>
-            <a:pPr marL="0" indent="0">
-              <a:buNone/>
-            </a:pPr>
-            <a:r>
-              <a:rPr lang="en-US" sz="1100" dirty="0">
-                <a:solidFill>
-                  <a:schemeClr val="tx1"/>
-                </a:solidFill>
-              </a:rPr>
-              <a:t>실제 제품 구성</a:t>
-            </a:r>
-            <a:endParaRPr lang="en-US" sz="1250" dirty="0"/>
+            <a:pPr marL="0" indent="0" algn="ctr">
+              <a:buNone/>
+            </a:pPr>
+            <a:r>
+              <a:rPr lang="en-US" sz="1200" b="1" dirty="0">
+                <a:solidFill>
+                  <a:schemeClr val="tx1"/>
+                </a:solidFill>
+              </a:rPr>
+              <a:t>선풍기, 가습기</a:t>
+            </a:r>
+            <a:endParaRPr lang="en-US" sz="1200" dirty="0"/>
+          </a:p>
+          <a:p>
+            <a:pPr marL="0" indent="0" algn="ctr">
+              <a:buNone/>
+            </a:pPr>
+            <a:r>
+              <a:rPr lang="en-US" sz="1050" dirty="0">
+                <a:solidFill>
+                  <a:schemeClr val="tx1"/>
+                </a:solidFill>
+              </a:rPr>
+              <a:t>벽 데움, 가습 (화면 속 가전)</a:t>
+            </a:r>
+            <a:endParaRPr lang="en-US" sz="1200" dirty="0"/>
           </a:p>
         </p:txBody>
-      </p:sp>
-      <p:sp>
-        <p:nvSpPr>
-          <p:cNvPr id="28" name="Shape 21"/>
-          <p:cNvSpPr/>
-          <p:nvPr/>
-        </p:nvSpPr>
-        <p:spPr>
-          <a:xfrm>
-            <a:off x="3493008" y="2788920"/>
-            <a:ext cx="2286000" cy="914400"/>
-          </a:xfrm>
-          <a:prstGeom prst="roundRect">
-            <a:avLst>
-              <a:gd name="adj" fmla="val 12000"/>
-            </a:avLst>
-          </a:prstGeom>
-          <a:solidFill>
-            <a:srgbClr val="FFFFFF"/>
-          </a:solidFill>
-          <a:ln w="19050">
-            <a:solidFill>
-              <a:srgbClr val="0066CC"/>
-            </a:solidFill>
-            <a:prstDash val="solid"/>
-          </a:ln>
-        </p:spPr>
-      </p:sp>
-      <p:sp>
-        <p:nvSpPr>
-          <p:cNvPr id="29" name="Shape 22"/>
-          <p:cNvSpPr/>
-          <p:nvPr/>
-        </p:nvSpPr>
-        <p:spPr>
-          <a:xfrm>
-            <a:off x="3639312" y="3035808"/>
-            <a:ext cx="420624" cy="420624"/>
-          </a:xfrm>
-          <a:prstGeom prst="ellipse">
-            <a:avLst/>
-          </a:prstGeom>
-          <a:solidFill>
-            <a:schemeClr val="accent1"/>
-          </a:solidFill>
-          <a:ln w="12700">
-            <a:solidFill>
-              <a:srgbClr val="0066CC"/>
-            </a:solidFill>
-            <a:prstDash val="solid"/>
-          </a:ln>
-        </p:spPr>
       </p:sp>
       <p:pic>
         <p:nvPicPr>
-          <p:cNvPr id="30" name="Image 5" descr="router"/>
+          <p:cNvPr id="17" name="Image 5" descr="온습도, 벽 온도 센서"/>
           <p:cNvPicPr>
             <a:picLocks noChangeAspect="1"/>
           </p:cNvPicPr>
           <p:nvPr/>
         </p:nvPicPr>
         <p:blipFill>
-          <a:blip r:embed="rId8"/>
+          <a:blip r:embed="rId8">
+            <a:alphaModFix amt="50000"/>
+          </a:blip>
           <a:stretch>
             <a:fillRect/>
           </a:stretch>
         </p:blipFill>
         <p:spPr>
           <a:xfrm>
-            <a:off x="3731849" y="3128345"/>
-            <a:ext cx="235549" cy="235549"/>
+            <a:off x="1348740" y="2880360"/>
+            <a:ext cx="685800" cy="685800"/>
           </a:xfrm>
           <a:prstGeom prst="rect">
             <a:avLst/>
@@ -10904,14 +10544,14 @@
       </p:pic>
       <p:sp>
         <p:nvSpPr>
-          <p:cNvPr id="31" name="Text 23"/>
+          <p:cNvPr id="18" name="Text 10"/>
           <p:cNvSpPr txBox="1"/>
           <p:nvPr/>
         </p:nvSpPr>
         <p:spPr>
           <a:xfrm>
-            <a:off x="4169664" y="2880360"/>
-            <a:ext cx="1536192" cy="731520"/>
+            <a:off x="502920" y="3593592"/>
+            <a:ext cx="2377440" cy="420624"/>
           </a:xfrm>
           <a:prstGeom prst="rect">
             <a:avLst/>
@@ -10920,93 +10560,41 @@
           <a:ln/>
         </p:spPr>
         <p:txBody>
-          <a:bodyPr wrap="square" lIns="0" tIns="0" rIns="0" bIns="0" rtlCol="0" anchor="ctr"/>
+          <a:bodyPr wrap="square" lIns="0" tIns="0" rIns="0" bIns="0" rtlCol="0" anchor="t"/>
           <a:lstStyle/>
           <a:p>
-            <a:pPr marL="0" indent="0">
-              <a:buNone/>
-            </a:pPr>
-            <a:r>
-              <a:rPr lang="en-US" sz="1250" b="1" dirty="0">
-                <a:solidFill>
-                  <a:schemeClr val="tx1"/>
-                </a:solidFill>
-              </a:rPr>
-              <a:t>SmartThings Station</a:t>
-            </a:r>
-            <a:endParaRPr lang="en-US" sz="1250" dirty="0"/>
-          </a:p>
-          <a:p>
-            <a:pPr marL="0" indent="0">
-              <a:buNone/>
-            </a:pPr>
-            <a:r>
-              <a:rPr lang="en-US" sz="1100" dirty="0">
-                <a:solidFill>
-                  <a:schemeClr val="tx1"/>
-                </a:solidFill>
-              </a:rPr>
-              <a:t>Thread 보더 라우터, 허브</a:t>
-            </a:r>
-            <a:endParaRPr lang="en-US" sz="1250" dirty="0"/>
+            <a:pPr marL="0" indent="0" algn="ctr">
+              <a:buNone/>
+            </a:pPr>
+            <a:r>
+              <a:rPr lang="en-US" sz="1200" b="1" dirty="0">
+                <a:solidFill>
+                  <a:schemeClr val="tx1"/>
+                </a:solidFill>
+              </a:rPr>
+              <a:t>온습도, 벽 온도 센서</a:t>
+            </a:r>
+            <a:endParaRPr lang="en-US" sz="1200" dirty="0"/>
+          </a:p>
+          <a:p>
+            <a:pPr marL="0" indent="0" algn="ctr">
+              <a:buNone/>
+            </a:pPr>
+            <a:r>
+              <a:rPr lang="en-US" sz="1050" dirty="0">
+                <a:solidFill>
+                  <a:schemeClr val="tx1"/>
+                </a:solidFill>
+              </a:rPr>
+              <a:t>실제 제품 구성</a:t>
+            </a:r>
+            <a:endParaRPr lang="en-US" sz="1200" dirty="0"/>
           </a:p>
         </p:txBody>
-      </p:sp>
-      <p:sp>
-        <p:nvSpPr>
-          <p:cNvPr id="32" name="Shape 24"/>
-          <p:cNvSpPr/>
-          <p:nvPr/>
-        </p:nvSpPr>
-        <p:spPr>
-          <a:xfrm>
-            <a:off x="6437376" y="2788920"/>
-            <a:ext cx="2286000" cy="914400"/>
-          </a:xfrm>
-          <a:prstGeom prst="roundRect">
-            <a:avLst>
-              <a:gd name="adj" fmla="val 12000"/>
-            </a:avLst>
-          </a:prstGeom>
-          <a:solidFill>
-            <a:schemeClr val="bg2"/>
-          </a:solidFill>
-          <a:ln w="9525">
-            <a:solidFill>
-              <a:srgbClr val="E0E0E0"/>
-            </a:solidFill>
-            <a:prstDash val="solid"/>
-          </a:ln>
-        </p:spPr>
-      </p:sp>
-      <p:sp>
-        <p:nvSpPr>
-          <p:cNvPr id="33" name="Shape 25"/>
-          <p:cNvSpPr/>
-          <p:nvPr/>
-        </p:nvSpPr>
-        <p:spPr>
-          <a:xfrm>
-            <a:off x="6583680" y="3035808"/>
-            <a:ext cx="420624" cy="420624"/>
-          </a:xfrm>
-          <a:prstGeom prst="ellipse">
-            <a:avLst/>
-          </a:prstGeom>
-          <a:solidFill>
-            <a:schemeClr val="accent1"/>
-          </a:solidFill>
-          <a:ln w="12700">
-            <a:solidFill>
-              <a:srgbClr val="0066CC"/>
-            </a:solidFill>
-            <a:prstDash val="solid"/>
-          </a:ln>
-        </p:spPr>
       </p:sp>
       <p:pic>
         <p:nvPicPr>
-          <p:cNvPr id="34" name="Image 6" descr="phone"/>
+          <p:cNvPr id="19" name="Image 6" descr="SmartThings Station"/>
           <p:cNvPicPr>
             <a:picLocks noChangeAspect="1"/>
           </p:cNvPicPr>
@@ -11020,8 +10608,8 @@
         </p:blipFill>
         <p:spPr>
           <a:xfrm>
-            <a:off x="6676217" y="3128345"/>
-            <a:ext cx="235549" cy="235549"/>
+            <a:off x="4293108" y="2880360"/>
+            <a:ext cx="685800" cy="685800"/>
           </a:xfrm>
           <a:prstGeom prst="rect">
             <a:avLst/>
@@ -11030,14 +10618,14 @@
       </p:pic>
       <p:sp>
         <p:nvSpPr>
-          <p:cNvPr id="35" name="Text 26"/>
+          <p:cNvPr id="20" name="Text 11"/>
           <p:cNvSpPr txBox="1"/>
           <p:nvPr/>
         </p:nvSpPr>
         <p:spPr>
           <a:xfrm>
-            <a:off x="7114032" y="2880360"/>
-            <a:ext cx="1536192" cy="731520"/>
+            <a:off x="3447288" y="3593592"/>
+            <a:ext cx="2377440" cy="420624"/>
           </a:xfrm>
           <a:prstGeom prst="rect">
             <a:avLst/>
@@ -11046,54 +10634,128 @@
           <a:ln/>
         </p:spPr>
         <p:txBody>
-          <a:bodyPr wrap="square" lIns="0" tIns="0" rIns="0" bIns="0" rtlCol="0" anchor="ctr"/>
+          <a:bodyPr wrap="square" lIns="0" tIns="0" rIns="0" bIns="0" rtlCol="0" anchor="t"/>
           <a:lstStyle/>
           <a:p>
-            <a:pPr marL="0" indent="0">
-              <a:buNone/>
-            </a:pPr>
-            <a:r>
-              <a:rPr lang="en-US" sz="1250" b="1" dirty="0">
+            <a:pPr marL="0" indent="0" algn="ctr">
+              <a:buNone/>
+            </a:pPr>
+            <a:r>
+              <a:rPr lang="en-US" sz="1200" b="1" dirty="0">
+                <a:solidFill>
+                  <a:schemeClr val="tx1"/>
+                </a:solidFill>
+              </a:rPr>
+              <a:t>SmartThings Station</a:t>
+            </a:r>
+            <a:endParaRPr lang="en-US" sz="1200" dirty="0"/>
+          </a:p>
+          <a:p>
+            <a:pPr marL="0" indent="0" algn="ctr">
+              <a:buNone/>
+            </a:pPr>
+            <a:r>
+              <a:rPr lang="en-US" sz="1050" dirty="0">
+                <a:solidFill>
+                  <a:schemeClr val="tx1"/>
+                </a:solidFill>
+              </a:rPr>
+              <a:t>Thread 보더 라우터, 허브</a:t>
+            </a:r>
+            <a:endParaRPr lang="en-US" sz="1200" dirty="0"/>
+          </a:p>
+        </p:txBody>
+      </p:sp>
+      <p:pic>
+        <p:nvPicPr>
+          <p:cNvPr id="21" name="Image 7" descr="SmartThings 앱"/>
+          <p:cNvPicPr>
+            <a:picLocks noChangeAspect="1"/>
+          </p:cNvPicPr>
+          <p:nvPr/>
+        </p:nvPicPr>
+        <p:blipFill>
+          <a:blip r:embed="rId10"/>
+          <a:stretch>
+            <a:fillRect/>
+          </a:stretch>
+        </p:blipFill>
+        <p:spPr>
+          <a:xfrm>
+            <a:off x="7237476" y="2880360"/>
+            <a:ext cx="685800" cy="685800"/>
+          </a:xfrm>
+          <a:prstGeom prst="rect">
+            <a:avLst/>
+          </a:prstGeom>
+        </p:spPr>
+      </p:pic>
+      <p:sp>
+        <p:nvSpPr>
+          <p:cNvPr id="22" name="Text 12"/>
+          <p:cNvSpPr txBox="1"/>
+          <p:nvPr/>
+        </p:nvSpPr>
+        <p:spPr>
+          <a:xfrm>
+            <a:off x="6391656" y="3593592"/>
+            <a:ext cx="2377440" cy="420624"/>
+          </a:xfrm>
+          <a:prstGeom prst="rect">
+            <a:avLst/>
+          </a:prstGeom>
+          <a:noFill/>
+          <a:ln/>
+        </p:spPr>
+        <p:txBody>
+          <a:bodyPr wrap="square" lIns="0" tIns="0" rIns="0" bIns="0" rtlCol="0" anchor="t"/>
+          <a:lstStyle/>
+          <a:p>
+            <a:pPr marL="0" indent="0" algn="ctr">
+              <a:buNone/>
+            </a:pPr>
+            <a:r>
+              <a:rPr lang="en-US" sz="1200" b="1" dirty="0">
                 <a:solidFill>
                   <a:schemeClr val="tx1"/>
                 </a:solidFill>
               </a:rPr>
               <a:t>SmartThings 앱</a:t>
             </a:r>
-            <a:endParaRPr lang="en-US" sz="1250" dirty="0"/>
-          </a:p>
-          <a:p>
-            <a:pPr marL="0" indent="0">
-              <a:buNone/>
-            </a:pPr>
-            <a:r>
-              <a:rPr lang="en-US" sz="1100" dirty="0">
+            <a:endParaRPr lang="en-US" sz="1200" dirty="0"/>
+          </a:p>
+          <a:p>
+            <a:pPr marL="0" indent="0" algn="ctr">
+              <a:buNone/>
+            </a:pPr>
+            <a:r>
+              <a:rPr lang="en-US" sz="1050" dirty="0">
                 <a:solidFill>
                   <a:schemeClr val="tx1"/>
                 </a:solidFill>
               </a:rPr>
               <a:t>등록, 원격 On/Off</a:t>
             </a:r>
-            <a:endParaRPr lang="en-US" sz="1250" dirty="0"/>
+            <a:endParaRPr lang="en-US" sz="1200" dirty="0"/>
           </a:p>
         </p:txBody>
       </p:sp>
       <p:sp>
         <p:nvSpPr>
-          <p:cNvPr id="36" name="Shape 27"/>
+          <p:cNvPr id="23" name="Shape 13"/>
           <p:cNvSpPr/>
           <p:nvPr/>
         </p:nvSpPr>
         <p:spPr>
           <a:xfrm>
-            <a:off x="2871216" y="1874520"/>
-            <a:ext cx="585216" cy="0"/>
+            <a:off x="2194560" y="1714500"/>
+            <a:ext cx="1938528" cy="0"/>
           </a:xfrm>
           <a:prstGeom prst="line">
             <a:avLst/>
           </a:prstGeom>
           <a:noFill/>
-          <a:ln w="25400">
+          <a:ln w="22225">
             <a:solidFill>
               <a:srgbClr val="0066CC"/>
             </a:solidFill>
@@ -11105,14 +10767,14 @@
       </p:sp>
       <p:sp>
         <p:nvSpPr>
-          <p:cNvPr id="37" name="Text 28"/>
+          <p:cNvPr id="24" name="Text 14"/>
           <p:cNvSpPr txBox="1"/>
           <p:nvPr/>
         </p:nvSpPr>
         <p:spPr>
           <a:xfrm>
-            <a:off x="2734056" y="1618488"/>
-            <a:ext cx="859536" cy="201168"/>
+            <a:off x="2011680" y="1440180"/>
+            <a:ext cx="2304288" cy="219456"/>
           </a:xfrm>
           <a:prstGeom prst="rect">
             <a:avLst/>
@@ -11128,27 +10790,27 @@
               <a:buNone/>
             </a:pPr>
             <a:r>
-              <a:rPr lang="en-US" sz="1000" b="1" dirty="0">
-                <a:solidFill>
-                  <a:schemeClr val="tx1"/>
-                </a:solidFill>
-              </a:rPr>
-              <a:t>USB</a:t>
-            </a:r>
-            <a:endParaRPr lang="en-US" sz="1000" dirty="0"/>
+              <a:rPr lang="en-US" sz="1050" b="1" dirty="0">
+                <a:solidFill>
+                  <a:schemeClr val="tx1"/>
+                </a:solidFill>
+              </a:rPr>
+              <a:t>USB 시리얼</a:t>
+            </a:r>
+            <a:endParaRPr lang="en-US" sz="1050" dirty="0"/>
           </a:p>
         </p:txBody>
       </p:sp>
       <p:sp>
         <p:nvSpPr>
-          <p:cNvPr id="38" name="Text 29"/>
+          <p:cNvPr id="25" name="Text 15"/>
           <p:cNvSpPr txBox="1"/>
           <p:nvPr/>
         </p:nvSpPr>
         <p:spPr>
           <a:xfrm>
-            <a:off x="2642616" y="1929384"/>
-            <a:ext cx="1042416" cy="201168"/>
+            <a:off x="2011680" y="1769364"/>
+            <a:ext cx="2304288" cy="201168"/>
           </a:xfrm>
           <a:prstGeom prst="rect">
             <a:avLst/>
@@ -11169,7 +10831,7 @@
                   <a:schemeClr val="tx1"/>
                 </a:solidFill>
               </a:rPr>
-              <a:t>0.5초마다</a:t>
+              <a:t>센서값 → DK, 판단 결과 → 화면</a:t>
             </a:r>
             <a:endParaRPr lang="en-US" sz="950" dirty="0"/>
           </a:p>
@@ -11177,22 +10839,22 @@
       </p:sp>
       <p:sp>
         <p:nvSpPr>
-          <p:cNvPr id="39" name="Shape 30"/>
+          <p:cNvPr id="26" name="Shape 16"/>
           <p:cNvSpPr/>
           <p:nvPr/>
         </p:nvSpPr>
         <p:spPr>
           <a:xfrm>
-            <a:off x="5815584" y="1874520"/>
-            <a:ext cx="585216" cy="0"/>
+            <a:off x="5138928" y="1714500"/>
+            <a:ext cx="1938528" cy="0"/>
           </a:xfrm>
           <a:prstGeom prst="line">
             <a:avLst/>
           </a:prstGeom>
           <a:noFill/>
-          <a:ln w="25400">
+          <a:ln w="22225">
             <a:solidFill>
-              <a:srgbClr val="8E8E93"/>
+              <a:srgbClr val="6E6E73"/>
             </a:solidFill>
             <a:prstDash val="solid"/>
             <a:tailEnd type="triangle"/>
@@ -11201,14 +10863,14 @@
       </p:sp>
       <p:sp>
         <p:nvSpPr>
-          <p:cNvPr id="40" name="Text 31"/>
+          <p:cNvPr id="27" name="Text 17"/>
           <p:cNvSpPr txBox="1"/>
           <p:nvPr/>
         </p:nvSpPr>
         <p:spPr>
           <a:xfrm>
-            <a:off x="5678424" y="1618488"/>
-            <a:ext cx="859536" cy="201168"/>
+            <a:off x="4956048" y="1440180"/>
+            <a:ext cx="2304288" cy="219456"/>
           </a:xfrm>
           <a:prstGeom prst="rect">
             <a:avLst/>
@@ -11224,35 +10886,71 @@
               <a:buNone/>
             </a:pPr>
             <a:r>
-              <a:rPr lang="en-US" sz="1000" b="1" dirty="0">
-                <a:solidFill>
-                  <a:schemeClr val="tx1"/>
-                </a:solidFill>
-              </a:rPr>
-              <a:t>GPIO</a:t>
-            </a:r>
-            <a:endParaRPr lang="en-US" sz="1000" dirty="0"/>
+              <a:rPr lang="en-US" sz="1050" b="1" dirty="0">
+                <a:solidFill>
+                  <a:schemeClr val="tx1"/>
+                </a:solidFill>
+              </a:rPr>
+              <a:t>GPIO P1.20, P1.21</a:t>
+            </a:r>
+            <a:endParaRPr lang="en-US" sz="1050" dirty="0"/>
           </a:p>
         </p:txBody>
       </p:sp>
       <p:sp>
         <p:nvSpPr>
-          <p:cNvPr id="41" name="Shape 32"/>
+          <p:cNvPr id="28" name="Text 18"/>
+          <p:cNvSpPr txBox="1"/>
+          <p:nvPr/>
+        </p:nvSpPr>
+        <p:spPr>
+          <a:xfrm>
+            <a:off x="4956048" y="1769364"/>
+            <a:ext cx="2304288" cy="201168"/>
+          </a:xfrm>
+          <a:prstGeom prst="rect">
+            <a:avLst/>
+          </a:prstGeom>
+          <a:noFill/>
+          <a:ln/>
+        </p:spPr>
+        <p:txBody>
+          <a:bodyPr wrap="square" lIns="0" tIns="0" rIns="0" bIns="0" rtlCol="0" anchor="t"/>
+          <a:lstStyle/>
+          <a:p>
+            <a:pPr marL="0" indent="0" algn="ctr">
+              <a:buNone/>
+            </a:pPr>
+            <a:r>
+              <a:rPr lang="en-US" sz="950" dirty="0">
+                <a:solidFill>
+                  <a:schemeClr val="tx1"/>
+                </a:solidFill>
+              </a:rPr>
+              <a:t>LOW 신호면 켜짐</a:t>
+            </a:r>
+            <a:endParaRPr lang="en-US" sz="950" dirty="0"/>
+          </a:p>
+        </p:txBody>
+      </p:sp>
+      <p:sp>
+        <p:nvSpPr>
+          <p:cNvPr id="29" name="Shape 19"/>
           <p:cNvSpPr/>
           <p:nvPr/>
         </p:nvSpPr>
         <p:spPr>
           <a:xfrm>
-            <a:off x="8759952" y="1874520"/>
-            <a:ext cx="585216" cy="0"/>
+            <a:off x="8083296" y="1714500"/>
+            <a:ext cx="1600200" cy="0"/>
           </a:xfrm>
           <a:prstGeom prst="line">
             <a:avLst/>
           </a:prstGeom>
           <a:noFill/>
-          <a:ln w="25400">
+          <a:ln w="22225">
             <a:solidFill>
-              <a:srgbClr val="8E8E93"/>
+              <a:srgbClr val="6E6E73"/>
             </a:solidFill>
             <a:prstDash val="solid"/>
             <a:tailEnd type="triangle"/>
@@ -11261,14 +10959,14 @@
       </p:sp>
       <p:sp>
         <p:nvSpPr>
-          <p:cNvPr id="42" name="Text 33"/>
+          <p:cNvPr id="30" name="Text 20"/>
           <p:cNvSpPr txBox="1"/>
           <p:nvPr/>
         </p:nvSpPr>
         <p:spPr>
           <a:xfrm>
-            <a:off x="8622792" y="1618488"/>
-            <a:ext cx="859536" cy="201168"/>
+            <a:off x="7900416" y="1440180"/>
+            <a:ext cx="1965960" cy="219456"/>
           </a:xfrm>
           <a:prstGeom prst="rect">
             <a:avLst/>
@@ -11284,27 +10982,27 @@
               <a:buNone/>
             </a:pPr>
             <a:r>
-              <a:rPr lang="en-US" sz="1000" b="1" dirty="0">
-                <a:solidFill>
-                  <a:schemeClr val="tx1"/>
-                </a:solidFill>
-              </a:rPr>
-              <a:t>전원</a:t>
-            </a:r>
-            <a:endParaRPr lang="en-US" sz="1000" dirty="0"/>
+              <a:rPr lang="en-US" sz="1050" b="1" dirty="0">
+                <a:solidFill>
+                  <a:schemeClr val="tx1"/>
+                </a:solidFill>
+              </a:rPr>
+              <a:t>전원 ON/OFF</a:t>
+            </a:r>
+            <a:endParaRPr lang="en-US" sz="1050" dirty="0"/>
           </a:p>
         </p:txBody>
       </p:sp>
       <p:sp>
         <p:nvSpPr>
-          <p:cNvPr id="43" name="Text 34"/>
+          <p:cNvPr id="31" name="Text 21"/>
           <p:cNvSpPr txBox="1"/>
           <p:nvPr/>
         </p:nvSpPr>
         <p:spPr>
           <a:xfrm>
-            <a:off x="8531352" y="1929384"/>
-            <a:ext cx="1042416" cy="201168"/>
+            <a:off x="7900416" y="1769364"/>
+            <a:ext cx="1965960" cy="201168"/>
           </a:xfrm>
           <a:prstGeom prst="rect">
             <a:avLst/>
@@ -11325,7 +11023,7 @@
                   <a:schemeClr val="tx1"/>
                 </a:solidFill>
               </a:rPr>
-              <a:t>CH1, CH2</a:t>
+              <a:t>CH1 선풍기, CH2 가습기</a:t>
             </a:r>
             <a:endParaRPr lang="en-US" sz="950" dirty="0"/>
           </a:p>
@@ -11333,20 +11031,20 @@
       </p:sp>
       <p:sp>
         <p:nvSpPr>
-          <p:cNvPr id="44" name="Shape 35"/>
+          <p:cNvPr id="32" name="Shape 22"/>
           <p:cNvSpPr/>
           <p:nvPr/>
         </p:nvSpPr>
         <p:spPr>
           <a:xfrm>
-            <a:off x="4636008" y="2368296"/>
-            <a:ext cx="0" cy="384048"/>
+            <a:off x="4636008" y="2532888"/>
+            <a:ext cx="0" cy="292608"/>
           </a:xfrm>
           <a:prstGeom prst="line">
             <a:avLst/>
           </a:prstGeom>
           <a:noFill/>
-          <a:ln w="25400">
+          <a:ln w="22225">
             <a:solidFill>
               <a:srgbClr val="0066CC"/>
             </a:solidFill>
@@ -11358,14 +11056,14 @@
       </p:sp>
       <p:sp>
         <p:nvSpPr>
-          <p:cNvPr id="45" name="Text 36"/>
+          <p:cNvPr id="33" name="Text 23"/>
           <p:cNvSpPr txBox="1"/>
           <p:nvPr/>
         </p:nvSpPr>
         <p:spPr>
           <a:xfrm>
-            <a:off x="4745736" y="2441448"/>
-            <a:ext cx="2103120" cy="237744"/>
+            <a:off x="4745736" y="2551176"/>
+            <a:ext cx="2194560" cy="237744"/>
           </a:xfrm>
           <a:prstGeom prst="rect">
             <a:avLst/>
@@ -11381,35 +11079,94 @@
               <a:buNone/>
             </a:pPr>
             <a:r>
-              <a:rPr lang="en-US" sz="1000" b="1" dirty="0">
+              <a:rPr lang="en-US" sz="1050" b="1" dirty="0">
                 <a:solidFill>
                   <a:schemeClr val="tx1"/>
                 </a:solidFill>
               </a:rPr>
               <a:t>Thread (Matter 보고, 명령)</a:t>
             </a:r>
-            <a:endParaRPr lang="en-US" sz="1000" dirty="0"/>
+            <a:endParaRPr lang="en-US" sz="1050" dirty="0"/>
           </a:p>
         </p:txBody>
       </p:sp>
       <p:sp>
         <p:nvSpPr>
-          <p:cNvPr id="46" name="Shape 37"/>
+          <p:cNvPr id="34" name="Shape 24"/>
           <p:cNvSpPr/>
           <p:nvPr/>
         </p:nvSpPr>
         <p:spPr>
           <a:xfrm>
-            <a:off x="5815584" y="3246120"/>
-            <a:ext cx="585216" cy="0"/>
+            <a:off x="1691640" y="2532888"/>
+            <a:ext cx="0" cy="292608"/>
           </a:xfrm>
           <a:prstGeom prst="line">
             <a:avLst/>
           </a:prstGeom>
           <a:noFill/>
-          <a:ln w="25400">
+          <a:ln w="22225">
             <a:solidFill>
-              <a:srgbClr val="8E8E93"/>
+              <a:srgbClr val="6E6E73"/>
+            </a:solidFill>
+            <a:prstDash val="dash"/>
+          </a:ln>
+        </p:spPr>
+      </p:sp>
+      <p:sp>
+        <p:nvSpPr>
+          <p:cNvPr id="35" name="Text 25"/>
+          <p:cNvSpPr txBox="1"/>
+          <p:nvPr/>
+        </p:nvSpPr>
+        <p:spPr>
+          <a:xfrm>
+            <a:off x="1801368" y="2551176"/>
+            <a:ext cx="2194560" cy="237744"/>
+          </a:xfrm>
+          <a:prstGeom prst="rect">
+            <a:avLst/>
+          </a:prstGeom>
+          <a:noFill/>
+          <a:ln/>
+        </p:spPr>
+        <p:txBody>
+          <a:bodyPr wrap="square" lIns="0" tIns="0" rIns="0" bIns="0" rtlCol="0" anchor="t"/>
+          <a:lstStyle/>
+          <a:p>
+            <a:pPr marL="0" indent="0">
+              <a:buNone/>
+            </a:pPr>
+            <a:r>
+              <a:rPr lang="en-US" sz="1050" b="1" dirty="0">
+                <a:solidFill>
+                  <a:schemeClr val="tx1"/>
+                </a:solidFill>
+              </a:rPr>
+              <a:t>시연에서는 노트북이 대신함</a:t>
+            </a:r>
+            <a:endParaRPr lang="en-US" sz="1050" dirty="0"/>
+          </a:p>
+        </p:txBody>
+      </p:sp>
+      <p:sp>
+        <p:nvSpPr>
+          <p:cNvPr id="36" name="Shape 26"/>
+          <p:cNvSpPr/>
+          <p:nvPr/>
+        </p:nvSpPr>
+        <p:spPr>
+          <a:xfrm>
+            <a:off x="5138928" y="3223260"/>
+            <a:ext cx="1938528" cy="0"/>
+          </a:xfrm>
+          <a:prstGeom prst="line">
+            <a:avLst/>
+          </a:prstGeom>
+          <a:noFill/>
+          <a:ln w="22225">
+            <a:solidFill>
+              <a:srgbClr val="0066CC"/>
             </a:solidFill>
             <a:prstDash val="solid"/>
             <a:headEnd type="triangle"/>
@@ -11419,14 +11176,14 @@
       </p:sp>
       <p:sp>
         <p:nvSpPr>
-          <p:cNvPr id="47" name="Text 38"/>
+          <p:cNvPr id="37" name="Text 27"/>
           <p:cNvSpPr txBox="1"/>
           <p:nvPr/>
         </p:nvSpPr>
         <p:spPr>
           <a:xfrm>
-            <a:off x="5678424" y="2990088"/>
-            <a:ext cx="859536" cy="201168"/>
+            <a:off x="4956048" y="2948940"/>
+            <a:ext cx="2304288" cy="219456"/>
           </a:xfrm>
           <a:prstGeom prst="rect">
             <a:avLst/>
@@ -11442,27 +11199,27 @@
               <a:buNone/>
             </a:pPr>
             <a:r>
-              <a:rPr lang="en-US" sz="1000" b="1" dirty="0">
+              <a:rPr lang="en-US" sz="1050" b="1" dirty="0">
                 <a:solidFill>
                   <a:schemeClr val="tx1"/>
                 </a:solidFill>
               </a:rPr>
               <a:t>Wi-Fi</a:t>
             </a:r>
-            <a:endParaRPr lang="en-US" sz="1000" dirty="0"/>
+            <a:endParaRPr lang="en-US" sz="1050" dirty="0"/>
           </a:p>
         </p:txBody>
       </p:sp>
       <p:sp>
         <p:nvSpPr>
-          <p:cNvPr id="48" name="Text 39"/>
+          <p:cNvPr id="38" name="Text 28"/>
           <p:cNvSpPr txBox="1"/>
           <p:nvPr/>
         </p:nvSpPr>
         <p:spPr>
           <a:xfrm>
-            <a:off x="5586984" y="3300984"/>
-            <a:ext cx="1042416" cy="201168"/>
+            <a:off x="4956048" y="3278124"/>
+            <a:ext cx="2304288" cy="201168"/>
           </a:xfrm>
           <a:prstGeom prst="rect">
             <a:avLst/>
@@ -11483,7 +11240,7 @@
                   <a:schemeClr val="tx1"/>
                 </a:solidFill>
               </a:rPr>
-              <a:t>클라우드</a:t>
+              <a:t>SmartThings 클라우드</a:t>
             </a:r>
             <a:endParaRPr lang="en-US" sz="950" dirty="0"/>
           </a:p>
@@ -11491,22 +11248,142 @@
       </p:sp>
       <p:sp>
         <p:nvSpPr>
-          <p:cNvPr id="49" name="Shape 40"/>
+          <p:cNvPr id="39" name="Shape 29"/>
           <p:cNvSpPr/>
           <p:nvPr/>
         </p:nvSpPr>
         <p:spPr>
           <a:xfrm>
-            <a:off x="1691640" y="2368296"/>
-            <a:ext cx="0" cy="384048"/>
+            <a:off x="9418320" y="3108960"/>
+            <a:ext cx="365760" cy="0"/>
           </a:xfrm>
           <a:prstGeom prst="line">
             <a:avLst/>
           </a:prstGeom>
           <a:noFill/>
-          <a:ln w="25400">
+          <a:ln w="22225">
             <a:solidFill>
-              <a:srgbClr val="8E8E93"/>
+              <a:srgbClr val="0066CC"/>
+            </a:solidFill>
+            <a:prstDash val="solid"/>
+            <a:tailEnd type="triangle"/>
+          </a:ln>
+        </p:spPr>
+      </p:sp>
+      <p:sp>
+        <p:nvSpPr>
+          <p:cNvPr id="40" name="Text 30"/>
+          <p:cNvSpPr txBox="1"/>
+          <p:nvPr/>
+        </p:nvSpPr>
+        <p:spPr>
+          <a:xfrm>
+            <a:off x="9875520" y="2990088"/>
+            <a:ext cx="1828800" cy="237744"/>
+          </a:xfrm>
+          <a:prstGeom prst="rect">
+            <a:avLst/>
+          </a:prstGeom>
+          <a:noFill/>
+          <a:ln/>
+        </p:spPr>
+        <p:txBody>
+          <a:bodyPr wrap="square" lIns="0" tIns="0" rIns="0" bIns="0" rtlCol="0" anchor="ctr"/>
+          <a:lstStyle/>
+          <a:p>
+            <a:pPr marL="0" indent="0">
+              <a:buNone/>
+            </a:pPr>
+            <a:r>
+              <a:rPr lang="en-US" sz="1000" dirty="0">
+                <a:solidFill>
+                  <a:schemeClr val="tx1"/>
+                </a:solidFill>
+              </a:rPr>
+              <a:t>통신 (USB, Thread, Wi-Fi)</a:t>
+            </a:r>
+            <a:endParaRPr lang="en-US" sz="1000" dirty="0"/>
+          </a:p>
+        </p:txBody>
+      </p:sp>
+      <p:sp>
+        <p:nvSpPr>
+          <p:cNvPr id="41" name="Shape 31"/>
+          <p:cNvSpPr/>
+          <p:nvPr/>
+        </p:nvSpPr>
+        <p:spPr>
+          <a:xfrm>
+            <a:off x="9418320" y="3383280"/>
+            <a:ext cx="365760" cy="0"/>
+          </a:xfrm>
+          <a:prstGeom prst="line">
+            <a:avLst/>
+          </a:prstGeom>
+          <a:noFill/>
+          <a:ln w="22225">
+            <a:solidFill>
+              <a:srgbClr val="6E6E73"/>
+            </a:solidFill>
+            <a:prstDash val="solid"/>
+            <a:tailEnd type="triangle"/>
+          </a:ln>
+        </p:spPr>
+      </p:sp>
+      <p:sp>
+        <p:nvSpPr>
+          <p:cNvPr id="42" name="Text 32"/>
+          <p:cNvSpPr txBox="1"/>
+          <p:nvPr/>
+        </p:nvSpPr>
+        <p:spPr>
+          <a:xfrm>
+            <a:off x="9875520" y="3264408"/>
+            <a:ext cx="1828800" cy="237744"/>
+          </a:xfrm>
+          <a:prstGeom prst="rect">
+            <a:avLst/>
+          </a:prstGeom>
+          <a:noFill/>
+          <a:ln/>
+        </p:spPr>
+        <p:txBody>
+          <a:bodyPr wrap="square" lIns="0" tIns="0" rIns="0" bIns="0" rtlCol="0" anchor="ctr"/>
+          <a:lstStyle/>
+          <a:p>
+            <a:pPr marL="0" indent="0">
+              <a:buNone/>
+            </a:pPr>
+            <a:r>
+              <a:rPr lang="en-US" sz="1000" dirty="0">
+                <a:solidFill>
+                  <a:schemeClr val="tx1"/>
+                </a:solidFill>
+              </a:rPr>
+              <a:t>전기 신호 (GPIO, 전원)</a:t>
+            </a:r>
+            <a:endParaRPr lang="en-US" sz="1000" dirty="0"/>
+          </a:p>
+        </p:txBody>
+      </p:sp>
+      <p:sp>
+        <p:nvSpPr>
+          <p:cNvPr id="43" name="Shape 33"/>
+          <p:cNvSpPr/>
+          <p:nvPr/>
+        </p:nvSpPr>
+        <p:spPr>
+          <a:xfrm>
+            <a:off x="9418320" y="3657600"/>
+            <a:ext cx="365760" cy="0"/>
+          </a:xfrm>
+          <a:prstGeom prst="line">
+            <a:avLst/>
+          </a:prstGeom>
+          <a:noFill/>
+          <a:ln w="22225">
+            <a:solidFill>
+              <a:srgbClr val="6E6E73"/>
             </a:solidFill>
             <a:prstDash val="dash"/>
           </a:ln>
@@ -11514,14 +11391,50 @@
       </p:sp>
       <p:sp>
         <p:nvSpPr>
-          <p:cNvPr id="50" name="Text 41"/>
+          <p:cNvPr id="44" name="Text 34"/>
           <p:cNvSpPr txBox="1"/>
           <p:nvPr/>
         </p:nvSpPr>
         <p:spPr>
           <a:xfrm>
-            <a:off x="1801368" y="2441448"/>
-            <a:ext cx="2011680" cy="237744"/>
+            <a:off x="9875520" y="3538728"/>
+            <a:ext cx="1828800" cy="237744"/>
+          </a:xfrm>
+          <a:prstGeom prst="rect">
+            <a:avLst/>
+          </a:prstGeom>
+          <a:noFill/>
+          <a:ln/>
+        </p:spPr>
+        <p:txBody>
+          <a:bodyPr wrap="square" lIns="0" tIns="0" rIns="0" bIns="0" rtlCol="0" anchor="ctr"/>
+          <a:lstStyle/>
+          <a:p>
+            <a:pPr marL="0" indent="0">
+              <a:buNone/>
+            </a:pPr>
+            <a:r>
+              <a:rPr lang="en-US" sz="1000" dirty="0">
+                <a:solidFill>
+                  <a:schemeClr val="tx1"/>
+                </a:solidFill>
+              </a:rPr>
+              <a:t>실제 제품에서 센서가 들어갈 자리</a:t>
+            </a:r>
+            <a:endParaRPr lang="en-US" sz="1000" dirty="0"/>
+          </a:p>
+        </p:txBody>
+      </p:sp>
+      <p:sp>
+        <p:nvSpPr>
+          <p:cNvPr id="45" name="Text 35"/>
+          <p:cNvSpPr txBox="1"/>
+          <p:nvPr/>
+        </p:nvSpPr>
+        <p:spPr>
+          <a:xfrm>
+            <a:off x="9418320" y="3794760"/>
+            <a:ext cx="2240280" cy="201168"/>
           </a:xfrm>
           <a:prstGeom prst="rect">
             <a:avLst/>
@@ -11537,70 +11450,20 @@
               <a:buNone/>
             </a:pPr>
             <a:r>
-              <a:rPr lang="en-US" sz="1000" b="1" dirty="0">
-                <a:solidFill>
-                  <a:schemeClr val="tx1"/>
-                </a:solidFill>
-              </a:rPr>
-              <a:t>시연에서는 노트북이 대신함</a:t>
-            </a:r>
-            <a:endParaRPr lang="en-US" sz="1000" dirty="0"/>
-          </a:p>
-        </p:txBody>
-      </p:sp>
-      <p:sp>
-        <p:nvSpPr>
-          <p:cNvPr id="51" name="Text 42"/>
-          <p:cNvSpPr txBox="1"/>
-          <p:nvPr/>
-        </p:nvSpPr>
-        <p:spPr>
-          <a:xfrm>
-            <a:off x="9381744" y="2971800"/>
-            <a:ext cx="2468880" cy="548640"/>
-          </a:xfrm>
-          <a:prstGeom prst="rect">
-            <a:avLst/>
-          </a:prstGeom>
-          <a:noFill/>
-          <a:ln/>
-        </p:spPr>
-        <p:txBody>
-          <a:bodyPr wrap="square" lIns="0" tIns="0" rIns="0" bIns="0" rtlCol="0" anchor="ctr"/>
-          <a:lstStyle/>
-          <a:p>
-            <a:pPr marL="0" indent="0">
-              <a:buNone/>
-            </a:pPr>
-            <a:r>
-              <a:rPr lang="en-US" sz="1050" dirty="0">
-                <a:solidFill>
-                  <a:schemeClr val="tx1"/>
-                </a:solidFill>
-              </a:rPr>
-              <a:t>실선: 시연에서 실제로 동작하는 연결</a:t>
-            </a:r>
-            <a:endParaRPr lang="en-US" sz="1050" dirty="0"/>
-          </a:p>
-          <a:p>
-            <a:pPr marL="0" indent="0">
-              <a:buNone/>
-            </a:pPr>
-            <a:r>
-              <a:rPr lang="en-US" sz="1050" dirty="0">
-                <a:solidFill>
-                  <a:schemeClr val="tx1"/>
-                </a:solidFill>
-              </a:rPr>
-              <a:t>점선: 실제 제품에서 센서가 들어갈 자리</a:t>
-            </a:r>
-            <a:endParaRPr lang="en-US" sz="1050" dirty="0"/>
+              <a:rPr lang="en-US" sz="900" dirty="0">
+                <a:solidFill>
+                  <a:schemeClr val="tx1"/>
+                </a:solidFill>
+              </a:rPr>
+              <a:t>기기 그림: Streamline (CC BY 4.0)</a:t>
+            </a:r>
+            <a:endParaRPr lang="en-US" sz="900" dirty="0"/>
           </a:p>
         </p:txBody>
       </p:sp>
       <p:graphicFrame>
         <p:nvGraphicFramePr>
-          <p:cNvPr id="52" name="Table 0"/>
+          <p:cNvPr id="46" name="Table 0"/>
           <p:cNvGraphicFramePr>
             <a:graphicFrameLocks noGrp="1"/>
           </p:cNvGraphicFramePr>
@@ -11613,8 +11476,8 @@
           </p:nvPr>
         </p:nvGraphicFramePr>
         <p:xfrm>
-          <a:off x="548640" y="3959352"/>
-          <a:ext cx="6400800" cy="2240280"/>
+          <a:off x="548640" y="4114800"/>
+          <a:ext cx="6400800" cy="2112264"/>
         </p:xfrm>
         <a:graphic>
           <a:graphicData uri="http://schemas.openxmlformats.org/drawingml/2006/table">
@@ -11643,7 +11506,7 @@
                   </a:extLst>
                 </a:gridCol>
               </a:tblGrid>
-              <a:tr h="320040">
+              <a:tr h="301752">
                 <a:tc>
                   <a:txBody>
                     <a:bodyPr/>
@@ -11854,7 +11717,7 @@
                   </a:ext>
                 </a:extLst>
               </a:tr>
-              <a:tr h="320040">
+              <a:tr h="301752">
                 <a:tc>
                   <a:txBody>
                     <a:bodyPr/>
@@ -12056,7 +11919,7 @@
                   </a:ext>
                 </a:extLst>
               </a:tr>
-              <a:tr h="320040">
+              <a:tr h="301752">
                 <a:tc>
                   <a:txBody>
                     <a:bodyPr/>
@@ -12258,7 +12121,7 @@
                   </a:ext>
                 </a:extLst>
               </a:tr>
-              <a:tr h="320040">
+              <a:tr h="301752">
                 <a:tc>
                   <a:txBody>
                     <a:bodyPr/>
@@ -12460,7 +12323,7 @@
                   </a:ext>
                 </a:extLst>
               </a:tr>
-              <a:tr h="320040">
+              <a:tr h="301752">
                 <a:tc>
                   <a:txBody>
                     <a:bodyPr/>
@@ -12662,7 +12525,7 @@
                   </a:ext>
                 </a:extLst>
               </a:tr>
-              <a:tr h="320040">
+              <a:tr h="301752">
                 <a:tc>
                   <a:txBody>
                     <a:bodyPr/>
@@ -12864,7 +12727,7 @@
                   </a:ext>
                 </a:extLst>
               </a:tr>
-              <a:tr h="320040">
+              <a:tr h="301752">
                 <a:tc>
                   <a:txBody>
                     <a:bodyPr/>
@@ -13072,13 +12935,13 @@
       </p:graphicFrame>
       <p:sp>
         <p:nvSpPr>
-          <p:cNvPr id="53" name="Text 43"/>
+          <p:cNvPr id="47" name="Text 36"/>
           <p:cNvSpPr txBox="1"/>
           <p:nvPr/>
         </p:nvSpPr>
         <p:spPr>
           <a:xfrm>
-            <a:off x="7178040" y="3959352"/>
+            <a:off x="7178040" y="4114800"/>
             <a:ext cx="4480560" cy="274320"/>
           </a:xfrm>
           <a:prstGeom prst="rect">
@@ -13108,18 +12971,18 @@
       </p:sp>
       <p:sp>
         <p:nvSpPr>
-          <p:cNvPr id="54" name="Shape 44"/>
+          <p:cNvPr id="48" name="Shape 37"/>
           <p:cNvSpPr/>
           <p:nvPr/>
         </p:nvSpPr>
         <p:spPr>
           <a:xfrm>
-            <a:off x="7178040" y="4288536"/>
-            <a:ext cx="2103120" cy="1938528"/>
+            <a:off x="7178040" y="4425696"/>
+            <a:ext cx="2103120" cy="1810512"/>
           </a:xfrm>
           <a:prstGeom prst="roundRect">
             <a:avLst>
-              <a:gd name="adj" fmla="val 4717"/>
+              <a:gd name="adj" fmla="val 5051"/>
             </a:avLst>
           </a:prstGeom>
           <a:solidFill>
@@ -13135,13 +12998,13 @@
       </p:sp>
       <p:sp>
         <p:nvSpPr>
-          <p:cNvPr id="55" name="Text 45"/>
+          <p:cNvPr id="49" name="Text 38"/>
           <p:cNvSpPr txBox="1"/>
           <p:nvPr/>
         </p:nvSpPr>
         <p:spPr>
           <a:xfrm>
-            <a:off x="7296912" y="4370832"/>
+            <a:off x="7296912" y="4526280"/>
             <a:ext cx="1554480" cy="256032"/>
           </a:xfrm>
           <a:prstGeom prst="rect">
@@ -13171,21 +13034,21 @@
       </p:sp>
       <p:pic>
         <p:nvPicPr>
-          <p:cNvPr id="56" name="Image 7" descr="DK"/>
+          <p:cNvPr id="50" name="Image 8" descr="DK"/>
           <p:cNvPicPr>
             <a:picLocks noChangeAspect="1"/>
           </p:cNvPicPr>
           <p:nvPr/>
         </p:nvPicPr>
         <p:blipFill>
-          <a:blip r:embed="rId10"/>
+          <a:blip r:embed="rId11"/>
           <a:stretch>
             <a:fillRect/>
           </a:stretch>
         </p:blipFill>
         <p:spPr>
           <a:xfrm>
-            <a:off x="8961120" y="4389120"/>
+            <a:off x="8961120" y="4544568"/>
             <a:ext cx="219456" cy="219456"/>
           </a:xfrm>
           <a:prstGeom prst="rect">
@@ -13195,14 +13058,14 @@
       </p:pic>
       <p:sp>
         <p:nvSpPr>
-          <p:cNvPr id="57" name="Shape 46"/>
+          <p:cNvPr id="51" name="Shape 39"/>
           <p:cNvSpPr/>
           <p:nvPr/>
         </p:nvSpPr>
         <p:spPr>
           <a:xfrm>
-            <a:off x="10012680" y="4288536"/>
-            <a:ext cx="1645920" cy="1938528"/>
+            <a:off x="10012680" y="4425696"/>
+            <a:ext cx="1645920" cy="1810512"/>
           </a:xfrm>
           <a:prstGeom prst="roundRect">
             <a:avLst>
@@ -13222,13 +13085,13 @@
       </p:sp>
       <p:sp>
         <p:nvSpPr>
-          <p:cNvPr id="58" name="Text 47"/>
+          <p:cNvPr id="52" name="Text 40"/>
           <p:cNvSpPr txBox="1"/>
           <p:nvPr/>
         </p:nvSpPr>
         <p:spPr>
           <a:xfrm>
-            <a:off x="10104120" y="4352544"/>
+            <a:off x="10104120" y="4507992"/>
             <a:ext cx="1280160" cy="411480"/>
           </a:xfrm>
           <a:prstGeom prst="rect">
@@ -13272,21 +13135,21 @@
       </p:sp>
       <p:pic>
         <p:nvPicPr>
-          <p:cNvPr id="59" name="Image 8" descr="릴레이"/>
+          <p:cNvPr id="53" name="Image 9" descr="릴레이"/>
           <p:cNvPicPr>
             <a:picLocks noChangeAspect="1"/>
           </p:cNvPicPr>
           <p:nvPr/>
         </p:nvPicPr>
         <p:blipFill>
-          <a:blip r:embed="rId11"/>
+          <a:blip r:embed="rId12"/>
           <a:stretch>
             <a:fillRect/>
           </a:stretch>
         </p:blipFill>
         <p:spPr>
           <a:xfrm>
-            <a:off x="11356848" y="4389120"/>
+            <a:off x="11356848" y="4544568"/>
             <a:ext cx="219456" cy="219456"/>
           </a:xfrm>
           <a:prstGeom prst="rect">
@@ -13296,13 +13159,13 @@
       </p:pic>
       <p:sp>
         <p:nvSpPr>
-          <p:cNvPr id="60" name="Shape 48"/>
+          <p:cNvPr id="54" name="Shape 41"/>
           <p:cNvSpPr/>
           <p:nvPr/>
         </p:nvSpPr>
         <p:spPr>
           <a:xfrm>
-            <a:off x="7296912" y="4919472"/>
+            <a:off x="7296912" y="5029200"/>
             <a:ext cx="100584" cy="100584"/>
           </a:xfrm>
           <a:prstGeom prst="ellipse">
@@ -13321,13 +13184,13 @@
       </p:sp>
       <p:sp>
         <p:nvSpPr>
-          <p:cNvPr id="61" name="Text 49"/>
+          <p:cNvPr id="55" name="Text 42"/>
           <p:cNvSpPr txBox="1"/>
           <p:nvPr/>
         </p:nvSpPr>
         <p:spPr>
           <a:xfrm>
-            <a:off x="7443216" y="4828032"/>
+            <a:off x="7443216" y="4937760"/>
             <a:ext cx="1143000" cy="274320"/>
           </a:xfrm>
           <a:prstGeom prst="rect">
@@ -13357,13 +13220,13 @@
       </p:sp>
       <p:sp>
         <p:nvSpPr>
-          <p:cNvPr id="62" name="Shape 50"/>
+          <p:cNvPr id="56" name="Shape 43"/>
           <p:cNvSpPr/>
           <p:nvPr/>
         </p:nvSpPr>
         <p:spPr>
           <a:xfrm>
-            <a:off x="8595360" y="4828032"/>
+            <a:off x="8595360" y="4937760"/>
             <a:ext cx="621792" cy="274320"/>
           </a:xfrm>
           <a:prstGeom prst="roundRect">
@@ -13384,13 +13247,13 @@
       </p:sp>
       <p:sp>
         <p:nvSpPr>
-          <p:cNvPr id="63" name="Text 51"/>
+          <p:cNvPr id="57" name="Text 44"/>
           <p:cNvSpPr txBox="1"/>
           <p:nvPr/>
         </p:nvSpPr>
         <p:spPr>
           <a:xfrm>
-            <a:off x="8595360" y="4828032"/>
+            <a:off x="8595360" y="4937760"/>
             <a:ext cx="621792" cy="274320"/>
           </a:xfrm>
           <a:prstGeom prst="rect">
@@ -13420,13 +13283,13 @@
       </p:sp>
       <p:sp>
         <p:nvSpPr>
-          <p:cNvPr id="64" name="Shape 52"/>
+          <p:cNvPr id="58" name="Shape 45"/>
           <p:cNvSpPr/>
           <p:nvPr/>
         </p:nvSpPr>
         <p:spPr>
           <a:xfrm>
-            <a:off x="9217152" y="4965192"/>
+            <a:off x="9217152" y="5074920"/>
             <a:ext cx="886968" cy="0"/>
           </a:xfrm>
           <a:prstGeom prst="line">
@@ -13443,13 +13306,13 @@
       </p:sp>
       <p:sp>
         <p:nvSpPr>
-          <p:cNvPr id="65" name="Text 53"/>
+          <p:cNvPr id="59" name="Text 46"/>
           <p:cNvSpPr txBox="1"/>
           <p:nvPr/>
         </p:nvSpPr>
         <p:spPr>
           <a:xfrm>
-            <a:off x="9189720" y="4727448"/>
+            <a:off x="9189720" y="4837176"/>
             <a:ext cx="969264" cy="182880"/>
           </a:xfrm>
           <a:prstGeom prst="rect">
@@ -13479,13 +13342,13 @@
       </p:sp>
       <p:sp>
         <p:nvSpPr>
-          <p:cNvPr id="66" name="Shape 54"/>
+          <p:cNvPr id="60" name="Shape 47"/>
           <p:cNvSpPr/>
           <p:nvPr/>
         </p:nvSpPr>
         <p:spPr>
           <a:xfrm>
-            <a:off x="10104120" y="4828032"/>
+            <a:off x="10104120" y="4937760"/>
             <a:ext cx="502920" cy="274320"/>
           </a:xfrm>
           <a:prstGeom prst="roundRect">
@@ -13506,13 +13369,13 @@
       </p:sp>
       <p:sp>
         <p:nvSpPr>
-          <p:cNvPr id="67" name="Text 55"/>
+          <p:cNvPr id="61" name="Text 48"/>
           <p:cNvSpPr txBox="1"/>
           <p:nvPr/>
         </p:nvSpPr>
         <p:spPr>
           <a:xfrm>
-            <a:off x="10104120" y="4828032"/>
+            <a:off x="10104120" y="4937760"/>
             <a:ext cx="502920" cy="274320"/>
           </a:xfrm>
           <a:prstGeom prst="rect">
@@ -13542,13 +13405,13 @@
       </p:sp>
       <p:sp>
         <p:nvSpPr>
-          <p:cNvPr id="68" name="Shape 56"/>
+          <p:cNvPr id="62" name="Shape 49"/>
           <p:cNvSpPr/>
           <p:nvPr/>
         </p:nvSpPr>
         <p:spPr>
           <a:xfrm>
-            <a:off x="7296912" y="5266944"/>
+            <a:off x="7296912" y="5349240"/>
             <a:ext cx="100584" cy="100584"/>
           </a:xfrm>
           <a:prstGeom prst="ellipse">
@@ -13567,13 +13430,13 @@
       </p:sp>
       <p:sp>
         <p:nvSpPr>
-          <p:cNvPr id="69" name="Text 57"/>
+          <p:cNvPr id="63" name="Text 50"/>
           <p:cNvSpPr txBox="1"/>
           <p:nvPr/>
         </p:nvSpPr>
         <p:spPr>
           <a:xfrm>
-            <a:off x="7443216" y="5175504"/>
+            <a:off x="7443216" y="5257800"/>
             <a:ext cx="1143000" cy="274320"/>
           </a:xfrm>
           <a:prstGeom prst="rect">
@@ -13603,13 +13466,13 @@
       </p:sp>
       <p:sp>
         <p:nvSpPr>
-          <p:cNvPr id="70" name="Shape 58"/>
+          <p:cNvPr id="64" name="Shape 51"/>
           <p:cNvSpPr/>
           <p:nvPr/>
         </p:nvSpPr>
         <p:spPr>
           <a:xfrm>
-            <a:off x="8595360" y="5175504"/>
+            <a:off x="8595360" y="5257800"/>
             <a:ext cx="621792" cy="274320"/>
           </a:xfrm>
           <a:prstGeom prst="roundRect">
@@ -13630,13 +13493,13 @@
       </p:sp>
       <p:sp>
         <p:nvSpPr>
-          <p:cNvPr id="71" name="Text 59"/>
+          <p:cNvPr id="65" name="Text 52"/>
           <p:cNvSpPr txBox="1"/>
           <p:nvPr/>
         </p:nvSpPr>
         <p:spPr>
           <a:xfrm>
-            <a:off x="8595360" y="5175504"/>
+            <a:off x="8595360" y="5257800"/>
             <a:ext cx="621792" cy="274320"/>
           </a:xfrm>
           <a:prstGeom prst="rect">
@@ -13666,13 +13529,13 @@
       </p:sp>
       <p:sp>
         <p:nvSpPr>
-          <p:cNvPr id="72" name="Shape 60"/>
+          <p:cNvPr id="66" name="Shape 53"/>
           <p:cNvSpPr/>
           <p:nvPr/>
         </p:nvSpPr>
         <p:spPr>
           <a:xfrm>
-            <a:off x="9217152" y="5312664"/>
+            <a:off x="9217152" y="5394960"/>
             <a:ext cx="886968" cy="0"/>
           </a:xfrm>
           <a:prstGeom prst="line">
@@ -13689,13 +13552,13 @@
       </p:sp>
       <p:sp>
         <p:nvSpPr>
-          <p:cNvPr id="73" name="Text 61"/>
+          <p:cNvPr id="67" name="Text 54"/>
           <p:cNvSpPr txBox="1"/>
           <p:nvPr/>
         </p:nvSpPr>
         <p:spPr>
           <a:xfrm>
-            <a:off x="9189720" y="5074920"/>
+            <a:off x="9189720" y="5157216"/>
             <a:ext cx="969264" cy="182880"/>
           </a:xfrm>
           <a:prstGeom prst="rect">
@@ -13725,13 +13588,13 @@
       </p:sp>
       <p:sp>
         <p:nvSpPr>
-          <p:cNvPr id="74" name="Shape 62"/>
+          <p:cNvPr id="68" name="Shape 55"/>
           <p:cNvSpPr/>
           <p:nvPr/>
         </p:nvSpPr>
         <p:spPr>
           <a:xfrm>
-            <a:off x="10104120" y="5175504"/>
+            <a:off x="10104120" y="5257800"/>
             <a:ext cx="502920" cy="274320"/>
           </a:xfrm>
           <a:prstGeom prst="roundRect">
@@ -13752,13 +13615,13 @@
       </p:sp>
       <p:sp>
         <p:nvSpPr>
-          <p:cNvPr id="75" name="Text 63"/>
+          <p:cNvPr id="69" name="Text 56"/>
           <p:cNvSpPr txBox="1"/>
           <p:nvPr/>
         </p:nvSpPr>
         <p:spPr>
           <a:xfrm>
-            <a:off x="10104120" y="5175504"/>
+            <a:off x="10104120" y="5257800"/>
             <a:ext cx="502920" cy="274320"/>
           </a:xfrm>
           <a:prstGeom prst="rect">
@@ -13788,13 +13651,13 @@
       </p:sp>
       <p:sp>
         <p:nvSpPr>
-          <p:cNvPr id="76" name="Shape 64"/>
+          <p:cNvPr id="70" name="Shape 57"/>
           <p:cNvSpPr/>
           <p:nvPr/>
         </p:nvSpPr>
         <p:spPr>
           <a:xfrm>
-            <a:off x="7296912" y="5614416"/>
+            <a:off x="7296912" y="5669280"/>
             <a:ext cx="100584" cy="100584"/>
           </a:xfrm>
           <a:prstGeom prst="ellipse">
@@ -13813,13 +13676,13 @@
       </p:sp>
       <p:sp>
         <p:nvSpPr>
-          <p:cNvPr id="77" name="Text 65"/>
+          <p:cNvPr id="71" name="Text 58"/>
           <p:cNvSpPr txBox="1"/>
           <p:nvPr/>
         </p:nvSpPr>
         <p:spPr>
           <a:xfrm>
-            <a:off x="7443216" y="5522976"/>
+            <a:off x="7443216" y="5577840"/>
             <a:ext cx="1143000" cy="274320"/>
           </a:xfrm>
           <a:prstGeom prst="rect">
@@ -13849,13 +13712,13 @@
       </p:sp>
       <p:sp>
         <p:nvSpPr>
-          <p:cNvPr id="78" name="Shape 66"/>
+          <p:cNvPr id="72" name="Shape 59"/>
           <p:cNvSpPr/>
           <p:nvPr/>
         </p:nvSpPr>
         <p:spPr>
           <a:xfrm>
-            <a:off x="8595360" y="5522976"/>
+            <a:off x="8595360" y="5577840"/>
             <a:ext cx="621792" cy="274320"/>
           </a:xfrm>
           <a:prstGeom prst="roundRect">
@@ -13876,13 +13739,13 @@
       </p:sp>
       <p:sp>
         <p:nvSpPr>
-          <p:cNvPr id="79" name="Text 67"/>
+          <p:cNvPr id="73" name="Text 60"/>
           <p:cNvSpPr txBox="1"/>
           <p:nvPr/>
         </p:nvSpPr>
         <p:spPr>
           <a:xfrm>
-            <a:off x="8595360" y="5522976"/>
+            <a:off x="8595360" y="5577840"/>
             <a:ext cx="621792" cy="274320"/>
           </a:xfrm>
           <a:prstGeom prst="rect">
@@ -13912,13 +13775,13 @@
       </p:sp>
       <p:sp>
         <p:nvSpPr>
-          <p:cNvPr id="80" name="Shape 68"/>
+          <p:cNvPr id="74" name="Shape 61"/>
           <p:cNvSpPr/>
           <p:nvPr/>
         </p:nvSpPr>
         <p:spPr>
           <a:xfrm>
-            <a:off x="9217152" y="5660136"/>
+            <a:off x="9217152" y="5715000"/>
             <a:ext cx="886968" cy="0"/>
           </a:xfrm>
           <a:prstGeom prst="line">
@@ -13935,13 +13798,13 @@
       </p:sp>
       <p:sp>
         <p:nvSpPr>
-          <p:cNvPr id="81" name="Text 69"/>
+          <p:cNvPr id="75" name="Text 62"/>
           <p:cNvSpPr txBox="1"/>
           <p:nvPr/>
         </p:nvSpPr>
         <p:spPr>
           <a:xfrm>
-            <a:off x="9189720" y="5422392"/>
+            <a:off x="9189720" y="5477256"/>
             <a:ext cx="969264" cy="182880"/>
           </a:xfrm>
           <a:prstGeom prst="rect">
@@ -13971,13 +13834,13 @@
       </p:sp>
       <p:sp>
         <p:nvSpPr>
-          <p:cNvPr id="82" name="Shape 70"/>
+          <p:cNvPr id="76" name="Shape 63"/>
           <p:cNvSpPr/>
           <p:nvPr/>
         </p:nvSpPr>
         <p:spPr>
           <a:xfrm>
-            <a:off x="10104120" y="5522976"/>
+            <a:off x="10104120" y="5577840"/>
             <a:ext cx="502920" cy="274320"/>
           </a:xfrm>
           <a:prstGeom prst="roundRect">
@@ -13998,13 +13861,13 @@
       </p:sp>
       <p:sp>
         <p:nvSpPr>
-          <p:cNvPr id="83" name="Text 71"/>
+          <p:cNvPr id="77" name="Text 64"/>
           <p:cNvSpPr txBox="1"/>
           <p:nvPr/>
         </p:nvSpPr>
         <p:spPr>
           <a:xfrm>
-            <a:off x="10104120" y="5522976"/>
+            <a:off x="10104120" y="5577840"/>
             <a:ext cx="502920" cy="274320"/>
           </a:xfrm>
           <a:prstGeom prst="rect">
@@ -14034,21 +13897,21 @@
       </p:sp>
       <p:pic>
         <p:nvPicPr>
-          <p:cNvPr id="84" name="Image 9" descr="CH1 선풍기"/>
+          <p:cNvPr id="78" name="Image 10" descr="CH1 선풍기"/>
           <p:cNvPicPr>
             <a:picLocks noChangeAspect="1"/>
           </p:cNvPicPr>
           <p:nvPr/>
         </p:nvPicPr>
         <p:blipFill>
-          <a:blip r:embed="rId12"/>
+          <a:blip r:embed="rId13"/>
           <a:stretch>
             <a:fillRect/>
           </a:stretch>
         </p:blipFill>
         <p:spPr>
           <a:xfrm>
-            <a:off x="10652760" y="5559552"/>
+            <a:off x="10652760" y="5614416"/>
             <a:ext cx="201168" cy="201168"/>
           </a:xfrm>
           <a:prstGeom prst="rect">
@@ -14058,13 +13921,13 @@
       </p:pic>
       <p:sp>
         <p:nvSpPr>
-          <p:cNvPr id="85" name="Text 72"/>
+          <p:cNvPr id="79" name="Text 65"/>
           <p:cNvSpPr txBox="1"/>
           <p:nvPr/>
         </p:nvSpPr>
         <p:spPr>
           <a:xfrm>
-            <a:off x="10881360" y="5522976"/>
+            <a:off x="10881360" y="5577840"/>
             <a:ext cx="777240" cy="274320"/>
           </a:xfrm>
           <a:prstGeom prst="rect">
@@ -14094,13 +13957,13 @@
       </p:sp>
       <p:sp>
         <p:nvSpPr>
-          <p:cNvPr id="86" name="Shape 73"/>
+          <p:cNvPr id="80" name="Shape 66"/>
           <p:cNvSpPr/>
           <p:nvPr/>
         </p:nvSpPr>
         <p:spPr>
           <a:xfrm>
-            <a:off x="7296912" y="5961888"/>
+            <a:off x="7296912" y="5989320"/>
             <a:ext cx="100584" cy="100584"/>
           </a:xfrm>
           <a:prstGeom prst="ellipse">
@@ -14119,13 +13982,13 @@
       </p:sp>
       <p:sp>
         <p:nvSpPr>
-          <p:cNvPr id="87" name="Text 74"/>
+          <p:cNvPr id="81" name="Text 67"/>
           <p:cNvSpPr txBox="1"/>
           <p:nvPr/>
         </p:nvSpPr>
         <p:spPr>
           <a:xfrm>
-            <a:off x="7443216" y="5870448"/>
+            <a:off x="7443216" y="5897880"/>
             <a:ext cx="1143000" cy="274320"/>
           </a:xfrm>
           <a:prstGeom prst="rect">
@@ -14155,13 +14018,13 @@
       </p:sp>
       <p:sp>
         <p:nvSpPr>
-          <p:cNvPr id="88" name="Shape 75"/>
+          <p:cNvPr id="82" name="Shape 68"/>
           <p:cNvSpPr/>
           <p:nvPr/>
         </p:nvSpPr>
         <p:spPr>
           <a:xfrm>
-            <a:off x="8595360" y="5870448"/>
+            <a:off x="8595360" y="5897880"/>
             <a:ext cx="621792" cy="274320"/>
           </a:xfrm>
           <a:prstGeom prst="roundRect">
@@ -14182,13 +14045,13 @@
       </p:sp>
       <p:sp>
         <p:nvSpPr>
-          <p:cNvPr id="89" name="Text 76"/>
+          <p:cNvPr id="83" name="Text 69"/>
           <p:cNvSpPr txBox="1"/>
           <p:nvPr/>
         </p:nvSpPr>
         <p:spPr>
           <a:xfrm>
-            <a:off x="8595360" y="5870448"/>
+            <a:off x="8595360" y="5897880"/>
             <a:ext cx="621792" cy="274320"/>
           </a:xfrm>
           <a:prstGeom prst="rect">
@@ -14218,13 +14081,13 @@
       </p:sp>
       <p:sp>
         <p:nvSpPr>
-          <p:cNvPr id="90" name="Shape 77"/>
+          <p:cNvPr id="84" name="Shape 70"/>
           <p:cNvSpPr/>
           <p:nvPr/>
         </p:nvSpPr>
         <p:spPr>
           <a:xfrm>
-            <a:off x="9217152" y="6007608"/>
+            <a:off x="9217152" y="6035040"/>
             <a:ext cx="886968" cy="0"/>
           </a:xfrm>
           <a:prstGeom prst="line">
@@ -14241,13 +14104,13 @@
       </p:sp>
       <p:sp>
         <p:nvSpPr>
-          <p:cNvPr id="91" name="Text 78"/>
+          <p:cNvPr id="85" name="Text 71"/>
           <p:cNvSpPr txBox="1"/>
           <p:nvPr/>
         </p:nvSpPr>
         <p:spPr>
           <a:xfrm>
-            <a:off x="9189720" y="5769864"/>
+            <a:off x="9189720" y="5797296"/>
             <a:ext cx="969264" cy="182880"/>
           </a:xfrm>
           <a:prstGeom prst="rect">
@@ -14277,13 +14140,13 @@
       </p:sp>
       <p:sp>
         <p:nvSpPr>
-          <p:cNvPr id="92" name="Shape 79"/>
+          <p:cNvPr id="86" name="Shape 72"/>
           <p:cNvSpPr/>
           <p:nvPr/>
         </p:nvSpPr>
         <p:spPr>
           <a:xfrm>
-            <a:off x="10104120" y="5870448"/>
+            <a:off x="10104120" y="5897880"/>
             <a:ext cx="502920" cy="274320"/>
           </a:xfrm>
           <a:prstGeom prst="roundRect">
@@ -14304,13 +14167,13 @@
       </p:sp>
       <p:sp>
         <p:nvSpPr>
-          <p:cNvPr id="93" name="Text 80"/>
+          <p:cNvPr id="87" name="Text 73"/>
           <p:cNvSpPr txBox="1"/>
           <p:nvPr/>
         </p:nvSpPr>
         <p:spPr>
           <a:xfrm>
-            <a:off x="10104120" y="5870448"/>
+            <a:off x="10104120" y="5897880"/>
             <a:ext cx="502920" cy="274320"/>
           </a:xfrm>
           <a:prstGeom prst="rect">
@@ -14340,21 +14203,21 @@
       </p:sp>
       <p:pic>
         <p:nvPicPr>
-          <p:cNvPr id="94" name="Image 10" descr="CH2 가습기"/>
+          <p:cNvPr id="88" name="Image 11" descr="CH2 가습기"/>
           <p:cNvPicPr>
             <a:picLocks noChangeAspect="1"/>
           </p:cNvPicPr>
           <p:nvPr/>
         </p:nvPicPr>
         <p:blipFill>
-          <a:blip r:embed="rId13"/>
+          <a:blip r:embed="rId14"/>
           <a:stretch>
             <a:fillRect/>
           </a:stretch>
         </p:blipFill>
         <p:spPr>
           <a:xfrm>
-            <a:off x="10652760" y="5907024"/>
+            <a:off x="10652760" y="5934456"/>
             <a:ext cx="201168" cy="201168"/>
           </a:xfrm>
           <a:prstGeom prst="rect">
@@ -14364,13 +14227,13 @@
       </p:pic>
       <p:sp>
         <p:nvSpPr>
-          <p:cNvPr id="95" name="Text 81"/>
+          <p:cNvPr id="89" name="Text 74"/>
           <p:cNvSpPr txBox="1"/>
           <p:nvPr/>
         </p:nvSpPr>
         <p:spPr>
           <a:xfrm>
-            <a:off x="10881360" y="5870448"/>
+            <a:off x="10881360" y="5897880"/>
             <a:ext cx="777240" cy="274320"/>
           </a:xfrm>
           <a:prstGeom prst="rect">
@@ -14400,7 +14263,7 @@
       </p:sp>
       <p:sp>
         <p:nvSpPr>
-          <p:cNvPr id="96" name="Slide Number Placeholder 0"/>
+          <p:cNvPr id="90" name="Slide Number Placeholder 0"/>
           <p:cNvSpPr>
             <a:spLocks noGrp="1"/>
           </p:cNvSpPr>

--- a/docs/발표자료_침실노드.pptx
+++ b/docs/발표자료_침실노드.pptx
@@ -122,18 +122,18 @@
   <p:extLst>
     <p:ext uri="{521415D9-36F7-43E2-AB2F-B90AF26B5E84}">
       <p14:sectionLst xmlns:p14="http://schemas.microsoft.com/office/powerpoint/2010/main">
-        <p14:section name="핵심 주제" id="{0D64C906-DF39-3DB8-1315-7B25F797396A}">
+        <p14:section name="핵심 주제" id="{C83EA3C5-4A09-AEFE-8F18-6E3F8C9494DC}">
           <p14:sldIdLst>
             <p14:sldId id="256"/>
           </p14:sldIdLst>
         </p14:section>
-        <p14:section name="주요 개발 내용" id="{D3ED934E-AF12-8183-97B9-DC3D3011353A}">
+        <p14:section name="주요 개발 내용" id="{4911ADF6-F374-F7C7-C15F-28872E28B3FF}">
           <p14:sldIdLst>
             <p14:sldId id="257"/>
             <p14:sldId id="258"/>
           </p14:sldIdLst>
         </p14:section>
-        <p14:section name="시연 내용" id="{1FAFBEBB-B859-BEFA-BCF4-C21EADC6AC41}">
+        <p14:section name="시연 내용" id="{4EBA2796-4374-DF9C-9598-00B2FC9C46F3}">
           <p14:sldIdLst>
             <p14:sldId id="259"/>
             <p14:sldId id="260"/>
@@ -325,7 +325,7 @@
           </c:val>
           <c:extLst>
             <c:ext xmlns:c16="http://schemas.microsoft.com/office/drawing/2014/chart" uri="{C3380CC4-5D6E-409C-BE32-E72D297353CC}">
-              <c16:uniqueId val="{00000000-7162-411D-8FE9-1273DD0C0688}"/>
+              <c16:uniqueId val="{00000000-B4C2-4478-8176-CF1436FC7C8C}"/>
             </c:ext>
           </c:extLst>
         </c:ser>
@@ -422,7 +422,7 @@
           <c:smooth val="0"/>
           <c:extLst>
             <c:ext xmlns:c16="http://schemas.microsoft.com/office/drawing/2014/chart" uri="{C3380CC4-5D6E-409C-BE32-E72D297353CC}">
-              <c16:uniqueId val="{00000001-7162-411D-8FE9-1273DD0C0688}"/>
+              <c16:uniqueId val="{00000001-B4C2-4478-8176-CF1436FC7C8C}"/>
             </c:ext>
           </c:extLst>
         </c:ser>
@@ -604,7 +604,7 @@
     </p:spTree>
     <p:extLst>
       <p:ext uri="{BB962C8B-B14F-4D97-AF65-F5344CB8AC3E}">
-        <p14:creationId xmlns:p14="http://schemas.microsoft.com/office/powerpoint/2010/main" val="3961732313"/>
+        <p14:creationId xmlns:p14="http://schemas.microsoft.com/office/powerpoint/2010/main" val="2896056647"/>
       </p:ext>
     </p:extLst>
   </p:cSld>
@@ -837,7 +837,7 @@
           <a:p>
             <a:r>
               <a:rPr lang="en-US" dirty="0"/>
-              <a:t>펌웨어는 C와 C++로, 시연 화면은 JavaScript와 HTML로, 시험 도구는 Python으로 작성함. nRF Connect SDK v3.4.1의 Matter 예제 위에 엔드포인트를 직접 추가함. 습도와 온도는 표준 측정 클러스터로, 가습기와 선풍기는 On/Off로 노출함. 판단부가 속성을 설정하면 SDK가 허브로 ReportData를 보내고, 시연 1회 동안 12번 보고해 12번 모두 수신 확인을 받았으며 응답은 평균 92ms였음. 앱에서 직접 조작한 값은 콜백으로 받아 판단부에 반영함. 칩이 nRF54LM20B라 보드 타깃을 b로 빌드함.</a:t>
+              <a:t>펌웨어는 C와 C++로, 시연 화면은 JavaScript와 HTML로, 시험 도구는 Python으로 작성함. nRF Connect SDK v3.4.1의 Matter 예제 위에 엔드포인트를 직접 추가함. 습도와 온도는 표준 측정 클러스터로, 가습기와 선풍기는 On/Off로 노출함. 판단부가 속성을 설정하면 SDK가 허브로 ReportData를 보내고, 시연 1회 동안 14번 보고해 14번 모두 수신 확인을 받았으며 응답은 평균 93ms였음. 앱에서 직접 조작한 값은 콜백으로 받아 판단부에 반영함. 칩이 nRF54LM20B라 보드 타깃을 b로 빌드함.</a:t>
             </a:r>
           </a:p>
         </p:txBody>
@@ -924,7 +924,7 @@
           <a:p>
             <a:r>
               <a:rPr lang="en-US" dirty="0"/>
-              <a:t>노드는 0.5초마다 벽 표면 습도와 절대습도를 계산함. 예를 들어 방이 21℃, 45%이고 벽이 12℃이면 벽 표면 습도는 약 80%로 곰팡이 임계에 닿음. 75%에서 가습을 멈추고, 그래도 오르면 선풍기를 켬. 선풍기를 켤 때 벽이 몇 도 오르는지 스스로 재서, 선풍기를 꺼도 안전한지를 판단함. 선풍기로 허용 구간을 넓힌 뒤에는 선풍기를 켠 채로 가습을 이어가 점막 방어와 곰팡이 방어를 동시에 지킴.</a:t>
+              <a:t>노드는 0.5초마다 벽 표면 습도와 절대습도를 계산함. 예를 들어 방이 21℃, 45%이고 벽이 12℃이면 벽 표면 습도는 약 80%로 곰팡이 임계에 닿음. 75%에서 가습을 멈추고, 그래도 오르면 선풍기를 켬. 선풍기를 켤 때 벽이 몇 도 오르는지 스스로 재서, 선풍기를 꺼도 안전한지를 판단함. 선풍기로 허용 구간을 넓힌 뒤에는 선풍기를 켠 채로 가습을 이어가 점막 방어와 곰팡이 방어를 동시에 지킴. 침구 센서 하나로 취침과 기상을 알아내고, 기상 후 밤새 젖은 침구가 60% 이상이면 가습을 멈추고 선풍기로 50% 미만까지 말림.</a:t>
             </a:r>
           </a:p>
         </p:txBody>
@@ -1011,7 +1011,7 @@
           <a:p>
             <a:r>
               <a:rPr lang="en-US" dirty="0"/>
-              <a:t>시연에 쓰는 기기와 연결임. 노트북은 가상 침실을 계산해 센서 대신 0.5초마다 USB로 DK에 값을 보내고, DK는 벽 표면 습도를 계산해 판단한 뒤 GPIO로 릴레이를 움직여 선풍기와 가습기 전원을 켜고 끔. 같은 결과는 Thread로 SmartThings Station에 Matter 보고되고, 앱에서 상태를 보고 조작할 수 있음. 실제 제품에서는 노트북 자리에 온습도 센서와 벽 온도 센서가 들어감. 릴레이는 LOW에서 켜지는 모듈이라 overlay에서 핀을 active-low로 정의했고, P1.22는 DK의 LED0 핀과 겹쳐 P1.21로 옮김.</a:t>
+              <a:t>시연에 쓰는 기기와 연결임. 노트북은 가상 침실을 계산해 센서 대신 0.5초마다 USB로 DK에 값을 보내고, DK는 벽 표면 습도를 계산해 판단한 뒤 GPIO로 릴레이를 움직여 선풍기와 가습기 전원을 켜고 끔. 같은 결과는 Thread로 SmartThings Station에 Matter 보고되고, 앱에서 상태를 보고 조작할 수 있음. 실제 제품에서는 노트북 자리에 온습도 센서, 벽 온도 센서, 침구 센서가 들어감. DK의 LED3은 벽 표면이 임계 80%에 닿으면 켜지는 위험 표시이고, 가습기 정지는 75%에서 판단부가 P1.21로 내보냄. 릴레이는 LOW에서 켜지는 모듈이라 overlay에서 핀을 active-low로 정의했고, P1.22는 DK의 LED0 핀과 겹쳐 P1.21로 옮김.</a:t>
             </a:r>
           </a:p>
         </p:txBody>
@@ -1098,7 +1098,7 @@
           <a:p>
             <a:r>
               <a:rPr lang="en-US" dirty="0"/>
-              <a:t>시연은 오른쪽 순서로 동작함. 노트북의 가상 침실이 한파의 밤을 진행하며 0.5초마다 센서값을 DK로 보내고, DK가 벽 표면 습도를 계산해 릴레이로 가습기와 선풍기를 켜고 끄며, 같은 결과를 SmartThings 허브에 보고함. 바뀐 가전 상태는 다시 가상 침실에 반영됨. 실내 습도는 40%대에 머무는데 벽 표면 습도만 올라가고, 75%에서 노드가 가습을 멈춘 뒤 선풍기로 벽을 데움. 같은 밤 일반 가습기였다면 8시간 넘게 곰팡이 임계를 넘고, 그중 6시간 넘게 벽이 이슬점(12.9℃)보다 차가워 결로가 생겼을 것을 우리 노드는 0분으로 막음.</a:t>
+              <a:t>시연은 오른쪽 순서로 동작함. 노트북의 가상 침실이 한파의 밤을 진행하며 0.5초마다 센서값을 DK로 보내고, DK가 벽 표면 습도를 계산해 릴레이로 가습기와 선풍기를 켜고 끄며, 같은 결과를 SmartThings 허브에 보고함. 바뀐 가전 상태는 다시 가상 침실에 반영됨. 실내 습도는 40%대에 머무는데 벽 표면 습도만 올라가고, 75%에서 노드가 가습을 멈춘 뒤 선풍기로 벽을 데움. 아침에는 침구 습도가 내려가는 것으로 기상을 알아내고 젖은 침구를 선풍기로 말림. 같은 밤 일반 가습기였다면 8시간 넘게 곰팡이 임계를 넘고, 그중 6시간 넘게 벽이 이슬점(12.9℃)보다 차가워 결로가 생겼을 것을 우리 노드는 0분으로 막음.</a:t>
             </a:r>
           </a:p>
         </p:txBody>
@@ -6299,7 +6299,7 @@
                   <a:schemeClr val="tx1"/>
                 </a:solidFill>
               </a:rPr>
-              <a:t>12 / 12</a:t>
+              <a:t>14 / 14</a:t>
             </a:r>
             <a:endParaRPr lang="en-US" sz="2000" dirty="0"/>
           </a:p>
@@ -6395,7 +6395,7 @@
                   <a:schemeClr val="tx1"/>
                 </a:solidFill>
               </a:rPr>
-              <a:t>92 ms</a:t>
+              <a:t>93 ms</a:t>
             </a:r>
             <a:endParaRPr lang="en-US" sz="2000" dirty="0"/>
           </a:p>
@@ -9212,7 +9212,7 @@
                   <a:schemeClr val="tx1"/>
                 </a:solidFill>
               </a:rPr>
-              <a:t>벽 표면 75%에서 가습 정지, 70% 미만에서만 재개함</a:t>
+              <a:t>벽 표면 75%에서 가습 정지, 그래도 오르면 선풍기로 벽을 데움</a:t>
             </a:r>
             <a:endParaRPr lang="en-US" sz="1300" dirty="0"/>
           </a:p>
@@ -9344,7 +9344,7 @@
       </p:sp>
       <p:pic>
         <p:nvPicPr>
-          <p:cNvPr id="34" name="Image 3" descr="fan"/>
+          <p:cNvPr id="34" name="Image 3" descr="bed"/>
           <p:cNvPicPr>
             <a:picLocks noChangeAspect="1"/>
           </p:cNvPicPr>
@@ -9396,7 +9396,7 @@
                   <a:schemeClr val="tx1"/>
                 </a:solidFill>
               </a:rPr>
-              <a:t>선풍기 개입</a:t>
+              <a:t>C 침구 건조</a:t>
             </a:r>
             <a:endParaRPr lang="en-US" sz="1300" dirty="0"/>
           </a:p>
@@ -9410,7 +9410,7 @@
                   <a:schemeClr val="tx1"/>
                 </a:solidFill>
               </a:rPr>
-              <a:t>가습을 멈춰도 75% 이상이면 선풍기로 벽 표면을 데움</a:t>
+              <a:t>기상 후 침구 60% 이상이면 가습을 멈추고 선풍기로 말림</a:t>
             </a:r>
             <a:endParaRPr lang="en-US" sz="1300" dirty="0"/>
           </a:p>
@@ -9443,7 +9443,7 @@
       </p:sp>
       <p:pic>
         <p:nvPicPr>
-          <p:cNvPr id="37" name="Image 4" descr="brain"/>
+          <p:cNvPr id="37" name="Image 4" descr="history"/>
           <p:cNvPicPr>
             <a:picLocks noChangeAspect="1"/>
           </p:cNvPicPr>
@@ -9495,7 +9495,7 @@
                   <a:schemeClr val="tx1"/>
                 </a:solidFill>
               </a:rPr>
-              <a:t>E 학습</a:t>
+              <a:t>D 국면 판정</a:t>
             </a:r>
             <a:endParaRPr lang="en-US" sz="1300" dirty="0"/>
           </a:p>
@@ -9509,7 +9509,7 @@
                   <a:schemeClr val="tx1"/>
                 </a:solidFill>
               </a:rPr>
-              <a:t>선풍기 효과(시연 +2.8℃)를 재서 끄는 시점을 판단함</a:t>
+              <a:t>침구 습도가 분당 0.3%p 넘게 오르면 취침, 내리면 기상</a:t>
             </a:r>
             <a:endParaRPr lang="en-US" sz="1300" dirty="0"/>
           </a:p>
@@ -9542,7 +9542,7 @@
       </p:sp>
       <p:pic>
         <p:nvPicPr>
-          <p:cNvPr id="40" name="Image 5" descr="chart"/>
+          <p:cNvPr id="40" name="Image 5" descr="brain"/>
           <p:cNvPicPr>
             <a:picLocks noChangeAspect="1"/>
           </p:cNvPicPr>
@@ -9594,7 +9594,7 @@
                   <a:schemeClr val="tx1"/>
                 </a:solidFill>
               </a:rPr>
-              <a:t>E 예측</a:t>
+              <a:t>E 학습</a:t>
             </a:r>
             <a:endParaRPr lang="en-US" sz="1300" dirty="0"/>
           </a:p>
@@ -9608,7 +9608,7 @@
                   <a:schemeClr val="tx1"/>
                 </a:solidFill>
               </a:rPr>
-              <a:t>벽 온도 추세로 임계 80%까지 남은 시간을 계산함</a:t>
+              <a:t>선풍기 효과(시연 +2.8℃)를 재서 끄는 시점을 판단함</a:t>
             </a:r>
             <a:endParaRPr lang="en-US" sz="1300" dirty="0"/>
           </a:p>
@@ -9641,7 +9641,7 @@
       </p:sp>
       <p:pic>
         <p:nvPicPr>
-          <p:cNvPr id="43" name="Image 6" descr="join"/>
+          <p:cNvPr id="43" name="Image 6" descr="chart"/>
           <p:cNvPicPr>
             <a:picLocks noChangeAspect="1"/>
           </p:cNvPicPr>
@@ -9693,7 +9693,7 @@
                   <a:schemeClr val="tx1"/>
                 </a:solidFill>
               </a:rPr>
-              <a:t>동시 가동</a:t>
+              <a:t>E 예측</a:t>
             </a:r>
             <a:endParaRPr lang="en-US" sz="1300" dirty="0"/>
           </a:p>
@@ -9707,7 +9707,7 @@
                   <a:schemeClr val="tx1"/>
                 </a:solidFill>
               </a:rPr>
-              <a:t>선풍기로 넓힌 구간에서 켠 채 가습해 ②, ③을 함께 지킴</a:t>
+              <a:t>벽 온도 추세로 임계 80%까지 남은 시간을 계산함</a:t>
             </a:r>
             <a:endParaRPr lang="en-US" sz="1300" dirty="0"/>
           </a:p>
@@ -9740,7 +9740,7 @@
       </p:sp>
       <p:pic>
         <p:nvPicPr>
-          <p:cNvPr id="46" name="Image 7" descr="user"/>
+          <p:cNvPr id="46" name="Image 7" descr="join"/>
           <p:cNvPicPr>
             <a:picLocks noChangeAspect="1"/>
           </p:cNvPicPr>
@@ -9792,7 +9792,7 @@
                   <a:schemeClr val="tx1"/>
                 </a:solidFill>
               </a:rPr>
-              <a:t>사용자 우선</a:t>
+              <a:t>동시 가동</a:t>
             </a:r>
             <a:endParaRPr lang="en-US" sz="1300" dirty="0"/>
           </a:p>
@@ -9806,7 +9806,7 @@
                   <a:schemeClr val="tx1"/>
                 </a:solidFill>
               </a:rPr>
-              <a:t>앱 조작은 30분 존중, 벽 표면 80%를 넘으면 방어를 우선함</a:t>
+              <a:t>선풍기로 넓힌 구간에서 켠 채 가습해 ②, ③을 함께 지킴</a:t>
             </a:r>
             <a:endParaRPr lang="en-US" sz="1300" dirty="0"/>
           </a:p>
@@ -9839,7 +9839,7 @@
       </p:sp>
       <p:pic>
         <p:nvPicPr>
-          <p:cNvPr id="49" name="Image 8" descr="history"/>
+          <p:cNvPr id="49" name="Image 8" descr="user"/>
           <p:cNvPicPr>
             <a:picLocks noChangeAspect="1"/>
           </p:cNvPicPr>
@@ -9891,7 +9891,7 @@
                   <a:schemeClr val="tx1"/>
                 </a:solidFill>
               </a:rPr>
-              <a:t>기록</a:t>
+              <a:t>사용자 우선</a:t>
             </a:r>
             <a:endParaRPr lang="en-US" sz="1300" dirty="0"/>
           </a:p>
@@ -9905,7 +9905,7 @@
                   <a:schemeClr val="tx1"/>
                 </a:solidFill>
               </a:rPr>
-              <a:t>벽 표면 80% 이상인 시간을 누적 위험 시간으로 기록함</a:t>
+              <a:t>앱 조작은 30분 존중, 벽 표면 80%를 넘으면 방어를 우선함</a:t>
             </a:r>
             <a:endParaRPr lang="en-US" sz="1300" dirty="0"/>
           </a:p>
@@ -10518,7 +10518,7 @@
       </p:sp>
       <p:pic>
         <p:nvPicPr>
-          <p:cNvPr id="17" name="Image 5" descr="온습도, 벽 온도 센서"/>
+          <p:cNvPr id="17" name="Image 5" descr="온습도, 벽 온도, 침구 센서"/>
           <p:cNvPicPr>
             <a:picLocks noChangeAspect="1"/>
           </p:cNvPicPr>
@@ -10572,7 +10572,7 @@
                   <a:schemeClr val="tx1"/>
                 </a:solidFill>
               </a:rPr>
-              <a:t>온습도, 벽 온도 센서</a:t>
+              <a:t>온습도, 벽 온도, 침구 센서</a:t>
             </a:r>
             <a:endParaRPr lang="en-US" sz="1200" dirty="0"/>
           </a:p>
@@ -13159,28 +13159,53 @@
       </p:pic>
       <p:sp>
         <p:nvSpPr>
-          <p:cNvPr id="54" name="Shape 41"/>
-          <p:cNvSpPr/>
-          <p:nvPr/>
-        </p:nvSpPr>
-        <p:spPr>
-          <a:xfrm>
-            <a:off x="7296912" y="5029200"/>
-            <a:ext cx="100584" cy="100584"/>
-          </a:xfrm>
-          <a:prstGeom prst="ellipse">
-            <a:avLst/>
-          </a:prstGeom>
-          <a:solidFill>
-            <a:srgbClr val="30D158"/>
-          </a:solidFill>
-          <a:ln w="12700">
-            <a:solidFill>
-              <a:srgbClr val="30D158"/>
-            </a:solidFill>
-            <a:prstDash val="solid"/>
-          </a:ln>
-        </p:spPr>
+          <p:cNvPr id="54" name="Text 41"/>
+          <p:cNvSpPr txBox="1"/>
+          <p:nvPr/>
+        </p:nvSpPr>
+        <p:spPr>
+          <a:xfrm>
+            <a:off x="7296912" y="4754880"/>
+            <a:ext cx="1938528" cy="274320"/>
+          </a:xfrm>
+          <a:prstGeom prst="rect">
+            <a:avLst/>
+          </a:prstGeom>
+          <a:noFill/>
+          <a:ln/>
+        </p:spPr>
+        <p:txBody>
+          <a:bodyPr wrap="square" lIns="0" tIns="0" rIns="0" bIns="0" rtlCol="0" anchor="t"/>
+          <a:lstStyle/>
+          <a:p>
+            <a:pPr marL="0" indent="0">
+              <a:buNone/>
+            </a:pPr>
+            <a:r>
+              <a:rPr lang="en-US" sz="850" dirty="0">
+                <a:solidFill>
+                  <a:schemeClr val="tx1"/>
+                </a:solidFill>
+              </a:rPr>
+              <a:t>LED0 Matter, LED1 선풍기, LED2 가습기</a:t>
+            </a:r>
+            <a:endParaRPr lang="en-US" sz="850" dirty="0"/>
+          </a:p>
+          <a:p>
+            <a:pPr marL="0" indent="0">
+              <a:buNone/>
+            </a:pPr>
+            <a:r>
+              <a:rPr lang="en-US" sz="850" dirty="0">
+                <a:solidFill>
+                  <a:schemeClr val="tx1"/>
+                </a:solidFill>
+              </a:rPr>
+              <a:t>LED3 벽 표면 80% 경고 (위험 표시)</a:t>
+            </a:r>
+            <a:endParaRPr lang="en-US" sz="850" dirty="0"/>
+          </a:p>
+        </p:txBody>
       </p:sp>
       <p:sp>
         <p:nvSpPr>
@@ -13190,8 +13215,8 @@
         </p:nvSpPr>
         <p:spPr>
           <a:xfrm>
-            <a:off x="7443216" y="4937760"/>
-            <a:ext cx="1143000" cy="274320"/>
+            <a:off x="7296912" y="5056632"/>
+            <a:ext cx="1234440" cy="256032"/>
           </a:xfrm>
           <a:prstGeom prst="rect">
             <a:avLst/>
@@ -13212,7 +13237,7 @@
                   <a:schemeClr val="tx1"/>
                 </a:solidFill>
               </a:rPr>
-              <a:t>LED0 Matter 상태</a:t>
+              <a:t>5V 전원</a:t>
             </a:r>
             <a:endParaRPr lang="en-US" sz="950" dirty="0"/>
           </a:p>
@@ -13226,12 +13251,12 @@
         </p:nvSpPr>
         <p:spPr>
           <a:xfrm>
-            <a:off x="8595360" y="4937760"/>
-            <a:ext cx="621792" cy="274320"/>
+            <a:off x="8595360" y="5056632"/>
+            <a:ext cx="621792" cy="256032"/>
           </a:xfrm>
           <a:prstGeom prst="roundRect">
             <a:avLst>
-              <a:gd name="adj" fmla="val 16667"/>
+              <a:gd name="adj" fmla="val 17857"/>
             </a:avLst>
           </a:prstGeom>
           <a:solidFill>
@@ -13253,8 +13278,8 @@
         </p:nvSpPr>
         <p:spPr>
           <a:xfrm>
-            <a:off x="8595360" y="4937760"/>
-            <a:ext cx="621792" cy="274320"/>
+            <a:off x="8595360" y="5056632"/>
+            <a:ext cx="621792" cy="256032"/>
           </a:xfrm>
           <a:prstGeom prst="rect">
             <a:avLst/>
@@ -13289,7 +13314,7 @@
         </p:nvSpPr>
         <p:spPr>
           <a:xfrm>
-            <a:off x="9217152" y="5074920"/>
+            <a:off x="9217152" y="5184648"/>
             <a:ext cx="886968" cy="0"/>
           </a:xfrm>
           <a:prstGeom prst="line">
@@ -13306,54 +13331,18 @@
       </p:sp>
       <p:sp>
         <p:nvSpPr>
-          <p:cNvPr id="59" name="Text 46"/>
-          <p:cNvSpPr txBox="1"/>
-          <p:nvPr/>
-        </p:nvSpPr>
-        <p:spPr>
-          <a:xfrm>
-            <a:off x="9189720" y="4837176"/>
-            <a:ext cx="969264" cy="182880"/>
-          </a:xfrm>
-          <a:prstGeom prst="rect">
-            <a:avLst/>
-          </a:prstGeom>
-          <a:noFill/>
-          <a:ln/>
-        </p:spPr>
-        <p:txBody>
-          <a:bodyPr wrap="square" lIns="0" tIns="0" rIns="0" bIns="0" rtlCol="0" anchor="t"/>
-          <a:lstStyle/>
-          <a:p>
-            <a:pPr marL="0" indent="0" algn="ctr">
-              <a:buNone/>
-            </a:pPr>
-            <a:r>
-              <a:rPr lang="en-US" sz="900" dirty="0">
-                <a:solidFill>
-                  <a:schemeClr val="tx1"/>
-                </a:solidFill>
-              </a:rPr>
-              <a:t>5V 전원</a:t>
-            </a:r>
-            <a:endParaRPr lang="en-US" sz="900" dirty="0"/>
-          </a:p>
-        </p:txBody>
-      </p:sp>
-      <p:sp>
-        <p:nvSpPr>
-          <p:cNvPr id="60" name="Shape 47"/>
+          <p:cNvPr id="59" name="Shape 46"/>
           <p:cNvSpPr/>
           <p:nvPr/>
         </p:nvSpPr>
         <p:spPr>
           <a:xfrm>
-            <a:off x="10104120" y="4937760"/>
-            <a:ext cx="502920" cy="274320"/>
+            <a:off x="10104120" y="5056632"/>
+            <a:ext cx="502920" cy="256032"/>
           </a:xfrm>
           <a:prstGeom prst="roundRect">
             <a:avLst>
-              <a:gd name="adj" fmla="val 16667"/>
+              <a:gd name="adj" fmla="val 17857"/>
             </a:avLst>
           </a:prstGeom>
           <a:solidFill>
@@ -13369,14 +13358,14 @@
       </p:sp>
       <p:sp>
         <p:nvSpPr>
-          <p:cNvPr id="61" name="Text 48"/>
+          <p:cNvPr id="60" name="Text 47"/>
           <p:cNvSpPr txBox="1"/>
           <p:nvPr/>
         </p:nvSpPr>
         <p:spPr>
           <a:xfrm>
-            <a:off x="10104120" y="4937760"/>
-            <a:ext cx="502920" cy="274320"/>
+            <a:off x="10104120" y="5056632"/>
+            <a:ext cx="502920" cy="256032"/>
           </a:xfrm>
           <a:prstGeom prst="rect">
             <a:avLst/>
@@ -13405,39 +13394,14 @@
       </p:sp>
       <p:sp>
         <p:nvSpPr>
-          <p:cNvPr id="62" name="Shape 49"/>
-          <p:cNvSpPr/>
-          <p:nvPr/>
-        </p:nvSpPr>
-        <p:spPr>
-          <a:xfrm>
-            <a:off x="7296912" y="5349240"/>
-            <a:ext cx="100584" cy="100584"/>
-          </a:xfrm>
-          <a:prstGeom prst="ellipse">
-            <a:avLst/>
-          </a:prstGeom>
-          <a:solidFill>
-            <a:srgbClr val="30D158"/>
-          </a:solidFill>
-          <a:ln w="12700">
-            <a:solidFill>
-              <a:srgbClr val="30D158"/>
-            </a:solidFill>
-            <a:prstDash val="solid"/>
-          </a:ln>
-        </p:spPr>
-      </p:sp>
-      <p:sp>
-        <p:nvSpPr>
-          <p:cNvPr id="63" name="Text 50"/>
+          <p:cNvPr id="61" name="Text 48"/>
           <p:cNvSpPr txBox="1"/>
           <p:nvPr/>
         </p:nvSpPr>
         <p:spPr>
           <a:xfrm>
-            <a:off x="7443216" y="5257800"/>
-            <a:ext cx="1143000" cy="274320"/>
+            <a:off x="7296912" y="5358384"/>
+            <a:ext cx="1234440" cy="256032"/>
           </a:xfrm>
           <a:prstGeom prst="rect">
             <a:avLst/>
@@ -13458,7 +13422,7 @@
                   <a:schemeClr val="tx1"/>
                 </a:solidFill>
               </a:rPr>
-              <a:t>LED1 선풍기</a:t>
+              <a:t>접지</a:t>
             </a:r>
             <a:endParaRPr lang="en-US" sz="950" dirty="0"/>
           </a:p>
@@ -13466,18 +13430,18 @@
       </p:sp>
       <p:sp>
         <p:nvSpPr>
-          <p:cNvPr id="64" name="Shape 51"/>
+          <p:cNvPr id="62" name="Shape 49"/>
           <p:cNvSpPr/>
           <p:nvPr/>
         </p:nvSpPr>
         <p:spPr>
           <a:xfrm>
-            <a:off x="8595360" y="5257800"/>
-            <a:ext cx="621792" cy="274320"/>
+            <a:off x="8595360" y="5358384"/>
+            <a:ext cx="621792" cy="256032"/>
           </a:xfrm>
           <a:prstGeom prst="roundRect">
             <a:avLst>
-              <a:gd name="adj" fmla="val 16667"/>
+              <a:gd name="adj" fmla="val 17857"/>
             </a:avLst>
           </a:prstGeom>
           <a:solidFill>
@@ -13493,14 +13457,14 @@
       </p:sp>
       <p:sp>
         <p:nvSpPr>
-          <p:cNvPr id="65" name="Text 52"/>
+          <p:cNvPr id="63" name="Text 50"/>
           <p:cNvSpPr txBox="1"/>
           <p:nvPr/>
         </p:nvSpPr>
         <p:spPr>
           <a:xfrm>
-            <a:off x="8595360" y="5257800"/>
-            <a:ext cx="621792" cy="274320"/>
+            <a:off x="8595360" y="5358384"/>
+            <a:ext cx="621792" cy="256032"/>
           </a:xfrm>
           <a:prstGeom prst="rect">
             <a:avLst/>
@@ -13529,13 +13493,13 @@
       </p:sp>
       <p:sp>
         <p:nvSpPr>
-          <p:cNvPr id="66" name="Shape 53"/>
+          <p:cNvPr id="64" name="Shape 51"/>
           <p:cNvSpPr/>
           <p:nvPr/>
         </p:nvSpPr>
         <p:spPr>
           <a:xfrm>
-            <a:off x="9217152" y="5394960"/>
+            <a:off x="9217152" y="5486400"/>
             <a:ext cx="886968" cy="0"/>
           </a:xfrm>
           <a:prstGeom prst="line">
@@ -13552,54 +13516,18 @@
       </p:sp>
       <p:sp>
         <p:nvSpPr>
-          <p:cNvPr id="67" name="Text 54"/>
-          <p:cNvSpPr txBox="1"/>
-          <p:nvPr/>
-        </p:nvSpPr>
-        <p:spPr>
-          <a:xfrm>
-            <a:off x="9189720" y="5157216"/>
-            <a:ext cx="969264" cy="182880"/>
-          </a:xfrm>
-          <a:prstGeom prst="rect">
-            <a:avLst/>
-          </a:prstGeom>
-          <a:noFill/>
-          <a:ln/>
-        </p:spPr>
-        <p:txBody>
-          <a:bodyPr wrap="square" lIns="0" tIns="0" rIns="0" bIns="0" rtlCol="0" anchor="t"/>
-          <a:lstStyle/>
-          <a:p>
-            <a:pPr marL="0" indent="0" algn="ctr">
-              <a:buNone/>
-            </a:pPr>
-            <a:r>
-              <a:rPr lang="en-US" sz="900" dirty="0">
-                <a:solidFill>
-                  <a:schemeClr val="tx1"/>
-                </a:solidFill>
-              </a:rPr>
-              <a:t>접지</a:t>
-            </a:r>
-            <a:endParaRPr lang="en-US" sz="900" dirty="0"/>
-          </a:p>
-        </p:txBody>
-      </p:sp>
-      <p:sp>
-        <p:nvSpPr>
-          <p:cNvPr id="68" name="Shape 55"/>
+          <p:cNvPr id="65" name="Shape 52"/>
           <p:cNvSpPr/>
           <p:nvPr/>
         </p:nvSpPr>
         <p:spPr>
           <a:xfrm>
-            <a:off x="10104120" y="5257800"/>
-            <a:ext cx="502920" cy="274320"/>
+            <a:off x="10104120" y="5358384"/>
+            <a:ext cx="502920" cy="256032"/>
           </a:xfrm>
           <a:prstGeom prst="roundRect">
             <a:avLst>
-              <a:gd name="adj" fmla="val 16667"/>
+              <a:gd name="adj" fmla="val 17857"/>
             </a:avLst>
           </a:prstGeom>
           <a:solidFill>
@@ -13615,14 +13543,14 @@
       </p:sp>
       <p:sp>
         <p:nvSpPr>
-          <p:cNvPr id="69" name="Text 56"/>
+          <p:cNvPr id="66" name="Text 53"/>
           <p:cNvSpPr txBox="1"/>
           <p:nvPr/>
         </p:nvSpPr>
         <p:spPr>
           <a:xfrm>
-            <a:off x="10104120" y="5257800"/>
-            <a:ext cx="502920" cy="274320"/>
+            <a:off x="10104120" y="5358384"/>
+            <a:ext cx="502920" cy="256032"/>
           </a:xfrm>
           <a:prstGeom prst="rect">
             <a:avLst/>
@@ -13651,39 +13579,14 @@
       </p:sp>
       <p:sp>
         <p:nvSpPr>
-          <p:cNvPr id="70" name="Shape 57"/>
-          <p:cNvSpPr/>
-          <p:nvPr/>
-        </p:nvSpPr>
-        <p:spPr>
-          <a:xfrm>
-            <a:off x="7296912" y="5669280"/>
-            <a:ext cx="100584" cy="100584"/>
-          </a:xfrm>
-          <a:prstGeom prst="ellipse">
-            <a:avLst/>
-          </a:prstGeom>
-          <a:solidFill>
-            <a:srgbClr val="30D158"/>
-          </a:solidFill>
-          <a:ln w="12700">
-            <a:solidFill>
-              <a:srgbClr val="30D158"/>
-            </a:solidFill>
-            <a:prstDash val="solid"/>
-          </a:ln>
-        </p:spPr>
-      </p:sp>
-      <p:sp>
-        <p:nvSpPr>
-          <p:cNvPr id="71" name="Text 58"/>
+          <p:cNvPr id="67" name="Text 54"/>
           <p:cNvSpPr txBox="1"/>
           <p:nvPr/>
         </p:nvSpPr>
         <p:spPr>
           <a:xfrm>
-            <a:off x="7443216" y="5577840"/>
-            <a:ext cx="1143000" cy="274320"/>
+            <a:off x="7296912" y="5660136"/>
+            <a:ext cx="1234440" cy="256032"/>
           </a:xfrm>
           <a:prstGeom prst="rect">
             <a:avLst/>
@@ -13704,7 +13607,7 @@
                   <a:schemeClr val="tx1"/>
                 </a:solidFill>
               </a:rPr>
-              <a:t>LED2 가습기</a:t>
+              <a:t>선풍기 신호</a:t>
             </a:r>
             <a:endParaRPr lang="en-US" sz="950" dirty="0"/>
           </a:p>
@@ -13712,18 +13615,18 @@
       </p:sp>
       <p:sp>
         <p:nvSpPr>
-          <p:cNvPr id="72" name="Shape 59"/>
+          <p:cNvPr id="68" name="Shape 55"/>
           <p:cNvSpPr/>
           <p:nvPr/>
         </p:nvSpPr>
         <p:spPr>
           <a:xfrm>
-            <a:off x="8595360" y="5577840"/>
-            <a:ext cx="621792" cy="274320"/>
+            <a:off x="8595360" y="5660136"/>
+            <a:ext cx="621792" cy="256032"/>
           </a:xfrm>
           <a:prstGeom prst="roundRect">
             <a:avLst>
-              <a:gd name="adj" fmla="val 16667"/>
+              <a:gd name="adj" fmla="val 17857"/>
             </a:avLst>
           </a:prstGeom>
           <a:solidFill>
@@ -13739,14 +13642,14 @@
       </p:sp>
       <p:sp>
         <p:nvSpPr>
-          <p:cNvPr id="73" name="Text 60"/>
+          <p:cNvPr id="69" name="Text 56"/>
           <p:cNvSpPr txBox="1"/>
           <p:nvPr/>
         </p:nvSpPr>
         <p:spPr>
           <a:xfrm>
-            <a:off x="8595360" y="5577840"/>
-            <a:ext cx="621792" cy="274320"/>
+            <a:off x="8595360" y="5660136"/>
+            <a:ext cx="621792" cy="256032"/>
           </a:xfrm>
           <a:prstGeom prst="rect">
             <a:avLst/>
@@ -13775,13 +13678,13 @@
       </p:sp>
       <p:sp>
         <p:nvSpPr>
-          <p:cNvPr id="74" name="Shape 61"/>
+          <p:cNvPr id="70" name="Shape 57"/>
           <p:cNvSpPr/>
           <p:nvPr/>
         </p:nvSpPr>
         <p:spPr>
           <a:xfrm>
-            <a:off x="9217152" y="5715000"/>
+            <a:off x="9217152" y="5788152"/>
             <a:ext cx="886968" cy="0"/>
           </a:xfrm>
           <a:prstGeom prst="line">
@@ -13798,54 +13701,18 @@
       </p:sp>
       <p:sp>
         <p:nvSpPr>
-          <p:cNvPr id="75" name="Text 62"/>
-          <p:cNvSpPr txBox="1"/>
-          <p:nvPr/>
-        </p:nvSpPr>
-        <p:spPr>
-          <a:xfrm>
-            <a:off x="9189720" y="5477256"/>
-            <a:ext cx="969264" cy="182880"/>
-          </a:xfrm>
-          <a:prstGeom prst="rect">
-            <a:avLst/>
-          </a:prstGeom>
-          <a:noFill/>
-          <a:ln/>
-        </p:spPr>
-        <p:txBody>
-          <a:bodyPr wrap="square" lIns="0" tIns="0" rIns="0" bIns="0" rtlCol="0" anchor="t"/>
-          <a:lstStyle/>
-          <a:p>
-            <a:pPr marL="0" indent="0" algn="ctr">
-              <a:buNone/>
-            </a:pPr>
-            <a:r>
-              <a:rPr lang="en-US" sz="900" dirty="0">
-                <a:solidFill>
-                  <a:schemeClr val="tx1"/>
-                </a:solidFill>
-              </a:rPr>
-              <a:t>선풍기 신호</a:t>
-            </a:r>
-            <a:endParaRPr lang="en-US" sz="900" dirty="0"/>
-          </a:p>
-        </p:txBody>
-      </p:sp>
-      <p:sp>
-        <p:nvSpPr>
-          <p:cNvPr id="76" name="Shape 63"/>
+          <p:cNvPr id="71" name="Shape 58"/>
           <p:cNvSpPr/>
           <p:nvPr/>
         </p:nvSpPr>
         <p:spPr>
           <a:xfrm>
-            <a:off x="10104120" y="5577840"/>
-            <a:ext cx="502920" cy="274320"/>
+            <a:off x="10104120" y="5660136"/>
+            <a:ext cx="502920" cy="256032"/>
           </a:xfrm>
           <a:prstGeom prst="roundRect">
             <a:avLst>
-              <a:gd name="adj" fmla="val 16667"/>
+              <a:gd name="adj" fmla="val 17857"/>
             </a:avLst>
           </a:prstGeom>
           <a:solidFill>
@@ -13861,14 +13728,14 @@
       </p:sp>
       <p:sp>
         <p:nvSpPr>
-          <p:cNvPr id="77" name="Text 64"/>
+          <p:cNvPr id="72" name="Text 59"/>
           <p:cNvSpPr txBox="1"/>
           <p:nvPr/>
         </p:nvSpPr>
         <p:spPr>
           <a:xfrm>
-            <a:off x="10104120" y="5577840"/>
-            <a:ext cx="502920" cy="274320"/>
+            <a:off x="10104120" y="5660136"/>
+            <a:ext cx="502920" cy="256032"/>
           </a:xfrm>
           <a:prstGeom prst="rect">
             <a:avLst/>
@@ -13897,7 +13764,7 @@
       </p:sp>
       <p:pic>
         <p:nvPicPr>
-          <p:cNvPr id="78" name="Image 10" descr="CH1 선풍기"/>
+          <p:cNvPr id="73" name="Image 10" descr="CH1 선풍기"/>
           <p:cNvPicPr>
             <a:picLocks noChangeAspect="1"/>
           </p:cNvPicPr>
@@ -13911,7 +13778,7 @@
         </p:blipFill>
         <p:spPr>
           <a:xfrm>
-            <a:off x="10652760" y="5614416"/>
+            <a:off x="10652760" y="5687568"/>
             <a:ext cx="201168" cy="201168"/>
           </a:xfrm>
           <a:prstGeom prst="rect">
@@ -13921,14 +13788,14 @@
       </p:pic>
       <p:sp>
         <p:nvSpPr>
-          <p:cNvPr id="79" name="Text 65"/>
+          <p:cNvPr id="74" name="Text 60"/>
           <p:cNvSpPr txBox="1"/>
           <p:nvPr/>
         </p:nvSpPr>
         <p:spPr>
           <a:xfrm>
-            <a:off x="10881360" y="5577840"/>
-            <a:ext cx="777240" cy="274320"/>
+            <a:off x="10881360" y="5660136"/>
+            <a:ext cx="777240" cy="256032"/>
           </a:xfrm>
           <a:prstGeom prst="rect">
             <a:avLst/>
@@ -13957,39 +13824,14 @@
       </p:sp>
       <p:sp>
         <p:nvSpPr>
-          <p:cNvPr id="80" name="Shape 66"/>
-          <p:cNvSpPr/>
-          <p:nvPr/>
-        </p:nvSpPr>
-        <p:spPr>
-          <a:xfrm>
-            <a:off x="7296912" y="5989320"/>
-            <a:ext cx="100584" cy="100584"/>
-          </a:xfrm>
-          <a:prstGeom prst="ellipse">
-            <a:avLst/>
-          </a:prstGeom>
-          <a:solidFill>
-            <a:srgbClr val="30D158"/>
-          </a:solidFill>
-          <a:ln w="12700">
-            <a:solidFill>
-              <a:srgbClr val="30D158"/>
-            </a:solidFill>
-            <a:prstDash val="solid"/>
-          </a:ln>
-        </p:spPr>
-      </p:sp>
-      <p:sp>
-        <p:nvSpPr>
-          <p:cNvPr id="81" name="Text 67"/>
+          <p:cNvPr id="75" name="Text 61"/>
           <p:cNvSpPr txBox="1"/>
           <p:nvPr/>
         </p:nvSpPr>
         <p:spPr>
           <a:xfrm>
-            <a:off x="7443216" y="5897880"/>
-            <a:ext cx="1143000" cy="274320"/>
+            <a:off x="7296912" y="5961888"/>
+            <a:ext cx="1234440" cy="256032"/>
           </a:xfrm>
           <a:prstGeom prst="rect">
             <a:avLst/>
@@ -14010,7 +13852,7 @@
                   <a:schemeClr val="tx1"/>
                 </a:solidFill>
               </a:rPr>
-              <a:t>LED3 표면 80%↑</a:t>
+              <a:t>가습기 신호</a:t>
             </a:r>
             <a:endParaRPr lang="en-US" sz="950" dirty="0"/>
           </a:p>
@@ -14018,18 +13860,18 @@
       </p:sp>
       <p:sp>
         <p:nvSpPr>
-          <p:cNvPr id="82" name="Shape 68"/>
+          <p:cNvPr id="76" name="Shape 62"/>
           <p:cNvSpPr/>
           <p:nvPr/>
         </p:nvSpPr>
         <p:spPr>
           <a:xfrm>
-            <a:off x="8595360" y="5897880"/>
-            <a:ext cx="621792" cy="274320"/>
+            <a:off x="8595360" y="5961888"/>
+            <a:ext cx="621792" cy="256032"/>
           </a:xfrm>
           <a:prstGeom prst="roundRect">
             <a:avLst>
-              <a:gd name="adj" fmla="val 16667"/>
+              <a:gd name="adj" fmla="val 17857"/>
             </a:avLst>
           </a:prstGeom>
           <a:solidFill>
@@ -14045,14 +13887,14 @@
       </p:sp>
       <p:sp>
         <p:nvSpPr>
-          <p:cNvPr id="83" name="Text 69"/>
+          <p:cNvPr id="77" name="Text 63"/>
           <p:cNvSpPr txBox="1"/>
           <p:nvPr/>
         </p:nvSpPr>
         <p:spPr>
           <a:xfrm>
-            <a:off x="8595360" y="5897880"/>
-            <a:ext cx="621792" cy="274320"/>
+            <a:off x="8595360" y="5961888"/>
+            <a:ext cx="621792" cy="256032"/>
           </a:xfrm>
           <a:prstGeom prst="rect">
             <a:avLst/>
@@ -14081,13 +13923,13 @@
       </p:sp>
       <p:sp>
         <p:nvSpPr>
-          <p:cNvPr id="84" name="Shape 70"/>
+          <p:cNvPr id="78" name="Shape 64"/>
           <p:cNvSpPr/>
           <p:nvPr/>
         </p:nvSpPr>
         <p:spPr>
           <a:xfrm>
-            <a:off x="9217152" y="6035040"/>
+            <a:off x="9217152" y="6089904"/>
             <a:ext cx="886968" cy="0"/>
           </a:xfrm>
           <a:prstGeom prst="line">
@@ -14104,54 +13946,18 @@
       </p:sp>
       <p:sp>
         <p:nvSpPr>
-          <p:cNvPr id="85" name="Text 71"/>
-          <p:cNvSpPr txBox="1"/>
-          <p:nvPr/>
-        </p:nvSpPr>
-        <p:spPr>
-          <a:xfrm>
-            <a:off x="9189720" y="5797296"/>
-            <a:ext cx="969264" cy="182880"/>
-          </a:xfrm>
-          <a:prstGeom prst="rect">
-            <a:avLst/>
-          </a:prstGeom>
-          <a:noFill/>
-          <a:ln/>
-        </p:spPr>
-        <p:txBody>
-          <a:bodyPr wrap="square" lIns="0" tIns="0" rIns="0" bIns="0" rtlCol="0" anchor="t"/>
-          <a:lstStyle/>
-          <a:p>
-            <a:pPr marL="0" indent="0" algn="ctr">
-              <a:buNone/>
-            </a:pPr>
-            <a:r>
-              <a:rPr lang="en-US" sz="900" dirty="0">
-                <a:solidFill>
-                  <a:schemeClr val="tx1"/>
-                </a:solidFill>
-              </a:rPr>
-              <a:t>가습기 신호</a:t>
-            </a:r>
-            <a:endParaRPr lang="en-US" sz="900" dirty="0"/>
-          </a:p>
-        </p:txBody>
-      </p:sp>
-      <p:sp>
-        <p:nvSpPr>
-          <p:cNvPr id="86" name="Shape 72"/>
+          <p:cNvPr id="79" name="Shape 65"/>
           <p:cNvSpPr/>
           <p:nvPr/>
         </p:nvSpPr>
         <p:spPr>
           <a:xfrm>
-            <a:off x="10104120" y="5897880"/>
-            <a:ext cx="502920" cy="274320"/>
+            <a:off x="10104120" y="5961888"/>
+            <a:ext cx="502920" cy="256032"/>
           </a:xfrm>
           <a:prstGeom prst="roundRect">
             <a:avLst>
-              <a:gd name="adj" fmla="val 16667"/>
+              <a:gd name="adj" fmla="val 17857"/>
             </a:avLst>
           </a:prstGeom>
           <a:solidFill>
@@ -14167,14 +13973,14 @@
       </p:sp>
       <p:sp>
         <p:nvSpPr>
-          <p:cNvPr id="87" name="Text 73"/>
+          <p:cNvPr id="80" name="Text 66"/>
           <p:cNvSpPr txBox="1"/>
           <p:nvPr/>
         </p:nvSpPr>
         <p:spPr>
           <a:xfrm>
-            <a:off x="10104120" y="5897880"/>
-            <a:ext cx="502920" cy="274320"/>
+            <a:off x="10104120" y="5961888"/>
+            <a:ext cx="502920" cy="256032"/>
           </a:xfrm>
           <a:prstGeom prst="rect">
             <a:avLst/>
@@ -14203,7 +14009,7 @@
       </p:sp>
       <p:pic>
         <p:nvPicPr>
-          <p:cNvPr id="88" name="Image 11" descr="CH2 가습기"/>
+          <p:cNvPr id="81" name="Image 11" descr="CH2 가습기"/>
           <p:cNvPicPr>
             <a:picLocks noChangeAspect="1"/>
           </p:cNvPicPr>
@@ -14217,7 +14023,7 @@
         </p:blipFill>
         <p:spPr>
           <a:xfrm>
-            <a:off x="10652760" y="5934456"/>
+            <a:off x="10652760" y="5989320"/>
             <a:ext cx="201168" cy="201168"/>
           </a:xfrm>
           <a:prstGeom prst="rect">
@@ -14227,14 +14033,14 @@
       </p:pic>
       <p:sp>
         <p:nvSpPr>
-          <p:cNvPr id="89" name="Text 74"/>
+          <p:cNvPr id="82" name="Text 67"/>
           <p:cNvSpPr txBox="1"/>
           <p:nvPr/>
         </p:nvSpPr>
         <p:spPr>
           <a:xfrm>
-            <a:off x="10881360" y="5897880"/>
-            <a:ext cx="777240" cy="274320"/>
+            <a:off x="10881360" y="5961888"/>
+            <a:ext cx="777240" cy="256032"/>
           </a:xfrm>
           <a:prstGeom prst="rect">
             <a:avLst/>
@@ -14263,7 +14069,7 @@
       </p:sp>
       <p:sp>
         <p:nvSpPr>
-          <p:cNvPr id="90" name="Slide Number Placeholder 0"/>
+          <p:cNvPr id="83" name="Slide Number Placeholder 0"/>
           <p:cNvSpPr>
             <a:spLocks noGrp="1"/>
           </p:cNvSpPr>
@@ -14600,7 +14406,7 @@
                   <a:schemeClr val="tx1"/>
                 </a:solidFill>
               </a:rPr>
-              <a:t>실제 보드를 연결한 03:00 화면. 실내와 벽 표면 습도, 노드의 판단, 가습기와 선풍기, 허브 보고를 한 화면에 보여줌</a:t>
+              <a:t>실제 보드를 연결한 07:40 화면. 기상을 감지해 침구를 말리는 중이고, 아래에 밤새 벽 표면 기록이 보임</a:t>
             </a:r>
             <a:endParaRPr lang="en-US" sz="1100" dirty="0"/>
           </a:p>
@@ -14806,7 +14612,7 @@
                   <a:schemeClr val="tx1"/>
                 </a:solidFill>
               </a:rPr>
-              <a:t>가전 상태를 반영해 온습도와 벽 온도를 만듦</a:t>
+              <a:t>가전 상태를 반영해 온습도, 벽, 침구 값을 만듦</a:t>
             </a:r>
             <a:endParaRPr lang="en-US" sz="1300" dirty="0"/>
           </a:p>
@@ -15018,7 +14824,7 @@
                   <a:schemeClr val="tx1"/>
                 </a:solidFill>
               </a:rPr>
-              <a:t>벽 표면 습도와 절대습도를 계산해</a:t>
+              <a:t>벽 표면, 절대습도, 침구 습도를 계산해</a:t>
             </a:r>
             <a:endParaRPr lang="en-US" sz="1300" dirty="0"/>
           </a:p>
@@ -15258,7 +15064,7 @@
                   <a:schemeClr val="tx1"/>
                 </a:solidFill>
               </a:rPr>
-              <a:t>12회 모두 수신 확인, 평균 92ms</a:t>
+              <a:t>14회 모두 수신 확인, 평균 93ms</a:t>
             </a:r>
             <a:endParaRPr lang="en-US" sz="1300" dirty="0"/>
           </a:p>
@@ -15357,7 +15163,7 @@
                   <a:schemeClr val="tx1"/>
                 </a:solidFill>
               </a:rPr>
-              <a:t>우리 노드 0분, 최고 벽 표면 78%</a:t>
+              <a:t>우리 노드 0분, 최고 벽 표면 77%</a:t>
             </a:r>
             <a:endParaRPr lang="en-US" sz="1300" dirty="0"/>
           </a:p>
@@ -15434,7 +15240,7 @@
         <p:spPr>
           <a:xfrm>
             <a:off x="548640" y="5943600"/>
-            <a:ext cx="2103120" cy="457200"/>
+            <a:ext cx="1572768" cy="457200"/>
           </a:xfrm>
           <a:prstGeom prst="rect">
             <a:avLst/>
@@ -15450,28 +15256,28 @@
               <a:buNone/>
             </a:pPr>
             <a:r>
-              <a:rPr lang="en-US" sz="1200" b="1" dirty="0">
+              <a:rPr lang="en-US" sz="1100" b="1" dirty="0">
                 <a:solidFill>
                   <a:schemeClr val="tx1"/>
                 </a:solidFill>
               </a:rPr>
               <a:t>22:00</a:t>
             </a:r>
-            <a:endParaRPr lang="en-US" sz="1200" dirty="0"/>
+            <a:endParaRPr lang="en-US" sz="1100" dirty="0"/>
           </a:p>
           <a:p>
             <a:pPr marL="0" indent="0">
               <a:buNone/>
             </a:pPr>
             <a:r>
-              <a:rPr lang="en-US" sz="1200" dirty="0">
+              <a:rPr lang="en-US" sz="1100" dirty="0">
                 <a:solidFill>
                   <a:schemeClr val="tx1"/>
                 </a:solidFill>
               </a:rPr>
               <a:t>건조 → 가습 시작</a:t>
             </a:r>
-            <a:endParaRPr lang="en-US" sz="1200" dirty="0"/>
+            <a:endParaRPr lang="en-US" sz="1100" dirty="0"/>
           </a:p>
         </p:txBody>
       </p:sp>
@@ -15483,7 +15289,7 @@
         </p:nvSpPr>
         <p:spPr>
           <a:xfrm>
-            <a:off x="2788920" y="5733288"/>
+            <a:off x="2157984" y="5733288"/>
             <a:ext cx="164592" cy="164592"/>
           </a:xfrm>
           <a:prstGeom prst="ellipse">
@@ -15508,8 +15314,8 @@
         </p:nvSpPr>
         <p:spPr>
           <a:xfrm>
-            <a:off x="2788920" y="5943600"/>
-            <a:ext cx="2103120" cy="457200"/>
+            <a:off x="2157984" y="5943600"/>
+            <a:ext cx="1572768" cy="457200"/>
           </a:xfrm>
           <a:prstGeom prst="rect">
             <a:avLst/>
@@ -15525,28 +15331,28 @@
               <a:buNone/>
             </a:pPr>
             <a:r>
-              <a:rPr lang="en-US" sz="1200" b="1" dirty="0">
-                <a:solidFill>
-                  <a:schemeClr val="tx1"/>
-                </a:solidFill>
-              </a:rPr>
-              <a:t>01:00</a:t>
-            </a:r>
-            <a:endParaRPr lang="en-US" sz="1200" dirty="0"/>
+              <a:rPr lang="en-US" sz="1100" b="1" dirty="0">
+                <a:solidFill>
+                  <a:schemeClr val="tx1"/>
+                </a:solidFill>
+              </a:rPr>
+              <a:t>22:45</a:t>
+            </a:r>
+            <a:endParaRPr lang="en-US" sz="1100" dirty="0"/>
           </a:p>
           <a:p>
             <a:pPr marL="0" indent="0">
               <a:buNone/>
             </a:pPr>
             <a:r>
-              <a:rPr lang="en-US" sz="1200" dirty="0">
-                <a:solidFill>
-                  <a:schemeClr val="tx1"/>
-                </a:solidFill>
-              </a:rPr>
-              <a:t>표면 75% → 가습 정지</a:t>
-            </a:r>
-            <a:endParaRPr lang="en-US" sz="1200" dirty="0"/>
+              <a:rPr lang="en-US" sz="1100" dirty="0">
+                <a:solidFill>
+                  <a:schemeClr val="tx1"/>
+                </a:solidFill>
+              </a:rPr>
+              <a:t>취침 감지 (침구 센서)</a:t>
+            </a:r>
+            <a:endParaRPr lang="en-US" sz="1100" dirty="0"/>
           </a:p>
         </p:txBody>
       </p:sp>
@@ -15558,7 +15364,7 @@
         </p:nvSpPr>
         <p:spPr>
           <a:xfrm>
-            <a:off x="5029200" y="5733288"/>
+            <a:off x="3767328" y="5733288"/>
             <a:ext cx="164592" cy="164592"/>
           </a:xfrm>
           <a:prstGeom prst="ellipse">
@@ -15583,8 +15389,8 @@
         </p:nvSpPr>
         <p:spPr>
           <a:xfrm>
-            <a:off x="5029200" y="5943600"/>
-            <a:ext cx="2103120" cy="457200"/>
+            <a:off x="3767328" y="5943600"/>
+            <a:ext cx="1572768" cy="457200"/>
           </a:xfrm>
           <a:prstGeom prst="rect">
             <a:avLst/>
@@ -15600,28 +15406,28 @@
               <a:buNone/>
             </a:pPr>
             <a:r>
-              <a:rPr lang="en-US" sz="1200" b="1" dirty="0">
-                <a:solidFill>
-                  <a:schemeClr val="tx1"/>
-                </a:solidFill>
-              </a:rPr>
-              <a:t>01:10</a:t>
-            </a:r>
-            <a:endParaRPr lang="en-US" sz="1200" dirty="0"/>
+              <a:rPr lang="en-US" sz="1100" b="1" dirty="0">
+                <a:solidFill>
+                  <a:schemeClr val="tx1"/>
+                </a:solidFill>
+              </a:rPr>
+              <a:t>01:00</a:t>
+            </a:r>
+            <a:endParaRPr lang="en-US" sz="1100" dirty="0"/>
           </a:p>
           <a:p>
             <a:pPr marL="0" indent="0">
               <a:buNone/>
             </a:pPr>
             <a:r>
-              <a:rPr lang="en-US" sz="1200" dirty="0">
-                <a:solidFill>
-                  <a:schemeClr val="tx1"/>
-                </a:solidFill>
-              </a:rPr>
-              <a:t>선풍기 ON, 효과 학습</a:t>
-            </a:r>
-            <a:endParaRPr lang="en-US" sz="1200" dirty="0"/>
+              <a:rPr lang="en-US" sz="1100" dirty="0">
+                <a:solidFill>
+                  <a:schemeClr val="tx1"/>
+                </a:solidFill>
+              </a:rPr>
+              <a:t>표면 75% → 가습 정지</a:t>
+            </a:r>
+            <a:endParaRPr lang="en-US" sz="1100" dirty="0"/>
           </a:p>
         </p:txBody>
       </p:sp>
@@ -15633,7 +15439,7 @@
         </p:nvSpPr>
         <p:spPr>
           <a:xfrm>
-            <a:off x="7269480" y="5733288"/>
+            <a:off x="5376672" y="5733288"/>
             <a:ext cx="164592" cy="164592"/>
           </a:xfrm>
           <a:prstGeom prst="ellipse">
@@ -15658,8 +15464,8 @@
         </p:nvSpPr>
         <p:spPr>
           <a:xfrm>
-            <a:off x="7269480" y="5943600"/>
-            <a:ext cx="2103120" cy="457200"/>
+            <a:off x="5376672" y="5943600"/>
+            <a:ext cx="1572768" cy="457200"/>
           </a:xfrm>
           <a:prstGeom prst="rect">
             <a:avLst/>
@@ -15675,28 +15481,28 @@
               <a:buNone/>
             </a:pPr>
             <a:r>
-              <a:rPr lang="en-US" sz="1200" b="1" dirty="0">
-                <a:solidFill>
-                  <a:schemeClr val="tx1"/>
-                </a:solidFill>
-              </a:rPr>
-              <a:t>02:55~</a:t>
-            </a:r>
-            <a:endParaRPr lang="en-US" sz="1200" dirty="0"/>
+              <a:rPr lang="en-US" sz="1100" b="1" dirty="0">
+                <a:solidFill>
+                  <a:schemeClr val="tx1"/>
+                </a:solidFill>
+              </a:rPr>
+              <a:t>01:05</a:t>
+            </a:r>
+            <a:endParaRPr lang="en-US" sz="1100" dirty="0"/>
           </a:p>
           <a:p>
             <a:pPr marL="0" indent="0">
               <a:buNone/>
             </a:pPr>
             <a:r>
-              <a:rPr lang="en-US" sz="1200" dirty="0">
-                <a:solidFill>
-                  <a:schemeClr val="tx1"/>
-                </a:solidFill>
-              </a:rPr>
-              <a:t>선풍기 켠 채 가습</a:t>
-            </a:r>
-            <a:endParaRPr lang="en-US" sz="1200" dirty="0"/>
+              <a:rPr lang="en-US" sz="1100" dirty="0">
+                <a:solidFill>
+                  <a:schemeClr val="tx1"/>
+                </a:solidFill>
+              </a:rPr>
+              <a:t>선풍기 ON, 효과 학습</a:t>
+            </a:r>
+            <a:endParaRPr lang="en-US" sz="1100" dirty="0"/>
           </a:p>
         </p:txBody>
       </p:sp>
@@ -15708,7 +15514,7 @@
         </p:nvSpPr>
         <p:spPr>
           <a:xfrm>
-            <a:off x="9509760" y="5733288"/>
+            <a:off x="6986016" y="5733288"/>
             <a:ext cx="164592" cy="164592"/>
           </a:xfrm>
           <a:prstGeom prst="ellipse">
@@ -15733,8 +15539,8 @@
         </p:nvSpPr>
         <p:spPr>
           <a:xfrm>
-            <a:off x="9509760" y="5943600"/>
-            <a:ext cx="2103120" cy="457200"/>
+            <a:off x="6986016" y="5943600"/>
+            <a:ext cx="1572768" cy="457200"/>
           </a:xfrm>
           <a:prstGeom prst="rect">
             <a:avLst/>
@@ -15750,34 +15556,184 @@
               <a:buNone/>
             </a:pPr>
             <a:r>
-              <a:rPr lang="en-US" sz="1200" b="1" dirty="0">
+              <a:rPr lang="en-US" sz="1100" b="1" dirty="0">
+                <a:solidFill>
+                  <a:schemeClr val="tx1"/>
+                </a:solidFill>
+              </a:rPr>
+              <a:t>02:45~</a:t>
+            </a:r>
+            <a:endParaRPr lang="en-US" sz="1100" dirty="0"/>
+          </a:p>
+          <a:p>
+            <a:pPr marL="0" indent="0">
+              <a:buNone/>
+            </a:pPr>
+            <a:r>
+              <a:rPr lang="en-US" sz="1100" dirty="0">
+                <a:solidFill>
+                  <a:schemeClr val="tx1"/>
+                </a:solidFill>
+              </a:rPr>
+              <a:t>선풍기 켠 채 가습</a:t>
+            </a:r>
+            <a:endParaRPr lang="en-US" sz="1100" dirty="0"/>
+          </a:p>
+        </p:txBody>
+      </p:sp>
+      <p:sp>
+        <p:nvSpPr>
+          <p:cNvPr id="43" name="Shape 34"/>
+          <p:cNvSpPr/>
+          <p:nvPr/>
+        </p:nvSpPr>
+        <p:spPr>
+          <a:xfrm>
+            <a:off x="8595360" y="5733288"/>
+            <a:ext cx="164592" cy="164592"/>
+          </a:xfrm>
+          <a:prstGeom prst="ellipse">
+            <a:avLst/>
+          </a:prstGeom>
+          <a:solidFill>
+            <a:schemeClr val="accent1"/>
+          </a:solidFill>
+          <a:ln w="12700">
+            <a:solidFill>
+              <a:srgbClr val="0066CC"/>
+            </a:solidFill>
+            <a:prstDash val="solid"/>
+          </a:ln>
+        </p:spPr>
+      </p:sp>
+      <p:sp>
+        <p:nvSpPr>
+          <p:cNvPr id="44" name="Text 35"/>
+          <p:cNvSpPr txBox="1"/>
+          <p:nvPr/>
+        </p:nvSpPr>
+        <p:spPr>
+          <a:xfrm>
+            <a:off x="8595360" y="5943600"/>
+            <a:ext cx="1572768" cy="457200"/>
+          </a:xfrm>
+          <a:prstGeom prst="rect">
+            <a:avLst/>
+          </a:prstGeom>
+          <a:noFill/>
+          <a:ln/>
+        </p:spPr>
+        <p:txBody>
+          <a:bodyPr wrap="square" lIns="0" tIns="0" rIns="0" bIns="0" rtlCol="0" anchor="t"/>
+          <a:lstStyle/>
+          <a:p>
+            <a:pPr marL="0" indent="0">
+              <a:buNone/>
+            </a:pPr>
+            <a:r>
+              <a:rPr lang="en-US" sz="1100" b="1" dirty="0">
                 <a:solidFill>
                   <a:schemeClr val="tx1"/>
                 </a:solidFill>
               </a:rPr>
               <a:t>07:30</a:t>
             </a:r>
-            <a:endParaRPr lang="en-US" sz="1200" dirty="0"/>
+            <a:endParaRPr lang="en-US" sz="1100" dirty="0"/>
           </a:p>
           <a:p>
             <a:pPr marL="0" indent="0">
               <a:buNone/>
             </a:pPr>
             <a:r>
-              <a:rPr lang="en-US" sz="1200" dirty="0">
+              <a:rPr lang="en-US" sz="1100" dirty="0">
                 <a:solidFill>
                   <a:schemeClr val="tx1"/>
                 </a:solidFill>
               </a:rPr>
               <a:t>벽 회복 → 선풍기 OFF</a:t>
             </a:r>
-            <a:endParaRPr lang="en-US" sz="1200" dirty="0"/>
+            <a:endParaRPr lang="en-US" sz="1100" dirty="0"/>
           </a:p>
         </p:txBody>
       </p:sp>
       <p:sp>
         <p:nvSpPr>
-          <p:cNvPr id="43" name="Slide Number Placeholder 0"/>
+          <p:cNvPr id="45" name="Shape 36"/>
+          <p:cNvSpPr/>
+          <p:nvPr/>
+        </p:nvSpPr>
+        <p:spPr>
+          <a:xfrm>
+            <a:off x="10204704" y="5733288"/>
+            <a:ext cx="164592" cy="164592"/>
+          </a:xfrm>
+          <a:prstGeom prst="ellipse">
+            <a:avLst/>
+          </a:prstGeom>
+          <a:solidFill>
+            <a:schemeClr val="accent1"/>
+          </a:solidFill>
+          <a:ln w="12700">
+            <a:solidFill>
+              <a:srgbClr val="0066CC"/>
+            </a:solidFill>
+            <a:prstDash val="solid"/>
+          </a:ln>
+        </p:spPr>
+      </p:sp>
+      <p:sp>
+        <p:nvSpPr>
+          <p:cNvPr id="46" name="Text 37"/>
+          <p:cNvSpPr txBox="1"/>
+          <p:nvPr/>
+        </p:nvSpPr>
+        <p:spPr>
+          <a:xfrm>
+            <a:off x="10204704" y="5943600"/>
+            <a:ext cx="1572768" cy="457200"/>
+          </a:xfrm>
+          <a:prstGeom prst="rect">
+            <a:avLst/>
+          </a:prstGeom>
+          <a:noFill/>
+          <a:ln/>
+        </p:spPr>
+        <p:txBody>
+          <a:bodyPr wrap="square" lIns="0" tIns="0" rIns="0" bIns="0" rtlCol="0" anchor="t"/>
+          <a:lstStyle/>
+          <a:p>
+            <a:pPr marL="0" indent="0">
+              <a:buNone/>
+            </a:pPr>
+            <a:r>
+              <a:rPr lang="en-US" sz="1100" b="1" dirty="0">
+                <a:solidFill>
+                  <a:schemeClr val="tx1"/>
+                </a:solidFill>
+              </a:rPr>
+              <a:t>07:35</a:t>
+            </a:r>
+            <a:endParaRPr lang="en-US" sz="1100" dirty="0"/>
+          </a:p>
+          <a:p>
+            <a:pPr marL="0" indent="0">
+              <a:buNone/>
+            </a:pPr>
+            <a:r>
+              <a:rPr lang="en-US" sz="1100" dirty="0">
+                <a:solidFill>
+                  <a:schemeClr val="tx1"/>
+                </a:solidFill>
+              </a:rPr>
+              <a:t>기상 감지 → 침구 건조</a:t>
+            </a:r>
+            <a:endParaRPr lang="en-US" sz="1100" dirty="0"/>
+          </a:p>
+        </p:txBody>
+      </p:sp>
+      <p:sp>
+        <p:nvSpPr>
+          <p:cNvPr id="47" name="Slide Number Placeholder 0"/>
           <p:cNvSpPr>
             <a:spLocks noGrp="1"/>
           </p:cNvSpPr>
